--- a/web-presentation/pdf-exports/Week1-Session2-Regression-Models.pptx
+++ b/web-presentation/pdf-exports/Week1-Session2-Regression-Models.pptx
@@ -5383,7 +5383,7 @@
         <p:spPr>
           <a:xfrm>
             <a:off x="548640" y="2743200"/>
-            <a:ext cx="10972800" cy="1051560"/>
+            <a:ext cx="10972800" cy="1417320"/>
           </a:xfrm>
           <a:prstGeom prst="roundRect">
             <a:avLst>
@@ -5420,16 +5420,40 @@
           </a:p>
         </p:txBody>
       </p:sp>
-      <p:sp>
-        <p:nvSpPr>
-          <p:cNvPr id="11" name="TextBox 10"/>
-          <p:cNvSpPr txBox="1"/>
-          <p:nvPr/>
-        </p:nvSpPr>
-        <p:spPr>
-          <a:xfrm>
-            <a:off x="914400" y="2880360"/>
-            <a:ext cx="10241280" cy="457200"/>
+      <p:pic>
+        <p:nvPicPr>
+          <p:cNvPr id="11" name="Picture 10" descr="f-9ac372374ac8a31e.png"/>
+          <p:cNvPicPr>
+            <a:picLocks noChangeAspect="1"/>
+          </p:cNvPicPr>
+          <p:nvPr/>
+        </p:nvPicPr>
+        <p:blipFill>
+          <a:blip r:embed="rId3"/>
+          <a:stretch>
+            <a:fillRect/>
+          </a:stretch>
+        </p:blipFill>
+        <p:spPr>
+          <a:xfrm>
+            <a:off x="836131430573" y="2608717363200"/>
+            <a:ext cx="2100132" cy="868680"/>
+          </a:xfrm>
+          <a:prstGeom prst="rect">
+            <a:avLst/>
+          </a:prstGeom>
+        </p:spPr>
+      </p:pic>
+      <p:sp>
+        <p:nvSpPr>
+          <p:cNvPr id="12" name="TextBox 11"/>
+          <p:cNvSpPr txBox="1"/>
+          <p:nvPr/>
+        </p:nvSpPr>
+        <p:spPr>
+          <a:xfrm>
+            <a:off x="914400" y="3840480"/>
+            <a:ext cx="10241280" cy="256032"/>
           </a:xfrm>
           <a:prstGeom prst="rect">
             <a:avLst/>
@@ -5444,109 +5468,6 @@
           <a:p>
             <a:pPr algn="ctr"/>
             <a:r>
-              <a:rPr sz="2600" b="1">
-                <a:solidFill>
-                  <a:srgbClr val="5234B7"/>
-                </a:solidFill>
-                <a:latin typeface="Helvetica Neue"/>
-                <a:ea typeface="Helvetica Neue"/>
-                <a:cs typeface="Helvetica Neue"/>
-              </a:rPr>
-              <a:t>min Σ</a:t>
-            </a:r>
-            <a:r>
-              <a:rPr sz="2200" b="1" baseline="-25000">
-                <a:solidFill>
-                  <a:srgbClr val="5234B7"/>
-                </a:solidFill>
-                <a:latin typeface="Helvetica Neue"/>
-                <a:ea typeface="Helvetica Neue"/>
-                <a:cs typeface="Helvetica Neue"/>
-              </a:rPr>
-              <a:t>i = 1 … n</a:t>
-            </a:r>
-            <a:r>
-              <a:rPr sz="2600" b="1">
-                <a:solidFill>
-                  <a:srgbClr val="5234B7"/>
-                </a:solidFill>
-                <a:latin typeface="Helvetica Neue"/>
-                <a:ea typeface="Helvetica Neue"/>
-                <a:cs typeface="Helvetica Neue"/>
-              </a:rPr>
-              <a:t> (y</a:t>
-            </a:r>
-            <a:r>
-              <a:rPr sz="2200" b="1" baseline="-25000">
-                <a:solidFill>
-                  <a:srgbClr val="5234B7"/>
-                </a:solidFill>
-                <a:latin typeface="Helvetica Neue"/>
-                <a:ea typeface="Helvetica Neue"/>
-                <a:cs typeface="Helvetica Neue"/>
-              </a:rPr>
-              <a:t>i</a:t>
-            </a:r>
-            <a:r>
-              <a:rPr sz="2600" b="1">
-                <a:solidFill>
-                  <a:srgbClr val="5234B7"/>
-                </a:solidFill>
-                <a:latin typeface="Helvetica Neue"/>
-                <a:ea typeface="Helvetica Neue"/>
-                <a:cs typeface="Helvetica Neue"/>
-              </a:rPr>
-              <a:t> − ŷ</a:t>
-            </a:r>
-            <a:r>
-              <a:rPr sz="2200" b="1" baseline="-25000">
-                <a:solidFill>
-                  <a:srgbClr val="5234B7"/>
-                </a:solidFill>
-                <a:latin typeface="Helvetica Neue"/>
-                <a:ea typeface="Helvetica Neue"/>
-                <a:cs typeface="Helvetica Neue"/>
-              </a:rPr>
-              <a:t>i</a:t>
-            </a:r>
-            <a:r>
-              <a:rPr sz="2600" b="1">
-                <a:solidFill>
-                  <a:srgbClr val="5234B7"/>
-                </a:solidFill>
-                <a:latin typeface="Helvetica Neue"/>
-                <a:ea typeface="Helvetica Neue"/>
-                <a:cs typeface="Helvetica Neue"/>
-              </a:rPr>
-              <a:t>)²</a:t>
-            </a:r>
-          </a:p>
-        </p:txBody>
-      </p:sp>
-      <p:sp>
-        <p:nvSpPr>
-          <p:cNvPr id="12" name="TextBox 11"/>
-          <p:cNvSpPr txBox="1"/>
-          <p:nvPr/>
-        </p:nvSpPr>
-        <p:spPr>
-          <a:xfrm>
-            <a:off x="914400" y="3474719"/>
-            <a:ext cx="10241280" cy="256032"/>
-          </a:xfrm>
-          <a:prstGeom prst="rect">
-            <a:avLst/>
-          </a:prstGeom>
-          <a:noFill/>
-        </p:spPr>
-        <p:txBody>
-          <a:bodyPr wrap="square" anchor="t">
-            <a:spAutoFit/>
-          </a:bodyPr>
-          <a:lstStyle/>
-          <a:p>
-            <a:pPr algn="ctr"/>
-            <a:r>
               <a:rPr sz="1200" b="0">
                 <a:solidFill>
                   <a:srgbClr val="5A5470"/>
@@ -5568,7 +5489,7 @@
         </p:nvSpPr>
         <p:spPr>
           <a:xfrm>
-            <a:off x="548640" y="3904488"/>
+            <a:off x="548640" y="4270248"/>
             <a:ext cx="320040" cy="384048"/>
           </a:xfrm>
           <a:prstGeom prst="rect">
@@ -5605,7 +5526,7 @@
         </p:nvSpPr>
         <p:spPr>
           <a:xfrm>
-            <a:off x="914400" y="3904488"/>
+            <a:off x="914400" y="4270248"/>
             <a:ext cx="9875519" cy="384048"/>
           </a:xfrm>
           <a:prstGeom prst="rect">
@@ -5642,7 +5563,7 @@
         </p:nvSpPr>
         <p:spPr>
           <a:xfrm>
-            <a:off x="548640" y="4325112"/>
+            <a:off x="548640" y="4690872"/>
             <a:ext cx="320040" cy="384048"/>
           </a:xfrm>
           <a:prstGeom prst="rect">
@@ -5679,7 +5600,7 @@
         </p:nvSpPr>
         <p:spPr>
           <a:xfrm>
-            <a:off x="914400" y="4325112"/>
+            <a:off x="914400" y="4690872"/>
             <a:ext cx="9875519" cy="384048"/>
           </a:xfrm>
           <a:prstGeom prst="rect">
@@ -5716,7 +5637,7 @@
         </p:nvSpPr>
         <p:spPr>
           <a:xfrm>
-            <a:off x="548640" y="4745736"/>
+            <a:off x="548640" y="5111496"/>
             <a:ext cx="320040" cy="384048"/>
           </a:xfrm>
           <a:prstGeom prst="rect">
@@ -5753,7 +5674,7 @@
         </p:nvSpPr>
         <p:spPr>
           <a:xfrm>
-            <a:off x="914400" y="4745736"/>
+            <a:off x="914400" y="5111496"/>
             <a:ext cx="9875519" cy="384048"/>
           </a:xfrm>
           <a:prstGeom prst="rect">
@@ -6278,7 +6199,7 @@
         <p:spPr>
           <a:xfrm>
             <a:off x="548640" y="3246120"/>
-            <a:ext cx="5760720" cy="1143000"/>
+            <a:ext cx="5760720" cy="1234440"/>
           </a:xfrm>
           <a:prstGeom prst="roundRect">
             <a:avLst>
@@ -6352,65 +6273,30 @@
           </a:p>
         </p:txBody>
       </p:sp>
-      <p:sp>
-        <p:nvSpPr>
-          <p:cNvPr id="12" name="TextBox 11"/>
-          <p:cNvSpPr txBox="1"/>
-          <p:nvPr/>
-        </p:nvSpPr>
-        <p:spPr>
-          <a:xfrm>
-            <a:off x="822960" y="3566160"/>
-            <a:ext cx="5303520" cy="365760"/>
-          </a:xfrm>
-          <a:prstGeom prst="rect">
-            <a:avLst/>
-          </a:prstGeom>
-          <a:noFill/>
-        </p:spPr>
-        <p:txBody>
-          <a:bodyPr wrap="square" anchor="t">
-            <a:spAutoFit/>
-          </a:bodyPr>
-          <a:lstStyle/>
-          <a:p>
-            <a:pPr algn="l"/>
-            <a:r>
-              <a:rPr sz="2000" b="1">
-                <a:solidFill>
-                  <a:srgbClr val="5234B7"/>
-                </a:solidFill>
-                <a:latin typeface="Helvetica Neue"/>
-                <a:ea typeface="Helvetica Neue"/>
-                <a:cs typeface="Helvetica Neue"/>
-              </a:rPr>
-              <a:t>min</a:t>
-            </a:r>
-            <a:r>
-              <a:rPr sz="1600" b="1" baseline="-25000">
-                <a:solidFill>
-                  <a:srgbClr val="5234B7"/>
-                </a:solidFill>
-                <a:latin typeface="Helvetica Neue"/>
-                <a:ea typeface="Helvetica Neue"/>
-                <a:cs typeface="Helvetica Neue"/>
-              </a:rPr>
-              <a:t>w</a:t>
-            </a:r>
-            <a:r>
-              <a:rPr sz="2000" b="1">
-                <a:solidFill>
-                  <a:srgbClr val="5234B7"/>
-                </a:solidFill>
-                <a:latin typeface="Helvetica Neue"/>
-                <a:ea typeface="Helvetica Neue"/>
-                <a:cs typeface="Helvetica Neue"/>
-              </a:rPr>
-              <a:t> L(w)</a:t>
-            </a:r>
-          </a:p>
-        </p:txBody>
-      </p:sp>
+      <p:pic>
+        <p:nvPicPr>
+          <p:cNvPr id="12" name="Picture 11" descr="f-84fa9e0ccaa9c7c4.png"/>
+          <p:cNvPicPr>
+            <a:picLocks noChangeAspect="1"/>
+          </p:cNvPicPr>
+          <p:nvPr/>
+        </p:nvPicPr>
+        <p:blipFill>
+          <a:blip r:embed="rId3"/>
+          <a:stretch>
+            <a:fillRect/>
+          </a:stretch>
+        </p:blipFill>
+        <p:spPr>
+          <a:xfrm>
+            <a:off x="752516614164" y="3566160"/>
+            <a:ext cx="1323190" cy="594360"/>
+          </a:xfrm>
+          <a:prstGeom prst="rect">
+            <a:avLst/>
+          </a:prstGeom>
+        </p:spPr>
+      </p:pic>
       <p:sp>
         <p:nvSpPr>
           <p:cNvPr id="13" name="TextBox 12"/>
@@ -6419,7 +6305,7 @@
         </p:nvSpPr>
         <p:spPr>
           <a:xfrm>
-            <a:off x="822960" y="3977639"/>
+            <a:off x="822960" y="4206240"/>
             <a:ext cx="5303520" cy="274320"/>
           </a:xfrm>
           <a:prstGeom prst="rect">
@@ -6456,7 +6342,7 @@
         </p:nvSpPr>
         <p:spPr>
           <a:xfrm>
-            <a:off x="548640" y="4498848"/>
+            <a:off x="548640" y="4590288"/>
             <a:ext cx="320040" cy="384048"/>
           </a:xfrm>
           <a:prstGeom prst="rect">
@@ -6493,7 +6379,7 @@
         </p:nvSpPr>
         <p:spPr>
           <a:xfrm>
-            <a:off x="914400" y="4498848"/>
+            <a:off x="914400" y="4590288"/>
             <a:ext cx="4754879" cy="384048"/>
           </a:xfrm>
           <a:prstGeom prst="rect">
@@ -6530,7 +6416,7 @@
         </p:nvSpPr>
         <p:spPr>
           <a:xfrm>
-            <a:off x="548640" y="4919472"/>
+            <a:off x="548640" y="5010912"/>
             <a:ext cx="320040" cy="384048"/>
           </a:xfrm>
           <a:prstGeom prst="rect">
@@ -6567,7 +6453,7 @@
         </p:nvSpPr>
         <p:spPr>
           <a:xfrm>
-            <a:off x="914400" y="4919472"/>
+            <a:off x="914400" y="5010912"/>
             <a:ext cx="4754879" cy="384048"/>
           </a:xfrm>
           <a:prstGeom prst="rect">
@@ -6651,7 +6537,7 @@
           <p:nvPr/>
         </p:nvPicPr>
         <p:blipFill>
-          <a:blip r:embed="rId3"/>
+          <a:blip r:embed="rId4"/>
           <a:stretch>
             <a:fillRect/>
           </a:stretch>
@@ -7162,7 +7048,7 @@
         <p:spPr>
           <a:xfrm>
             <a:off x="548640" y="3246120"/>
-            <a:ext cx="5760720" cy="1371600"/>
+            <a:ext cx="5760720" cy="1508760"/>
           </a:xfrm>
           <a:prstGeom prst="roundRect">
             <a:avLst>
@@ -7236,43 +7122,30 @@
           </a:p>
         </p:txBody>
       </p:sp>
-      <p:sp>
-        <p:nvSpPr>
-          <p:cNvPr id="12" name="TextBox 11"/>
-          <p:cNvSpPr txBox="1"/>
-          <p:nvPr/>
-        </p:nvSpPr>
-        <p:spPr>
-          <a:xfrm>
-            <a:off x="822960" y="3566160"/>
-            <a:ext cx="1803196" cy="640080"/>
-          </a:xfrm>
-          <a:prstGeom prst="rect">
-            <a:avLst/>
-          </a:prstGeom>
-          <a:noFill/>
-        </p:spPr>
-        <p:txBody>
-          <a:bodyPr wrap="none" anchor="ctr">
-            <a:spAutoFit/>
-          </a:bodyPr>
-          <a:lstStyle/>
-          <a:p>
-            <a:pPr algn="r"/>
-            <a:r>
-              <a:rPr sz="1800" b="1">
-                <a:solidFill>
-                  <a:srgbClr val="5234B7"/>
-                </a:solidFill>
-                <a:latin typeface="Helvetica Neue"/>
-                <a:ea typeface="Helvetica Neue"/>
-                <a:cs typeface="Helvetica Neue"/>
-              </a:rPr>
-              <a:t>R² = 1 −</a:t>
-            </a:r>
-          </a:p>
-        </p:txBody>
-      </p:sp>
+      <p:pic>
+        <p:nvPicPr>
+          <p:cNvPr id="12" name="Picture 11" descr="f-ba4459fe2dd36660.png"/>
+          <p:cNvPicPr>
+            <a:picLocks noChangeAspect="1"/>
+          </p:cNvPicPr>
+          <p:nvPr/>
+        </p:nvPicPr>
+        <p:blipFill>
+          <a:blip r:embed="rId3"/>
+          <a:stretch>
+            <a:fillRect/>
+          </a:stretch>
+        </p:blipFill>
+        <p:spPr>
+          <a:xfrm>
+            <a:off x="752516167836" y="3566160"/>
+            <a:ext cx="2215846" cy="868680"/>
+          </a:xfrm>
+          <a:prstGeom prst="rect">
+            <a:avLst/>
+          </a:prstGeom>
+        </p:spPr>
+      </p:pic>
       <p:sp>
         <p:nvSpPr>
           <p:cNvPr id="13" name="TextBox 12"/>
@@ -7281,56 +7154,300 @@
         </p:nvSpPr>
         <p:spPr>
           <a:xfrm>
-            <a:off x="2732227" y="3566160"/>
-            <a:ext cx="3394252" cy="243230"/>
-          </a:xfrm>
-          <a:prstGeom prst="rect">
-            <a:avLst/>
-          </a:prstGeom>
-          <a:noFill/>
-        </p:spPr>
-        <p:txBody>
-          <a:bodyPr wrap="none" anchor="b">
-            <a:spAutoFit/>
-          </a:bodyPr>
+            <a:off x="822960" y="4480559"/>
+            <a:ext cx="5303520" cy="274320"/>
+          </a:xfrm>
+          <a:prstGeom prst="rect">
+            <a:avLst/>
+          </a:prstGeom>
+          <a:noFill/>
+        </p:spPr>
+        <p:txBody>
+          <a:bodyPr wrap="square" anchor="t">
+            <a:spAutoFit/>
+          </a:bodyPr>
+          <a:lstStyle/>
+          <a:p>
+            <a:pPr algn="l"/>
+            <a:r>
+              <a:rPr sz="1000" b="0">
+                <a:solidFill>
+                  <a:srgbClr val="5A5470"/>
+                </a:solidFill>
+                <a:latin typeface="DIN Next LT W23"/>
+                <a:ea typeface="DIN Next LT W23"/>
+                <a:cs typeface="DIN Next LT W23"/>
+              </a:rPr>
+              <a:t>SS_res = residual SS  ·  SS_tot = total SS</a:t>
+            </a:r>
+          </a:p>
+        </p:txBody>
+      </p:sp>
+      <p:sp>
+        <p:nvSpPr>
+          <p:cNvPr id="14" name="TextBox 13"/>
+          <p:cNvSpPr txBox="1"/>
+          <p:nvPr/>
+        </p:nvSpPr>
+        <p:spPr>
+          <a:xfrm>
+            <a:off x="548640" y="4864607"/>
+            <a:ext cx="320040" cy="384048"/>
+          </a:xfrm>
+          <a:prstGeom prst="rect">
+            <a:avLst/>
+          </a:prstGeom>
+          <a:noFill/>
+        </p:spPr>
+        <p:txBody>
+          <a:bodyPr wrap="square" anchor="t">
+            <a:spAutoFit/>
+          </a:bodyPr>
+          <a:lstStyle/>
+          <a:p>
+            <a:pPr algn="l"/>
+            <a:r>
+              <a:rPr sz="1200" b="0">
+                <a:solidFill>
+                  <a:srgbClr val="9E59CD"/>
+                </a:solidFill>
+                <a:latin typeface="DIN Next LT W23"/>
+                <a:ea typeface="DIN Next LT W23"/>
+                <a:cs typeface="DIN Next LT W23"/>
+              </a:rPr>
+              <a:t>–</a:t>
+            </a:r>
+          </a:p>
+        </p:txBody>
+      </p:sp>
+      <p:sp>
+        <p:nvSpPr>
+          <p:cNvPr id="15" name="TextBox 14"/>
+          <p:cNvSpPr txBox="1"/>
+          <p:nvPr/>
+        </p:nvSpPr>
+        <p:spPr>
+          <a:xfrm>
+            <a:off x="914400" y="4864607"/>
+            <a:ext cx="4754879" cy="384048"/>
+          </a:xfrm>
+          <a:prstGeom prst="rect">
+            <a:avLst/>
+          </a:prstGeom>
+          <a:noFill/>
+        </p:spPr>
+        <p:txBody>
+          <a:bodyPr wrap="square" anchor="t">
+            <a:spAutoFit/>
+          </a:bodyPr>
+          <a:lstStyle/>
+          <a:p>
+            <a:pPr algn="l"/>
+            <a:r>
+              <a:rPr sz="1200" b="0">
+                <a:solidFill>
+                  <a:srgbClr val="121018"/>
+                </a:solidFill>
+                <a:latin typeface="DIN Next LT W23"/>
+                <a:ea typeface="DIN Next LT W23"/>
+                <a:cs typeface="DIN Next LT W23"/>
+              </a:rPr>
+              <a:t>Near 1 → strong explanatory power.</a:t>
+            </a:r>
+          </a:p>
+        </p:txBody>
+      </p:sp>
+      <p:sp>
+        <p:nvSpPr>
+          <p:cNvPr id="16" name="TextBox 15"/>
+          <p:cNvSpPr txBox="1"/>
+          <p:nvPr/>
+        </p:nvSpPr>
+        <p:spPr>
+          <a:xfrm>
+            <a:off x="548640" y="5285231"/>
+            <a:ext cx="320040" cy="384048"/>
+          </a:xfrm>
+          <a:prstGeom prst="rect">
+            <a:avLst/>
+          </a:prstGeom>
+          <a:noFill/>
+        </p:spPr>
+        <p:txBody>
+          <a:bodyPr wrap="square" anchor="t">
+            <a:spAutoFit/>
+          </a:bodyPr>
+          <a:lstStyle/>
+          <a:p>
+            <a:pPr algn="l"/>
+            <a:r>
+              <a:rPr sz="1200" b="0">
+                <a:solidFill>
+                  <a:srgbClr val="9E59CD"/>
+                </a:solidFill>
+                <a:latin typeface="DIN Next LT W23"/>
+                <a:ea typeface="DIN Next LT W23"/>
+                <a:cs typeface="DIN Next LT W23"/>
+              </a:rPr>
+              <a:t>–</a:t>
+            </a:r>
+          </a:p>
+        </p:txBody>
+      </p:sp>
+      <p:sp>
+        <p:nvSpPr>
+          <p:cNvPr id="17" name="TextBox 16"/>
+          <p:cNvSpPr txBox="1"/>
+          <p:nvPr/>
+        </p:nvSpPr>
+        <p:spPr>
+          <a:xfrm>
+            <a:off x="914400" y="5285231"/>
+            <a:ext cx="4754879" cy="384048"/>
+          </a:xfrm>
+          <a:prstGeom prst="rect">
+            <a:avLst/>
+          </a:prstGeom>
+          <a:noFill/>
+        </p:spPr>
+        <p:txBody>
+          <a:bodyPr wrap="square" anchor="t">
+            <a:spAutoFit/>
+          </a:bodyPr>
+          <a:lstStyle/>
+          <a:p>
+            <a:pPr algn="l"/>
+            <a:r>
+              <a:rPr sz="1200" b="0">
+                <a:solidFill>
+                  <a:srgbClr val="121018"/>
+                </a:solidFill>
+                <a:latin typeface="DIN Next LT W23"/>
+                <a:ea typeface="DIN Next LT W23"/>
+                <a:cs typeface="DIN Next LT W23"/>
+              </a:rPr>
+              <a:t>Near 0 → little better than predicting the mean.</a:t>
+            </a:r>
+          </a:p>
+        </p:txBody>
+      </p:sp>
+      <p:sp>
+        <p:nvSpPr>
+          <p:cNvPr id="18" name="Rounded Rectangle 17"/>
+          <p:cNvSpPr/>
+          <p:nvPr/>
+        </p:nvSpPr>
+        <p:spPr>
+          <a:xfrm>
+            <a:off x="6537960" y="2011680"/>
+            <a:ext cx="4983480" cy="3794760"/>
+          </a:xfrm>
+          <a:prstGeom prst="roundRect">
+            <a:avLst>
+              <a:gd name="adj" fmla="val 10000"/>
+            </a:avLst>
+          </a:prstGeom>
+          <a:solidFill>
+            <a:srgbClr val="EEE8FA"/>
+          </a:solidFill>
+          <a:ln>
+            <a:noFill/>
+          </a:ln>
+          <a:effectLst/>
+        </p:spPr>
+        <p:style>
+          <a:lnRef idx="1">
+            <a:schemeClr val="accent1"/>
+          </a:lnRef>
+          <a:fillRef idx="3">
+            <a:schemeClr val="accent1"/>
+          </a:fillRef>
+          <a:effectRef idx="2">
+            <a:schemeClr val="accent1"/>
+          </a:effectRef>
+          <a:fontRef idx="minor">
+            <a:schemeClr val="lt1"/>
+          </a:fontRef>
+        </p:style>
+        <p:txBody>
+          <a:bodyPr rtlCol="0" anchor="ctr"/>
           <a:lstStyle/>
           <a:p>
             <a:pPr algn="ctr"/>
-            <a:r>
-              <a:rPr sz="1800" b="1">
-                <a:solidFill>
-                  <a:srgbClr val="5234B7"/>
-                </a:solidFill>
-                <a:latin typeface="Helvetica Neue"/>
-                <a:ea typeface="Helvetica Neue"/>
-                <a:cs typeface="Helvetica Neue"/>
-              </a:rPr>
-              <a:t>SS</a:t>
-            </a:r>
-            <a:r>
-              <a:rPr sz="1400" b="1" baseline="-25000">
-                <a:solidFill>
-                  <a:srgbClr val="5234B7"/>
-                </a:solidFill>
-                <a:latin typeface="Helvetica Neue"/>
-                <a:ea typeface="Helvetica Neue"/>
-                <a:cs typeface="Helvetica Neue"/>
-              </a:rPr>
-              <a:t>res</a:t>
-            </a:r>
-          </a:p>
-        </p:txBody>
-      </p:sp>
-      <p:sp>
-        <p:nvSpPr>
-          <p:cNvPr id="14" name="Rectangle 13"/>
+          </a:p>
+        </p:txBody>
+      </p:sp>
+      <p:pic>
+        <p:nvPicPr>
+          <p:cNvPr id="19" name="Picture 18" descr="slide-22-1.png"/>
+          <p:cNvPicPr>
+            <a:picLocks noChangeAspect="1"/>
+          </p:cNvPicPr>
+          <p:nvPr/>
+        </p:nvPicPr>
+        <p:blipFill>
+          <a:blip r:embed="rId4"/>
+          <a:stretch>
+            <a:fillRect/>
+          </a:stretch>
+        </p:blipFill>
+        <p:spPr>
+          <a:xfrm>
+            <a:off x="6720840" y="2194560"/>
+            <a:ext cx="4617720" cy="2854210"/>
+          </a:xfrm>
+          <a:prstGeom prst="rect">
+            <a:avLst/>
+          </a:prstGeom>
+        </p:spPr>
+      </p:pic>
+      <p:sp>
+        <p:nvSpPr>
+          <p:cNvPr id="20" name="TextBox 19"/>
+          <p:cNvSpPr txBox="1"/>
+          <p:nvPr/>
+        </p:nvSpPr>
+        <p:spPr>
+          <a:xfrm>
+            <a:off x="548640" y="5989320"/>
+            <a:ext cx="10972800" cy="256032"/>
+          </a:xfrm>
+          <a:prstGeom prst="rect">
+            <a:avLst/>
+          </a:prstGeom>
+          <a:noFill/>
+        </p:spPr>
+        <p:txBody>
+          <a:bodyPr wrap="square" anchor="t">
+            <a:spAutoFit/>
+          </a:bodyPr>
+          <a:lstStyle/>
+          <a:p>
+            <a:pPr algn="l"/>
+            <a:r>
+              <a:rPr sz="1100" b="0">
+                <a:solidFill>
+                  <a:srgbClr val="5A5470"/>
+                </a:solidFill>
+                <a:latin typeface="DIN Next LT W23"/>
+                <a:ea typeface="DIN Next LT W23"/>
+                <a:cs typeface="DIN Next LT W23"/>
+              </a:rPr>
+              <a:t>High R² on training data ≠ guaranteed good new-data predictions.</a:t>
+            </a:r>
+          </a:p>
+        </p:txBody>
+      </p:sp>
+      <p:sp>
+        <p:nvSpPr>
+          <p:cNvPr id="21" name="Rectangle 20"/>
           <p:cNvSpPr/>
           <p:nvPr/>
         </p:nvSpPr>
         <p:spPr>
           <a:xfrm>
-            <a:off x="2901939" y="3836273"/>
-            <a:ext cx="3054827" cy="18288"/>
+            <a:off x="548640" y="6446520"/>
+            <a:ext cx="11064240" cy="10972"/>
           </a:xfrm>
           <a:prstGeom prst="rect">
             <a:avLst/>
@@ -7367,391 +7484,7 @@
       </p:sp>
       <p:sp>
         <p:nvSpPr>
-          <p:cNvPr id="15" name="TextBox 14"/>
-          <p:cNvSpPr txBox="1"/>
-          <p:nvPr/>
-        </p:nvSpPr>
-        <p:spPr>
-          <a:xfrm>
-            <a:off x="2732227" y="3886200"/>
-            <a:ext cx="3394252" cy="243230"/>
-          </a:xfrm>
-          <a:prstGeom prst="rect">
-            <a:avLst/>
-          </a:prstGeom>
-          <a:noFill/>
-        </p:spPr>
-        <p:txBody>
-          <a:bodyPr wrap="none" anchor="t">
-            <a:spAutoFit/>
-          </a:bodyPr>
-          <a:lstStyle/>
-          <a:p>
-            <a:pPr algn="ctr"/>
-            <a:r>
-              <a:rPr sz="1800" b="1">
-                <a:solidFill>
-                  <a:srgbClr val="5234B7"/>
-                </a:solidFill>
-                <a:latin typeface="Helvetica Neue"/>
-                <a:ea typeface="Helvetica Neue"/>
-                <a:cs typeface="Helvetica Neue"/>
-              </a:rPr>
-              <a:t>SS</a:t>
-            </a:r>
-            <a:r>
-              <a:rPr sz="1400" b="1" baseline="-25000">
-                <a:solidFill>
-                  <a:srgbClr val="5234B7"/>
-                </a:solidFill>
-                <a:latin typeface="Helvetica Neue"/>
-                <a:ea typeface="Helvetica Neue"/>
-                <a:cs typeface="Helvetica Neue"/>
-              </a:rPr>
-              <a:t>tot</a:t>
-            </a:r>
-          </a:p>
-        </p:txBody>
-      </p:sp>
-      <p:sp>
-        <p:nvSpPr>
-          <p:cNvPr id="16" name="TextBox 15"/>
-          <p:cNvSpPr txBox="1"/>
-          <p:nvPr/>
-        </p:nvSpPr>
-        <p:spPr>
-          <a:xfrm>
-            <a:off x="822960" y="4251959"/>
-            <a:ext cx="5303520" cy="274320"/>
-          </a:xfrm>
-          <a:prstGeom prst="rect">
-            <a:avLst/>
-          </a:prstGeom>
-          <a:noFill/>
-        </p:spPr>
-        <p:txBody>
-          <a:bodyPr wrap="square" anchor="t">
-            <a:spAutoFit/>
-          </a:bodyPr>
-          <a:lstStyle/>
-          <a:p>
-            <a:pPr algn="l"/>
-            <a:r>
-              <a:rPr sz="1000" b="0">
-                <a:solidFill>
-                  <a:srgbClr val="5A5470"/>
-                </a:solidFill>
-                <a:latin typeface="DIN Next LT W23"/>
-                <a:ea typeface="DIN Next LT W23"/>
-                <a:cs typeface="DIN Next LT W23"/>
-              </a:rPr>
-              <a:t>SS_res = residual SS  ·  SS_tot = total SS</a:t>
-            </a:r>
-          </a:p>
-        </p:txBody>
-      </p:sp>
-      <p:sp>
-        <p:nvSpPr>
-          <p:cNvPr id="17" name="TextBox 16"/>
-          <p:cNvSpPr txBox="1"/>
-          <p:nvPr/>
-        </p:nvSpPr>
-        <p:spPr>
-          <a:xfrm>
-            <a:off x="548640" y="4727448"/>
-            <a:ext cx="320040" cy="384048"/>
-          </a:xfrm>
-          <a:prstGeom prst="rect">
-            <a:avLst/>
-          </a:prstGeom>
-          <a:noFill/>
-        </p:spPr>
-        <p:txBody>
-          <a:bodyPr wrap="square" anchor="t">
-            <a:spAutoFit/>
-          </a:bodyPr>
-          <a:lstStyle/>
-          <a:p>
-            <a:pPr algn="l"/>
-            <a:r>
-              <a:rPr sz="1200" b="0">
-                <a:solidFill>
-                  <a:srgbClr val="9E59CD"/>
-                </a:solidFill>
-                <a:latin typeface="DIN Next LT W23"/>
-                <a:ea typeface="DIN Next LT W23"/>
-                <a:cs typeface="DIN Next LT W23"/>
-              </a:rPr>
-              <a:t>–</a:t>
-            </a:r>
-          </a:p>
-        </p:txBody>
-      </p:sp>
-      <p:sp>
-        <p:nvSpPr>
-          <p:cNvPr id="18" name="TextBox 17"/>
-          <p:cNvSpPr txBox="1"/>
-          <p:nvPr/>
-        </p:nvSpPr>
-        <p:spPr>
-          <a:xfrm>
-            <a:off x="914400" y="4727448"/>
-            <a:ext cx="4754879" cy="384048"/>
-          </a:xfrm>
-          <a:prstGeom prst="rect">
-            <a:avLst/>
-          </a:prstGeom>
-          <a:noFill/>
-        </p:spPr>
-        <p:txBody>
-          <a:bodyPr wrap="square" anchor="t">
-            <a:spAutoFit/>
-          </a:bodyPr>
-          <a:lstStyle/>
-          <a:p>
-            <a:pPr algn="l"/>
-            <a:r>
-              <a:rPr sz="1200" b="0">
-                <a:solidFill>
-                  <a:srgbClr val="121018"/>
-                </a:solidFill>
-                <a:latin typeface="DIN Next LT W23"/>
-                <a:ea typeface="DIN Next LT W23"/>
-                <a:cs typeface="DIN Next LT W23"/>
-              </a:rPr>
-              <a:t>Near 1 → strong explanatory power.</a:t>
-            </a:r>
-          </a:p>
-        </p:txBody>
-      </p:sp>
-      <p:sp>
-        <p:nvSpPr>
-          <p:cNvPr id="19" name="TextBox 18"/>
-          <p:cNvSpPr txBox="1"/>
-          <p:nvPr/>
-        </p:nvSpPr>
-        <p:spPr>
-          <a:xfrm>
-            <a:off x="548640" y="5148072"/>
-            <a:ext cx="320040" cy="384048"/>
-          </a:xfrm>
-          <a:prstGeom prst="rect">
-            <a:avLst/>
-          </a:prstGeom>
-          <a:noFill/>
-        </p:spPr>
-        <p:txBody>
-          <a:bodyPr wrap="square" anchor="t">
-            <a:spAutoFit/>
-          </a:bodyPr>
-          <a:lstStyle/>
-          <a:p>
-            <a:pPr algn="l"/>
-            <a:r>
-              <a:rPr sz="1200" b="0">
-                <a:solidFill>
-                  <a:srgbClr val="9E59CD"/>
-                </a:solidFill>
-                <a:latin typeface="DIN Next LT W23"/>
-                <a:ea typeface="DIN Next LT W23"/>
-                <a:cs typeface="DIN Next LT W23"/>
-              </a:rPr>
-              <a:t>–</a:t>
-            </a:r>
-          </a:p>
-        </p:txBody>
-      </p:sp>
-      <p:sp>
-        <p:nvSpPr>
-          <p:cNvPr id="20" name="TextBox 19"/>
-          <p:cNvSpPr txBox="1"/>
-          <p:nvPr/>
-        </p:nvSpPr>
-        <p:spPr>
-          <a:xfrm>
-            <a:off x="914400" y="5148072"/>
-            <a:ext cx="4754879" cy="384048"/>
-          </a:xfrm>
-          <a:prstGeom prst="rect">
-            <a:avLst/>
-          </a:prstGeom>
-          <a:noFill/>
-        </p:spPr>
-        <p:txBody>
-          <a:bodyPr wrap="square" anchor="t">
-            <a:spAutoFit/>
-          </a:bodyPr>
-          <a:lstStyle/>
-          <a:p>
-            <a:pPr algn="l"/>
-            <a:r>
-              <a:rPr sz="1200" b="0">
-                <a:solidFill>
-                  <a:srgbClr val="121018"/>
-                </a:solidFill>
-                <a:latin typeface="DIN Next LT W23"/>
-                <a:ea typeface="DIN Next LT W23"/>
-                <a:cs typeface="DIN Next LT W23"/>
-              </a:rPr>
-              <a:t>Near 0 → little better than predicting the mean.</a:t>
-            </a:r>
-          </a:p>
-        </p:txBody>
-      </p:sp>
-      <p:sp>
-        <p:nvSpPr>
-          <p:cNvPr id="21" name="Rounded Rectangle 20"/>
-          <p:cNvSpPr/>
-          <p:nvPr/>
-        </p:nvSpPr>
-        <p:spPr>
-          <a:xfrm>
-            <a:off x="6537960" y="2011680"/>
-            <a:ext cx="4983480" cy="3794760"/>
-          </a:xfrm>
-          <a:prstGeom prst="roundRect">
-            <a:avLst>
-              <a:gd name="adj" fmla="val 10000"/>
-            </a:avLst>
-          </a:prstGeom>
-          <a:solidFill>
-            <a:srgbClr val="EEE8FA"/>
-          </a:solidFill>
-          <a:ln>
-            <a:noFill/>
-          </a:ln>
-          <a:effectLst/>
-        </p:spPr>
-        <p:style>
-          <a:lnRef idx="1">
-            <a:schemeClr val="accent1"/>
-          </a:lnRef>
-          <a:fillRef idx="3">
-            <a:schemeClr val="accent1"/>
-          </a:fillRef>
-          <a:effectRef idx="2">
-            <a:schemeClr val="accent1"/>
-          </a:effectRef>
-          <a:fontRef idx="minor">
-            <a:schemeClr val="lt1"/>
-          </a:fontRef>
-        </p:style>
-        <p:txBody>
-          <a:bodyPr rtlCol="0" anchor="ctr"/>
-          <a:lstStyle/>
-          <a:p>
-            <a:pPr algn="ctr"/>
-          </a:p>
-        </p:txBody>
-      </p:sp>
-      <p:pic>
-        <p:nvPicPr>
-          <p:cNvPr id="22" name="Picture 21" descr="slide-22-1.png"/>
-          <p:cNvPicPr>
-            <a:picLocks noChangeAspect="1"/>
-          </p:cNvPicPr>
-          <p:nvPr/>
-        </p:nvPicPr>
-        <p:blipFill>
-          <a:blip r:embed="rId3"/>
-          <a:stretch>
-            <a:fillRect/>
-          </a:stretch>
-        </p:blipFill>
-        <p:spPr>
-          <a:xfrm>
-            <a:off x="6720840" y="2194560"/>
-            <a:ext cx="4617720" cy="2854210"/>
-          </a:xfrm>
-          <a:prstGeom prst="rect">
-            <a:avLst/>
-          </a:prstGeom>
-        </p:spPr>
-      </p:pic>
-      <p:sp>
-        <p:nvSpPr>
-          <p:cNvPr id="23" name="TextBox 22"/>
-          <p:cNvSpPr txBox="1"/>
-          <p:nvPr/>
-        </p:nvSpPr>
-        <p:spPr>
-          <a:xfrm>
-            <a:off x="548640" y="5989320"/>
-            <a:ext cx="10972800" cy="256032"/>
-          </a:xfrm>
-          <a:prstGeom prst="rect">
-            <a:avLst/>
-          </a:prstGeom>
-          <a:noFill/>
-        </p:spPr>
-        <p:txBody>
-          <a:bodyPr wrap="square" anchor="t">
-            <a:spAutoFit/>
-          </a:bodyPr>
-          <a:lstStyle/>
-          <a:p>
-            <a:pPr algn="l"/>
-            <a:r>
-              <a:rPr sz="1100" b="0">
-                <a:solidFill>
-                  <a:srgbClr val="5A5470"/>
-                </a:solidFill>
-                <a:latin typeface="DIN Next LT W23"/>
-                <a:ea typeface="DIN Next LT W23"/>
-                <a:cs typeface="DIN Next LT W23"/>
-              </a:rPr>
-              <a:t>High R² on training data ≠ guaranteed good new-data predictions.</a:t>
-            </a:r>
-          </a:p>
-        </p:txBody>
-      </p:sp>
-      <p:sp>
-        <p:nvSpPr>
-          <p:cNvPr id="24" name="Rectangle 23"/>
-          <p:cNvSpPr/>
-          <p:nvPr/>
-        </p:nvSpPr>
-        <p:spPr>
-          <a:xfrm>
-            <a:off x="548640" y="6446520"/>
-            <a:ext cx="11064240" cy="10972"/>
-          </a:xfrm>
-          <a:prstGeom prst="rect">
-            <a:avLst/>
-          </a:prstGeom>
-          <a:solidFill>
-            <a:srgbClr val="5234B7"/>
-          </a:solidFill>
-          <a:ln>
-            <a:noFill/>
-          </a:ln>
-          <a:effectLst/>
-        </p:spPr>
-        <p:style>
-          <a:lnRef idx="1">
-            <a:schemeClr val="accent1"/>
-          </a:lnRef>
-          <a:fillRef idx="3">
-            <a:schemeClr val="accent1"/>
-          </a:fillRef>
-          <a:effectRef idx="2">
-            <a:schemeClr val="accent1"/>
-          </a:effectRef>
-          <a:fontRef idx="minor">
-            <a:schemeClr val="lt1"/>
-          </a:fontRef>
-        </p:style>
-        <p:txBody>
-          <a:bodyPr rtlCol="0" anchor="ctr"/>
-          <a:lstStyle/>
-          <a:p>
-            <a:pPr algn="ctr"/>
-          </a:p>
-        </p:txBody>
-      </p:sp>
-      <p:sp>
-        <p:nvSpPr>
-          <p:cNvPr id="25" name="TextBox 24"/>
+          <p:cNvPr id="22" name="TextBox 21"/>
           <p:cNvSpPr txBox="1"/>
           <p:nvPr/>
         </p:nvSpPr>
@@ -7788,7 +7521,7 @@
       </p:sp>
       <p:sp>
         <p:nvSpPr>
-          <p:cNvPr id="26" name="TextBox 25"/>
+          <p:cNvPr id="23" name="TextBox 22"/>
           <p:cNvSpPr txBox="1"/>
           <p:nvPr/>
         </p:nvSpPr>
@@ -8869,7 +8602,7 @@
         <p:spPr>
           <a:xfrm>
             <a:off x="548640" y="2743200"/>
-            <a:ext cx="10972800" cy="1051560"/>
+            <a:ext cx="10972800" cy="1417320"/>
           </a:xfrm>
           <a:prstGeom prst="roundRect">
             <a:avLst>
@@ -8906,16 +8639,40 @@
           </a:p>
         </p:txBody>
       </p:sp>
-      <p:sp>
-        <p:nvSpPr>
-          <p:cNvPr id="11" name="TextBox 10"/>
-          <p:cNvSpPr txBox="1"/>
-          <p:nvPr/>
-        </p:nvSpPr>
-        <p:spPr>
-          <a:xfrm>
-            <a:off x="914400" y="2880360"/>
-            <a:ext cx="10241280" cy="457200"/>
+      <p:pic>
+        <p:nvPicPr>
+          <p:cNvPr id="11" name="Picture 10" descr="f-ee9afbb9888975b1.png"/>
+          <p:cNvPicPr>
+            <a:picLocks noChangeAspect="1"/>
+          </p:cNvPicPr>
+          <p:nvPr/>
+        </p:nvPicPr>
+        <p:blipFill>
+          <a:blip r:embed="rId3"/>
+          <a:stretch>
+            <a:fillRect/>
+          </a:stretch>
+        </p:blipFill>
+        <p:spPr>
+          <a:xfrm>
+            <a:off x="836131257107" y="2608717363200"/>
+            <a:ext cx="2447065" cy="868680"/>
+          </a:xfrm>
+          <a:prstGeom prst="rect">
+            <a:avLst/>
+          </a:prstGeom>
+        </p:spPr>
+      </p:pic>
+      <p:sp>
+        <p:nvSpPr>
+          <p:cNvPr id="12" name="TextBox 11"/>
+          <p:cNvSpPr txBox="1"/>
+          <p:nvPr/>
+        </p:nvSpPr>
+        <p:spPr>
+          <a:xfrm>
+            <a:off x="914400" y="3840480"/>
+            <a:ext cx="10241280" cy="256032"/>
           </a:xfrm>
           <a:prstGeom prst="rect">
             <a:avLst/>
@@ -8930,131 +8687,6 @@
           <a:p>
             <a:pPr algn="ctr"/>
             <a:r>
-              <a:rPr sz="2600" b="1">
-                <a:solidFill>
-                  <a:srgbClr val="5234B7"/>
-                </a:solidFill>
-                <a:latin typeface="Helvetica Neue"/>
-                <a:ea typeface="Helvetica Neue"/>
-                <a:cs typeface="Helvetica Neue"/>
-              </a:rPr>
-              <a:t>SS</a:t>
-            </a:r>
-            <a:r>
-              <a:rPr sz="2200" b="1" baseline="-25000">
-                <a:solidFill>
-                  <a:srgbClr val="5234B7"/>
-                </a:solidFill>
-                <a:latin typeface="Helvetica Neue"/>
-                <a:ea typeface="Helvetica Neue"/>
-                <a:cs typeface="Helvetica Neue"/>
-              </a:rPr>
-              <a:t>res</a:t>
-            </a:r>
-            <a:r>
-              <a:rPr sz="2600" b="1">
-                <a:solidFill>
-                  <a:srgbClr val="5234B7"/>
-                </a:solidFill>
-                <a:latin typeface="Helvetica Neue"/>
-                <a:ea typeface="Helvetica Neue"/>
-                <a:cs typeface="Helvetica Neue"/>
-              </a:rPr>
-              <a:t> = Σ</a:t>
-            </a:r>
-            <a:r>
-              <a:rPr sz="2200" b="1" baseline="-25000">
-                <a:solidFill>
-                  <a:srgbClr val="5234B7"/>
-                </a:solidFill>
-                <a:latin typeface="Helvetica Neue"/>
-                <a:ea typeface="Helvetica Neue"/>
-                <a:cs typeface="Helvetica Neue"/>
-              </a:rPr>
-              <a:t>i = 1 … n</a:t>
-            </a:r>
-            <a:r>
-              <a:rPr sz="2600" b="1">
-                <a:solidFill>
-                  <a:srgbClr val="5234B7"/>
-                </a:solidFill>
-                <a:latin typeface="Helvetica Neue"/>
-                <a:ea typeface="Helvetica Neue"/>
-                <a:cs typeface="Helvetica Neue"/>
-              </a:rPr>
-              <a:t> (y</a:t>
-            </a:r>
-            <a:r>
-              <a:rPr sz="2200" b="1" baseline="-25000">
-                <a:solidFill>
-                  <a:srgbClr val="5234B7"/>
-                </a:solidFill>
-                <a:latin typeface="Helvetica Neue"/>
-                <a:ea typeface="Helvetica Neue"/>
-                <a:cs typeface="Helvetica Neue"/>
-              </a:rPr>
-              <a:t>i</a:t>
-            </a:r>
-            <a:r>
-              <a:rPr sz="2600" b="1">
-                <a:solidFill>
-                  <a:srgbClr val="5234B7"/>
-                </a:solidFill>
-                <a:latin typeface="Helvetica Neue"/>
-                <a:ea typeface="Helvetica Neue"/>
-                <a:cs typeface="Helvetica Neue"/>
-              </a:rPr>
-              <a:t> − ŷ</a:t>
-            </a:r>
-            <a:r>
-              <a:rPr sz="2200" b="1" baseline="-25000">
-                <a:solidFill>
-                  <a:srgbClr val="5234B7"/>
-                </a:solidFill>
-                <a:latin typeface="Helvetica Neue"/>
-                <a:ea typeface="Helvetica Neue"/>
-                <a:cs typeface="Helvetica Neue"/>
-              </a:rPr>
-              <a:t>i</a:t>
-            </a:r>
-            <a:r>
-              <a:rPr sz="2600" b="1">
-                <a:solidFill>
-                  <a:srgbClr val="5234B7"/>
-                </a:solidFill>
-                <a:latin typeface="Helvetica Neue"/>
-                <a:ea typeface="Helvetica Neue"/>
-                <a:cs typeface="Helvetica Neue"/>
-              </a:rPr>
-              <a:t>)²</a:t>
-            </a:r>
-          </a:p>
-        </p:txBody>
-      </p:sp>
-      <p:sp>
-        <p:nvSpPr>
-          <p:cNvPr id="12" name="TextBox 11"/>
-          <p:cNvSpPr txBox="1"/>
-          <p:nvPr/>
-        </p:nvSpPr>
-        <p:spPr>
-          <a:xfrm>
-            <a:off x="914400" y="3474719"/>
-            <a:ext cx="10241280" cy="256032"/>
-          </a:xfrm>
-          <a:prstGeom prst="rect">
-            <a:avLst/>
-          </a:prstGeom>
-          <a:noFill/>
-        </p:spPr>
-        <p:txBody>
-          <a:bodyPr wrap="square" anchor="t">
-            <a:spAutoFit/>
-          </a:bodyPr>
-          <a:lstStyle/>
-          <a:p>
-            <a:pPr algn="ctr"/>
-            <a:r>
               <a:rPr sz="1200" b="0">
                 <a:solidFill>
                   <a:srgbClr val="5A5470"/>
@@ -9076,7 +8708,7 @@
         </p:nvSpPr>
         <p:spPr>
           <a:xfrm>
-            <a:off x="548640" y="3904488"/>
+            <a:off x="548640" y="4270248"/>
             <a:ext cx="320040" cy="384048"/>
           </a:xfrm>
           <a:prstGeom prst="rect">
@@ -9113,7 +8745,7 @@
         </p:nvSpPr>
         <p:spPr>
           <a:xfrm>
-            <a:off x="914400" y="3904488"/>
+            <a:off x="914400" y="4270248"/>
             <a:ext cx="9875519" cy="384048"/>
           </a:xfrm>
           <a:prstGeom prst="rect">
@@ -9150,7 +8782,7 @@
         </p:nvSpPr>
         <p:spPr>
           <a:xfrm>
-            <a:off x="548640" y="4416552"/>
+            <a:off x="548640" y="4782312"/>
             <a:ext cx="320040" cy="384048"/>
           </a:xfrm>
           <a:prstGeom prst="rect">
@@ -9187,7 +8819,7 @@
         </p:nvSpPr>
         <p:spPr>
           <a:xfrm>
-            <a:off x="914400" y="4416552"/>
+            <a:off x="914400" y="4782312"/>
             <a:ext cx="9875519" cy="384048"/>
           </a:xfrm>
           <a:prstGeom prst="rect">
@@ -9675,7 +9307,7 @@
         <p:spPr>
           <a:xfrm>
             <a:off x="548640" y="2743200"/>
-            <a:ext cx="10972800" cy="1051560"/>
+            <a:ext cx="10972800" cy="1417320"/>
           </a:xfrm>
           <a:prstGeom prst="roundRect">
             <a:avLst>
@@ -9712,16 +9344,40 @@
           </a:p>
         </p:txBody>
       </p:sp>
-      <p:sp>
-        <p:nvSpPr>
-          <p:cNvPr id="11" name="TextBox 10"/>
-          <p:cNvSpPr txBox="1"/>
-          <p:nvPr/>
-        </p:nvSpPr>
-        <p:spPr>
-          <a:xfrm>
-            <a:off x="914400" y="2880360"/>
-            <a:ext cx="10241280" cy="457200"/>
+      <p:pic>
+        <p:nvPicPr>
+          <p:cNvPr id="11" name="Picture 10" descr="f-22cf8d21008e42c3.png"/>
+          <p:cNvPicPr>
+            <a:picLocks noChangeAspect="1"/>
+          </p:cNvPicPr>
+          <p:nvPr/>
+        </p:nvPicPr>
+        <p:blipFill>
+          <a:blip r:embed="rId3"/>
+          <a:stretch>
+            <a:fillRect/>
+          </a:stretch>
+        </p:blipFill>
+        <p:spPr>
+          <a:xfrm>
+            <a:off x="836131298270" y="2608717363200"/>
+            <a:ext cx="2364740" cy="868680"/>
+          </a:xfrm>
+          <a:prstGeom prst="rect">
+            <a:avLst/>
+          </a:prstGeom>
+        </p:spPr>
+      </p:pic>
+      <p:sp>
+        <p:nvSpPr>
+          <p:cNvPr id="12" name="TextBox 11"/>
+          <p:cNvSpPr txBox="1"/>
+          <p:nvPr/>
+        </p:nvSpPr>
+        <p:spPr>
+          <a:xfrm>
+            <a:off x="914400" y="3840480"/>
+            <a:ext cx="10241280" cy="256032"/>
           </a:xfrm>
           <a:prstGeom prst="rect">
             <a:avLst/>
@@ -9736,109 +9392,6 @@
           <a:p>
             <a:pPr algn="ctr"/>
             <a:r>
-              <a:rPr sz="2600" b="1">
-                <a:solidFill>
-                  <a:srgbClr val="5234B7"/>
-                </a:solidFill>
-                <a:latin typeface="Helvetica Neue"/>
-                <a:ea typeface="Helvetica Neue"/>
-                <a:cs typeface="Helvetica Neue"/>
-              </a:rPr>
-              <a:t>SS</a:t>
-            </a:r>
-            <a:r>
-              <a:rPr sz="2200" b="1" baseline="-25000">
-                <a:solidFill>
-                  <a:srgbClr val="5234B7"/>
-                </a:solidFill>
-                <a:latin typeface="Helvetica Neue"/>
-                <a:ea typeface="Helvetica Neue"/>
-                <a:cs typeface="Helvetica Neue"/>
-              </a:rPr>
-              <a:t>tot</a:t>
-            </a:r>
-            <a:r>
-              <a:rPr sz="2600" b="1">
-                <a:solidFill>
-                  <a:srgbClr val="5234B7"/>
-                </a:solidFill>
-                <a:latin typeface="Helvetica Neue"/>
-                <a:ea typeface="Helvetica Neue"/>
-                <a:cs typeface="Helvetica Neue"/>
-              </a:rPr>
-              <a:t> = Σ</a:t>
-            </a:r>
-            <a:r>
-              <a:rPr sz="2200" b="1" baseline="-25000">
-                <a:solidFill>
-                  <a:srgbClr val="5234B7"/>
-                </a:solidFill>
-                <a:latin typeface="Helvetica Neue"/>
-                <a:ea typeface="Helvetica Neue"/>
-                <a:cs typeface="Helvetica Neue"/>
-              </a:rPr>
-              <a:t>i = 1 … n</a:t>
-            </a:r>
-            <a:r>
-              <a:rPr sz="2600" b="1">
-                <a:solidFill>
-                  <a:srgbClr val="5234B7"/>
-                </a:solidFill>
-                <a:latin typeface="Helvetica Neue"/>
-                <a:ea typeface="Helvetica Neue"/>
-                <a:cs typeface="Helvetica Neue"/>
-              </a:rPr>
-              <a:t> (y</a:t>
-            </a:r>
-            <a:r>
-              <a:rPr sz="2200" b="1" baseline="-25000">
-                <a:solidFill>
-                  <a:srgbClr val="5234B7"/>
-                </a:solidFill>
-                <a:latin typeface="Helvetica Neue"/>
-                <a:ea typeface="Helvetica Neue"/>
-                <a:cs typeface="Helvetica Neue"/>
-              </a:rPr>
-              <a:t>i</a:t>
-            </a:r>
-            <a:r>
-              <a:rPr sz="2600" b="1">
-                <a:solidFill>
-                  <a:srgbClr val="5234B7"/>
-                </a:solidFill>
-                <a:latin typeface="Helvetica Neue"/>
-                <a:ea typeface="Helvetica Neue"/>
-                <a:cs typeface="Helvetica Neue"/>
-              </a:rPr>
-              <a:t> − ȳ)²</a:t>
-            </a:r>
-          </a:p>
-        </p:txBody>
-      </p:sp>
-      <p:sp>
-        <p:nvSpPr>
-          <p:cNvPr id="12" name="TextBox 11"/>
-          <p:cNvSpPr txBox="1"/>
-          <p:nvPr/>
-        </p:nvSpPr>
-        <p:spPr>
-          <a:xfrm>
-            <a:off x="914400" y="3474719"/>
-            <a:ext cx="10241280" cy="256032"/>
-          </a:xfrm>
-          <a:prstGeom prst="rect">
-            <a:avLst/>
-          </a:prstGeom>
-          <a:noFill/>
-        </p:spPr>
-        <p:txBody>
-          <a:bodyPr wrap="square" anchor="t">
-            <a:spAutoFit/>
-          </a:bodyPr>
-          <a:lstStyle/>
-          <a:p>
-            <a:pPr algn="ctr"/>
-            <a:r>
               <a:rPr sz="1200" b="0">
                 <a:solidFill>
                   <a:srgbClr val="5A5470"/>
@@ -9860,7 +9413,7 @@
         </p:nvSpPr>
         <p:spPr>
           <a:xfrm>
-            <a:off x="548640" y="3904488"/>
+            <a:off x="548640" y="4270248"/>
             <a:ext cx="320040" cy="384048"/>
           </a:xfrm>
           <a:prstGeom prst="rect">
@@ -9897,7 +9450,7 @@
         </p:nvSpPr>
         <p:spPr>
           <a:xfrm>
-            <a:off x="914400" y="3904488"/>
+            <a:off x="914400" y="4270248"/>
             <a:ext cx="9875519" cy="384048"/>
           </a:xfrm>
           <a:prstGeom prst="rect">
@@ -9934,7 +9487,7 @@
         </p:nvSpPr>
         <p:spPr>
           <a:xfrm>
-            <a:off x="548640" y="4325112"/>
+            <a:off x="548640" y="4690872"/>
             <a:ext cx="320040" cy="384048"/>
           </a:xfrm>
           <a:prstGeom prst="rect">
@@ -9971,7 +9524,7 @@
         </p:nvSpPr>
         <p:spPr>
           <a:xfrm>
-            <a:off x="914400" y="4325112"/>
+            <a:off x="914400" y="4690872"/>
             <a:ext cx="9875519" cy="384048"/>
           </a:xfrm>
           <a:prstGeom prst="rect">
@@ -13744,7 +13297,7 @@
         <p:spPr>
           <a:xfrm>
             <a:off x="548640" y="2743200"/>
-            <a:ext cx="10972800" cy="1325880"/>
+            <a:ext cx="10972800" cy="1417320"/>
           </a:xfrm>
           <a:prstGeom prst="roundRect">
             <a:avLst>
@@ -13781,65 +13334,30 @@
           </a:p>
         </p:txBody>
       </p:sp>
-      <p:sp>
-        <p:nvSpPr>
-          <p:cNvPr id="11" name="TextBox 10"/>
-          <p:cNvSpPr txBox="1"/>
-          <p:nvPr/>
-        </p:nvSpPr>
-        <p:spPr>
-          <a:xfrm>
-            <a:off x="914400" y="2880360"/>
-            <a:ext cx="3482035" cy="685800"/>
-          </a:xfrm>
-          <a:prstGeom prst="rect">
-            <a:avLst/>
-          </a:prstGeom>
-          <a:noFill/>
-        </p:spPr>
-        <p:txBody>
-          <a:bodyPr wrap="none" anchor="ctr">
-            <a:spAutoFit/>
-          </a:bodyPr>
-          <a:lstStyle/>
-          <a:p>
-            <a:pPr algn="r"/>
-            <a:r>
-              <a:rPr sz="2400" b="1">
-                <a:solidFill>
-                  <a:srgbClr val="5234B7"/>
-                </a:solidFill>
-                <a:latin typeface="Helvetica Neue"/>
-                <a:ea typeface="Helvetica Neue"/>
-                <a:cs typeface="Helvetica Neue"/>
-              </a:rPr>
-              <a:t>R²</a:t>
-            </a:r>
-            <a:r>
-              <a:rPr sz="2000" b="1" baseline="-25000">
-                <a:solidFill>
-                  <a:srgbClr val="5234B7"/>
-                </a:solidFill>
-                <a:latin typeface="Helvetica Neue"/>
-                <a:ea typeface="Helvetica Neue"/>
-                <a:cs typeface="Helvetica Neue"/>
-              </a:rPr>
-              <a:t>adj</a:t>
-            </a:r>
-            <a:r>
-              <a:rPr sz="2400" b="1">
-                <a:solidFill>
-                  <a:srgbClr val="5234B7"/>
-                </a:solidFill>
-                <a:latin typeface="Helvetica Neue"/>
-                <a:ea typeface="Helvetica Neue"/>
-                <a:cs typeface="Helvetica Neue"/>
-              </a:rPr>
-              <a:t> = 1 −</a:t>
-            </a:r>
-          </a:p>
-        </p:txBody>
-      </p:sp>
+      <p:pic>
+        <p:nvPicPr>
+          <p:cNvPr id="11" name="Picture 10" descr="f-2cbafd383160adf7.png"/>
+          <p:cNvPicPr>
+            <a:picLocks noChangeAspect="1"/>
+          </p:cNvPicPr>
+          <p:nvPr/>
+        </p:nvPicPr>
+        <p:blipFill>
+          <a:blip r:embed="rId3"/>
+          <a:stretch>
+            <a:fillRect/>
+          </a:stretch>
+        </p:blipFill>
+        <p:spPr>
+          <a:xfrm>
+            <a:off x="836130764919" y="2608717363200"/>
+            <a:ext cx="3431440" cy="868680"/>
+          </a:xfrm>
+          <a:prstGeom prst="rect">
+            <a:avLst/>
+          </a:prstGeom>
+        </p:spPr>
+      </p:pic>
       <p:sp>
         <p:nvSpPr>
           <p:cNvPr id="12" name="TextBox 11"/>
@@ -13848,45 +13366,193 @@
         </p:nvSpPr>
         <p:spPr>
           <a:xfrm>
-            <a:off x="4601260" y="2880360"/>
-            <a:ext cx="6554419" cy="260604"/>
-          </a:xfrm>
-          <a:prstGeom prst="rect">
-            <a:avLst/>
-          </a:prstGeom>
-          <a:noFill/>
-        </p:spPr>
-        <p:txBody>
-          <a:bodyPr wrap="none" anchor="b">
+            <a:off x="914400" y="3840480"/>
+            <a:ext cx="10241280" cy="256032"/>
+          </a:xfrm>
+          <a:prstGeom prst="rect">
+            <a:avLst/>
+          </a:prstGeom>
+          <a:noFill/>
+        </p:spPr>
+        <p:txBody>
+          <a:bodyPr wrap="square" anchor="t">
             <a:spAutoFit/>
           </a:bodyPr>
           <a:lstStyle/>
           <a:p>
             <a:pPr algn="ctr"/>
             <a:r>
-              <a:rPr sz="2400" b="1">
-                <a:solidFill>
-                  <a:srgbClr val="5234B7"/>
-                </a:solidFill>
-                <a:latin typeface="Helvetica Neue"/>
-                <a:ea typeface="Helvetica Neue"/>
-                <a:cs typeface="Helvetica Neue"/>
-              </a:rPr>
-              <a:t>1 − R²)(n − 1</a:t>
-            </a:r>
-          </a:p>
-        </p:txBody>
-      </p:sp>
-      <p:sp>
-        <p:nvSpPr>
-          <p:cNvPr id="13" name="Rectangle 12"/>
+              <a:rPr sz="1200" b="0">
+                <a:solidFill>
+                  <a:srgbClr val="5A5470"/>
+                </a:solidFill>
+                <a:latin typeface="DIN Next LT W23"/>
+                <a:ea typeface="DIN Next LT W23"/>
+                <a:cs typeface="DIN Next LT W23"/>
+              </a:rPr>
+              <a:t>n = samples  ·  p = predictors</a:t>
+            </a:r>
+          </a:p>
+        </p:txBody>
+      </p:sp>
+      <p:sp>
+        <p:nvSpPr>
+          <p:cNvPr id="13" name="TextBox 12"/>
+          <p:cNvSpPr txBox="1"/>
+          <p:nvPr/>
+        </p:nvSpPr>
+        <p:spPr>
+          <a:xfrm>
+            <a:off x="548640" y="4270248"/>
+            <a:ext cx="320040" cy="384048"/>
+          </a:xfrm>
+          <a:prstGeom prst="rect">
+            <a:avLst/>
+          </a:prstGeom>
+          <a:noFill/>
+        </p:spPr>
+        <p:txBody>
+          <a:bodyPr wrap="square" anchor="t">
+            <a:spAutoFit/>
+          </a:bodyPr>
+          <a:lstStyle/>
+          <a:p>
+            <a:pPr algn="l"/>
+            <a:r>
+              <a:rPr sz="1500" b="0">
+                <a:solidFill>
+                  <a:srgbClr val="9E59CD"/>
+                </a:solidFill>
+                <a:latin typeface="DIN Next LT W23"/>
+                <a:ea typeface="DIN Next LT W23"/>
+                <a:cs typeface="DIN Next LT W23"/>
+              </a:rPr>
+              <a:t>–</a:t>
+            </a:r>
+          </a:p>
+        </p:txBody>
+      </p:sp>
+      <p:sp>
+        <p:nvSpPr>
+          <p:cNvPr id="14" name="TextBox 13"/>
+          <p:cNvSpPr txBox="1"/>
+          <p:nvPr/>
+        </p:nvSpPr>
+        <p:spPr>
+          <a:xfrm>
+            <a:off x="914400" y="4270248"/>
+            <a:ext cx="9875519" cy="384048"/>
+          </a:xfrm>
+          <a:prstGeom prst="rect">
+            <a:avLst/>
+          </a:prstGeom>
+          <a:noFill/>
+        </p:spPr>
+        <p:txBody>
+          <a:bodyPr wrap="square" anchor="t">
+            <a:spAutoFit/>
+          </a:bodyPr>
+          <a:lstStyle/>
+          <a:p>
+            <a:pPr algn="l"/>
+            <a:r>
+              <a:rPr sz="1500" b="0">
+                <a:solidFill>
+                  <a:srgbClr val="121018"/>
+                </a:solidFill>
+                <a:latin typeface="DIN Next LT W23"/>
+                <a:ea typeface="DIN Next LT W23"/>
+                <a:cs typeface="DIN Next LT W23"/>
+              </a:rPr>
+              <a:t>Better for comparing models with different p.</a:t>
+            </a:r>
+          </a:p>
+        </p:txBody>
+      </p:sp>
+      <p:sp>
+        <p:nvSpPr>
+          <p:cNvPr id="15" name="TextBox 14"/>
+          <p:cNvSpPr txBox="1"/>
+          <p:nvPr/>
+        </p:nvSpPr>
+        <p:spPr>
+          <a:xfrm>
+            <a:off x="548640" y="4782312"/>
+            <a:ext cx="320040" cy="384048"/>
+          </a:xfrm>
+          <a:prstGeom prst="rect">
+            <a:avLst/>
+          </a:prstGeom>
+          <a:noFill/>
+        </p:spPr>
+        <p:txBody>
+          <a:bodyPr wrap="square" anchor="t">
+            <a:spAutoFit/>
+          </a:bodyPr>
+          <a:lstStyle/>
+          <a:p>
+            <a:pPr algn="l"/>
+            <a:r>
+              <a:rPr sz="1500" b="0">
+                <a:solidFill>
+                  <a:srgbClr val="9E59CD"/>
+                </a:solidFill>
+                <a:latin typeface="DIN Next LT W23"/>
+                <a:ea typeface="DIN Next LT W23"/>
+                <a:cs typeface="DIN Next LT W23"/>
+              </a:rPr>
+              <a:t>–</a:t>
+            </a:r>
+          </a:p>
+        </p:txBody>
+      </p:sp>
+      <p:sp>
+        <p:nvSpPr>
+          <p:cNvPr id="16" name="TextBox 15"/>
+          <p:cNvSpPr txBox="1"/>
+          <p:nvPr/>
+        </p:nvSpPr>
+        <p:spPr>
+          <a:xfrm>
+            <a:off x="914400" y="4782312"/>
+            <a:ext cx="9875519" cy="384048"/>
+          </a:xfrm>
+          <a:prstGeom prst="rect">
+            <a:avLst/>
+          </a:prstGeom>
+          <a:noFill/>
+        </p:spPr>
+        <p:txBody>
+          <a:bodyPr wrap="square" anchor="t">
+            <a:spAutoFit/>
+          </a:bodyPr>
+          <a:lstStyle/>
+          <a:p>
+            <a:pPr algn="l"/>
+            <a:r>
+              <a:rPr sz="1500" b="0">
+                <a:solidFill>
+                  <a:srgbClr val="121018"/>
+                </a:solidFill>
+                <a:latin typeface="DIN Next LT W23"/>
+                <a:ea typeface="DIN Next LT W23"/>
+                <a:cs typeface="DIN Next LT W23"/>
+              </a:rPr>
+              <a:t>Can fall when R² rises if the new variable is weak.</a:t>
+            </a:r>
+          </a:p>
+        </p:txBody>
+      </p:sp>
+      <p:sp>
+        <p:nvSpPr>
+          <p:cNvPr id="17" name="Rectangle 16"/>
           <p:cNvSpPr/>
           <p:nvPr/>
         </p:nvSpPr>
         <p:spPr>
           <a:xfrm>
-            <a:off x="4928981" y="3169767"/>
-            <a:ext cx="5898977" cy="18288"/>
+            <a:off x="548640" y="6446520"/>
+            <a:ext cx="11064240" cy="10972"/>
           </a:xfrm>
           <a:prstGeom prst="rect">
             <a:avLst/>
@@ -13923,273 +13589,7 @@
       </p:sp>
       <p:sp>
         <p:nvSpPr>
-          <p:cNvPr id="14" name="TextBox 13"/>
-          <p:cNvSpPr txBox="1"/>
-          <p:nvPr/>
-        </p:nvSpPr>
-        <p:spPr>
-          <a:xfrm>
-            <a:off x="4601260" y="3223260"/>
-            <a:ext cx="6554419" cy="260604"/>
-          </a:xfrm>
-          <a:prstGeom prst="rect">
-            <a:avLst/>
-          </a:prstGeom>
-          <a:noFill/>
-        </p:spPr>
-        <p:txBody>
-          <a:bodyPr wrap="none" anchor="t">
-            <a:spAutoFit/>
-          </a:bodyPr>
-          <a:lstStyle/>
-          <a:p>
-            <a:pPr algn="ctr"/>
-            <a:r>
-              <a:rPr sz="2400" b="1">
-                <a:solidFill>
-                  <a:srgbClr val="5234B7"/>
-                </a:solidFill>
-                <a:latin typeface="Helvetica Neue"/>
-                <a:ea typeface="Helvetica Neue"/>
-                <a:cs typeface="Helvetica Neue"/>
-              </a:rPr>
-              <a:t>n − p − 1</a:t>
-            </a:r>
-          </a:p>
-        </p:txBody>
-      </p:sp>
-      <p:sp>
-        <p:nvSpPr>
-          <p:cNvPr id="15" name="TextBox 14"/>
-          <p:cNvSpPr txBox="1"/>
-          <p:nvPr/>
-        </p:nvSpPr>
-        <p:spPr>
-          <a:xfrm>
-            <a:off x="914400" y="3749040"/>
-            <a:ext cx="10241280" cy="256032"/>
-          </a:xfrm>
-          <a:prstGeom prst="rect">
-            <a:avLst/>
-          </a:prstGeom>
-          <a:noFill/>
-        </p:spPr>
-        <p:txBody>
-          <a:bodyPr wrap="square" anchor="t">
-            <a:spAutoFit/>
-          </a:bodyPr>
-          <a:lstStyle/>
-          <a:p>
-            <a:pPr algn="ctr"/>
-            <a:r>
-              <a:rPr sz="1200" b="0">
-                <a:solidFill>
-                  <a:srgbClr val="5A5470"/>
-                </a:solidFill>
-                <a:latin typeface="DIN Next LT W23"/>
-                <a:ea typeface="DIN Next LT W23"/>
-                <a:cs typeface="DIN Next LT W23"/>
-              </a:rPr>
-              <a:t>n = samples  ·  p = predictors</a:t>
-            </a:r>
-          </a:p>
-        </p:txBody>
-      </p:sp>
-      <p:sp>
-        <p:nvSpPr>
-          <p:cNvPr id="16" name="TextBox 15"/>
-          <p:cNvSpPr txBox="1"/>
-          <p:nvPr/>
-        </p:nvSpPr>
-        <p:spPr>
-          <a:xfrm>
-            <a:off x="548640" y="4178808"/>
-            <a:ext cx="320040" cy="384048"/>
-          </a:xfrm>
-          <a:prstGeom prst="rect">
-            <a:avLst/>
-          </a:prstGeom>
-          <a:noFill/>
-        </p:spPr>
-        <p:txBody>
-          <a:bodyPr wrap="square" anchor="t">
-            <a:spAutoFit/>
-          </a:bodyPr>
-          <a:lstStyle/>
-          <a:p>
-            <a:pPr algn="l"/>
-            <a:r>
-              <a:rPr sz="1500" b="0">
-                <a:solidFill>
-                  <a:srgbClr val="9E59CD"/>
-                </a:solidFill>
-                <a:latin typeface="DIN Next LT W23"/>
-                <a:ea typeface="DIN Next LT W23"/>
-                <a:cs typeface="DIN Next LT W23"/>
-              </a:rPr>
-              <a:t>–</a:t>
-            </a:r>
-          </a:p>
-        </p:txBody>
-      </p:sp>
-      <p:sp>
-        <p:nvSpPr>
-          <p:cNvPr id="17" name="TextBox 16"/>
-          <p:cNvSpPr txBox="1"/>
-          <p:nvPr/>
-        </p:nvSpPr>
-        <p:spPr>
-          <a:xfrm>
-            <a:off x="914400" y="4178808"/>
-            <a:ext cx="9875519" cy="384048"/>
-          </a:xfrm>
-          <a:prstGeom prst="rect">
-            <a:avLst/>
-          </a:prstGeom>
-          <a:noFill/>
-        </p:spPr>
-        <p:txBody>
-          <a:bodyPr wrap="square" anchor="t">
-            <a:spAutoFit/>
-          </a:bodyPr>
-          <a:lstStyle/>
-          <a:p>
-            <a:pPr algn="l"/>
-            <a:r>
-              <a:rPr sz="1500" b="0">
-                <a:solidFill>
-                  <a:srgbClr val="121018"/>
-                </a:solidFill>
-                <a:latin typeface="DIN Next LT W23"/>
-                <a:ea typeface="DIN Next LT W23"/>
-                <a:cs typeface="DIN Next LT W23"/>
-              </a:rPr>
-              <a:t>Better for comparing models with different p.</a:t>
-            </a:r>
-          </a:p>
-        </p:txBody>
-      </p:sp>
-      <p:sp>
-        <p:nvSpPr>
           <p:cNvPr id="18" name="TextBox 17"/>
-          <p:cNvSpPr txBox="1"/>
-          <p:nvPr/>
-        </p:nvSpPr>
-        <p:spPr>
-          <a:xfrm>
-            <a:off x="548640" y="4690872"/>
-            <a:ext cx="320040" cy="384048"/>
-          </a:xfrm>
-          <a:prstGeom prst="rect">
-            <a:avLst/>
-          </a:prstGeom>
-          <a:noFill/>
-        </p:spPr>
-        <p:txBody>
-          <a:bodyPr wrap="square" anchor="t">
-            <a:spAutoFit/>
-          </a:bodyPr>
-          <a:lstStyle/>
-          <a:p>
-            <a:pPr algn="l"/>
-            <a:r>
-              <a:rPr sz="1500" b="0">
-                <a:solidFill>
-                  <a:srgbClr val="9E59CD"/>
-                </a:solidFill>
-                <a:latin typeface="DIN Next LT W23"/>
-                <a:ea typeface="DIN Next LT W23"/>
-                <a:cs typeface="DIN Next LT W23"/>
-              </a:rPr>
-              <a:t>–</a:t>
-            </a:r>
-          </a:p>
-        </p:txBody>
-      </p:sp>
-      <p:sp>
-        <p:nvSpPr>
-          <p:cNvPr id="19" name="TextBox 18"/>
-          <p:cNvSpPr txBox="1"/>
-          <p:nvPr/>
-        </p:nvSpPr>
-        <p:spPr>
-          <a:xfrm>
-            <a:off x="914400" y="4690872"/>
-            <a:ext cx="9875519" cy="384048"/>
-          </a:xfrm>
-          <a:prstGeom prst="rect">
-            <a:avLst/>
-          </a:prstGeom>
-          <a:noFill/>
-        </p:spPr>
-        <p:txBody>
-          <a:bodyPr wrap="square" anchor="t">
-            <a:spAutoFit/>
-          </a:bodyPr>
-          <a:lstStyle/>
-          <a:p>
-            <a:pPr algn="l"/>
-            <a:r>
-              <a:rPr sz="1500" b="0">
-                <a:solidFill>
-                  <a:srgbClr val="121018"/>
-                </a:solidFill>
-                <a:latin typeface="DIN Next LT W23"/>
-                <a:ea typeface="DIN Next LT W23"/>
-                <a:cs typeface="DIN Next LT W23"/>
-              </a:rPr>
-              <a:t>Can fall when R² rises if the new variable is weak.</a:t>
-            </a:r>
-          </a:p>
-        </p:txBody>
-      </p:sp>
-      <p:sp>
-        <p:nvSpPr>
-          <p:cNvPr id="20" name="Rectangle 19"/>
-          <p:cNvSpPr/>
-          <p:nvPr/>
-        </p:nvSpPr>
-        <p:spPr>
-          <a:xfrm>
-            <a:off x="548640" y="6446520"/>
-            <a:ext cx="11064240" cy="10972"/>
-          </a:xfrm>
-          <a:prstGeom prst="rect">
-            <a:avLst/>
-          </a:prstGeom>
-          <a:solidFill>
-            <a:srgbClr val="5234B7"/>
-          </a:solidFill>
-          <a:ln>
-            <a:noFill/>
-          </a:ln>
-          <a:effectLst/>
-        </p:spPr>
-        <p:style>
-          <a:lnRef idx="1">
-            <a:schemeClr val="accent1"/>
-          </a:lnRef>
-          <a:fillRef idx="3">
-            <a:schemeClr val="accent1"/>
-          </a:fillRef>
-          <a:effectRef idx="2">
-            <a:schemeClr val="accent1"/>
-          </a:effectRef>
-          <a:fontRef idx="minor">
-            <a:schemeClr val="lt1"/>
-          </a:fontRef>
-        </p:style>
-        <p:txBody>
-          <a:bodyPr rtlCol="0" anchor="ctr"/>
-          <a:lstStyle/>
-          <a:p>
-            <a:pPr algn="ctr"/>
-          </a:p>
-        </p:txBody>
-      </p:sp>
-      <p:sp>
-        <p:nvSpPr>
-          <p:cNvPr id="21" name="TextBox 20"/>
           <p:cNvSpPr txBox="1"/>
           <p:nvPr/>
         </p:nvSpPr>
@@ -14226,7 +13626,7 @@
       </p:sp>
       <p:sp>
         <p:nvSpPr>
-          <p:cNvPr id="22" name="TextBox 21"/>
+          <p:cNvPr id="19" name="TextBox 18"/>
           <p:cNvSpPr txBox="1"/>
           <p:nvPr/>
         </p:nvSpPr>
@@ -24245,7 +23645,7 @@
         <p:spPr>
           <a:xfrm>
             <a:off x="548640" y="3246120"/>
-            <a:ext cx="5760720" cy="1143000"/>
+            <a:ext cx="5760720" cy="1234440"/>
           </a:xfrm>
           <a:prstGeom prst="roundRect">
             <a:avLst>
@@ -24319,54 +23719,30 @@
           </a:p>
         </p:txBody>
       </p:sp>
-      <p:sp>
-        <p:nvSpPr>
-          <p:cNvPr id="12" name="TextBox 11"/>
-          <p:cNvSpPr txBox="1"/>
-          <p:nvPr/>
-        </p:nvSpPr>
-        <p:spPr>
-          <a:xfrm>
-            <a:off x="822960" y="3566160"/>
-            <a:ext cx="5303520" cy="365760"/>
-          </a:xfrm>
-          <a:prstGeom prst="rect">
-            <a:avLst/>
-          </a:prstGeom>
-          <a:noFill/>
-        </p:spPr>
-        <p:txBody>
-          <a:bodyPr wrap="square" anchor="t">
-            <a:spAutoFit/>
-          </a:bodyPr>
-          <a:lstStyle/>
-          <a:p>
-            <a:pPr algn="l"/>
-            <a:r>
-              <a:rPr sz="2000" b="1">
-                <a:solidFill>
-                  <a:srgbClr val="5234B7"/>
-                </a:solidFill>
-                <a:latin typeface="Helvetica Neue"/>
-                <a:ea typeface="Helvetica Neue"/>
-                <a:cs typeface="Helvetica Neue"/>
-              </a:rPr>
-              <a:t>0.03 &lt; 0.05  ⇒  Reject H</a:t>
-            </a:r>
-            <a:r>
-              <a:rPr sz="1600" b="1" baseline="-25000">
-                <a:solidFill>
-                  <a:srgbClr val="5234B7"/>
-                </a:solidFill>
-                <a:latin typeface="Helvetica Neue"/>
-                <a:ea typeface="Helvetica Neue"/>
-                <a:cs typeface="Helvetica Neue"/>
-              </a:rPr>
-              <a:t>0</a:t>
-            </a:r>
-          </a:p>
-        </p:txBody>
-      </p:sp>
+      <p:pic>
+        <p:nvPicPr>
+          <p:cNvPr id="12" name="Picture 11" descr="f-3edfc9980c3178fc.png"/>
+          <p:cNvPicPr>
+            <a:picLocks noChangeAspect="1"/>
+          </p:cNvPicPr>
+          <p:nvPr/>
+        </p:nvPicPr>
+        <p:blipFill>
+          <a:blip r:embed="rId3"/>
+          <a:stretch>
+            <a:fillRect/>
+          </a:stretch>
+        </p:blipFill>
+        <p:spPr>
+          <a:xfrm>
+            <a:off x="752515255585" y="3566160"/>
+            <a:ext cx="4040348" cy="594360"/>
+          </a:xfrm>
+          <a:prstGeom prst="rect">
+            <a:avLst/>
+          </a:prstGeom>
+        </p:spPr>
+      </p:pic>
       <p:sp>
         <p:nvSpPr>
           <p:cNvPr id="13" name="TextBox 12"/>
@@ -24375,7 +23751,7 @@
         </p:nvSpPr>
         <p:spPr>
           <a:xfrm>
-            <a:off x="822960" y="3977639"/>
+            <a:off x="822960" y="4206240"/>
             <a:ext cx="5303520" cy="274320"/>
           </a:xfrm>
           <a:prstGeom prst="rect">
@@ -24412,7 +23788,7 @@
         </p:nvSpPr>
         <p:spPr>
           <a:xfrm>
-            <a:off x="548640" y="4498848"/>
+            <a:off x="548640" y="4590288"/>
             <a:ext cx="320040" cy="384048"/>
           </a:xfrm>
           <a:prstGeom prst="rect">
@@ -24449,7 +23825,7 @@
         </p:nvSpPr>
         <p:spPr>
           <a:xfrm>
-            <a:off x="914400" y="4498848"/>
+            <a:off x="914400" y="4590288"/>
             <a:ext cx="4754879" cy="384048"/>
           </a:xfrm>
           <a:prstGeom prst="rect">
@@ -24486,7 +23862,7 @@
         </p:nvSpPr>
         <p:spPr>
           <a:xfrm>
-            <a:off x="548640" y="4919472"/>
+            <a:off x="548640" y="5010912"/>
             <a:ext cx="320040" cy="384048"/>
           </a:xfrm>
           <a:prstGeom prst="rect">
@@ -24523,7 +23899,7 @@
         </p:nvSpPr>
         <p:spPr>
           <a:xfrm>
-            <a:off x="914400" y="4919472"/>
+            <a:off x="914400" y="5010912"/>
             <a:ext cx="4754879" cy="384048"/>
           </a:xfrm>
           <a:prstGeom prst="rect">
@@ -24607,7 +23983,7 @@
           <p:nvPr/>
         </p:nvPicPr>
         <p:blipFill>
-          <a:blip r:embed="rId3"/>
+          <a:blip r:embed="rId4"/>
           <a:stretch>
             <a:fillRect/>
           </a:stretch>
@@ -25786,7 +25162,7 @@
         <p:spPr>
           <a:xfrm>
             <a:off x="548640" y="2743200"/>
-            <a:ext cx="10972800" cy="1051560"/>
+            <a:ext cx="10972800" cy="1143000"/>
           </a:xfrm>
           <a:prstGeom prst="roundRect">
             <a:avLst>
@@ -25823,16 +25199,40 @@
           </a:p>
         </p:txBody>
       </p:sp>
-      <p:sp>
-        <p:nvSpPr>
-          <p:cNvPr id="11" name="TextBox 10"/>
-          <p:cNvSpPr txBox="1"/>
-          <p:nvPr/>
-        </p:nvSpPr>
-        <p:spPr>
-          <a:xfrm>
-            <a:off x="914400" y="2880360"/>
-            <a:ext cx="10241280" cy="457200"/>
+      <p:pic>
+        <p:nvPicPr>
+          <p:cNvPr id="11" name="Picture 10" descr="f-b469ed52762c9796.png"/>
+          <p:cNvPicPr>
+            <a:picLocks noChangeAspect="1"/>
+          </p:cNvPicPr>
+          <p:nvPr/>
+        </p:nvPicPr>
+        <p:blipFill>
+          <a:blip r:embed="rId3"/>
+          <a:stretch>
+            <a:fillRect/>
+          </a:stretch>
+        </p:blipFill>
+        <p:spPr>
+          <a:xfrm>
+            <a:off x="836130018110" y="2608717363200"/>
+            <a:ext cx="4925060" cy="640080"/>
+          </a:xfrm>
+          <a:prstGeom prst="rect">
+            <a:avLst/>
+          </a:prstGeom>
+        </p:spPr>
+      </p:pic>
+      <p:sp>
+        <p:nvSpPr>
+          <p:cNvPr id="12" name="TextBox 11"/>
+          <p:cNvSpPr txBox="1"/>
+          <p:nvPr/>
+        </p:nvSpPr>
+        <p:spPr>
+          <a:xfrm>
+            <a:off x="914400" y="3566160"/>
+            <a:ext cx="10241280" cy="256032"/>
           </a:xfrm>
           <a:prstGeom prst="rect">
             <a:avLst/>
@@ -25847,43 +25247,6 @@
           <a:p>
             <a:pPr algn="ctr"/>
             <a:r>
-              <a:rPr sz="2600" b="1">
-                <a:solidFill>
-                  <a:srgbClr val="5234B7"/>
-                </a:solidFill>
-                <a:latin typeface="Helvetica Neue"/>
-                <a:ea typeface="Helvetica Neue"/>
-                <a:cs typeface="Helvetica Neue"/>
-              </a:rPr>
-              <a:t>SL = 1 − Confidence Level</a:t>
-            </a:r>
-          </a:p>
-        </p:txBody>
-      </p:sp>
-      <p:sp>
-        <p:nvSpPr>
-          <p:cNvPr id="12" name="TextBox 11"/>
-          <p:cNvSpPr txBox="1"/>
-          <p:nvPr/>
-        </p:nvSpPr>
-        <p:spPr>
-          <a:xfrm>
-            <a:off x="914400" y="3474719"/>
-            <a:ext cx="10241280" cy="256032"/>
-          </a:xfrm>
-          <a:prstGeom prst="rect">
-            <a:avLst/>
-          </a:prstGeom>
-          <a:noFill/>
-        </p:spPr>
-        <p:txBody>
-          <a:bodyPr wrap="square" anchor="t">
-            <a:spAutoFit/>
-          </a:bodyPr>
-          <a:lstStyle/>
-          <a:p>
-            <a:pPr algn="ctr"/>
-            <a:r>
               <a:rPr sz="1200" b="0">
                 <a:solidFill>
                   <a:srgbClr val="5A5470"/>
@@ -25905,7 +25268,7 @@
         </p:nvSpPr>
         <p:spPr>
           <a:xfrm>
-            <a:off x="548640" y="3904488"/>
+            <a:off x="548640" y="3995928"/>
             <a:ext cx="320040" cy="384048"/>
           </a:xfrm>
           <a:prstGeom prst="rect">
@@ -25942,7 +25305,7 @@
         </p:nvSpPr>
         <p:spPr>
           <a:xfrm>
-            <a:off x="914400" y="3904488"/>
+            <a:off x="914400" y="3995928"/>
             <a:ext cx="9875519" cy="384048"/>
           </a:xfrm>
           <a:prstGeom prst="rect">
@@ -25979,7 +25342,7 @@
         </p:nvSpPr>
         <p:spPr>
           <a:xfrm>
-            <a:off x="548640" y="4416552"/>
+            <a:off x="548640" y="4507992"/>
             <a:ext cx="320040" cy="384048"/>
           </a:xfrm>
           <a:prstGeom prst="rect">
@@ -26016,7 +25379,7 @@
         </p:nvSpPr>
         <p:spPr>
           <a:xfrm>
-            <a:off x="914400" y="4416552"/>
+            <a:off x="914400" y="4507992"/>
             <a:ext cx="9875519" cy="384048"/>
           </a:xfrm>
           <a:prstGeom prst="rect">
@@ -27933,7 +27296,7 @@
         <p:spPr>
           <a:xfrm>
             <a:off x="548640" y="2743200"/>
-            <a:ext cx="10972800" cy="1051560"/>
+            <a:ext cx="10972800" cy="1143000"/>
           </a:xfrm>
           <a:prstGeom prst="roundRect">
             <a:avLst>
@@ -27970,16 +27333,40 @@
           </a:p>
         </p:txBody>
       </p:sp>
-      <p:sp>
-        <p:nvSpPr>
-          <p:cNvPr id="11" name="TextBox 10"/>
-          <p:cNvSpPr txBox="1"/>
-          <p:nvPr/>
-        </p:nvSpPr>
-        <p:spPr>
-          <a:xfrm>
-            <a:off x="914400" y="2880360"/>
-            <a:ext cx="10241280" cy="457200"/>
+      <p:pic>
+        <p:nvPicPr>
+          <p:cNvPr id="11" name="Picture 10" descr="f-61fa22ad19be8ac1.png"/>
+          <p:cNvPicPr>
+            <a:picLocks noChangeAspect="1"/>
+          </p:cNvPicPr>
+          <p:nvPr/>
+        </p:nvPicPr>
+        <p:blipFill>
+          <a:blip r:embed="rId3"/>
+          <a:stretch>
+            <a:fillRect/>
+          </a:stretch>
+        </p:blipFill>
+        <p:spPr>
+          <a:xfrm>
+            <a:off x="836130061566" y="2608717363200"/>
+            <a:ext cx="4838146" cy="640080"/>
+          </a:xfrm>
+          <a:prstGeom prst="rect">
+            <a:avLst/>
+          </a:prstGeom>
+        </p:spPr>
+      </p:pic>
+      <p:sp>
+        <p:nvSpPr>
+          <p:cNvPr id="12" name="TextBox 11"/>
+          <p:cNvSpPr txBox="1"/>
+          <p:nvPr/>
+        </p:nvSpPr>
+        <p:spPr>
+          <a:xfrm>
+            <a:off x="914400" y="3566160"/>
+            <a:ext cx="10241280" cy="256032"/>
           </a:xfrm>
           <a:prstGeom prst="rect">
             <a:avLst/>
@@ -27994,131 +27381,6 @@
           <a:p>
             <a:pPr algn="ctr"/>
             <a:r>
-              <a:rPr sz="2600" b="1">
-                <a:solidFill>
-                  <a:srgbClr val="5234B7"/>
-                </a:solidFill>
-                <a:latin typeface="Helvetica Neue"/>
-                <a:ea typeface="Helvetica Neue"/>
-                <a:cs typeface="Helvetica Neue"/>
-              </a:rPr>
-              <a:t>y = b</a:t>
-            </a:r>
-            <a:r>
-              <a:rPr sz="2200" b="1" baseline="-25000">
-                <a:solidFill>
-                  <a:srgbClr val="5234B7"/>
-                </a:solidFill>
-                <a:latin typeface="Helvetica Neue"/>
-                <a:ea typeface="Helvetica Neue"/>
-                <a:cs typeface="Helvetica Neue"/>
-              </a:rPr>
-              <a:t>0</a:t>
-            </a:r>
-            <a:r>
-              <a:rPr sz="2600" b="1">
-                <a:solidFill>
-                  <a:srgbClr val="5234B7"/>
-                </a:solidFill>
-                <a:latin typeface="Helvetica Neue"/>
-                <a:ea typeface="Helvetica Neue"/>
-                <a:cs typeface="Helvetica Neue"/>
-              </a:rPr>
-              <a:t> + b</a:t>
-            </a:r>
-            <a:r>
-              <a:rPr sz="2200" b="1" baseline="-25000">
-                <a:solidFill>
-                  <a:srgbClr val="5234B7"/>
-                </a:solidFill>
-                <a:latin typeface="Helvetica Neue"/>
-                <a:ea typeface="Helvetica Neue"/>
-                <a:cs typeface="Helvetica Neue"/>
-              </a:rPr>
-              <a:t>1</a:t>
-            </a:r>
-            <a:r>
-              <a:rPr sz="2600" b="1">
-                <a:solidFill>
-                  <a:srgbClr val="5234B7"/>
-                </a:solidFill>
-                <a:latin typeface="Helvetica Neue"/>
-                <a:ea typeface="Helvetica Neue"/>
-                <a:cs typeface="Helvetica Neue"/>
-              </a:rPr>
-              <a:t>x + b</a:t>
-            </a:r>
-            <a:r>
-              <a:rPr sz="2200" b="1" baseline="-25000">
-                <a:solidFill>
-                  <a:srgbClr val="5234B7"/>
-                </a:solidFill>
-                <a:latin typeface="Helvetica Neue"/>
-                <a:ea typeface="Helvetica Neue"/>
-                <a:cs typeface="Helvetica Neue"/>
-              </a:rPr>
-              <a:t>2</a:t>
-            </a:r>
-            <a:r>
-              <a:rPr sz="2600" b="1">
-                <a:solidFill>
-                  <a:srgbClr val="5234B7"/>
-                </a:solidFill>
-                <a:latin typeface="Helvetica Neue"/>
-                <a:ea typeface="Helvetica Neue"/>
-                <a:cs typeface="Helvetica Neue"/>
-              </a:rPr>
-              <a:t>x² + b</a:t>
-            </a:r>
-            <a:r>
-              <a:rPr sz="2200" b="1" baseline="-25000">
-                <a:solidFill>
-                  <a:srgbClr val="5234B7"/>
-                </a:solidFill>
-                <a:latin typeface="Helvetica Neue"/>
-                <a:ea typeface="Helvetica Neue"/>
-                <a:cs typeface="Helvetica Neue"/>
-              </a:rPr>
-              <a:t>3</a:t>
-            </a:r>
-            <a:r>
-              <a:rPr sz="2600" b="1">
-                <a:solidFill>
-                  <a:srgbClr val="5234B7"/>
-                </a:solidFill>
-                <a:latin typeface="Helvetica Neue"/>
-                <a:ea typeface="Helvetica Neue"/>
-                <a:cs typeface="Helvetica Neue"/>
-              </a:rPr>
-              <a:t>x³ + ⋯</a:t>
-            </a:r>
-          </a:p>
-        </p:txBody>
-      </p:sp>
-      <p:sp>
-        <p:nvSpPr>
-          <p:cNvPr id="12" name="TextBox 11"/>
-          <p:cNvSpPr txBox="1"/>
-          <p:nvPr/>
-        </p:nvSpPr>
-        <p:spPr>
-          <a:xfrm>
-            <a:off x="914400" y="3474719"/>
-            <a:ext cx="10241280" cy="256032"/>
-          </a:xfrm>
-          <a:prstGeom prst="rect">
-            <a:avLst/>
-          </a:prstGeom>
-          <a:noFill/>
-        </p:spPr>
-        <p:txBody>
-          <a:bodyPr wrap="square" anchor="t">
-            <a:spAutoFit/>
-          </a:bodyPr>
-          <a:lstStyle/>
-          <a:p>
-            <a:pPr algn="ctr"/>
-            <a:r>
               <a:rPr sz="1200" b="0">
                 <a:solidFill>
                   <a:srgbClr val="5A5470"/>
@@ -28140,7 +27402,7 @@
         </p:nvSpPr>
         <p:spPr>
           <a:xfrm>
-            <a:off x="548640" y="3904488"/>
+            <a:off x="548640" y="3995928"/>
             <a:ext cx="320040" cy="384048"/>
           </a:xfrm>
           <a:prstGeom prst="rect">
@@ -28177,7 +27439,7 @@
         </p:nvSpPr>
         <p:spPr>
           <a:xfrm>
-            <a:off x="914400" y="3904488"/>
+            <a:off x="914400" y="3995928"/>
             <a:ext cx="9875519" cy="384048"/>
           </a:xfrm>
           <a:prstGeom prst="rect">
@@ -28214,7 +27476,7 @@
         </p:nvSpPr>
         <p:spPr>
           <a:xfrm>
-            <a:off x="548640" y="4325112"/>
+            <a:off x="548640" y="4416552"/>
             <a:ext cx="320040" cy="384048"/>
           </a:xfrm>
           <a:prstGeom prst="rect">
@@ -28251,7 +27513,7 @@
         </p:nvSpPr>
         <p:spPr>
           <a:xfrm>
-            <a:off x="914400" y="4325112"/>
+            <a:off x="914400" y="4416552"/>
             <a:ext cx="9875519" cy="384048"/>
           </a:xfrm>
           <a:prstGeom prst="rect">
@@ -35432,7 +34694,7 @@
         <p:spPr>
           <a:xfrm>
             <a:off x="548640" y="2743200"/>
-            <a:ext cx="10972800" cy="1051560"/>
+            <a:ext cx="10972800" cy="1143000"/>
           </a:xfrm>
           <a:prstGeom prst="roundRect">
             <a:avLst>
@@ -35469,16 +34731,40 @@
           </a:p>
         </p:txBody>
       </p:sp>
-      <p:sp>
-        <p:nvSpPr>
-          <p:cNvPr id="11" name="TextBox 10"/>
-          <p:cNvSpPr txBox="1"/>
-          <p:nvPr/>
-        </p:nvSpPr>
-        <p:spPr>
-          <a:xfrm>
-            <a:off x="914400" y="2880360"/>
-            <a:ext cx="10241280" cy="457200"/>
+      <p:pic>
+        <p:nvPicPr>
+          <p:cNvPr id="11" name="Picture 10" descr="f-d3b07b19c928e445.png"/>
+          <p:cNvPicPr>
+            <a:picLocks noChangeAspect="1"/>
+          </p:cNvPicPr>
+          <p:nvPr/>
+        </p:nvPicPr>
+        <p:blipFill>
+          <a:blip r:embed="rId3"/>
+          <a:stretch>
+            <a:fillRect/>
+          </a:stretch>
+        </p:blipFill>
+        <p:spPr>
+          <a:xfrm>
+            <a:off x="836130895135" y="2608717363200"/>
+            <a:ext cx="3171008" cy="640080"/>
+          </a:xfrm>
+          <a:prstGeom prst="rect">
+            <a:avLst/>
+          </a:prstGeom>
+        </p:spPr>
+      </p:pic>
+      <p:sp>
+        <p:nvSpPr>
+          <p:cNvPr id="12" name="TextBox 11"/>
+          <p:cNvSpPr txBox="1"/>
+          <p:nvPr/>
+        </p:nvSpPr>
+        <p:spPr>
+          <a:xfrm>
+            <a:off x="914400" y="3566160"/>
+            <a:ext cx="10241280" cy="256032"/>
           </a:xfrm>
           <a:prstGeom prst="rect">
             <a:avLst/>
@@ -35493,43 +34779,6 @@
           <a:p>
             <a:pPr algn="ctr"/>
             <a:r>
-              <a:rPr sz="2600" b="1">
-                <a:solidFill>
-                  <a:srgbClr val="5234B7"/>
-                </a:solidFill>
-                <a:latin typeface="Helvetica Neue"/>
-                <a:ea typeface="Helvetica Neue"/>
-                <a:cs typeface="Helvetica Neue"/>
-              </a:rPr>
-              <a:t>f(x) = wᵀ φ(x) + b</a:t>
-            </a:r>
-          </a:p>
-        </p:txBody>
-      </p:sp>
-      <p:sp>
-        <p:nvSpPr>
-          <p:cNvPr id="12" name="TextBox 11"/>
-          <p:cNvSpPr txBox="1"/>
-          <p:nvPr/>
-        </p:nvSpPr>
-        <p:spPr>
-          <a:xfrm>
-            <a:off x="914400" y="3474719"/>
-            <a:ext cx="10241280" cy="256032"/>
-          </a:xfrm>
-          <a:prstGeom prst="rect">
-            <a:avLst/>
-          </a:prstGeom>
-          <a:noFill/>
-        </p:spPr>
-        <p:txBody>
-          <a:bodyPr wrap="square" anchor="t">
-            <a:spAutoFit/>
-          </a:bodyPr>
-          <a:lstStyle/>
-          <a:p>
-            <a:pPr algn="ctr"/>
-            <a:r>
               <a:rPr sz="1200" b="0">
                 <a:solidFill>
                   <a:srgbClr val="5A5470"/>
@@ -35551,7 +34800,7 @@
         </p:nvSpPr>
         <p:spPr>
           <a:xfrm>
-            <a:off x="548640" y="3904488"/>
+            <a:off x="548640" y="3995928"/>
             <a:ext cx="320040" cy="384048"/>
           </a:xfrm>
           <a:prstGeom prst="rect">
@@ -35588,7 +34837,7 @@
         </p:nvSpPr>
         <p:spPr>
           <a:xfrm>
-            <a:off x="914400" y="3904488"/>
+            <a:off x="914400" y="3995928"/>
             <a:ext cx="9875519" cy="384048"/>
           </a:xfrm>
           <a:prstGeom prst="rect">
@@ -35625,7 +34874,7 @@
         </p:nvSpPr>
         <p:spPr>
           <a:xfrm>
-            <a:off x="548640" y="4416552"/>
+            <a:off x="548640" y="4507992"/>
             <a:ext cx="320040" cy="384048"/>
           </a:xfrm>
           <a:prstGeom prst="rect">
@@ -35662,7 +34911,7 @@
         </p:nvSpPr>
         <p:spPr>
           <a:xfrm>
-            <a:off x="914400" y="4416552"/>
+            <a:off x="914400" y="4507992"/>
             <a:ext cx="9875519" cy="384048"/>
           </a:xfrm>
           <a:prstGeom prst="rect">
@@ -36150,7 +35399,7 @@
         <p:spPr>
           <a:xfrm>
             <a:off x="548640" y="2743200"/>
-            <a:ext cx="10972800" cy="1051560"/>
+            <a:ext cx="10972800" cy="1417320"/>
           </a:xfrm>
           <a:prstGeom prst="roundRect">
             <a:avLst>
@@ -36195,8 +35444,8 @@
         </p:nvSpPr>
         <p:spPr>
           <a:xfrm>
-            <a:off x="914400" y="2880360"/>
-            <a:ext cx="10241280" cy="457200"/>
+            <a:off x="914400" y="2852928"/>
+            <a:ext cx="10241280" cy="868680"/>
           </a:xfrm>
           <a:prstGeom prst="rect">
             <a:avLst/>
@@ -36211,7 +35460,7 @@
           <a:p>
             <a:pPr algn="ctr"/>
             <a:r>
-              <a:rPr sz="2600" b="1">
+              <a:rPr sz="2400" b="1">
                 <a:solidFill>
                   <a:srgbClr val="5234B7"/>
                 </a:solidFill>
@@ -36232,7 +35481,7 @@
         </p:nvSpPr>
         <p:spPr>
           <a:xfrm>
-            <a:off x="914400" y="3474719"/>
+            <a:off x="914400" y="3840480"/>
             <a:ext cx="10241280" cy="256032"/>
           </a:xfrm>
           <a:prstGeom prst="rect">
@@ -36269,7 +35518,7 @@
         </p:nvSpPr>
         <p:spPr>
           <a:xfrm>
-            <a:off x="548640" y="3904488"/>
+            <a:off x="548640" y="4270248"/>
             <a:ext cx="320040" cy="384048"/>
           </a:xfrm>
           <a:prstGeom prst="rect">
@@ -36306,7 +35555,7 @@
         </p:nvSpPr>
         <p:spPr>
           <a:xfrm>
-            <a:off x="914400" y="3904488"/>
+            <a:off x="914400" y="4270248"/>
             <a:ext cx="9875519" cy="384048"/>
           </a:xfrm>
           <a:prstGeom prst="rect">
@@ -36343,7 +35592,7 @@
         </p:nvSpPr>
         <p:spPr>
           <a:xfrm>
-            <a:off x="548640" y="4416552"/>
+            <a:off x="548640" y="4782312"/>
             <a:ext cx="320040" cy="384048"/>
           </a:xfrm>
           <a:prstGeom prst="rect">
@@ -36380,7 +35629,7 @@
         </p:nvSpPr>
         <p:spPr>
           <a:xfrm>
-            <a:off x="914400" y="4416552"/>
+            <a:off x="914400" y="4782312"/>
             <a:ext cx="9875519" cy="384048"/>
           </a:xfrm>
           <a:prstGeom prst="rect">
@@ -36868,7 +36117,7 @@
         <p:spPr>
           <a:xfrm>
             <a:off x="548640" y="3246120"/>
-            <a:ext cx="5760720" cy="1143000"/>
+            <a:ext cx="5760720" cy="1234440"/>
           </a:xfrm>
           <a:prstGeom prst="roundRect">
             <a:avLst>
@@ -36942,43 +36191,30 @@
           </a:p>
         </p:txBody>
       </p:sp>
-      <p:sp>
-        <p:nvSpPr>
-          <p:cNvPr id="12" name="TextBox 11"/>
-          <p:cNvSpPr txBox="1"/>
-          <p:nvPr/>
-        </p:nvSpPr>
-        <p:spPr>
-          <a:xfrm>
-            <a:off x="822960" y="3566160"/>
-            <a:ext cx="5303520" cy="365760"/>
-          </a:xfrm>
-          <a:prstGeom prst="rect">
-            <a:avLst/>
-          </a:prstGeom>
-          <a:noFill/>
-        </p:spPr>
-        <p:txBody>
-          <a:bodyPr wrap="square" anchor="t">
-            <a:spAutoFit/>
-          </a:bodyPr>
-          <a:lstStyle/>
-          <a:p>
-            <a:pPr algn="l"/>
-            <a:r>
-              <a:rPr sz="2000" b="1">
-                <a:solidFill>
-                  <a:srgbClr val="5234B7"/>
-                </a:solidFill>
-                <a:latin typeface="Helvetica Neue"/>
-                <a:ea typeface="Helvetica Neue"/>
-                <a:cs typeface="Helvetica Neue"/>
-              </a:rPr>
-              <a:t>yᵢ − (wᵀφ(xᵢ) + b) ≤ ε + ξᵢ</a:t>
-            </a:r>
-          </a:p>
-        </p:txBody>
-      </p:sp>
+      <p:pic>
+        <p:nvPicPr>
+          <p:cNvPr id="12" name="Picture 11" descr="f-b49cb8ffd8c0be08.png"/>
+          <p:cNvPicPr>
+            <a:picLocks noChangeAspect="1"/>
+          </p:cNvPicPr>
+          <p:nvPr/>
+        </p:nvPicPr>
+        <p:blipFill>
+          <a:blip r:embed="rId3"/>
+          <a:stretch>
+            <a:fillRect/>
+          </a:stretch>
+        </p:blipFill>
+        <p:spPr>
+          <a:xfrm>
+            <a:off x="752515337335" y="3566160"/>
+            <a:ext cx="3876848" cy="594360"/>
+          </a:xfrm>
+          <a:prstGeom prst="rect">
+            <a:avLst/>
+          </a:prstGeom>
+        </p:spPr>
+      </p:pic>
       <p:sp>
         <p:nvSpPr>
           <p:cNvPr id="13" name="TextBox 12"/>
@@ -36987,7 +36223,7 @@
         </p:nvSpPr>
         <p:spPr>
           <a:xfrm>
-            <a:off x="822960" y="3977639"/>
+            <a:off x="822960" y="4206240"/>
             <a:ext cx="5303520" cy="274320"/>
           </a:xfrm>
           <a:prstGeom prst="rect">
@@ -37024,7 +36260,7 @@
         </p:nvSpPr>
         <p:spPr>
           <a:xfrm>
-            <a:off x="548640" y="4498848"/>
+            <a:off x="548640" y="4590288"/>
             <a:ext cx="320040" cy="384048"/>
           </a:xfrm>
           <a:prstGeom prst="rect">
@@ -37061,7 +36297,7 @@
         </p:nvSpPr>
         <p:spPr>
           <a:xfrm>
-            <a:off x="914400" y="4498848"/>
+            <a:off x="914400" y="4590288"/>
             <a:ext cx="4754879" cy="384048"/>
           </a:xfrm>
           <a:prstGeom prst="rect">
@@ -37098,7 +36334,7 @@
         </p:nvSpPr>
         <p:spPr>
           <a:xfrm>
-            <a:off x="548640" y="4919472"/>
+            <a:off x="548640" y="5010912"/>
             <a:ext cx="320040" cy="384048"/>
           </a:xfrm>
           <a:prstGeom prst="rect">
@@ -37135,7 +36371,7 @@
         </p:nvSpPr>
         <p:spPr>
           <a:xfrm>
-            <a:off x="914400" y="4919472"/>
+            <a:off x="914400" y="5010912"/>
             <a:ext cx="4754879" cy="384048"/>
           </a:xfrm>
           <a:prstGeom prst="rect">
@@ -37219,7 +36455,7 @@
           <p:nvPr/>
         </p:nvPicPr>
         <p:blipFill>
-          <a:blip r:embed="rId3"/>
+          <a:blip r:embed="rId4"/>
           <a:stretch>
             <a:fillRect/>
           </a:stretch>
@@ -37693,7 +36929,7 @@
         <p:spPr>
           <a:xfrm>
             <a:off x="548640" y="3246120"/>
-            <a:ext cx="5760720" cy="1143000"/>
+            <a:ext cx="5760720" cy="1234440"/>
           </a:xfrm>
           <a:prstGeom prst="roundRect">
             <a:avLst>
@@ -37767,87 +37003,30 @@
           </a:p>
         </p:txBody>
       </p:sp>
-      <p:sp>
-        <p:nvSpPr>
-          <p:cNvPr id="12" name="TextBox 11"/>
-          <p:cNvSpPr txBox="1"/>
-          <p:nvPr/>
-        </p:nvSpPr>
-        <p:spPr>
-          <a:xfrm>
-            <a:off x="822960" y="3566160"/>
-            <a:ext cx="5303520" cy="365760"/>
-          </a:xfrm>
-          <a:prstGeom prst="rect">
-            <a:avLst/>
-          </a:prstGeom>
-          <a:noFill/>
-        </p:spPr>
-        <p:txBody>
-          <a:bodyPr wrap="square" anchor="t">
-            <a:spAutoFit/>
-          </a:bodyPr>
-          <a:lstStyle/>
-          <a:p>
-            <a:pPr algn="l"/>
-            <a:r>
-              <a:rPr sz="2000" b="1">
-                <a:solidFill>
-                  <a:srgbClr val="5234B7"/>
-                </a:solidFill>
-                <a:latin typeface="Helvetica Neue"/>
-                <a:ea typeface="Helvetica Neue"/>
-                <a:cs typeface="Helvetica Neue"/>
-              </a:rPr>
-              <a:t>y = b</a:t>
-            </a:r>
-            <a:r>
-              <a:rPr sz="1600" b="1" baseline="-25000">
-                <a:solidFill>
-                  <a:srgbClr val="5234B7"/>
-                </a:solidFill>
-                <a:latin typeface="Helvetica Neue"/>
-                <a:ea typeface="Helvetica Neue"/>
-                <a:cs typeface="Helvetica Neue"/>
-              </a:rPr>
-              <a:t>0</a:t>
-            </a:r>
-            <a:r>
-              <a:rPr sz="2000" b="1">
-                <a:solidFill>
-                  <a:srgbClr val="5234B7"/>
-                </a:solidFill>
-                <a:latin typeface="Helvetica Neue"/>
-                <a:ea typeface="Helvetica Neue"/>
-                <a:cs typeface="Helvetica Neue"/>
-              </a:rPr>
-              <a:t> + b</a:t>
-            </a:r>
-            <a:r>
-              <a:rPr sz="1600" b="1" baseline="-25000">
-                <a:solidFill>
-                  <a:srgbClr val="5234B7"/>
-                </a:solidFill>
-                <a:latin typeface="Helvetica Neue"/>
-                <a:ea typeface="Helvetica Neue"/>
-                <a:cs typeface="Helvetica Neue"/>
-              </a:rPr>
-              <a:t>1</a:t>
-            </a:r>
-            <a:r>
-              <a:rPr sz="2000" b="1">
-                <a:solidFill>
-                  <a:srgbClr val="5234B7"/>
-                </a:solidFill>
-                <a:latin typeface="Helvetica Neue"/>
-                <a:ea typeface="Helvetica Neue"/>
-                <a:cs typeface="Helvetica Neue"/>
-              </a:rPr>
-              <a:t>x</a:t>
-            </a:r>
-          </a:p>
-        </p:txBody>
-      </p:sp>
+      <p:pic>
+        <p:nvPicPr>
+          <p:cNvPr id="12" name="Picture 11" descr="f-bfd591cfea34a800.png"/>
+          <p:cNvPicPr>
+            <a:picLocks noChangeAspect="1"/>
+          </p:cNvPicPr>
+          <p:nvPr/>
+        </p:nvPicPr>
+        <p:blipFill>
+          <a:blip r:embed="rId3"/>
+          <a:stretch>
+            <a:fillRect/>
+          </a:stretch>
+        </p:blipFill>
+        <p:spPr>
+          <a:xfrm>
+            <a:off x="752516151997" y="3566160"/>
+            <a:ext cx="2247525" cy="594360"/>
+          </a:xfrm>
+          <a:prstGeom prst="rect">
+            <a:avLst/>
+          </a:prstGeom>
+        </p:spPr>
+      </p:pic>
       <p:sp>
         <p:nvSpPr>
           <p:cNvPr id="13" name="TextBox 12"/>
@@ -37856,7 +37035,7 @@
         </p:nvSpPr>
         <p:spPr>
           <a:xfrm>
-            <a:off x="822960" y="3977639"/>
+            <a:off x="822960" y="4206240"/>
             <a:ext cx="5303520" cy="274320"/>
           </a:xfrm>
           <a:prstGeom prst="rect">
@@ -37893,7 +37072,7 @@
         </p:nvSpPr>
         <p:spPr>
           <a:xfrm>
-            <a:off x="548640" y="4498848"/>
+            <a:off x="548640" y="4590288"/>
             <a:ext cx="320040" cy="384048"/>
           </a:xfrm>
           <a:prstGeom prst="rect">
@@ -37930,7 +37109,7 @@
         </p:nvSpPr>
         <p:spPr>
           <a:xfrm>
-            <a:off x="914400" y="4498848"/>
+            <a:off x="914400" y="4590288"/>
             <a:ext cx="4754879" cy="384048"/>
           </a:xfrm>
           <a:prstGeom prst="rect">
@@ -37967,7 +37146,7 @@
         </p:nvSpPr>
         <p:spPr>
           <a:xfrm>
-            <a:off x="548640" y="4919472"/>
+            <a:off x="548640" y="5010912"/>
             <a:ext cx="320040" cy="384048"/>
           </a:xfrm>
           <a:prstGeom prst="rect">
@@ -38004,7 +37183,7 @@
         </p:nvSpPr>
         <p:spPr>
           <a:xfrm>
-            <a:off x="914400" y="4919472"/>
+            <a:off x="914400" y="5010912"/>
             <a:ext cx="4754879" cy="384048"/>
           </a:xfrm>
           <a:prstGeom prst="rect">
@@ -38088,7 +37267,7 @@
           <p:nvPr/>
         </p:nvPicPr>
         <p:blipFill>
-          <a:blip r:embed="rId3"/>
+          <a:blip r:embed="rId4"/>
           <a:stretch>
             <a:fillRect/>
           </a:stretch>
@@ -43576,7 +42755,7 @@
         <p:spPr>
           <a:xfrm>
             <a:off x="548640" y="2743200"/>
-            <a:ext cx="10972800" cy="1051560"/>
+            <a:ext cx="10972800" cy="1417320"/>
           </a:xfrm>
           <a:prstGeom prst="roundRect">
             <a:avLst>
@@ -43613,16 +42792,40 @@
           </a:p>
         </p:txBody>
       </p:sp>
-      <p:sp>
-        <p:nvSpPr>
-          <p:cNvPr id="11" name="TextBox 10"/>
-          <p:cNvSpPr txBox="1"/>
-          <p:nvPr/>
-        </p:nvSpPr>
-        <p:spPr>
-          <a:xfrm>
-            <a:off x="914400" y="2880360"/>
-            <a:ext cx="10241280" cy="457200"/>
+      <p:pic>
+        <p:nvPicPr>
+          <p:cNvPr id="11" name="Picture 10" descr="f-86c39339596ce90b.png"/>
+          <p:cNvPicPr>
+            <a:picLocks noChangeAspect="1"/>
+          </p:cNvPicPr>
+          <p:nvPr/>
+        </p:nvPicPr>
+        <p:blipFill>
+          <a:blip r:embed="rId3"/>
+          <a:stretch>
+            <a:fillRect/>
+          </a:stretch>
+        </p:blipFill>
+        <p:spPr>
+          <a:xfrm>
+            <a:off x="836130699846" y="2608717363200"/>
+            <a:ext cx="3561587" cy="868680"/>
+          </a:xfrm>
+          <a:prstGeom prst="rect">
+            <a:avLst/>
+          </a:prstGeom>
+        </p:spPr>
+      </p:pic>
+      <p:sp>
+        <p:nvSpPr>
+          <p:cNvPr id="12" name="TextBox 11"/>
+          <p:cNvSpPr txBox="1"/>
+          <p:nvPr/>
+        </p:nvSpPr>
+        <p:spPr>
+          <a:xfrm>
+            <a:off x="914400" y="3840480"/>
+            <a:ext cx="10241280" cy="256032"/>
           </a:xfrm>
           <a:prstGeom prst="rect">
             <a:avLst/>
@@ -43637,87 +42840,6 @@
           <a:p>
             <a:pPr algn="ctr"/>
             <a:r>
-              <a:rPr sz="2600" b="1">
-                <a:solidFill>
-                  <a:srgbClr val="5234B7"/>
-                </a:solidFill>
-                <a:latin typeface="Helvetica Neue"/>
-                <a:ea typeface="Helvetica Neue"/>
-                <a:cs typeface="Helvetica Neue"/>
-              </a:rPr>
-              <a:t>MSE(S) = (1 / |S|) Σ</a:t>
-            </a:r>
-            <a:r>
-              <a:rPr sz="2200" b="1" baseline="-25000">
-                <a:solidFill>
-                  <a:srgbClr val="5234B7"/>
-                </a:solidFill>
-                <a:latin typeface="Helvetica Neue"/>
-                <a:ea typeface="Helvetica Neue"/>
-                <a:cs typeface="Helvetica Neue"/>
-              </a:rPr>
-              <a:t>i ∈ S</a:t>
-            </a:r>
-            <a:r>
-              <a:rPr sz="2600" b="1">
-                <a:solidFill>
-                  <a:srgbClr val="5234B7"/>
-                </a:solidFill>
-                <a:latin typeface="Helvetica Neue"/>
-                <a:ea typeface="Helvetica Neue"/>
-                <a:cs typeface="Helvetica Neue"/>
-              </a:rPr>
-              <a:t> (y</a:t>
-            </a:r>
-            <a:r>
-              <a:rPr sz="2200" b="1" baseline="-25000">
-                <a:solidFill>
-                  <a:srgbClr val="5234B7"/>
-                </a:solidFill>
-                <a:latin typeface="Helvetica Neue"/>
-                <a:ea typeface="Helvetica Neue"/>
-                <a:cs typeface="Helvetica Neue"/>
-              </a:rPr>
-              <a:t>i</a:t>
-            </a:r>
-            <a:r>
-              <a:rPr sz="2600" b="1">
-                <a:solidFill>
-                  <a:srgbClr val="5234B7"/>
-                </a:solidFill>
-                <a:latin typeface="Helvetica Neue"/>
-                <a:ea typeface="Helvetica Neue"/>
-                <a:cs typeface="Helvetica Neue"/>
-              </a:rPr>
-              <a:t> − ȳ_S)²</a:t>
-            </a:r>
-          </a:p>
-        </p:txBody>
-      </p:sp>
-      <p:sp>
-        <p:nvSpPr>
-          <p:cNvPr id="12" name="TextBox 11"/>
-          <p:cNvSpPr txBox="1"/>
-          <p:nvPr/>
-        </p:nvSpPr>
-        <p:spPr>
-          <a:xfrm>
-            <a:off x="914400" y="3474719"/>
-            <a:ext cx="10241280" cy="256032"/>
-          </a:xfrm>
-          <a:prstGeom prst="rect">
-            <a:avLst/>
-          </a:prstGeom>
-          <a:noFill/>
-        </p:spPr>
-        <p:txBody>
-          <a:bodyPr wrap="square" anchor="t">
-            <a:spAutoFit/>
-          </a:bodyPr>
-          <a:lstStyle/>
-          <a:p>
-            <a:pPr algn="ctr"/>
-            <a:r>
               <a:rPr sz="1200" b="0">
                 <a:solidFill>
                   <a:srgbClr val="5A5470"/>
@@ -43739,7 +42861,7 @@
         </p:nvSpPr>
         <p:spPr>
           <a:xfrm>
-            <a:off x="548640" y="3904488"/>
+            <a:off x="548640" y="4270248"/>
             <a:ext cx="320040" cy="384048"/>
           </a:xfrm>
           <a:prstGeom prst="rect">
@@ -43776,7 +42898,7 @@
         </p:nvSpPr>
         <p:spPr>
           <a:xfrm>
-            <a:off x="914400" y="3904488"/>
+            <a:off x="914400" y="4270248"/>
             <a:ext cx="9875519" cy="384048"/>
           </a:xfrm>
           <a:prstGeom prst="rect">
@@ -43813,7 +42935,7 @@
         </p:nvSpPr>
         <p:spPr>
           <a:xfrm>
-            <a:off x="548640" y="4416552"/>
+            <a:off x="548640" y="4782312"/>
             <a:ext cx="320040" cy="384048"/>
           </a:xfrm>
           <a:prstGeom prst="rect">
@@ -43850,7 +42972,7 @@
         </p:nvSpPr>
         <p:spPr>
           <a:xfrm>
-            <a:off x="914400" y="4416552"/>
+            <a:off x="914400" y="4782312"/>
             <a:ext cx="9875519" cy="384048"/>
           </a:xfrm>
           <a:prstGeom prst="rect">
@@ -44338,7 +43460,7 @@
         <p:spPr>
           <a:xfrm>
             <a:off x="548640" y="2743200"/>
-            <a:ext cx="10972800" cy="1051560"/>
+            <a:ext cx="10972800" cy="1417320"/>
           </a:xfrm>
           <a:prstGeom prst="roundRect">
             <a:avLst>
@@ -44375,16 +43497,40 @@
           </a:p>
         </p:txBody>
       </p:sp>
-      <p:sp>
-        <p:nvSpPr>
-          <p:cNvPr id="11" name="TextBox 10"/>
-          <p:cNvSpPr txBox="1"/>
-          <p:nvPr/>
-        </p:nvSpPr>
-        <p:spPr>
-          <a:xfrm>
-            <a:off x="914400" y="2880360"/>
-            <a:ext cx="10241280" cy="457200"/>
+      <p:pic>
+        <p:nvPicPr>
+          <p:cNvPr id="11" name="Picture 10" descr="f-75deffe401c90517.png"/>
+          <p:cNvPicPr>
+            <a:picLocks noChangeAspect="1"/>
+          </p:cNvPicPr>
+          <p:nvPr/>
+        </p:nvPicPr>
+        <p:blipFill>
+          <a:blip r:embed="rId3"/>
+          <a:stretch>
+            <a:fillRect/>
+          </a:stretch>
+        </p:blipFill>
+        <p:spPr>
+          <a:xfrm>
+            <a:off x="836127853042" y="2608717363200"/>
+            <a:ext cx="9255195" cy="868679"/>
+          </a:xfrm>
+          <a:prstGeom prst="rect">
+            <a:avLst/>
+          </a:prstGeom>
+        </p:spPr>
+      </p:pic>
+      <p:sp>
+        <p:nvSpPr>
+          <p:cNvPr id="12" name="TextBox 11"/>
+          <p:cNvSpPr txBox="1"/>
+          <p:nvPr/>
+        </p:nvSpPr>
+        <p:spPr>
+          <a:xfrm>
+            <a:off x="914400" y="3840480"/>
+            <a:ext cx="10241280" cy="256032"/>
           </a:xfrm>
           <a:prstGeom prst="rect">
             <a:avLst/>
@@ -44399,43 +43545,6 @@
           <a:p>
             <a:pPr algn="ctr"/>
             <a:r>
-              <a:rPr sz="2600" b="1">
-                <a:solidFill>
-                  <a:srgbClr val="5234B7"/>
-                </a:solidFill>
-                <a:latin typeface="Helvetica Neue"/>
-                <a:ea typeface="Helvetica Neue"/>
-                <a:cs typeface="Helvetica Neue"/>
-              </a:rPr>
-              <a:t>MSE_split = (|S_L|/|S|) MSE(S_L) + (|S_R|/|S|) MSE(S_R)</a:t>
-            </a:r>
-          </a:p>
-        </p:txBody>
-      </p:sp>
-      <p:sp>
-        <p:nvSpPr>
-          <p:cNvPr id="12" name="TextBox 11"/>
-          <p:cNvSpPr txBox="1"/>
-          <p:nvPr/>
-        </p:nvSpPr>
-        <p:spPr>
-          <a:xfrm>
-            <a:off x="914400" y="3474719"/>
-            <a:ext cx="10241280" cy="256032"/>
-          </a:xfrm>
-          <a:prstGeom prst="rect">
-            <a:avLst/>
-          </a:prstGeom>
-          <a:noFill/>
-        </p:spPr>
-        <p:txBody>
-          <a:bodyPr wrap="square" anchor="t">
-            <a:spAutoFit/>
-          </a:bodyPr>
-          <a:lstStyle/>
-          <a:p>
-            <a:pPr algn="ctr"/>
-            <a:r>
               <a:rPr sz="1200" b="0">
                 <a:solidFill>
                   <a:srgbClr val="5A5470"/>
@@ -44457,7 +43566,7 @@
         </p:nvSpPr>
         <p:spPr>
           <a:xfrm>
-            <a:off x="548640" y="3904488"/>
+            <a:off x="548640" y="4270248"/>
             <a:ext cx="320040" cy="384048"/>
           </a:xfrm>
           <a:prstGeom prst="rect">
@@ -44494,7 +43603,7 @@
         </p:nvSpPr>
         <p:spPr>
           <a:xfrm>
-            <a:off x="914400" y="3904488"/>
+            <a:off x="914400" y="4270248"/>
             <a:ext cx="9875519" cy="384048"/>
           </a:xfrm>
           <a:prstGeom prst="rect">
@@ -44531,7 +43640,7 @@
         </p:nvSpPr>
         <p:spPr>
           <a:xfrm>
-            <a:off x="548640" y="4416552"/>
+            <a:off x="548640" y="4782312"/>
             <a:ext cx="320040" cy="384048"/>
           </a:xfrm>
           <a:prstGeom prst="rect">
@@ -44568,7 +43677,7 @@
         </p:nvSpPr>
         <p:spPr>
           <a:xfrm>
-            <a:off x="914400" y="4416552"/>
+            <a:off x="914400" y="4782312"/>
             <a:ext cx="9875519" cy="384048"/>
           </a:xfrm>
           <a:prstGeom prst="rect">
@@ -45056,7 +44165,7 @@
         <p:spPr>
           <a:xfrm>
             <a:off x="548640" y="2743200"/>
-            <a:ext cx="10972800" cy="1051560"/>
+            <a:ext cx="10972800" cy="1417320"/>
           </a:xfrm>
           <a:prstGeom prst="roundRect">
             <a:avLst>
@@ -45093,16 +44202,40 @@
           </a:p>
         </p:txBody>
       </p:sp>
-      <p:sp>
-        <p:nvSpPr>
-          <p:cNvPr id="11" name="TextBox 10"/>
-          <p:cNvSpPr txBox="1"/>
-          <p:nvPr/>
-        </p:nvSpPr>
-        <p:spPr>
-          <a:xfrm>
-            <a:off x="914400" y="2880360"/>
-            <a:ext cx="10241280" cy="457200"/>
+      <p:pic>
+        <p:nvPicPr>
+          <p:cNvPr id="11" name="Picture 10" descr="f-7c6c7fb19faf2870.png"/>
+          <p:cNvPicPr>
+            <a:picLocks noChangeAspect="1"/>
+          </p:cNvPicPr>
+          <p:nvPr/>
+        </p:nvPicPr>
+        <p:blipFill>
+          <a:blip r:embed="rId3"/>
+          <a:stretch>
+            <a:fillRect/>
+          </a:stretch>
+        </p:blipFill>
+        <p:spPr>
+          <a:xfrm>
+            <a:off x="836131134030" y="2608717363200"/>
+            <a:ext cx="2693219" cy="868680"/>
+          </a:xfrm>
+          <a:prstGeom prst="rect">
+            <a:avLst/>
+          </a:prstGeom>
+        </p:spPr>
+      </p:pic>
+      <p:sp>
+        <p:nvSpPr>
+          <p:cNvPr id="12" name="TextBox 11"/>
+          <p:cNvSpPr txBox="1"/>
+          <p:nvPr/>
+        </p:nvSpPr>
+        <p:spPr>
+          <a:xfrm>
+            <a:off x="914400" y="3840480"/>
+            <a:ext cx="10241280" cy="256032"/>
           </a:xfrm>
           <a:prstGeom prst="rect">
             <a:avLst/>
@@ -45117,76 +44250,6 @@
           <a:p>
             <a:pPr algn="ctr"/>
             <a:r>
-              <a:rPr sz="2600" b="1">
-                <a:solidFill>
-                  <a:srgbClr val="5234B7"/>
-                </a:solidFill>
-                <a:latin typeface="Helvetica Neue"/>
-                <a:ea typeface="Helvetica Neue"/>
-                <a:cs typeface="Helvetica Neue"/>
-              </a:rPr>
-              <a:t>ŷ_leaf = (1 / |S_leaf|) Σ</a:t>
-            </a:r>
-            <a:r>
-              <a:rPr sz="2200" b="1" baseline="-25000">
-                <a:solidFill>
-                  <a:srgbClr val="5234B7"/>
-                </a:solidFill>
-                <a:latin typeface="Helvetica Neue"/>
-                <a:ea typeface="Helvetica Neue"/>
-                <a:cs typeface="Helvetica Neue"/>
-              </a:rPr>
-              <a:t>i ∈ S_leaf</a:t>
-            </a:r>
-            <a:r>
-              <a:rPr sz="2600" b="1">
-                <a:solidFill>
-                  <a:srgbClr val="5234B7"/>
-                </a:solidFill>
-                <a:latin typeface="Helvetica Neue"/>
-                <a:ea typeface="Helvetica Neue"/>
-                <a:cs typeface="Helvetica Neue"/>
-              </a:rPr>
-              <a:t> y</a:t>
-            </a:r>
-            <a:r>
-              <a:rPr sz="2200" b="1" baseline="-25000">
-                <a:solidFill>
-                  <a:srgbClr val="5234B7"/>
-                </a:solidFill>
-                <a:latin typeface="Helvetica Neue"/>
-                <a:ea typeface="Helvetica Neue"/>
-                <a:cs typeface="Helvetica Neue"/>
-              </a:rPr>
-              <a:t>i</a:t>
-            </a:r>
-          </a:p>
-        </p:txBody>
-      </p:sp>
-      <p:sp>
-        <p:nvSpPr>
-          <p:cNvPr id="12" name="TextBox 11"/>
-          <p:cNvSpPr txBox="1"/>
-          <p:nvPr/>
-        </p:nvSpPr>
-        <p:spPr>
-          <a:xfrm>
-            <a:off x="914400" y="3474719"/>
-            <a:ext cx="10241280" cy="256032"/>
-          </a:xfrm>
-          <a:prstGeom prst="rect">
-            <a:avLst/>
-          </a:prstGeom>
-          <a:noFill/>
-        </p:spPr>
-        <p:txBody>
-          <a:bodyPr wrap="square" anchor="t">
-            <a:spAutoFit/>
-          </a:bodyPr>
-          <a:lstStyle/>
-          <a:p>
-            <a:pPr algn="ctr"/>
-            <a:r>
               <a:rPr sz="1200" b="0">
                 <a:solidFill>
                   <a:srgbClr val="5A5470"/>
@@ -45208,7 +44271,7 @@
         </p:nvSpPr>
         <p:spPr>
           <a:xfrm>
-            <a:off x="548640" y="3904488"/>
+            <a:off x="548640" y="4270248"/>
             <a:ext cx="320040" cy="384048"/>
           </a:xfrm>
           <a:prstGeom prst="rect">
@@ -45245,7 +44308,7 @@
         </p:nvSpPr>
         <p:spPr>
           <a:xfrm>
-            <a:off x="914400" y="3904488"/>
+            <a:off x="914400" y="4270248"/>
             <a:ext cx="9875519" cy="384048"/>
           </a:xfrm>
           <a:prstGeom prst="rect">
@@ -45282,7 +44345,7 @@
         </p:nvSpPr>
         <p:spPr>
           <a:xfrm>
-            <a:off x="548640" y="4416552"/>
+            <a:off x="548640" y="4782312"/>
             <a:ext cx="320040" cy="384048"/>
           </a:xfrm>
           <a:prstGeom prst="rect">
@@ -45319,7 +44382,7 @@
         </p:nvSpPr>
         <p:spPr>
           <a:xfrm>
-            <a:off x="914400" y="4416552"/>
+            <a:off x="914400" y="4782312"/>
             <a:ext cx="9875519" cy="384048"/>
           </a:xfrm>
           <a:prstGeom prst="rect">
@@ -45807,7 +44870,7 @@
         <p:spPr>
           <a:xfrm>
             <a:off x="548640" y="2743200"/>
-            <a:ext cx="10972800" cy="1051560"/>
+            <a:ext cx="10972800" cy="1143000"/>
           </a:xfrm>
           <a:prstGeom prst="roundRect">
             <a:avLst>
@@ -45844,43 +44907,30 @@
           </a:p>
         </p:txBody>
       </p:sp>
-      <p:sp>
-        <p:nvSpPr>
-          <p:cNvPr id="11" name="TextBox 10"/>
-          <p:cNvSpPr txBox="1"/>
-          <p:nvPr/>
-        </p:nvSpPr>
-        <p:spPr>
-          <a:xfrm>
-            <a:off x="914400" y="2880360"/>
-            <a:ext cx="10241280" cy="457200"/>
-          </a:xfrm>
-          <a:prstGeom prst="rect">
-            <a:avLst/>
-          </a:prstGeom>
-          <a:noFill/>
-        </p:spPr>
-        <p:txBody>
-          <a:bodyPr wrap="square" anchor="t">
-            <a:spAutoFit/>
-          </a:bodyPr>
-          <a:lstStyle/>
-          <a:p>
-            <a:pPr algn="ctr"/>
-            <a:r>
-              <a:rPr sz="2600" b="1">
-                <a:solidFill>
-                  <a:srgbClr val="5234B7"/>
-                </a:solidFill>
-                <a:latin typeface="Helvetica Neue"/>
-                <a:ea typeface="Helvetica Neue"/>
-                <a:cs typeface="Helvetica Neue"/>
-              </a:rPr>
-              <a:t>y = 40 + 5x</a:t>
-            </a:r>
-          </a:p>
-        </p:txBody>
-      </p:sp>
+      <p:pic>
+        <p:nvPicPr>
+          <p:cNvPr id="11" name="Picture 10" descr="f-7b750c2b645bb008.png"/>
+          <p:cNvPicPr>
+            <a:picLocks noChangeAspect="1"/>
+          </p:cNvPicPr>
+          <p:nvPr/>
+        </p:nvPicPr>
+        <p:blipFill>
+          <a:blip r:embed="rId3"/>
+          <a:stretch>
+            <a:fillRect/>
+          </a:stretch>
+        </p:blipFill>
+        <p:spPr>
+          <a:xfrm>
+            <a:off x="836131313643" y="2608717363200"/>
+            <a:ext cx="2333993" cy="640080"/>
+          </a:xfrm>
+          <a:prstGeom prst="rect">
+            <a:avLst/>
+          </a:prstGeom>
+        </p:spPr>
+      </p:pic>
       <p:sp>
         <p:nvSpPr>
           <p:cNvPr id="12" name="TextBox 11"/>
@@ -45889,7 +44939,7 @@
         </p:nvSpPr>
         <p:spPr>
           <a:xfrm>
-            <a:off x="548640" y="3904488"/>
+            <a:off x="548640" y="3995928"/>
             <a:ext cx="320040" cy="384048"/>
           </a:xfrm>
           <a:prstGeom prst="rect">
@@ -45926,7 +44976,7 @@
         </p:nvSpPr>
         <p:spPr>
           <a:xfrm>
-            <a:off x="914400" y="3904488"/>
+            <a:off x="914400" y="3995928"/>
             <a:ext cx="9875519" cy="384048"/>
           </a:xfrm>
           <a:prstGeom prst="rect">
@@ -45963,7 +45013,7 @@
         </p:nvSpPr>
         <p:spPr>
           <a:xfrm>
-            <a:off x="548640" y="4325112"/>
+            <a:off x="548640" y="4416552"/>
             <a:ext cx="320040" cy="384048"/>
           </a:xfrm>
           <a:prstGeom prst="rect">
@@ -46000,7 +45050,7 @@
         </p:nvSpPr>
         <p:spPr>
           <a:xfrm>
-            <a:off x="914400" y="4325112"/>
+            <a:off x="914400" y="4416552"/>
             <a:ext cx="9875519" cy="384048"/>
           </a:xfrm>
           <a:prstGeom prst="rect">
@@ -46037,7 +45087,7 @@
         </p:nvSpPr>
         <p:spPr>
           <a:xfrm>
-            <a:off x="548640" y="4745736"/>
+            <a:off x="548640" y="4837176"/>
             <a:ext cx="320040" cy="384048"/>
           </a:xfrm>
           <a:prstGeom prst="rect">
@@ -46074,7 +45124,7 @@
         </p:nvSpPr>
         <p:spPr>
           <a:xfrm>
-            <a:off x="914400" y="4745736"/>
+            <a:off x="914400" y="4837176"/>
             <a:ext cx="9875519" cy="384048"/>
           </a:xfrm>
           <a:prstGeom prst="rect">
@@ -48806,7 +47856,7 @@
         <p:spPr>
           <a:xfrm>
             <a:off x="548640" y="3246120"/>
-            <a:ext cx="5760720" cy="1143000"/>
+            <a:ext cx="5760720" cy="1508760"/>
           </a:xfrm>
           <a:prstGeom prst="roundRect">
             <a:avLst>
@@ -48880,43 +47930,30 @@
           </a:p>
         </p:txBody>
       </p:sp>
-      <p:sp>
-        <p:nvSpPr>
-          <p:cNvPr id="12" name="TextBox 11"/>
-          <p:cNvSpPr txBox="1"/>
-          <p:nvPr/>
-        </p:nvSpPr>
-        <p:spPr>
-          <a:xfrm>
-            <a:off x="822960" y="3566160"/>
-            <a:ext cx="5303520" cy="365760"/>
-          </a:xfrm>
-          <a:prstGeom prst="rect">
-            <a:avLst/>
-          </a:prstGeom>
-          <a:noFill/>
-        </p:spPr>
-        <p:txBody>
-          <a:bodyPr wrap="square" anchor="t">
-            <a:spAutoFit/>
-          </a:bodyPr>
-          <a:lstStyle/>
-          <a:p>
-            <a:pPr algn="l"/>
-            <a:r>
-              <a:rPr sz="2000" b="1">
-                <a:solidFill>
-                  <a:srgbClr val="5234B7"/>
-                </a:solidFill>
-                <a:latin typeface="Helvetica Neue"/>
-                <a:ea typeface="Helvetica Neue"/>
-                <a:cs typeface="Helvetica Neue"/>
-              </a:rPr>
-              <a:t>ŷ_RF(x) = (1 / N_trees) Σ ŷ_t(x)</a:t>
-            </a:r>
-          </a:p>
-        </p:txBody>
-      </p:sp>
+      <p:pic>
+        <p:nvPicPr>
+          <p:cNvPr id="12" name="Picture 11" descr="f-65290eea2f8b52b6.png"/>
+          <p:cNvPicPr>
+            <a:picLocks noChangeAspect="1"/>
+          </p:cNvPicPr>
+          <p:nvPr/>
+        </p:nvPicPr>
+        <p:blipFill>
+          <a:blip r:embed="rId3"/>
+          <a:stretch>
+            <a:fillRect/>
+          </a:stretch>
+        </p:blipFill>
+        <p:spPr>
+          <a:xfrm>
+            <a:off x="752515962219" y="3566160"/>
+            <a:ext cx="2627080" cy="868680"/>
+          </a:xfrm>
+          <a:prstGeom prst="rect">
+            <a:avLst/>
+          </a:prstGeom>
+        </p:spPr>
+      </p:pic>
       <p:sp>
         <p:nvSpPr>
           <p:cNvPr id="13" name="TextBox 12"/>
@@ -48925,7 +47962,7 @@
         </p:nvSpPr>
         <p:spPr>
           <a:xfrm>
-            <a:off x="822960" y="3977639"/>
+            <a:off x="822960" y="4480559"/>
             <a:ext cx="5303520" cy="274320"/>
           </a:xfrm>
           <a:prstGeom prst="rect">
@@ -48962,7 +47999,7 @@
         </p:nvSpPr>
         <p:spPr>
           <a:xfrm>
-            <a:off x="548640" y="4498848"/>
+            <a:off x="548640" y="4864607"/>
             <a:ext cx="320040" cy="384048"/>
           </a:xfrm>
           <a:prstGeom prst="rect">
@@ -48999,7 +48036,7 @@
         </p:nvSpPr>
         <p:spPr>
           <a:xfrm>
-            <a:off x="914400" y="4498848"/>
+            <a:off x="914400" y="4864607"/>
             <a:ext cx="4754879" cy="384048"/>
           </a:xfrm>
           <a:prstGeom prst="rect">
@@ -49036,7 +48073,7 @@
         </p:nvSpPr>
         <p:spPr>
           <a:xfrm>
-            <a:off x="548640" y="4919472"/>
+            <a:off x="548640" y="5285231"/>
             <a:ext cx="320040" cy="384048"/>
           </a:xfrm>
           <a:prstGeom prst="rect">
@@ -49073,7 +48110,7 @@
         </p:nvSpPr>
         <p:spPr>
           <a:xfrm>
-            <a:off x="914400" y="4919472"/>
+            <a:off x="914400" y="5285231"/>
             <a:ext cx="4754879" cy="384048"/>
           </a:xfrm>
           <a:prstGeom prst="rect">
@@ -49157,7 +48194,7 @@
           <p:nvPr/>
         </p:nvPicPr>
         <p:blipFill>
-          <a:blip r:embed="rId3"/>
+          <a:blip r:embed="rId4"/>
           <a:stretch>
             <a:fillRect/>
           </a:stretch>
@@ -52142,7 +51179,7 @@
         <p:spPr>
           <a:xfrm>
             <a:off x="548640" y="3246120"/>
-            <a:ext cx="5760720" cy="1143000"/>
+            <a:ext cx="5760720" cy="1508760"/>
           </a:xfrm>
           <a:prstGeom prst="roundRect">
             <a:avLst>
@@ -52216,87 +51253,30 @@
           </a:p>
         </p:txBody>
       </p:sp>
-      <p:sp>
-        <p:nvSpPr>
-          <p:cNvPr id="12" name="TextBox 11"/>
-          <p:cNvSpPr txBox="1"/>
-          <p:nvPr/>
-        </p:nvSpPr>
-        <p:spPr>
-          <a:xfrm>
-            <a:off x="822960" y="3566160"/>
-            <a:ext cx="5303520" cy="365760"/>
-          </a:xfrm>
-          <a:prstGeom prst="rect">
-            <a:avLst/>
-          </a:prstGeom>
-          <a:noFill/>
-        </p:spPr>
-        <p:txBody>
-          <a:bodyPr wrap="square" anchor="t">
-            <a:spAutoFit/>
-          </a:bodyPr>
-          <a:lstStyle/>
-          <a:p>
-            <a:pPr algn="l"/>
-            <a:r>
-              <a:rPr sz="2000" b="1">
-                <a:solidFill>
-                  <a:srgbClr val="5234B7"/>
-                </a:solidFill>
-                <a:latin typeface="Helvetica Neue"/>
-                <a:ea typeface="Helvetica Neue"/>
-                <a:cs typeface="Helvetica Neue"/>
-              </a:rPr>
-              <a:t>min_β  Σ (y</a:t>
-            </a:r>
-            <a:r>
-              <a:rPr sz="1600" b="1" baseline="-25000">
-                <a:solidFill>
-                  <a:srgbClr val="5234B7"/>
-                </a:solidFill>
-                <a:latin typeface="Helvetica Neue"/>
-                <a:ea typeface="Helvetica Neue"/>
-                <a:cs typeface="Helvetica Neue"/>
-              </a:rPr>
-              <a:t>i</a:t>
-            </a:r>
-            <a:r>
-              <a:rPr sz="2000" b="1">
-                <a:solidFill>
-                  <a:srgbClr val="5234B7"/>
-                </a:solidFill>
-                <a:latin typeface="Helvetica Neue"/>
-                <a:ea typeface="Helvetica Neue"/>
-                <a:cs typeface="Helvetica Neue"/>
-              </a:rPr>
-              <a:t> − ŷ</a:t>
-            </a:r>
-            <a:r>
-              <a:rPr sz="1600" b="1" baseline="-25000">
-                <a:solidFill>
-                  <a:srgbClr val="5234B7"/>
-                </a:solidFill>
-                <a:latin typeface="Helvetica Neue"/>
-                <a:ea typeface="Helvetica Neue"/>
-                <a:cs typeface="Helvetica Neue"/>
-              </a:rPr>
-              <a:t>i</a:t>
-            </a:r>
-            <a:r>
-              <a:rPr sz="2000" b="1">
-                <a:solidFill>
-                  <a:srgbClr val="5234B7"/>
-                </a:solidFill>
-                <a:latin typeface="Helvetica Neue"/>
-                <a:ea typeface="Helvetica Neue"/>
-                <a:cs typeface="Helvetica Neue"/>
-              </a:rPr>
-              <a:t>)² + λ · Ω(β)</a:t>
-            </a:r>
-          </a:p>
-        </p:txBody>
-      </p:sp>
+      <p:pic>
+        <p:nvPicPr>
+          <p:cNvPr id="12" name="Picture 11" descr="f-7d4bdcb26121a906.png"/>
+          <p:cNvPicPr>
+            <a:picLocks noChangeAspect="1"/>
+          </p:cNvPicPr>
+          <p:nvPr/>
+        </p:nvPicPr>
+        <p:blipFill>
+          <a:blip r:embed="rId3"/>
+          <a:stretch>
+            <a:fillRect/>
+          </a:stretch>
+        </p:blipFill>
+        <p:spPr>
+          <a:xfrm>
+            <a:off x="752515418338" y="3566160"/>
+            <a:ext cx="3714842" cy="868680"/>
+          </a:xfrm>
+          <a:prstGeom prst="rect">
+            <a:avLst/>
+          </a:prstGeom>
+        </p:spPr>
+      </p:pic>
       <p:sp>
         <p:nvSpPr>
           <p:cNvPr id="13" name="TextBox 12"/>
@@ -52305,7 +51285,7 @@
         </p:nvSpPr>
         <p:spPr>
           <a:xfrm>
-            <a:off x="822960" y="3977639"/>
+            <a:off x="822960" y="4480559"/>
             <a:ext cx="5303520" cy="274320"/>
           </a:xfrm>
           <a:prstGeom prst="rect">
@@ -52342,7 +51322,7 @@
         </p:nvSpPr>
         <p:spPr>
           <a:xfrm>
-            <a:off x="548640" y="4498848"/>
+            <a:off x="548640" y="4864607"/>
             <a:ext cx="320040" cy="384048"/>
           </a:xfrm>
           <a:prstGeom prst="rect">
@@ -52379,7 +51359,7 @@
         </p:nvSpPr>
         <p:spPr>
           <a:xfrm>
-            <a:off x="914400" y="4498848"/>
+            <a:off x="914400" y="4864607"/>
             <a:ext cx="4754879" cy="384048"/>
           </a:xfrm>
           <a:prstGeom prst="rect">
@@ -52416,7 +51396,7 @@
         </p:nvSpPr>
         <p:spPr>
           <a:xfrm>
-            <a:off x="548640" y="4919472"/>
+            <a:off x="548640" y="5285231"/>
             <a:ext cx="320040" cy="384048"/>
           </a:xfrm>
           <a:prstGeom prst="rect">
@@ -52453,7 +51433,7 @@
         </p:nvSpPr>
         <p:spPr>
           <a:xfrm>
-            <a:off x="914400" y="4919472"/>
+            <a:off x="914400" y="5285231"/>
             <a:ext cx="4754879" cy="384048"/>
           </a:xfrm>
           <a:prstGeom prst="rect">
@@ -52537,7 +51517,7 @@
           <p:nvPr/>
         </p:nvPicPr>
         <p:blipFill>
-          <a:blip r:embed="rId3"/>
+          <a:blip r:embed="rId4"/>
           <a:stretch>
             <a:fillRect/>
           </a:stretch>
@@ -53048,7 +52028,7 @@
         <p:spPr>
           <a:xfrm>
             <a:off x="548640" y="2743200"/>
-            <a:ext cx="10972800" cy="1051560"/>
+            <a:ext cx="10972800" cy="1143000"/>
           </a:xfrm>
           <a:prstGeom prst="roundRect">
             <a:avLst>
@@ -53085,16 +52065,40 @@
           </a:p>
         </p:txBody>
       </p:sp>
-      <p:sp>
-        <p:nvSpPr>
-          <p:cNvPr id="11" name="TextBox 10"/>
-          <p:cNvSpPr txBox="1"/>
-          <p:nvPr/>
-        </p:nvSpPr>
-        <p:spPr>
-          <a:xfrm>
-            <a:off x="914400" y="2880360"/>
-            <a:ext cx="10241280" cy="457200"/>
+      <p:pic>
+        <p:nvPicPr>
+          <p:cNvPr id="11" name="Picture 10" descr="f-750add5b60d4d415.png"/>
+          <p:cNvPicPr>
+            <a:picLocks noChangeAspect="1"/>
+          </p:cNvPicPr>
+          <p:nvPr/>
+        </p:nvPicPr>
+        <p:blipFill>
+          <a:blip r:embed="rId3"/>
+          <a:stretch>
+            <a:fillRect/>
+          </a:stretch>
+        </p:blipFill>
+        <p:spPr>
+          <a:xfrm>
+            <a:off x="836130943586" y="2608717363200"/>
+            <a:ext cx="3074106" cy="640080"/>
+          </a:xfrm>
+          <a:prstGeom prst="rect">
+            <a:avLst/>
+          </a:prstGeom>
+        </p:spPr>
+      </p:pic>
+      <p:sp>
+        <p:nvSpPr>
+          <p:cNvPr id="12" name="TextBox 11"/>
+          <p:cNvSpPr txBox="1"/>
+          <p:nvPr/>
+        </p:nvSpPr>
+        <p:spPr>
+          <a:xfrm>
+            <a:off x="914400" y="3566160"/>
+            <a:ext cx="10241280" cy="256032"/>
           </a:xfrm>
           <a:prstGeom prst="rect">
             <a:avLst/>
@@ -53109,43 +52113,6 @@
           <a:p>
             <a:pPr algn="ctr"/>
             <a:r>
-              <a:rPr sz="2600" b="1">
-                <a:solidFill>
-                  <a:srgbClr val="5234B7"/>
-                </a:solidFill>
-                <a:latin typeface="Helvetica Neue"/>
-                <a:ea typeface="Helvetica Neue"/>
-                <a:cs typeface="Helvetica Neue"/>
-              </a:rPr>
-              <a:t>min_β  data loss + λ · penalty</a:t>
-            </a:r>
-          </a:p>
-        </p:txBody>
-      </p:sp>
-      <p:sp>
-        <p:nvSpPr>
-          <p:cNvPr id="12" name="TextBox 11"/>
-          <p:cNvSpPr txBox="1"/>
-          <p:nvPr/>
-        </p:nvSpPr>
-        <p:spPr>
-          <a:xfrm>
-            <a:off x="914400" y="3474719"/>
-            <a:ext cx="10241280" cy="256032"/>
-          </a:xfrm>
-          <a:prstGeom prst="rect">
-            <a:avLst/>
-          </a:prstGeom>
-          <a:noFill/>
-        </p:spPr>
-        <p:txBody>
-          <a:bodyPr wrap="square" anchor="t">
-            <a:spAutoFit/>
-          </a:bodyPr>
-          <a:lstStyle/>
-          <a:p>
-            <a:pPr algn="ctr"/>
-            <a:r>
               <a:rPr sz="1200" b="0">
                 <a:solidFill>
                   <a:srgbClr val="5A5470"/>
@@ -53167,7 +52134,7 @@
         </p:nvSpPr>
         <p:spPr>
           <a:xfrm>
-            <a:off x="548640" y="3904488"/>
+            <a:off x="548640" y="3995928"/>
             <a:ext cx="320040" cy="384048"/>
           </a:xfrm>
           <a:prstGeom prst="rect">
@@ -53204,7 +52171,7 @@
         </p:nvSpPr>
         <p:spPr>
           <a:xfrm>
-            <a:off x="914400" y="3904488"/>
+            <a:off x="914400" y="3995928"/>
             <a:ext cx="9875519" cy="384048"/>
           </a:xfrm>
           <a:prstGeom prst="rect">
@@ -53241,7 +52208,7 @@
         </p:nvSpPr>
         <p:spPr>
           <a:xfrm>
-            <a:off x="548640" y="4416552"/>
+            <a:off x="548640" y="4507992"/>
             <a:ext cx="320040" cy="384048"/>
           </a:xfrm>
           <a:prstGeom prst="rect">
@@ -53278,7 +52245,7 @@
         </p:nvSpPr>
         <p:spPr>
           <a:xfrm>
-            <a:off x="914400" y="4416552"/>
+            <a:off x="914400" y="4507992"/>
             <a:ext cx="9875519" cy="384048"/>
           </a:xfrm>
           <a:prstGeom prst="rect">
@@ -55187,7 +54154,7 @@
         <p:spPr>
           <a:xfrm>
             <a:off x="548640" y="2743200"/>
-            <a:ext cx="10972800" cy="1051560"/>
+            <a:ext cx="10972800" cy="1417320"/>
           </a:xfrm>
           <a:prstGeom prst="roundRect">
             <a:avLst>
@@ -55224,16 +54191,40 @@
           </a:p>
         </p:txBody>
       </p:sp>
-      <p:sp>
-        <p:nvSpPr>
-          <p:cNvPr id="11" name="TextBox 10"/>
-          <p:cNvSpPr txBox="1"/>
-          <p:nvPr/>
-        </p:nvSpPr>
-        <p:spPr>
-          <a:xfrm>
-            <a:off x="914400" y="2880360"/>
-            <a:ext cx="10241280" cy="457200"/>
+      <p:pic>
+        <p:nvPicPr>
+          <p:cNvPr id="11" name="Picture 10" descr="f-5347cbd1bc8a1f81.png"/>
+          <p:cNvPicPr>
+            <a:picLocks noChangeAspect="1"/>
+          </p:cNvPicPr>
+          <p:nvPr/>
+        </p:nvPicPr>
+        <p:blipFill>
+          <a:blip r:embed="rId3"/>
+          <a:stretch>
+            <a:fillRect/>
+          </a:stretch>
+        </p:blipFill>
+        <p:spPr>
+          <a:xfrm>
+            <a:off x="836131276494" y="2608717363200"/>
+            <a:ext cx="2408291" cy="868680"/>
+          </a:xfrm>
+          <a:prstGeom prst="rect">
+            <a:avLst/>
+          </a:prstGeom>
+        </p:spPr>
+      </p:pic>
+      <p:sp>
+        <p:nvSpPr>
+          <p:cNvPr id="12" name="TextBox 11"/>
+          <p:cNvSpPr txBox="1"/>
+          <p:nvPr/>
+        </p:nvSpPr>
+        <p:spPr>
+          <a:xfrm>
+            <a:off x="914400" y="3840480"/>
+            <a:ext cx="10241280" cy="256032"/>
           </a:xfrm>
           <a:prstGeom prst="rect">
             <a:avLst/>
@@ -55248,87 +54239,6 @@
           <a:p>
             <a:pPr algn="ctr"/>
             <a:r>
-              <a:rPr sz="2600" b="1">
-                <a:solidFill>
-                  <a:srgbClr val="5234B7"/>
-                </a:solidFill>
-                <a:latin typeface="Helvetica Neue"/>
-                <a:ea typeface="Helvetica Neue"/>
-                <a:cs typeface="Helvetica Neue"/>
-              </a:rPr>
-              <a:t>min_β  Σ (y</a:t>
-            </a:r>
-            <a:r>
-              <a:rPr sz="2200" b="1" baseline="-25000">
-                <a:solidFill>
-                  <a:srgbClr val="5234B7"/>
-                </a:solidFill>
-                <a:latin typeface="Helvetica Neue"/>
-                <a:ea typeface="Helvetica Neue"/>
-                <a:cs typeface="Helvetica Neue"/>
-              </a:rPr>
-              <a:t>i</a:t>
-            </a:r>
-            <a:r>
-              <a:rPr sz="2600" b="1">
-                <a:solidFill>
-                  <a:srgbClr val="5234B7"/>
-                </a:solidFill>
-                <a:latin typeface="Helvetica Neue"/>
-                <a:ea typeface="Helvetica Neue"/>
-                <a:cs typeface="Helvetica Neue"/>
-              </a:rPr>
-              <a:t> − ŷ</a:t>
-            </a:r>
-            <a:r>
-              <a:rPr sz="2200" b="1" baseline="-25000">
-                <a:solidFill>
-                  <a:srgbClr val="5234B7"/>
-                </a:solidFill>
-                <a:latin typeface="Helvetica Neue"/>
-                <a:ea typeface="Helvetica Neue"/>
-                <a:cs typeface="Helvetica Neue"/>
-              </a:rPr>
-              <a:t>i</a:t>
-            </a:r>
-            <a:r>
-              <a:rPr sz="2600" b="1">
-                <a:solidFill>
-                  <a:srgbClr val="5234B7"/>
-                </a:solidFill>
-                <a:latin typeface="Helvetica Neue"/>
-                <a:ea typeface="Helvetica Neue"/>
-                <a:cs typeface="Helvetica Neue"/>
-              </a:rPr>
-              <a:t>)²</a:t>
-            </a:r>
-          </a:p>
-        </p:txBody>
-      </p:sp>
-      <p:sp>
-        <p:nvSpPr>
-          <p:cNvPr id="12" name="TextBox 11"/>
-          <p:cNvSpPr txBox="1"/>
-          <p:nvPr/>
-        </p:nvSpPr>
-        <p:spPr>
-          <a:xfrm>
-            <a:off x="914400" y="3474719"/>
-            <a:ext cx="10241280" cy="256032"/>
-          </a:xfrm>
-          <a:prstGeom prst="rect">
-            <a:avLst/>
-          </a:prstGeom>
-          <a:noFill/>
-        </p:spPr>
-        <p:txBody>
-          <a:bodyPr wrap="square" anchor="t">
-            <a:spAutoFit/>
-          </a:bodyPr>
-          <a:lstStyle/>
-          <a:p>
-            <a:pPr algn="ctr"/>
-            <a:r>
               <a:rPr sz="1200" b="0">
                 <a:solidFill>
                   <a:srgbClr val="5A5470"/>
@@ -55350,7 +54260,7 @@
         </p:nvSpPr>
         <p:spPr>
           <a:xfrm>
-            <a:off x="548640" y="3904488"/>
+            <a:off x="548640" y="4270248"/>
             <a:ext cx="320040" cy="384048"/>
           </a:xfrm>
           <a:prstGeom prst="rect">
@@ -55387,7 +54297,7 @@
         </p:nvSpPr>
         <p:spPr>
           <a:xfrm>
-            <a:off x="914400" y="3904488"/>
+            <a:off x="914400" y="4270248"/>
             <a:ext cx="9875519" cy="384048"/>
           </a:xfrm>
           <a:prstGeom prst="rect">
@@ -55424,7 +54334,7 @@
         </p:nvSpPr>
         <p:spPr>
           <a:xfrm>
-            <a:off x="548640" y="4416552"/>
+            <a:off x="548640" y="4782312"/>
             <a:ext cx="320040" cy="384048"/>
           </a:xfrm>
           <a:prstGeom prst="rect">
@@ -55461,7 +54371,7 @@
         </p:nvSpPr>
         <p:spPr>
           <a:xfrm>
-            <a:off x="914400" y="4416552"/>
+            <a:off x="914400" y="4782312"/>
             <a:ext cx="9875519" cy="384048"/>
           </a:xfrm>
           <a:prstGeom prst="rect">
@@ -55949,7 +54859,7 @@
         <p:spPr>
           <a:xfrm>
             <a:off x="548640" y="2743200"/>
-            <a:ext cx="10972800" cy="1051560"/>
+            <a:ext cx="10972800" cy="1417320"/>
           </a:xfrm>
           <a:prstGeom prst="roundRect">
             <a:avLst>
@@ -55986,16 +54896,40 @@
           </a:p>
         </p:txBody>
       </p:sp>
-      <p:sp>
-        <p:nvSpPr>
-          <p:cNvPr id="11" name="TextBox 10"/>
-          <p:cNvSpPr txBox="1"/>
-          <p:nvPr/>
-        </p:nvSpPr>
-        <p:spPr>
-          <a:xfrm>
-            <a:off x="914400" y="2880360"/>
-            <a:ext cx="10241280" cy="457200"/>
+      <p:pic>
+        <p:nvPicPr>
+          <p:cNvPr id="11" name="Picture 10" descr="f-598338256a37e9ef.png"/>
+          <p:cNvPicPr>
+            <a:picLocks noChangeAspect="1"/>
+          </p:cNvPicPr>
+          <p:nvPr/>
+        </p:nvPicPr>
+        <p:blipFill>
+          <a:blip r:embed="rId3"/>
+          <a:stretch>
+            <a:fillRect/>
+          </a:stretch>
+        </p:blipFill>
+        <p:spPr>
+          <a:xfrm>
+            <a:off x="836130679718" y="2608717363200"/>
+            <a:ext cx="3601843" cy="868680"/>
+          </a:xfrm>
+          <a:prstGeom prst="rect">
+            <a:avLst/>
+          </a:prstGeom>
+        </p:spPr>
+      </p:pic>
+      <p:sp>
+        <p:nvSpPr>
+          <p:cNvPr id="12" name="TextBox 11"/>
+          <p:cNvSpPr txBox="1"/>
+          <p:nvPr/>
+        </p:nvSpPr>
+        <p:spPr>
+          <a:xfrm>
+            <a:off x="914400" y="3840480"/>
+            <a:ext cx="10241280" cy="256032"/>
           </a:xfrm>
           <a:prstGeom prst="rect">
             <a:avLst/>
@@ -56010,87 +54944,6 @@
           <a:p>
             <a:pPr algn="ctr"/>
             <a:r>
-              <a:rPr sz="2600" b="1">
-                <a:solidFill>
-                  <a:srgbClr val="5234B7"/>
-                </a:solidFill>
-                <a:latin typeface="Helvetica Neue"/>
-                <a:ea typeface="Helvetica Neue"/>
-                <a:cs typeface="Helvetica Neue"/>
-              </a:rPr>
-              <a:t>min_β  Σ (y</a:t>
-            </a:r>
-            <a:r>
-              <a:rPr sz="2200" b="1" baseline="-25000">
-                <a:solidFill>
-                  <a:srgbClr val="5234B7"/>
-                </a:solidFill>
-                <a:latin typeface="Helvetica Neue"/>
-                <a:ea typeface="Helvetica Neue"/>
-                <a:cs typeface="Helvetica Neue"/>
-              </a:rPr>
-              <a:t>i</a:t>
-            </a:r>
-            <a:r>
-              <a:rPr sz="2600" b="1">
-                <a:solidFill>
-                  <a:srgbClr val="5234B7"/>
-                </a:solidFill>
-                <a:latin typeface="Helvetica Neue"/>
-                <a:ea typeface="Helvetica Neue"/>
-                <a:cs typeface="Helvetica Neue"/>
-              </a:rPr>
-              <a:t> − ŷ</a:t>
-            </a:r>
-            <a:r>
-              <a:rPr sz="2200" b="1" baseline="-25000">
-                <a:solidFill>
-                  <a:srgbClr val="5234B7"/>
-                </a:solidFill>
-                <a:latin typeface="Helvetica Neue"/>
-                <a:ea typeface="Helvetica Neue"/>
-                <a:cs typeface="Helvetica Neue"/>
-              </a:rPr>
-              <a:t>i</a:t>
-            </a:r>
-            <a:r>
-              <a:rPr sz="2600" b="1">
-                <a:solidFill>
-                  <a:srgbClr val="5234B7"/>
-                </a:solidFill>
-                <a:latin typeface="Helvetica Neue"/>
-                <a:ea typeface="Helvetica Neue"/>
-                <a:cs typeface="Helvetica Neue"/>
-              </a:rPr>
-              <a:t>)² + λ Σ βⱼ²</a:t>
-            </a:r>
-          </a:p>
-        </p:txBody>
-      </p:sp>
-      <p:sp>
-        <p:nvSpPr>
-          <p:cNvPr id="12" name="TextBox 11"/>
-          <p:cNvSpPr txBox="1"/>
-          <p:nvPr/>
-        </p:nvSpPr>
-        <p:spPr>
-          <a:xfrm>
-            <a:off x="914400" y="3474719"/>
-            <a:ext cx="10241280" cy="256032"/>
-          </a:xfrm>
-          <a:prstGeom prst="rect">
-            <a:avLst/>
-          </a:prstGeom>
-          <a:noFill/>
-        </p:spPr>
-        <p:txBody>
-          <a:bodyPr wrap="square" anchor="t">
-            <a:spAutoFit/>
-          </a:bodyPr>
-          <a:lstStyle/>
-          <a:p>
-            <a:pPr algn="ctr"/>
-            <a:r>
               <a:rPr sz="1200" b="0">
                 <a:solidFill>
                   <a:srgbClr val="5A5470"/>
@@ -56112,7 +54965,7 @@
         </p:nvSpPr>
         <p:spPr>
           <a:xfrm>
-            <a:off x="548640" y="3904488"/>
+            <a:off x="548640" y="4270248"/>
             <a:ext cx="320040" cy="384048"/>
           </a:xfrm>
           <a:prstGeom prst="rect">
@@ -56149,7 +55002,7 @@
         </p:nvSpPr>
         <p:spPr>
           <a:xfrm>
-            <a:off x="914400" y="3904488"/>
+            <a:off x="914400" y="4270248"/>
             <a:ext cx="9875519" cy="384048"/>
           </a:xfrm>
           <a:prstGeom prst="rect">
@@ -56186,7 +55039,7 @@
         </p:nvSpPr>
         <p:spPr>
           <a:xfrm>
-            <a:off x="548640" y="4416552"/>
+            <a:off x="548640" y="4782312"/>
             <a:ext cx="320040" cy="384048"/>
           </a:xfrm>
           <a:prstGeom prst="rect">
@@ -56223,7 +55076,7 @@
         </p:nvSpPr>
         <p:spPr>
           <a:xfrm>
-            <a:off x="914400" y="4416552"/>
+            <a:off x="914400" y="4782312"/>
             <a:ext cx="9875519" cy="384048"/>
           </a:xfrm>
           <a:prstGeom prst="rect">
@@ -56711,7 +55564,7 @@
         <p:spPr>
           <a:xfrm>
             <a:off x="548640" y="2743200"/>
-            <a:ext cx="10972800" cy="1051560"/>
+            <a:ext cx="10972800" cy="1417320"/>
           </a:xfrm>
           <a:prstGeom prst="roundRect">
             <a:avLst>
@@ -56748,16 +55601,40 @@
           </a:p>
         </p:txBody>
       </p:sp>
-      <p:sp>
-        <p:nvSpPr>
-          <p:cNvPr id="11" name="TextBox 10"/>
-          <p:cNvSpPr txBox="1"/>
-          <p:nvPr/>
-        </p:nvSpPr>
-        <p:spPr>
-          <a:xfrm>
-            <a:off x="914400" y="2880360"/>
-            <a:ext cx="10241280" cy="457200"/>
+      <p:pic>
+        <p:nvPicPr>
+          <p:cNvPr id="11" name="Picture 10" descr="f-3ef1c094ad07b0e7.png"/>
+          <p:cNvPicPr>
+            <a:picLocks noChangeAspect="1"/>
+          </p:cNvPicPr>
+          <p:nvPr/>
+        </p:nvPicPr>
+        <p:blipFill>
+          <a:blip r:embed="rId3"/>
+          <a:stretch>
+            <a:fillRect/>
+          </a:stretch>
+        </p:blipFill>
+        <p:spPr>
+          <a:xfrm>
+            <a:off x="836130630280" y="2608717363200"/>
+            <a:ext cx="3700718" cy="868680"/>
+          </a:xfrm>
+          <a:prstGeom prst="rect">
+            <a:avLst/>
+          </a:prstGeom>
+        </p:spPr>
+      </p:pic>
+      <p:sp>
+        <p:nvSpPr>
+          <p:cNvPr id="12" name="TextBox 11"/>
+          <p:cNvSpPr txBox="1"/>
+          <p:nvPr/>
+        </p:nvSpPr>
+        <p:spPr>
+          <a:xfrm>
+            <a:off x="914400" y="3840480"/>
+            <a:ext cx="10241280" cy="256032"/>
           </a:xfrm>
           <a:prstGeom prst="rect">
             <a:avLst/>
@@ -56772,87 +55649,6 @@
           <a:p>
             <a:pPr algn="ctr"/>
             <a:r>
-              <a:rPr sz="2600" b="1">
-                <a:solidFill>
-                  <a:srgbClr val="5234B7"/>
-                </a:solidFill>
-                <a:latin typeface="Helvetica Neue"/>
-                <a:ea typeface="Helvetica Neue"/>
-                <a:cs typeface="Helvetica Neue"/>
-              </a:rPr>
-              <a:t>min_β  Σ (y</a:t>
-            </a:r>
-            <a:r>
-              <a:rPr sz="2200" b="1" baseline="-25000">
-                <a:solidFill>
-                  <a:srgbClr val="5234B7"/>
-                </a:solidFill>
-                <a:latin typeface="Helvetica Neue"/>
-                <a:ea typeface="Helvetica Neue"/>
-                <a:cs typeface="Helvetica Neue"/>
-              </a:rPr>
-              <a:t>i</a:t>
-            </a:r>
-            <a:r>
-              <a:rPr sz="2600" b="1">
-                <a:solidFill>
-                  <a:srgbClr val="5234B7"/>
-                </a:solidFill>
-                <a:latin typeface="Helvetica Neue"/>
-                <a:ea typeface="Helvetica Neue"/>
-                <a:cs typeface="Helvetica Neue"/>
-              </a:rPr>
-              <a:t> − ŷ</a:t>
-            </a:r>
-            <a:r>
-              <a:rPr sz="2200" b="1" baseline="-25000">
-                <a:solidFill>
-                  <a:srgbClr val="5234B7"/>
-                </a:solidFill>
-                <a:latin typeface="Helvetica Neue"/>
-                <a:ea typeface="Helvetica Neue"/>
-                <a:cs typeface="Helvetica Neue"/>
-              </a:rPr>
-              <a:t>i</a:t>
-            </a:r>
-            <a:r>
-              <a:rPr sz="2600" b="1">
-                <a:solidFill>
-                  <a:srgbClr val="5234B7"/>
-                </a:solidFill>
-                <a:latin typeface="Helvetica Neue"/>
-                <a:ea typeface="Helvetica Neue"/>
-                <a:cs typeface="Helvetica Neue"/>
-              </a:rPr>
-              <a:t>)² + λ Σ |βⱼ|</a:t>
-            </a:r>
-          </a:p>
-        </p:txBody>
-      </p:sp>
-      <p:sp>
-        <p:nvSpPr>
-          <p:cNvPr id="12" name="TextBox 11"/>
-          <p:cNvSpPr txBox="1"/>
-          <p:nvPr/>
-        </p:nvSpPr>
-        <p:spPr>
-          <a:xfrm>
-            <a:off x="914400" y="3474719"/>
-            <a:ext cx="10241280" cy="256032"/>
-          </a:xfrm>
-          <a:prstGeom prst="rect">
-            <a:avLst/>
-          </a:prstGeom>
-          <a:noFill/>
-        </p:spPr>
-        <p:txBody>
-          <a:bodyPr wrap="square" anchor="t">
-            <a:spAutoFit/>
-          </a:bodyPr>
-          <a:lstStyle/>
-          <a:p>
-            <a:pPr algn="ctr"/>
-            <a:r>
               <a:rPr sz="1200" b="0">
                 <a:solidFill>
                   <a:srgbClr val="5A5470"/>
@@ -56874,7 +55670,7 @@
         </p:nvSpPr>
         <p:spPr>
           <a:xfrm>
-            <a:off x="548640" y="3904488"/>
+            <a:off x="548640" y="4270248"/>
             <a:ext cx="320040" cy="384048"/>
           </a:xfrm>
           <a:prstGeom prst="rect">
@@ -56911,7 +55707,7 @@
         </p:nvSpPr>
         <p:spPr>
           <a:xfrm>
-            <a:off x="914400" y="3904488"/>
+            <a:off x="914400" y="4270248"/>
             <a:ext cx="9875519" cy="384048"/>
           </a:xfrm>
           <a:prstGeom prst="rect">
@@ -56948,7 +55744,7 @@
         </p:nvSpPr>
         <p:spPr>
           <a:xfrm>
-            <a:off x="548640" y="4416552"/>
+            <a:off x="548640" y="4782312"/>
             <a:ext cx="320040" cy="384048"/>
           </a:xfrm>
           <a:prstGeom prst="rect">
@@ -56985,7 +55781,7 @@
         </p:nvSpPr>
         <p:spPr>
           <a:xfrm>
-            <a:off x="914400" y="4416552"/>
+            <a:off x="914400" y="4782312"/>
             <a:ext cx="9875519" cy="384048"/>
           </a:xfrm>
           <a:prstGeom prst="rect">
@@ -57473,7 +56269,7 @@
         <p:spPr>
           <a:xfrm>
             <a:off x="548640" y="2743200"/>
-            <a:ext cx="10972800" cy="1051560"/>
+            <a:ext cx="10972800" cy="1417320"/>
           </a:xfrm>
           <a:prstGeom prst="roundRect">
             <a:avLst>
@@ -57510,16 +56306,40 @@
           </a:p>
         </p:txBody>
       </p:sp>
-      <p:sp>
-        <p:nvSpPr>
-          <p:cNvPr id="11" name="TextBox 10"/>
-          <p:cNvSpPr txBox="1"/>
-          <p:nvPr/>
-        </p:nvSpPr>
-        <p:spPr>
-          <a:xfrm>
-            <a:off x="914400" y="2880360"/>
-            <a:ext cx="10241280" cy="457200"/>
+      <p:pic>
+        <p:nvPicPr>
+          <p:cNvPr id="11" name="Picture 10" descr="f-8326348feae989c6.png"/>
+          <p:cNvPicPr>
+            <a:picLocks noChangeAspect="1"/>
+          </p:cNvPicPr>
+          <p:nvPr/>
+        </p:nvPicPr>
+        <p:blipFill>
+          <a:blip r:embed="rId3"/>
+          <a:stretch>
+            <a:fillRect/>
+          </a:stretch>
+        </p:blipFill>
+        <p:spPr>
+          <a:xfrm>
+            <a:off x="836129980728" y="2608717363200"/>
+            <a:ext cx="4999823" cy="868680"/>
+          </a:xfrm>
+          <a:prstGeom prst="rect">
+            <a:avLst/>
+          </a:prstGeom>
+        </p:spPr>
+      </p:pic>
+      <p:sp>
+        <p:nvSpPr>
+          <p:cNvPr id="12" name="TextBox 11"/>
+          <p:cNvSpPr txBox="1"/>
+          <p:nvPr/>
+        </p:nvSpPr>
+        <p:spPr>
+          <a:xfrm>
+            <a:off x="914400" y="3840480"/>
+            <a:ext cx="10241280" cy="256032"/>
           </a:xfrm>
           <a:prstGeom prst="rect">
             <a:avLst/>
@@ -57534,131 +56354,6 @@
           <a:p>
             <a:pPr algn="ctr"/>
             <a:r>
-              <a:rPr sz="2600" b="1">
-                <a:solidFill>
-                  <a:srgbClr val="5234B7"/>
-                </a:solidFill>
-                <a:latin typeface="Helvetica Neue"/>
-                <a:ea typeface="Helvetica Neue"/>
-                <a:cs typeface="Helvetica Neue"/>
-              </a:rPr>
-              <a:t>min_β  Σ (y</a:t>
-            </a:r>
-            <a:r>
-              <a:rPr sz="2200" b="1" baseline="-25000">
-                <a:solidFill>
-                  <a:srgbClr val="5234B7"/>
-                </a:solidFill>
-                <a:latin typeface="Helvetica Neue"/>
-                <a:ea typeface="Helvetica Neue"/>
-                <a:cs typeface="Helvetica Neue"/>
-              </a:rPr>
-              <a:t>i</a:t>
-            </a:r>
-            <a:r>
-              <a:rPr sz="2600" b="1">
-                <a:solidFill>
-                  <a:srgbClr val="5234B7"/>
-                </a:solidFill>
-                <a:latin typeface="Helvetica Neue"/>
-                <a:ea typeface="Helvetica Neue"/>
-                <a:cs typeface="Helvetica Neue"/>
-              </a:rPr>
-              <a:t> − ŷ</a:t>
-            </a:r>
-            <a:r>
-              <a:rPr sz="2200" b="1" baseline="-25000">
-                <a:solidFill>
-                  <a:srgbClr val="5234B7"/>
-                </a:solidFill>
-                <a:latin typeface="Helvetica Neue"/>
-                <a:ea typeface="Helvetica Neue"/>
-                <a:cs typeface="Helvetica Neue"/>
-              </a:rPr>
-              <a:t>i</a:t>
-            </a:r>
-            <a:r>
-              <a:rPr sz="2600" b="1">
-                <a:solidFill>
-                  <a:srgbClr val="5234B7"/>
-                </a:solidFill>
-                <a:latin typeface="Helvetica Neue"/>
-                <a:ea typeface="Helvetica Neue"/>
-                <a:cs typeface="Helvetica Neue"/>
-              </a:rPr>
-              <a:t>)² + λ</a:t>
-            </a:r>
-            <a:r>
-              <a:rPr sz="2200" b="1" baseline="-25000">
-                <a:solidFill>
-                  <a:srgbClr val="5234B7"/>
-                </a:solidFill>
-                <a:latin typeface="Helvetica Neue"/>
-                <a:ea typeface="Helvetica Neue"/>
-                <a:cs typeface="Helvetica Neue"/>
-              </a:rPr>
-              <a:t>1</a:t>
-            </a:r>
-            <a:r>
-              <a:rPr sz="2600" b="1">
-                <a:solidFill>
-                  <a:srgbClr val="5234B7"/>
-                </a:solidFill>
-                <a:latin typeface="Helvetica Neue"/>
-                <a:ea typeface="Helvetica Neue"/>
-                <a:cs typeface="Helvetica Neue"/>
-              </a:rPr>
-              <a:t> Σ |βⱼ| + λ</a:t>
-            </a:r>
-            <a:r>
-              <a:rPr sz="2200" b="1" baseline="-25000">
-                <a:solidFill>
-                  <a:srgbClr val="5234B7"/>
-                </a:solidFill>
-                <a:latin typeface="Helvetica Neue"/>
-                <a:ea typeface="Helvetica Neue"/>
-                <a:cs typeface="Helvetica Neue"/>
-              </a:rPr>
-              <a:t>2</a:t>
-            </a:r>
-            <a:r>
-              <a:rPr sz="2600" b="1">
-                <a:solidFill>
-                  <a:srgbClr val="5234B7"/>
-                </a:solidFill>
-                <a:latin typeface="Helvetica Neue"/>
-                <a:ea typeface="Helvetica Neue"/>
-                <a:cs typeface="Helvetica Neue"/>
-              </a:rPr>
-              <a:t> Σ βⱼ²</a:t>
-            </a:r>
-          </a:p>
-        </p:txBody>
-      </p:sp>
-      <p:sp>
-        <p:nvSpPr>
-          <p:cNvPr id="12" name="TextBox 11"/>
-          <p:cNvSpPr txBox="1"/>
-          <p:nvPr/>
-        </p:nvSpPr>
-        <p:spPr>
-          <a:xfrm>
-            <a:off x="914400" y="3474719"/>
-            <a:ext cx="10241280" cy="256032"/>
-          </a:xfrm>
-          <a:prstGeom prst="rect">
-            <a:avLst/>
-          </a:prstGeom>
-          <a:noFill/>
-        </p:spPr>
-        <p:txBody>
-          <a:bodyPr wrap="square" anchor="t">
-            <a:spAutoFit/>
-          </a:bodyPr>
-          <a:lstStyle/>
-          <a:p>
-            <a:pPr algn="ctr"/>
-            <a:r>
               <a:rPr sz="1200" b="0">
                 <a:solidFill>
                   <a:srgbClr val="5A5470"/>
@@ -57680,7 +56375,7 @@
         </p:nvSpPr>
         <p:spPr>
           <a:xfrm>
-            <a:off x="548640" y="3904488"/>
+            <a:off x="548640" y="4270248"/>
             <a:ext cx="320040" cy="384048"/>
           </a:xfrm>
           <a:prstGeom prst="rect">
@@ -57717,7 +56412,7 @@
         </p:nvSpPr>
         <p:spPr>
           <a:xfrm>
-            <a:off x="914400" y="3904488"/>
+            <a:off x="914400" y="4270248"/>
             <a:ext cx="9875519" cy="384048"/>
           </a:xfrm>
           <a:prstGeom prst="rect">
@@ -57754,7 +56449,7 @@
         </p:nvSpPr>
         <p:spPr>
           <a:xfrm>
-            <a:off x="548640" y="4416552"/>
+            <a:off x="548640" y="4782312"/>
             <a:ext cx="320040" cy="384048"/>
           </a:xfrm>
           <a:prstGeom prst="rect">
@@ -57791,7 +56486,7 @@
         </p:nvSpPr>
         <p:spPr>
           <a:xfrm>
-            <a:off x="914400" y="4416552"/>
+            <a:off x="914400" y="4782312"/>
             <a:ext cx="9875519" cy="384048"/>
           </a:xfrm>
           <a:prstGeom prst="rect">
@@ -62938,7 +61633,7 @@
         <p:spPr>
           <a:xfrm>
             <a:off x="548640" y="2743200"/>
-            <a:ext cx="10972800" cy="1051560"/>
+            <a:ext cx="10972800" cy="1143000"/>
           </a:xfrm>
           <a:prstGeom prst="roundRect">
             <a:avLst>
@@ -62975,16 +61670,40 @@
           </a:p>
         </p:txBody>
       </p:sp>
-      <p:sp>
-        <p:nvSpPr>
-          <p:cNvPr id="11" name="TextBox 10"/>
-          <p:cNvSpPr txBox="1"/>
-          <p:nvPr/>
-        </p:nvSpPr>
-        <p:spPr>
-          <a:xfrm>
-            <a:off x="914400" y="2880360"/>
-            <a:ext cx="10241280" cy="457200"/>
+      <p:pic>
+        <p:nvPicPr>
+          <p:cNvPr id="11" name="Picture 10" descr="f-3ce2b7412de9f952.png"/>
+          <p:cNvPicPr>
+            <a:picLocks noChangeAspect="1"/>
+          </p:cNvPicPr>
+          <p:nvPr/>
+        </p:nvPicPr>
+        <p:blipFill>
+          <a:blip r:embed="rId3"/>
+          <a:stretch>
+            <a:fillRect/>
+          </a:stretch>
+        </p:blipFill>
+        <p:spPr>
+          <a:xfrm>
+            <a:off x="836129802714" y="2608717363200"/>
+            <a:ext cx="5355850" cy="640080"/>
+          </a:xfrm>
+          <a:prstGeom prst="rect">
+            <a:avLst/>
+          </a:prstGeom>
+        </p:spPr>
+      </p:pic>
+      <p:sp>
+        <p:nvSpPr>
+          <p:cNvPr id="12" name="TextBox 11"/>
+          <p:cNvSpPr txBox="1"/>
+          <p:nvPr/>
+        </p:nvSpPr>
+        <p:spPr>
+          <a:xfrm>
+            <a:off x="914400" y="3566160"/>
+            <a:ext cx="10241280" cy="256032"/>
           </a:xfrm>
           <a:prstGeom prst="rect">
             <a:avLst/>
@@ -62999,186 +61718,6 @@
           <a:p>
             <a:pPr algn="ctr"/>
             <a:r>
-              <a:rPr sz="2600" b="1">
-                <a:solidFill>
-                  <a:srgbClr val="5234B7"/>
-                </a:solidFill>
-                <a:latin typeface="Helvetica Neue"/>
-                <a:ea typeface="Helvetica Neue"/>
-                <a:cs typeface="Helvetica Neue"/>
-              </a:rPr>
-              <a:t>y = b</a:t>
-            </a:r>
-            <a:r>
-              <a:rPr sz="2200" b="1" baseline="-25000">
-                <a:solidFill>
-                  <a:srgbClr val="5234B7"/>
-                </a:solidFill>
-                <a:latin typeface="Helvetica Neue"/>
-                <a:ea typeface="Helvetica Neue"/>
-                <a:cs typeface="Helvetica Neue"/>
-              </a:rPr>
-              <a:t>0</a:t>
-            </a:r>
-            <a:r>
-              <a:rPr sz="2600" b="1">
-                <a:solidFill>
-                  <a:srgbClr val="5234B7"/>
-                </a:solidFill>
-                <a:latin typeface="Helvetica Neue"/>
-                <a:ea typeface="Helvetica Neue"/>
-                <a:cs typeface="Helvetica Neue"/>
-              </a:rPr>
-              <a:t> + b</a:t>
-            </a:r>
-            <a:r>
-              <a:rPr sz="2200" b="1" baseline="-25000">
-                <a:solidFill>
-                  <a:srgbClr val="5234B7"/>
-                </a:solidFill>
-                <a:latin typeface="Helvetica Neue"/>
-                <a:ea typeface="Helvetica Neue"/>
-                <a:cs typeface="Helvetica Neue"/>
-              </a:rPr>
-              <a:t>1</a:t>
-            </a:r>
-            <a:r>
-              <a:rPr sz="2600" b="1">
-                <a:solidFill>
-                  <a:srgbClr val="5234B7"/>
-                </a:solidFill>
-                <a:latin typeface="Helvetica Neue"/>
-                <a:ea typeface="Helvetica Neue"/>
-                <a:cs typeface="Helvetica Neue"/>
-              </a:rPr>
-              <a:t>x</a:t>
-            </a:r>
-            <a:r>
-              <a:rPr sz="2200" b="1" baseline="-25000">
-                <a:solidFill>
-                  <a:srgbClr val="5234B7"/>
-                </a:solidFill>
-                <a:latin typeface="Helvetica Neue"/>
-                <a:ea typeface="Helvetica Neue"/>
-                <a:cs typeface="Helvetica Neue"/>
-              </a:rPr>
-              <a:t>1</a:t>
-            </a:r>
-            <a:r>
-              <a:rPr sz="2600" b="1">
-                <a:solidFill>
-                  <a:srgbClr val="5234B7"/>
-                </a:solidFill>
-                <a:latin typeface="Helvetica Neue"/>
-                <a:ea typeface="Helvetica Neue"/>
-                <a:cs typeface="Helvetica Neue"/>
-              </a:rPr>
-              <a:t> + b</a:t>
-            </a:r>
-            <a:r>
-              <a:rPr sz="2200" b="1" baseline="-25000">
-                <a:solidFill>
-                  <a:srgbClr val="5234B7"/>
-                </a:solidFill>
-                <a:latin typeface="Helvetica Neue"/>
-                <a:ea typeface="Helvetica Neue"/>
-                <a:cs typeface="Helvetica Neue"/>
-              </a:rPr>
-              <a:t>2</a:t>
-            </a:r>
-            <a:r>
-              <a:rPr sz="2600" b="1">
-                <a:solidFill>
-                  <a:srgbClr val="5234B7"/>
-                </a:solidFill>
-                <a:latin typeface="Helvetica Neue"/>
-                <a:ea typeface="Helvetica Neue"/>
-                <a:cs typeface="Helvetica Neue"/>
-              </a:rPr>
-              <a:t>x</a:t>
-            </a:r>
-            <a:r>
-              <a:rPr sz="2200" b="1" baseline="-25000">
-                <a:solidFill>
-                  <a:srgbClr val="5234B7"/>
-                </a:solidFill>
-                <a:latin typeface="Helvetica Neue"/>
-                <a:ea typeface="Helvetica Neue"/>
-                <a:cs typeface="Helvetica Neue"/>
-              </a:rPr>
-              <a:t>2</a:t>
-            </a:r>
-            <a:r>
-              <a:rPr sz="2600" b="1">
-                <a:solidFill>
-                  <a:srgbClr val="5234B7"/>
-                </a:solidFill>
-                <a:latin typeface="Helvetica Neue"/>
-                <a:ea typeface="Helvetica Neue"/>
-                <a:cs typeface="Helvetica Neue"/>
-              </a:rPr>
-              <a:t> + ⋯ + b</a:t>
-            </a:r>
-            <a:r>
-              <a:rPr sz="2200" b="1" baseline="-25000">
-                <a:solidFill>
-                  <a:srgbClr val="5234B7"/>
-                </a:solidFill>
-                <a:latin typeface="Helvetica Neue"/>
-                <a:ea typeface="Helvetica Neue"/>
-                <a:cs typeface="Helvetica Neue"/>
-              </a:rPr>
-              <a:t>n</a:t>
-            </a:r>
-            <a:r>
-              <a:rPr sz="2600" b="1">
-                <a:solidFill>
-                  <a:srgbClr val="5234B7"/>
-                </a:solidFill>
-                <a:latin typeface="Helvetica Neue"/>
-                <a:ea typeface="Helvetica Neue"/>
-                <a:cs typeface="Helvetica Neue"/>
-              </a:rPr>
-              <a:t>x</a:t>
-            </a:r>
-            <a:r>
-              <a:rPr sz="2200" b="1" baseline="-25000">
-                <a:solidFill>
-                  <a:srgbClr val="5234B7"/>
-                </a:solidFill>
-                <a:latin typeface="Helvetica Neue"/>
-                <a:ea typeface="Helvetica Neue"/>
-                <a:cs typeface="Helvetica Neue"/>
-              </a:rPr>
-              <a:t>n</a:t>
-            </a:r>
-          </a:p>
-        </p:txBody>
-      </p:sp>
-      <p:sp>
-        <p:nvSpPr>
-          <p:cNvPr id="12" name="TextBox 11"/>
-          <p:cNvSpPr txBox="1"/>
-          <p:nvPr/>
-        </p:nvSpPr>
-        <p:spPr>
-          <a:xfrm>
-            <a:off x="914400" y="3474719"/>
-            <a:ext cx="10241280" cy="256032"/>
-          </a:xfrm>
-          <a:prstGeom prst="rect">
-            <a:avLst/>
-          </a:prstGeom>
-          <a:noFill/>
-        </p:spPr>
-        <p:txBody>
-          <a:bodyPr wrap="square" anchor="t">
-            <a:spAutoFit/>
-          </a:bodyPr>
-          <a:lstStyle/>
-          <a:p>
-            <a:pPr algn="ctr"/>
-            <a:r>
               <a:rPr sz="1200" b="0">
                 <a:solidFill>
                   <a:srgbClr val="5A5470"/>
@@ -63200,7 +61739,7 @@
         </p:nvSpPr>
         <p:spPr>
           <a:xfrm>
-            <a:off x="548640" y="3904488"/>
+            <a:off x="548640" y="3995928"/>
             <a:ext cx="320040" cy="384048"/>
           </a:xfrm>
           <a:prstGeom prst="rect">
@@ -63237,7 +61776,7 @@
         </p:nvSpPr>
         <p:spPr>
           <a:xfrm>
-            <a:off x="914400" y="3904488"/>
+            <a:off x="914400" y="3995928"/>
             <a:ext cx="9875519" cy="384048"/>
           </a:xfrm>
           <a:prstGeom prst="rect">
@@ -63274,7 +61813,7 @@
         </p:nvSpPr>
         <p:spPr>
           <a:xfrm>
-            <a:off x="548640" y="4325112"/>
+            <a:off x="548640" y="4416552"/>
             <a:ext cx="320040" cy="384048"/>
           </a:xfrm>
           <a:prstGeom prst="rect">
@@ -63311,7 +61850,7 @@
         </p:nvSpPr>
         <p:spPr>
           <a:xfrm>
-            <a:off x="914400" y="4325112"/>
+            <a:off x="914400" y="4416552"/>
             <a:ext cx="9875519" cy="384048"/>
           </a:xfrm>
           <a:prstGeom prst="rect">
@@ -63836,7 +62375,7 @@
         <p:spPr>
           <a:xfrm>
             <a:off x="548640" y="2743200"/>
-            <a:ext cx="10972800" cy="1051560"/>
+            <a:ext cx="10972800" cy="1143000"/>
           </a:xfrm>
           <a:prstGeom prst="roundRect">
             <a:avLst>
@@ -63873,16 +62412,40 @@
           </a:p>
         </p:txBody>
       </p:sp>
-      <p:sp>
-        <p:nvSpPr>
-          <p:cNvPr id="11" name="TextBox 10"/>
-          <p:cNvSpPr txBox="1"/>
-          <p:nvPr/>
-        </p:nvSpPr>
-        <p:spPr>
-          <a:xfrm>
-            <a:off x="914400" y="2880360"/>
-            <a:ext cx="10241280" cy="457200"/>
+      <p:pic>
+        <p:nvPicPr>
+          <p:cNvPr id="11" name="Picture 10" descr="f-865e8e868ff4f97a.png"/>
+          <p:cNvPicPr>
+            <a:picLocks noChangeAspect="1"/>
+          </p:cNvPicPr>
+          <p:nvPr/>
+        </p:nvPicPr>
+        <p:blipFill>
+          <a:blip r:embed="rId3"/>
+          <a:stretch>
+            <a:fillRect/>
+          </a:stretch>
+        </p:blipFill>
+        <p:spPr>
+          <a:xfrm>
+            <a:off x="836130415409" y="2608717363200"/>
+            <a:ext cx="4130460" cy="640080"/>
+          </a:xfrm>
+          <a:prstGeom prst="rect">
+            <a:avLst/>
+          </a:prstGeom>
+        </p:spPr>
+      </p:pic>
+      <p:sp>
+        <p:nvSpPr>
+          <p:cNvPr id="12" name="TextBox 11"/>
+          <p:cNvSpPr txBox="1"/>
+          <p:nvPr/>
+        </p:nvSpPr>
+        <p:spPr>
+          <a:xfrm>
+            <a:off x="914400" y="3566160"/>
+            <a:ext cx="10241280" cy="256032"/>
           </a:xfrm>
           <a:prstGeom prst="rect">
             <a:avLst/>
@@ -63897,76 +62460,6 @@
           <a:p>
             <a:pPr algn="ctr"/>
             <a:r>
-              <a:rPr sz="2600" b="1">
-                <a:solidFill>
-                  <a:srgbClr val="5234B7"/>
-                </a:solidFill>
-                <a:latin typeface="Helvetica Neue"/>
-                <a:ea typeface="Helvetica Neue"/>
-                <a:cs typeface="Helvetica Neue"/>
-              </a:rPr>
-              <a:t>y = 50 + 2.5 x</a:t>
-            </a:r>
-            <a:r>
-              <a:rPr sz="2200" b="1" baseline="-25000">
-                <a:solidFill>
-                  <a:srgbClr val="5234B7"/>
-                </a:solidFill>
-                <a:latin typeface="Helvetica Neue"/>
-                <a:ea typeface="Helvetica Neue"/>
-                <a:cs typeface="Helvetica Neue"/>
-              </a:rPr>
-              <a:t>1</a:t>
-            </a:r>
-            <a:r>
-              <a:rPr sz="2600" b="1">
-                <a:solidFill>
-                  <a:srgbClr val="5234B7"/>
-                </a:solidFill>
-                <a:latin typeface="Helvetica Neue"/>
-                <a:ea typeface="Helvetica Neue"/>
-                <a:cs typeface="Helvetica Neue"/>
-              </a:rPr>
-              <a:t> + 15 x</a:t>
-            </a:r>
-            <a:r>
-              <a:rPr sz="2200" b="1" baseline="-25000">
-                <a:solidFill>
-                  <a:srgbClr val="5234B7"/>
-                </a:solidFill>
-                <a:latin typeface="Helvetica Neue"/>
-                <a:ea typeface="Helvetica Neue"/>
-                <a:cs typeface="Helvetica Neue"/>
-              </a:rPr>
-              <a:t>2</a:t>
-            </a:r>
-          </a:p>
-        </p:txBody>
-      </p:sp>
-      <p:sp>
-        <p:nvSpPr>
-          <p:cNvPr id="12" name="TextBox 11"/>
-          <p:cNvSpPr txBox="1"/>
-          <p:nvPr/>
-        </p:nvSpPr>
-        <p:spPr>
-          <a:xfrm>
-            <a:off x="914400" y="3474719"/>
-            <a:ext cx="10241280" cy="256032"/>
-          </a:xfrm>
-          <a:prstGeom prst="rect">
-            <a:avLst/>
-          </a:prstGeom>
-          <a:noFill/>
-        </p:spPr>
-        <p:txBody>
-          <a:bodyPr wrap="square" anchor="t">
-            <a:spAutoFit/>
-          </a:bodyPr>
-          <a:lstStyle/>
-          <a:p>
-            <a:pPr algn="ctr"/>
-            <a:r>
               <a:rPr sz="1200" b="0">
                 <a:solidFill>
                   <a:srgbClr val="5A5470"/>
@@ -63988,7 +62481,7 @@
         </p:nvSpPr>
         <p:spPr>
           <a:xfrm>
-            <a:off x="548640" y="3904488"/>
+            <a:off x="548640" y="3995928"/>
             <a:ext cx="320040" cy="384048"/>
           </a:xfrm>
           <a:prstGeom prst="rect">
@@ -64025,7 +62518,7 @@
         </p:nvSpPr>
         <p:spPr>
           <a:xfrm>
-            <a:off x="914400" y="3904488"/>
+            <a:off x="914400" y="3995928"/>
             <a:ext cx="9875519" cy="384048"/>
           </a:xfrm>
           <a:prstGeom prst="rect">
@@ -64062,7 +62555,7 @@
         </p:nvSpPr>
         <p:spPr>
           <a:xfrm>
-            <a:off x="548640" y="4325112"/>
+            <a:off x="548640" y="4416552"/>
             <a:ext cx="320040" cy="384048"/>
           </a:xfrm>
           <a:prstGeom prst="rect">
@@ -64099,7 +62592,7 @@
         </p:nvSpPr>
         <p:spPr>
           <a:xfrm>
-            <a:off x="914400" y="4325112"/>
+            <a:off x="914400" y="4416552"/>
             <a:ext cx="9875519" cy="384048"/>
           </a:xfrm>
           <a:prstGeom prst="rect">

--- a/web-presentation/pdf-exports/Week1-Session2-Regression-Models.pptx
+++ b/web-presentation/pdf-exports/Week1-Session2-Regression-Models.pptx
@@ -5436,7 +5436,7 @@
         </p:blipFill>
         <p:spPr>
           <a:xfrm>
-            <a:off x="836131430573" y="2608717363200"/>
+            <a:off x="4984973" y="2852928"/>
             <a:ext cx="2100132" cy="868680"/>
           </a:xfrm>
           <a:prstGeom prst="rect">
@@ -6289,7 +6289,7 @@
         </p:blipFill>
         <p:spPr>
           <a:xfrm>
-            <a:off x="752516614164" y="3566160"/>
+            <a:off x="2813123" y="3566160"/>
             <a:ext cx="1323190" cy="594360"/>
           </a:xfrm>
           <a:prstGeom prst="rect">
@@ -6305,7 +6305,7 @@
         </p:nvSpPr>
         <p:spPr>
           <a:xfrm>
-            <a:off x="822960" y="4206240"/>
+            <a:off x="822959" y="4206240"/>
             <a:ext cx="5303520" cy="274320"/>
           </a:xfrm>
           <a:prstGeom prst="rect">
@@ -7138,7 +7138,7 @@
         </p:blipFill>
         <p:spPr>
           <a:xfrm>
-            <a:off x="752516167836" y="3566160"/>
+            <a:off x="2366795" y="3566160"/>
             <a:ext cx="2215846" cy="868680"/>
           </a:xfrm>
           <a:prstGeom prst="rect">
@@ -7154,7 +7154,7 @@
         </p:nvSpPr>
         <p:spPr>
           <a:xfrm>
-            <a:off x="822960" y="4480559"/>
+            <a:off x="822959" y="4480559"/>
             <a:ext cx="5303520" cy="274320"/>
           </a:xfrm>
           <a:prstGeom prst="rect">
@@ -8655,7 +8655,7 @@
         </p:blipFill>
         <p:spPr>
           <a:xfrm>
-            <a:off x="836131257107" y="2608717363200"/>
+            <a:off x="4811507" y="2852928"/>
             <a:ext cx="2447065" cy="868680"/>
           </a:xfrm>
           <a:prstGeom prst="rect">
@@ -9360,7 +9360,7 @@
         </p:blipFill>
         <p:spPr>
           <a:xfrm>
-            <a:off x="836131298270" y="2608717363200"/>
+            <a:off x="4852669" y="2852928"/>
             <a:ext cx="2364740" cy="868680"/>
           </a:xfrm>
           <a:prstGeom prst="rect">
@@ -13350,7 +13350,7 @@
         </p:blipFill>
         <p:spPr>
           <a:xfrm>
-            <a:off x="836130764919" y="2608717363200"/>
+            <a:off x="4319319" y="2852928"/>
             <a:ext cx="3431440" cy="868680"/>
           </a:xfrm>
           <a:prstGeom prst="rect">
@@ -23735,7 +23735,7 @@
         </p:blipFill>
         <p:spPr>
           <a:xfrm>
-            <a:off x="752515255585" y="3566160"/>
+            <a:off x="1454544" y="3566160"/>
             <a:ext cx="4040348" cy="594360"/>
           </a:xfrm>
           <a:prstGeom prst="rect">
@@ -23751,7 +23751,7 @@
         </p:nvSpPr>
         <p:spPr>
           <a:xfrm>
-            <a:off x="822960" y="4206240"/>
+            <a:off x="822959" y="4206240"/>
             <a:ext cx="5303520" cy="274320"/>
           </a:xfrm>
           <a:prstGeom prst="rect">
@@ -25215,7 +25215,7 @@
         </p:blipFill>
         <p:spPr>
           <a:xfrm>
-            <a:off x="836130018110" y="2608717363200"/>
+            <a:off x="3572509" y="2852928"/>
             <a:ext cx="4925060" cy="640080"/>
           </a:xfrm>
           <a:prstGeom prst="rect">
@@ -27349,7 +27349,7 @@
         </p:blipFill>
         <p:spPr>
           <a:xfrm>
-            <a:off x="836130061566" y="2608717363200"/>
+            <a:off x="3615966" y="2852928"/>
             <a:ext cx="4838146" cy="640080"/>
           </a:xfrm>
           <a:prstGeom prst="rect">
@@ -34747,7 +34747,7 @@
         </p:blipFill>
         <p:spPr>
           <a:xfrm>
-            <a:off x="836130895135" y="2608717363200"/>
+            <a:off x="4449535" y="2852928"/>
             <a:ext cx="3171008" cy="640080"/>
           </a:xfrm>
           <a:prstGeom prst="rect">
@@ -36207,7 +36207,7 @@
         </p:blipFill>
         <p:spPr>
           <a:xfrm>
-            <a:off x="752515337335" y="3566160"/>
+            <a:off x="1536294" y="3566160"/>
             <a:ext cx="3876848" cy="594360"/>
           </a:xfrm>
           <a:prstGeom prst="rect">
@@ -36223,7 +36223,7 @@
         </p:nvSpPr>
         <p:spPr>
           <a:xfrm>
-            <a:off x="822960" y="4206240"/>
+            <a:off x="822959" y="4206240"/>
             <a:ext cx="5303520" cy="274320"/>
           </a:xfrm>
           <a:prstGeom prst="rect">
@@ -37019,7 +37019,7 @@
         </p:blipFill>
         <p:spPr>
           <a:xfrm>
-            <a:off x="752516151997" y="3566160"/>
+            <a:off x="2350956" y="3566160"/>
             <a:ext cx="2247525" cy="594360"/>
           </a:xfrm>
           <a:prstGeom prst="rect">
@@ -37035,7 +37035,7 @@
         </p:nvSpPr>
         <p:spPr>
           <a:xfrm>
-            <a:off x="822960" y="4206240"/>
+            <a:off x="822959" y="4206240"/>
             <a:ext cx="5303520" cy="274320"/>
           </a:xfrm>
           <a:prstGeom prst="rect">
@@ -42808,7 +42808,7 @@
         </p:blipFill>
         <p:spPr>
           <a:xfrm>
-            <a:off x="836130699846" y="2608717363200"/>
+            <a:off x="4254246" y="2852928"/>
             <a:ext cx="3561587" cy="868680"/>
           </a:xfrm>
           <a:prstGeom prst="rect">
@@ -43513,7 +43513,7 @@
         </p:blipFill>
         <p:spPr>
           <a:xfrm>
-            <a:off x="836127853042" y="2608717363200"/>
+            <a:off x="1407442" y="2852928"/>
             <a:ext cx="9255195" cy="868679"/>
           </a:xfrm>
           <a:prstGeom prst="rect">
@@ -44218,7 +44218,7 @@
         </p:blipFill>
         <p:spPr>
           <a:xfrm>
-            <a:off x="836131134030" y="2608717363200"/>
+            <a:off x="4688430" y="2852928"/>
             <a:ext cx="2693219" cy="868680"/>
           </a:xfrm>
           <a:prstGeom prst="rect">
@@ -44923,7 +44923,7 @@
         </p:blipFill>
         <p:spPr>
           <a:xfrm>
-            <a:off x="836131313643" y="2608717363200"/>
+            <a:off x="4868043" y="2852928"/>
             <a:ext cx="2333993" cy="640080"/>
           </a:xfrm>
           <a:prstGeom prst="rect">
@@ -47946,7 +47946,7 @@
         </p:blipFill>
         <p:spPr>
           <a:xfrm>
-            <a:off x="752515962219" y="3566160"/>
+            <a:off x="2161178" y="3566160"/>
             <a:ext cx="2627080" cy="868680"/>
           </a:xfrm>
           <a:prstGeom prst="rect">
@@ -47962,7 +47962,7 @@
         </p:nvSpPr>
         <p:spPr>
           <a:xfrm>
-            <a:off x="822960" y="4480559"/>
+            <a:off x="822959" y="4480559"/>
             <a:ext cx="5303520" cy="274320"/>
           </a:xfrm>
           <a:prstGeom prst="rect">
@@ -51269,7 +51269,7 @@
         </p:blipFill>
         <p:spPr>
           <a:xfrm>
-            <a:off x="752515418338" y="3566160"/>
+            <a:off x="1617297" y="3566160"/>
             <a:ext cx="3714842" cy="868680"/>
           </a:xfrm>
           <a:prstGeom prst="rect">
@@ -51285,7 +51285,7 @@
         </p:nvSpPr>
         <p:spPr>
           <a:xfrm>
-            <a:off x="822960" y="4480559"/>
+            <a:off x="822959" y="4480559"/>
             <a:ext cx="5303520" cy="274320"/>
           </a:xfrm>
           <a:prstGeom prst="rect">
@@ -52081,7 +52081,7 @@
         </p:blipFill>
         <p:spPr>
           <a:xfrm>
-            <a:off x="836130943586" y="2608717363200"/>
+            <a:off x="4497986" y="2852928"/>
             <a:ext cx="3074106" cy="640080"/>
           </a:xfrm>
           <a:prstGeom prst="rect">
@@ -54207,7 +54207,7 @@
         </p:blipFill>
         <p:spPr>
           <a:xfrm>
-            <a:off x="836131276494" y="2608717363200"/>
+            <a:off x="4830894" y="2852928"/>
             <a:ext cx="2408291" cy="868680"/>
           </a:xfrm>
           <a:prstGeom prst="rect">
@@ -54912,7 +54912,7 @@
         </p:blipFill>
         <p:spPr>
           <a:xfrm>
-            <a:off x="836130679718" y="2608717363200"/>
+            <a:off x="4234118" y="2852928"/>
             <a:ext cx="3601843" cy="868680"/>
           </a:xfrm>
           <a:prstGeom prst="rect">
@@ -55617,7 +55617,7 @@
         </p:blipFill>
         <p:spPr>
           <a:xfrm>
-            <a:off x="836130630280" y="2608717363200"/>
+            <a:off x="4184680" y="2852928"/>
             <a:ext cx="3700718" cy="868680"/>
           </a:xfrm>
           <a:prstGeom prst="rect">
@@ -56322,7 +56322,7 @@
         </p:blipFill>
         <p:spPr>
           <a:xfrm>
-            <a:off x="836129980728" y="2608717363200"/>
+            <a:off x="3535128" y="2852928"/>
             <a:ext cx="4999823" cy="868680"/>
           </a:xfrm>
           <a:prstGeom prst="rect">
@@ -61686,7 +61686,7 @@
         </p:blipFill>
         <p:spPr>
           <a:xfrm>
-            <a:off x="836129802714" y="2608717363200"/>
+            <a:off x="3357114" y="2852928"/>
             <a:ext cx="5355850" cy="640080"/>
           </a:xfrm>
           <a:prstGeom prst="rect">
@@ -62428,7 +62428,7 @@
         </p:blipFill>
         <p:spPr>
           <a:xfrm>
-            <a:off x="836130415409" y="2608717363200"/>
+            <a:off x="3969809" y="2852928"/>
             <a:ext cx="4130460" cy="640080"/>
           </a:xfrm>
           <a:prstGeom prst="rect">

--- a/web-presentation/pdf-exports/Week1-Session2-Regression-Models.pptx
+++ b/web-presentation/pdf-exports/Week1-Session2-Regression-Models.pptx
@@ -4,88 +4,91 @@
   <p:sldMasterIdLst>
     <p:sldMasterId id="2147483648" r:id="rId1"/>
   </p:sldMasterIdLst>
+  <p:notesMasterIdLst>
+    <p:notesMasterId r:id="rId81"/>
+  </p:notesMasterIdLst>
   <p:sldIdLst>
-    <p:sldId id="256" r:id="rId7"/>
-    <p:sldId id="257" r:id="rId8"/>
-    <p:sldId id="258" r:id="rId9"/>
-    <p:sldId id="259" r:id="rId10"/>
-    <p:sldId id="260" r:id="rId11"/>
-    <p:sldId id="261" r:id="rId12"/>
-    <p:sldId id="262" r:id="rId13"/>
-    <p:sldId id="263" r:id="rId14"/>
-    <p:sldId id="264" r:id="rId15"/>
-    <p:sldId id="265" r:id="rId16"/>
-    <p:sldId id="266" r:id="rId17"/>
-    <p:sldId id="267" r:id="rId18"/>
-    <p:sldId id="268" r:id="rId19"/>
-    <p:sldId id="269" r:id="rId20"/>
-    <p:sldId id="270" r:id="rId21"/>
-    <p:sldId id="271" r:id="rId22"/>
-    <p:sldId id="272" r:id="rId23"/>
-    <p:sldId id="273" r:id="rId24"/>
-    <p:sldId id="274" r:id="rId25"/>
-    <p:sldId id="275" r:id="rId26"/>
-    <p:sldId id="276" r:id="rId27"/>
-    <p:sldId id="277" r:id="rId28"/>
-    <p:sldId id="278" r:id="rId29"/>
-    <p:sldId id="279" r:id="rId30"/>
-    <p:sldId id="280" r:id="rId31"/>
-    <p:sldId id="281" r:id="rId32"/>
-    <p:sldId id="282" r:id="rId33"/>
-    <p:sldId id="283" r:id="rId34"/>
-    <p:sldId id="284" r:id="rId35"/>
-    <p:sldId id="285" r:id="rId36"/>
-    <p:sldId id="286" r:id="rId37"/>
-    <p:sldId id="287" r:id="rId38"/>
-    <p:sldId id="288" r:id="rId39"/>
-    <p:sldId id="289" r:id="rId40"/>
-    <p:sldId id="290" r:id="rId41"/>
-    <p:sldId id="291" r:id="rId42"/>
-    <p:sldId id="292" r:id="rId43"/>
-    <p:sldId id="293" r:id="rId44"/>
-    <p:sldId id="294" r:id="rId45"/>
-    <p:sldId id="295" r:id="rId46"/>
-    <p:sldId id="296" r:id="rId47"/>
-    <p:sldId id="297" r:id="rId48"/>
-    <p:sldId id="298" r:id="rId49"/>
-    <p:sldId id="299" r:id="rId50"/>
-    <p:sldId id="300" r:id="rId51"/>
-    <p:sldId id="301" r:id="rId52"/>
-    <p:sldId id="302" r:id="rId53"/>
-    <p:sldId id="303" r:id="rId54"/>
-    <p:sldId id="304" r:id="rId55"/>
-    <p:sldId id="305" r:id="rId56"/>
-    <p:sldId id="306" r:id="rId57"/>
-    <p:sldId id="307" r:id="rId58"/>
-    <p:sldId id="308" r:id="rId59"/>
-    <p:sldId id="309" r:id="rId60"/>
-    <p:sldId id="310" r:id="rId61"/>
-    <p:sldId id="311" r:id="rId62"/>
-    <p:sldId id="312" r:id="rId63"/>
-    <p:sldId id="313" r:id="rId64"/>
-    <p:sldId id="314" r:id="rId65"/>
-    <p:sldId id="315" r:id="rId66"/>
-    <p:sldId id="316" r:id="rId67"/>
-    <p:sldId id="317" r:id="rId68"/>
-    <p:sldId id="318" r:id="rId69"/>
-    <p:sldId id="319" r:id="rId70"/>
-    <p:sldId id="320" r:id="rId71"/>
-    <p:sldId id="321" r:id="rId72"/>
-    <p:sldId id="322" r:id="rId73"/>
-    <p:sldId id="323" r:id="rId74"/>
-    <p:sldId id="324" r:id="rId75"/>
-    <p:sldId id="325" r:id="rId76"/>
-    <p:sldId id="326" r:id="rId77"/>
-    <p:sldId id="327" r:id="rId78"/>
-    <p:sldId id="328" r:id="rId79"/>
-    <p:sldId id="329" r:id="rId80"/>
-    <p:sldId id="330" r:id="rId81"/>
-    <p:sldId id="331" r:id="rId82"/>
-    <p:sldId id="332" r:id="rId83"/>
-    <p:sldId id="333" r:id="rId84"/>
-    <p:sldId id="334" r:id="rId85"/>
+    <p:sldId id="256" r:id="rId2"/>
+    <p:sldId id="257" r:id="rId3"/>
+    <p:sldId id="258" r:id="rId4"/>
+    <p:sldId id="259" r:id="rId5"/>
+    <p:sldId id="260" r:id="rId6"/>
+    <p:sldId id="261" r:id="rId7"/>
+    <p:sldId id="262" r:id="rId8"/>
+    <p:sldId id="263" r:id="rId9"/>
+    <p:sldId id="264" r:id="rId10"/>
+    <p:sldId id="265" r:id="rId11"/>
+    <p:sldId id="266" r:id="rId12"/>
+    <p:sldId id="267" r:id="rId13"/>
+    <p:sldId id="268" r:id="rId14"/>
+    <p:sldId id="269" r:id="rId15"/>
+    <p:sldId id="270" r:id="rId16"/>
+    <p:sldId id="271" r:id="rId17"/>
+    <p:sldId id="272" r:id="rId18"/>
+    <p:sldId id="273" r:id="rId19"/>
+    <p:sldId id="274" r:id="rId20"/>
+    <p:sldId id="275" r:id="rId21"/>
+    <p:sldId id="276" r:id="rId22"/>
+    <p:sldId id="277" r:id="rId23"/>
+    <p:sldId id="278" r:id="rId24"/>
+    <p:sldId id="279" r:id="rId25"/>
+    <p:sldId id="280" r:id="rId26"/>
+    <p:sldId id="281" r:id="rId27"/>
+    <p:sldId id="282" r:id="rId28"/>
+    <p:sldId id="283" r:id="rId29"/>
+    <p:sldId id="284" r:id="rId30"/>
+    <p:sldId id="285" r:id="rId31"/>
+    <p:sldId id="286" r:id="rId32"/>
+    <p:sldId id="287" r:id="rId33"/>
+    <p:sldId id="288" r:id="rId34"/>
+    <p:sldId id="289" r:id="rId35"/>
+    <p:sldId id="290" r:id="rId36"/>
+    <p:sldId id="291" r:id="rId37"/>
+    <p:sldId id="292" r:id="rId38"/>
+    <p:sldId id="293" r:id="rId39"/>
+    <p:sldId id="294" r:id="rId40"/>
+    <p:sldId id="295" r:id="rId41"/>
+    <p:sldId id="296" r:id="rId42"/>
+    <p:sldId id="297" r:id="rId43"/>
+    <p:sldId id="298" r:id="rId44"/>
+    <p:sldId id="299" r:id="rId45"/>
+    <p:sldId id="300" r:id="rId46"/>
+    <p:sldId id="301" r:id="rId47"/>
+    <p:sldId id="302" r:id="rId48"/>
+    <p:sldId id="303" r:id="rId49"/>
+    <p:sldId id="304" r:id="rId50"/>
+    <p:sldId id="305" r:id="rId51"/>
+    <p:sldId id="306" r:id="rId52"/>
+    <p:sldId id="307" r:id="rId53"/>
+    <p:sldId id="308" r:id="rId54"/>
+    <p:sldId id="309" r:id="rId55"/>
+    <p:sldId id="310" r:id="rId56"/>
+    <p:sldId id="311" r:id="rId57"/>
+    <p:sldId id="312" r:id="rId58"/>
+    <p:sldId id="313" r:id="rId59"/>
+    <p:sldId id="314" r:id="rId60"/>
+    <p:sldId id="315" r:id="rId61"/>
+    <p:sldId id="316" r:id="rId62"/>
+    <p:sldId id="317" r:id="rId63"/>
+    <p:sldId id="318" r:id="rId64"/>
+    <p:sldId id="319" r:id="rId65"/>
+    <p:sldId id="320" r:id="rId66"/>
+    <p:sldId id="321" r:id="rId67"/>
+    <p:sldId id="322" r:id="rId68"/>
+    <p:sldId id="323" r:id="rId69"/>
+    <p:sldId id="324" r:id="rId70"/>
+    <p:sldId id="325" r:id="rId71"/>
+    <p:sldId id="326" r:id="rId72"/>
+    <p:sldId id="327" r:id="rId73"/>
+    <p:sldId id="328" r:id="rId74"/>
+    <p:sldId id="329" r:id="rId75"/>
+    <p:sldId id="330" r:id="rId76"/>
+    <p:sldId id="331" r:id="rId77"/>
+    <p:sldId id="332" r:id="rId78"/>
+    <p:sldId id="333" r:id="rId79"/>
+    <p:sldId id="334" r:id="rId80"/>
   </p:sldIdLst>
-  <p:sldSz cx="12191695" cy="6858000" type="screen4x3"/>
+  <p:sldSz cx="12192000" cy="6858000"/>
   <p:notesSz cx="6858000" cy="9144000"/>
   <p:defaultTextStyle>
     <a:defPPr>
@@ -182,7 +185,458 @@
       </a:defRPr>
     </a:lvl9pPr>
   </p:defaultTextStyle>
+  <p:extLst>
+    <p:ext uri="{EFAFB233-063F-42B5-8137-9DF3F51BA10A}">
+      <p15:sldGuideLst xmlns:p15="http://schemas.microsoft.com/office/powerpoint/2012/main">
+        <p15:guide id="1" orient="horz" pos="2160">
+          <p15:clr>
+            <a:srgbClr val="A4A3A4"/>
+          </p15:clr>
+        </p15:guide>
+        <p15:guide id="2" pos="2880">
+          <p15:clr>
+            <a:srgbClr val="A4A3A4"/>
+          </p15:clr>
+        </p15:guide>
+      </p15:sldGuideLst>
+    </p:ext>
+  </p:extLst>
 </p:presentation>
+</file>
+
+<file path=ppt/notesMasters/notesMaster1.xml><?xml version="1.0" encoding="utf-8"?>
+<p:notesMaster xmlns:a="http://schemas.openxmlformats.org/drawingml/2006/main" xmlns:r="http://schemas.openxmlformats.org/officeDocument/2006/relationships" xmlns:p="http://schemas.openxmlformats.org/presentationml/2006/main">
+  <p:cSld>
+    <p:bg>
+      <p:bgRef idx="1001">
+        <a:schemeClr val="bg1"/>
+      </p:bgRef>
+    </p:bg>
+    <p:spTree>
+      <p:nvGrpSpPr>
+        <p:cNvPr id="1" name=""/>
+        <p:cNvGrpSpPr/>
+        <p:nvPr/>
+      </p:nvGrpSpPr>
+      <p:grpSpPr>
+        <a:xfrm>
+          <a:off x="0" y="0"/>
+          <a:ext cx="0" cy="0"/>
+          <a:chOff x="0" y="0"/>
+          <a:chExt cx="0" cy="0"/>
+        </a:xfrm>
+      </p:grpSpPr>
+      <p:sp>
+        <p:nvSpPr>
+          <p:cNvPr id="2" name="Header Placeholder 1"/>
+          <p:cNvSpPr>
+            <a:spLocks noGrp="1"/>
+          </p:cNvSpPr>
+          <p:nvPr>
+            <p:ph type="hdr" sz="quarter"/>
+          </p:nvPr>
+        </p:nvSpPr>
+        <p:spPr>
+          <a:xfrm>
+            <a:off x="0" y="0"/>
+            <a:ext cx="2971800" cy="458788"/>
+          </a:xfrm>
+          <a:prstGeom prst="rect">
+            <a:avLst/>
+          </a:prstGeom>
+        </p:spPr>
+        <p:txBody>
+          <a:bodyPr vert="horz" lIns="91440" tIns="45720" rIns="91440" bIns="45720" rtlCol="0"/>
+          <a:lstStyle>
+            <a:lvl1pPr algn="l">
+              <a:defRPr sz="1200"/>
+            </a:lvl1pPr>
+          </a:lstStyle>
+          <a:p>
+            <a:endParaRPr lang="en-SA"/>
+          </a:p>
+        </p:txBody>
+      </p:sp>
+      <p:sp>
+        <p:nvSpPr>
+          <p:cNvPr id="3" name="Date Placeholder 2"/>
+          <p:cNvSpPr>
+            <a:spLocks noGrp="1"/>
+          </p:cNvSpPr>
+          <p:nvPr>
+            <p:ph type="dt" idx="1"/>
+          </p:nvPr>
+        </p:nvSpPr>
+        <p:spPr>
+          <a:xfrm>
+            <a:off x="3884613" y="0"/>
+            <a:ext cx="2971800" cy="458788"/>
+          </a:xfrm>
+          <a:prstGeom prst="rect">
+            <a:avLst/>
+          </a:prstGeom>
+        </p:spPr>
+        <p:txBody>
+          <a:bodyPr vert="horz" lIns="91440" tIns="45720" rIns="91440" bIns="45720" rtlCol="0"/>
+          <a:lstStyle>
+            <a:lvl1pPr algn="r">
+              <a:defRPr sz="1200"/>
+            </a:lvl1pPr>
+          </a:lstStyle>
+          <a:p>
+            <a:fld id="{6CE73EDE-D943-EC48-94AE-705C34C002FD}" type="datetimeFigureOut">
+              <a:rPr lang="en-SA" smtClean="0"/>
+              <a:t>02/08/2026 R</a:t>
+            </a:fld>
+            <a:endParaRPr lang="en-SA"/>
+          </a:p>
+        </p:txBody>
+      </p:sp>
+      <p:sp>
+        <p:nvSpPr>
+          <p:cNvPr id="4" name="Slide Image Placeholder 3"/>
+          <p:cNvSpPr>
+            <a:spLocks noGrp="1" noRot="1" noChangeAspect="1"/>
+          </p:cNvSpPr>
+          <p:nvPr>
+            <p:ph type="sldImg" idx="2"/>
+          </p:nvPr>
+        </p:nvSpPr>
+        <p:spPr>
+          <a:xfrm>
+            <a:off x="685800" y="1143000"/>
+            <a:ext cx="5486400" cy="3086100"/>
+          </a:xfrm>
+          <a:prstGeom prst="rect">
+            <a:avLst/>
+          </a:prstGeom>
+          <a:noFill/>
+          <a:ln w="12700">
+            <a:solidFill>
+              <a:prstClr val="black"/>
+            </a:solidFill>
+          </a:ln>
+        </p:spPr>
+        <p:txBody>
+          <a:bodyPr vert="horz" lIns="91440" tIns="45720" rIns="91440" bIns="45720" rtlCol="0" anchor="ctr"/>
+          <a:lstStyle/>
+          <a:p>
+            <a:endParaRPr lang="en-SA"/>
+          </a:p>
+        </p:txBody>
+      </p:sp>
+      <p:sp>
+        <p:nvSpPr>
+          <p:cNvPr id="5" name="Notes Placeholder 4"/>
+          <p:cNvSpPr>
+            <a:spLocks noGrp="1"/>
+          </p:cNvSpPr>
+          <p:nvPr>
+            <p:ph type="body" sz="quarter" idx="3"/>
+          </p:nvPr>
+        </p:nvSpPr>
+        <p:spPr>
+          <a:xfrm>
+            <a:off x="685800" y="4400550"/>
+            <a:ext cx="5486400" cy="3600450"/>
+          </a:xfrm>
+          <a:prstGeom prst="rect">
+            <a:avLst/>
+          </a:prstGeom>
+        </p:spPr>
+        <p:txBody>
+          <a:bodyPr vert="horz" lIns="91440" tIns="45720" rIns="91440" bIns="45720" rtlCol="0"/>
+          <a:lstStyle/>
+          <a:p>
+            <a:pPr lvl="0"/>
+            <a:r>
+              <a:rPr lang="en-US"/>
+              <a:t>Click to edit Master text styles</a:t>
+            </a:r>
+          </a:p>
+          <a:p>
+            <a:pPr lvl="1"/>
+            <a:r>
+              <a:rPr lang="en-US"/>
+              <a:t>Second level</a:t>
+            </a:r>
+          </a:p>
+          <a:p>
+            <a:pPr lvl="2"/>
+            <a:r>
+              <a:rPr lang="en-US"/>
+              <a:t>Third level</a:t>
+            </a:r>
+          </a:p>
+          <a:p>
+            <a:pPr lvl="3"/>
+            <a:r>
+              <a:rPr lang="en-US"/>
+              <a:t>Fourth level</a:t>
+            </a:r>
+          </a:p>
+          <a:p>
+            <a:pPr lvl="4"/>
+            <a:r>
+              <a:rPr lang="en-US"/>
+              <a:t>Fifth level</a:t>
+            </a:r>
+            <a:endParaRPr lang="en-SA"/>
+          </a:p>
+        </p:txBody>
+      </p:sp>
+      <p:sp>
+        <p:nvSpPr>
+          <p:cNvPr id="6" name="Footer Placeholder 5"/>
+          <p:cNvSpPr>
+            <a:spLocks noGrp="1"/>
+          </p:cNvSpPr>
+          <p:nvPr>
+            <p:ph type="ftr" sz="quarter" idx="4"/>
+          </p:nvPr>
+        </p:nvSpPr>
+        <p:spPr>
+          <a:xfrm>
+            <a:off x="0" y="8685213"/>
+            <a:ext cx="2971800" cy="458787"/>
+          </a:xfrm>
+          <a:prstGeom prst="rect">
+            <a:avLst/>
+          </a:prstGeom>
+        </p:spPr>
+        <p:txBody>
+          <a:bodyPr vert="horz" lIns="91440" tIns="45720" rIns="91440" bIns="45720" rtlCol="0" anchor="b"/>
+          <a:lstStyle>
+            <a:lvl1pPr algn="l">
+              <a:defRPr sz="1200"/>
+            </a:lvl1pPr>
+          </a:lstStyle>
+          <a:p>
+            <a:endParaRPr lang="en-SA"/>
+          </a:p>
+        </p:txBody>
+      </p:sp>
+      <p:sp>
+        <p:nvSpPr>
+          <p:cNvPr id="7" name="Slide Number Placeholder 6"/>
+          <p:cNvSpPr>
+            <a:spLocks noGrp="1"/>
+          </p:cNvSpPr>
+          <p:nvPr>
+            <p:ph type="sldNum" sz="quarter" idx="5"/>
+          </p:nvPr>
+        </p:nvSpPr>
+        <p:spPr>
+          <a:xfrm>
+            <a:off x="3884613" y="8685213"/>
+            <a:ext cx="2971800" cy="458787"/>
+          </a:xfrm>
+          <a:prstGeom prst="rect">
+            <a:avLst/>
+          </a:prstGeom>
+        </p:spPr>
+        <p:txBody>
+          <a:bodyPr vert="horz" lIns="91440" tIns="45720" rIns="91440" bIns="45720" rtlCol="0" anchor="b"/>
+          <a:lstStyle>
+            <a:lvl1pPr algn="r">
+              <a:defRPr sz="1200"/>
+            </a:lvl1pPr>
+          </a:lstStyle>
+          <a:p>
+            <a:fld id="{3B6BF23D-E636-FB46-803B-29D3CD053FD1}" type="slidenum">
+              <a:rPr lang="en-SA" smtClean="0"/>
+              <a:t>‹#›</a:t>
+            </a:fld>
+            <a:endParaRPr lang="en-SA"/>
+          </a:p>
+        </p:txBody>
+      </p:sp>
+    </p:spTree>
+    <p:extLst>
+      <p:ext uri="{BB962C8B-B14F-4D97-AF65-F5344CB8AC3E}">
+        <p14:creationId xmlns:p14="http://schemas.microsoft.com/office/powerpoint/2010/main" val="3821006323"/>
+      </p:ext>
+    </p:extLst>
+  </p:cSld>
+  <p:clrMap bg1="lt1" tx1="dk1" bg2="lt2" tx2="dk2" accent1="accent1" accent2="accent2" accent3="accent3" accent4="accent4" accent5="accent5" accent6="accent6" hlink="hlink" folHlink="folHlink"/>
+  <p:notesStyle>
+    <a:lvl1pPr marL="0" algn="l" defTabSz="914400" rtl="0" eaLnBrk="1" latinLnBrk="0" hangingPunct="1">
+      <a:defRPr sz="1200" kern="1200">
+        <a:solidFill>
+          <a:schemeClr val="tx1"/>
+        </a:solidFill>
+        <a:latin typeface="+mn-lt"/>
+        <a:ea typeface="+mn-ea"/>
+        <a:cs typeface="+mn-cs"/>
+      </a:defRPr>
+    </a:lvl1pPr>
+    <a:lvl2pPr marL="457200" algn="l" defTabSz="914400" rtl="0" eaLnBrk="1" latinLnBrk="0" hangingPunct="1">
+      <a:defRPr sz="1200" kern="1200">
+        <a:solidFill>
+          <a:schemeClr val="tx1"/>
+        </a:solidFill>
+        <a:latin typeface="+mn-lt"/>
+        <a:ea typeface="+mn-ea"/>
+        <a:cs typeface="+mn-cs"/>
+      </a:defRPr>
+    </a:lvl2pPr>
+    <a:lvl3pPr marL="914400" algn="l" defTabSz="914400" rtl="0" eaLnBrk="1" latinLnBrk="0" hangingPunct="1">
+      <a:defRPr sz="1200" kern="1200">
+        <a:solidFill>
+          <a:schemeClr val="tx1"/>
+        </a:solidFill>
+        <a:latin typeface="+mn-lt"/>
+        <a:ea typeface="+mn-ea"/>
+        <a:cs typeface="+mn-cs"/>
+      </a:defRPr>
+    </a:lvl3pPr>
+    <a:lvl4pPr marL="1371600" algn="l" defTabSz="914400" rtl="0" eaLnBrk="1" latinLnBrk="0" hangingPunct="1">
+      <a:defRPr sz="1200" kern="1200">
+        <a:solidFill>
+          <a:schemeClr val="tx1"/>
+        </a:solidFill>
+        <a:latin typeface="+mn-lt"/>
+        <a:ea typeface="+mn-ea"/>
+        <a:cs typeface="+mn-cs"/>
+      </a:defRPr>
+    </a:lvl4pPr>
+    <a:lvl5pPr marL="1828800" algn="l" defTabSz="914400" rtl="0" eaLnBrk="1" latinLnBrk="0" hangingPunct="1">
+      <a:defRPr sz="1200" kern="1200">
+        <a:solidFill>
+          <a:schemeClr val="tx1"/>
+        </a:solidFill>
+        <a:latin typeface="+mn-lt"/>
+        <a:ea typeface="+mn-ea"/>
+        <a:cs typeface="+mn-cs"/>
+      </a:defRPr>
+    </a:lvl5pPr>
+    <a:lvl6pPr marL="2286000" algn="l" defTabSz="914400" rtl="0" eaLnBrk="1" latinLnBrk="0" hangingPunct="1">
+      <a:defRPr sz="1200" kern="1200">
+        <a:solidFill>
+          <a:schemeClr val="tx1"/>
+        </a:solidFill>
+        <a:latin typeface="+mn-lt"/>
+        <a:ea typeface="+mn-ea"/>
+        <a:cs typeface="+mn-cs"/>
+      </a:defRPr>
+    </a:lvl6pPr>
+    <a:lvl7pPr marL="2743200" algn="l" defTabSz="914400" rtl="0" eaLnBrk="1" latinLnBrk="0" hangingPunct="1">
+      <a:defRPr sz="1200" kern="1200">
+        <a:solidFill>
+          <a:schemeClr val="tx1"/>
+        </a:solidFill>
+        <a:latin typeface="+mn-lt"/>
+        <a:ea typeface="+mn-ea"/>
+        <a:cs typeface="+mn-cs"/>
+      </a:defRPr>
+    </a:lvl7pPr>
+    <a:lvl8pPr marL="3200400" algn="l" defTabSz="914400" rtl="0" eaLnBrk="1" latinLnBrk="0" hangingPunct="1">
+      <a:defRPr sz="1200" kern="1200">
+        <a:solidFill>
+          <a:schemeClr val="tx1"/>
+        </a:solidFill>
+        <a:latin typeface="+mn-lt"/>
+        <a:ea typeface="+mn-ea"/>
+        <a:cs typeface="+mn-cs"/>
+      </a:defRPr>
+    </a:lvl8pPr>
+    <a:lvl9pPr marL="3657600" algn="l" defTabSz="914400" rtl="0" eaLnBrk="1" latinLnBrk="0" hangingPunct="1">
+      <a:defRPr sz="1200" kern="1200">
+        <a:solidFill>
+          <a:schemeClr val="tx1"/>
+        </a:solidFill>
+        <a:latin typeface="+mn-lt"/>
+        <a:ea typeface="+mn-ea"/>
+        <a:cs typeface="+mn-cs"/>
+      </a:defRPr>
+    </a:lvl9pPr>
+  </p:notesStyle>
+</p:notesMaster>
+</file>
+
+<file path=ppt/notesSlides/notesSlide1.xml><?xml version="1.0" encoding="utf-8"?>
+<p:notes xmlns:a="http://schemas.openxmlformats.org/drawingml/2006/main" xmlns:r="http://schemas.openxmlformats.org/officeDocument/2006/relationships" xmlns:p="http://schemas.openxmlformats.org/presentationml/2006/main">
+  <p:cSld>
+    <p:spTree>
+      <p:nvGrpSpPr>
+        <p:cNvPr id="1" name=""/>
+        <p:cNvGrpSpPr/>
+        <p:nvPr/>
+      </p:nvGrpSpPr>
+      <p:grpSpPr>
+        <a:xfrm>
+          <a:off x="0" y="0"/>
+          <a:ext cx="0" cy="0"/>
+          <a:chOff x="0" y="0"/>
+          <a:chExt cx="0" cy="0"/>
+        </a:xfrm>
+      </p:grpSpPr>
+      <p:sp>
+        <p:nvSpPr>
+          <p:cNvPr id="2" name="Slide Image Placeholder 1"/>
+          <p:cNvSpPr>
+            <a:spLocks noGrp="1" noRot="1" noChangeAspect="1"/>
+          </p:cNvSpPr>
+          <p:nvPr>
+            <p:ph type="sldImg"/>
+          </p:nvPr>
+        </p:nvSpPr>
+        <p:spPr/>
+      </p:sp>
+      <p:sp>
+        <p:nvSpPr>
+          <p:cNvPr id="3" name="Notes Placeholder 2"/>
+          <p:cNvSpPr>
+            <a:spLocks noGrp="1"/>
+          </p:cNvSpPr>
+          <p:nvPr>
+            <p:ph type="body" idx="1"/>
+          </p:nvPr>
+        </p:nvSpPr>
+        <p:spPr/>
+        <p:txBody>
+          <a:bodyPr/>
+          <a:lstStyle/>
+          <a:p>
+            <a:pPr marL="0" algn="r" defTabSz="914400" rtl="1" eaLnBrk="1" latinLnBrk="0" hangingPunct="1"/>
+            <a:endParaRPr lang="en-SA" dirty="0"/>
+          </a:p>
+        </p:txBody>
+      </p:sp>
+      <p:sp>
+        <p:nvSpPr>
+          <p:cNvPr id="4" name="Slide Number Placeholder 3"/>
+          <p:cNvSpPr>
+            <a:spLocks noGrp="1"/>
+          </p:cNvSpPr>
+          <p:nvPr>
+            <p:ph type="sldNum" sz="quarter" idx="5"/>
+          </p:nvPr>
+        </p:nvSpPr>
+        <p:spPr/>
+        <p:txBody>
+          <a:bodyPr/>
+          <a:lstStyle/>
+          <a:p>
+            <a:fld id="{3B6BF23D-E636-FB46-803B-29D3CD053FD1}" type="slidenum">
+              <a:rPr lang="en-SA" smtClean="0"/>
+              <a:t>4</a:t>
+            </a:fld>
+            <a:endParaRPr lang="en-SA"/>
+          </a:p>
+        </p:txBody>
+      </p:sp>
+    </p:spTree>
+    <p:extLst>
+      <p:ext uri="{BB962C8B-B14F-4D97-AF65-F5344CB8AC3E}">
+        <p14:creationId xmlns:p14="http://schemas.microsoft.com/office/powerpoint/2010/main" val="1869617814"/>
+      </p:ext>
+    </p:extLst>
+  </p:cSld>
+  <p:clrMapOvr>
+    <a:masterClrMapping/>
+  </p:clrMapOvr>
+</p:notes>
 </file>
 
 <file path=ppt/slideLayouts/slideLayout1.xml><?xml version="1.0" encoding="utf-8"?>
@@ -223,10 +677,9 @@
           <a:lstStyle/>
           <a:p>
             <a:r>
-              <a:rPr lang="en-US" smtClean="0"/>
+              <a:rPr lang="en-US"/>
               <a:t>Click to edit Master title style</a:t>
             </a:r>
-            <a:endParaRPr lang="en-US"/>
           </a:p>
         </p:txBody>
       </p:sp>
@@ -342,10 +795,9 @@
           </a:lstStyle>
           <a:p>
             <a:r>
-              <a:rPr lang="en-US" smtClean="0"/>
+              <a:rPr lang="en-US"/>
               <a:t>Click to edit Master subtitle style</a:t>
             </a:r>
-            <a:endParaRPr lang="en-US"/>
           </a:p>
         </p:txBody>
       </p:sp>
@@ -366,7 +818,7 @@
           <a:p>
             <a:fld id="{5BCAD085-E8A6-8845-BD4E-CB4CCA059FC4}" type="datetimeFigureOut">
               <a:rPr lang="en-US" smtClean="0"/>
-              <a:t>1/27/13</a:t>
+              <a:t>8/2/26</a:t>
             </a:fld>
             <a:endParaRPr lang="en-US"/>
           </a:p>
@@ -460,10 +912,9 @@
           <a:lstStyle/>
           <a:p>
             <a:r>
-              <a:rPr lang="en-US" smtClean="0"/>
+              <a:rPr lang="en-US"/>
               <a:t>Click to edit Master title style</a:t>
             </a:r>
-            <a:endParaRPr lang="en-US"/>
           </a:p>
         </p:txBody>
       </p:sp>
@@ -484,38 +935,37 @@
           <a:p>
             <a:pPr lvl="0"/>
             <a:r>
-              <a:rPr lang="en-US" smtClean="0"/>
+              <a:rPr lang="en-US"/>
               <a:t>Click to edit Master text styles</a:t>
             </a:r>
           </a:p>
           <a:p>
             <a:pPr lvl="1"/>
             <a:r>
-              <a:rPr lang="en-US" smtClean="0"/>
+              <a:rPr lang="en-US"/>
               <a:t>Second level</a:t>
             </a:r>
           </a:p>
           <a:p>
             <a:pPr lvl="2"/>
             <a:r>
-              <a:rPr lang="en-US" smtClean="0"/>
+              <a:rPr lang="en-US"/>
               <a:t>Third level</a:t>
             </a:r>
           </a:p>
           <a:p>
             <a:pPr lvl="3"/>
             <a:r>
-              <a:rPr lang="en-US" smtClean="0"/>
+              <a:rPr lang="en-US"/>
               <a:t>Fourth level</a:t>
             </a:r>
           </a:p>
           <a:p>
             <a:pPr lvl="4"/>
             <a:r>
-              <a:rPr lang="en-US" smtClean="0"/>
+              <a:rPr lang="en-US"/>
               <a:t>Fifth level</a:t>
             </a:r>
-            <a:endParaRPr lang="en-US"/>
           </a:p>
         </p:txBody>
       </p:sp>
@@ -536,7 +986,7 @@
           <a:p>
             <a:fld id="{5BCAD085-E8A6-8845-BD4E-CB4CCA059FC4}" type="datetimeFigureOut">
               <a:rPr lang="en-US" smtClean="0"/>
-              <a:t>1/27/13</a:t>
+              <a:t>8/2/26</a:t>
             </a:fld>
             <a:endParaRPr lang="en-US"/>
           </a:p>
@@ -635,10 +1085,9 @@
           <a:lstStyle/>
           <a:p>
             <a:r>
-              <a:rPr lang="en-US" smtClean="0"/>
+              <a:rPr lang="en-US"/>
               <a:t>Click to edit Master title style</a:t>
             </a:r>
-            <a:endParaRPr lang="en-US"/>
           </a:p>
         </p:txBody>
       </p:sp>
@@ -664,38 +1113,37 @@
           <a:p>
             <a:pPr lvl="0"/>
             <a:r>
-              <a:rPr lang="en-US" smtClean="0"/>
+              <a:rPr lang="en-US"/>
               <a:t>Click to edit Master text styles</a:t>
             </a:r>
           </a:p>
           <a:p>
             <a:pPr lvl="1"/>
             <a:r>
-              <a:rPr lang="en-US" smtClean="0"/>
+              <a:rPr lang="en-US"/>
               <a:t>Second level</a:t>
             </a:r>
           </a:p>
           <a:p>
             <a:pPr lvl="2"/>
             <a:r>
-              <a:rPr lang="en-US" smtClean="0"/>
+              <a:rPr lang="en-US"/>
               <a:t>Third level</a:t>
             </a:r>
           </a:p>
           <a:p>
             <a:pPr lvl="3"/>
             <a:r>
-              <a:rPr lang="en-US" smtClean="0"/>
+              <a:rPr lang="en-US"/>
               <a:t>Fourth level</a:t>
             </a:r>
           </a:p>
           <a:p>
             <a:pPr lvl="4"/>
             <a:r>
-              <a:rPr lang="en-US" smtClean="0"/>
+              <a:rPr lang="en-US"/>
               <a:t>Fifth level</a:t>
             </a:r>
-            <a:endParaRPr lang="en-US"/>
           </a:p>
         </p:txBody>
       </p:sp>
@@ -716,7 +1164,7 @@
           <a:p>
             <a:fld id="{5BCAD085-E8A6-8845-BD4E-CB4CCA059FC4}" type="datetimeFigureOut">
               <a:rPr lang="en-US" smtClean="0"/>
-              <a:t>1/27/13</a:t>
+              <a:t>8/2/26</a:t>
             </a:fld>
             <a:endParaRPr lang="en-US"/>
           </a:p>
@@ -810,10 +1258,9 @@
           <a:lstStyle/>
           <a:p>
             <a:r>
-              <a:rPr lang="en-US" smtClean="0"/>
+              <a:rPr lang="en-US"/>
               <a:t>Click to edit Master title style</a:t>
             </a:r>
-            <a:endParaRPr lang="en-US"/>
           </a:p>
         </p:txBody>
       </p:sp>
@@ -834,38 +1281,37 @@
           <a:p>
             <a:pPr lvl="0"/>
             <a:r>
-              <a:rPr lang="en-US" smtClean="0"/>
+              <a:rPr lang="en-US"/>
               <a:t>Click to edit Master text styles</a:t>
             </a:r>
           </a:p>
           <a:p>
             <a:pPr lvl="1"/>
             <a:r>
-              <a:rPr lang="en-US" smtClean="0"/>
+              <a:rPr lang="en-US"/>
               <a:t>Second level</a:t>
             </a:r>
           </a:p>
           <a:p>
             <a:pPr lvl="2"/>
             <a:r>
-              <a:rPr lang="en-US" smtClean="0"/>
+              <a:rPr lang="en-US"/>
               <a:t>Third level</a:t>
             </a:r>
           </a:p>
           <a:p>
             <a:pPr lvl="3"/>
             <a:r>
-              <a:rPr lang="en-US" smtClean="0"/>
+              <a:rPr lang="en-US"/>
               <a:t>Fourth level</a:t>
             </a:r>
           </a:p>
           <a:p>
             <a:pPr lvl="4"/>
             <a:r>
-              <a:rPr lang="en-US" smtClean="0"/>
+              <a:rPr lang="en-US"/>
               <a:t>Fifth level</a:t>
             </a:r>
-            <a:endParaRPr lang="en-US"/>
           </a:p>
         </p:txBody>
       </p:sp>
@@ -886,7 +1332,7 @@
           <a:p>
             <a:fld id="{5BCAD085-E8A6-8845-BD4E-CB4CCA059FC4}" type="datetimeFigureOut">
               <a:rPr lang="en-US" smtClean="0"/>
-              <a:t>1/27/13</a:t>
+              <a:t>8/2/26</a:t>
             </a:fld>
             <a:endParaRPr lang="en-US"/>
           </a:p>
@@ -989,10 +1435,9 @@
           </a:lstStyle>
           <a:p>
             <a:r>
-              <a:rPr lang="en-US" smtClean="0"/>
+              <a:rPr lang="en-US"/>
               <a:t>Click to edit Master title style</a:t>
             </a:r>
-            <a:endParaRPr lang="en-US"/>
           </a:p>
         </p:txBody>
       </p:sp>
@@ -1109,7 +1554,7 @@
           <a:p>
             <a:pPr lvl="0"/>
             <a:r>
-              <a:rPr lang="en-US" smtClean="0"/>
+              <a:rPr lang="en-US"/>
               <a:t>Click to edit Master text styles</a:t>
             </a:r>
           </a:p>
@@ -1132,7 +1577,7 @@
           <a:p>
             <a:fld id="{5BCAD085-E8A6-8845-BD4E-CB4CCA059FC4}" type="datetimeFigureOut">
               <a:rPr lang="en-US" smtClean="0"/>
-              <a:t>1/27/13</a:t>
+              <a:t>8/2/26</a:t>
             </a:fld>
             <a:endParaRPr lang="en-US"/>
           </a:p>
@@ -1226,10 +1671,9 @@
           <a:lstStyle/>
           <a:p>
             <a:r>
-              <a:rPr lang="en-US" smtClean="0"/>
+              <a:rPr lang="en-US"/>
               <a:t>Click to edit Master title style</a:t>
             </a:r>
-            <a:endParaRPr lang="en-US"/>
           </a:p>
         </p:txBody>
       </p:sp>
@@ -1283,38 +1727,37 @@
           <a:p>
             <a:pPr lvl="0"/>
             <a:r>
-              <a:rPr lang="en-US" smtClean="0"/>
+              <a:rPr lang="en-US"/>
               <a:t>Click to edit Master text styles</a:t>
             </a:r>
           </a:p>
           <a:p>
             <a:pPr lvl="1"/>
             <a:r>
-              <a:rPr lang="en-US" smtClean="0"/>
+              <a:rPr lang="en-US"/>
               <a:t>Second level</a:t>
             </a:r>
           </a:p>
           <a:p>
             <a:pPr lvl="2"/>
             <a:r>
-              <a:rPr lang="en-US" smtClean="0"/>
+              <a:rPr lang="en-US"/>
               <a:t>Third level</a:t>
             </a:r>
           </a:p>
           <a:p>
             <a:pPr lvl="3"/>
             <a:r>
-              <a:rPr lang="en-US" smtClean="0"/>
+              <a:rPr lang="en-US"/>
               <a:t>Fourth level</a:t>
             </a:r>
           </a:p>
           <a:p>
             <a:pPr lvl="4"/>
             <a:r>
-              <a:rPr lang="en-US" smtClean="0"/>
+              <a:rPr lang="en-US"/>
               <a:t>Fifth level</a:t>
             </a:r>
-            <a:endParaRPr lang="en-US"/>
           </a:p>
         </p:txBody>
       </p:sp>
@@ -1368,38 +1811,37 @@
           <a:p>
             <a:pPr lvl="0"/>
             <a:r>
-              <a:rPr lang="en-US" smtClean="0"/>
+              <a:rPr lang="en-US"/>
               <a:t>Click to edit Master text styles</a:t>
             </a:r>
           </a:p>
           <a:p>
             <a:pPr lvl="1"/>
             <a:r>
-              <a:rPr lang="en-US" smtClean="0"/>
+              <a:rPr lang="en-US"/>
               <a:t>Second level</a:t>
             </a:r>
           </a:p>
           <a:p>
             <a:pPr lvl="2"/>
             <a:r>
-              <a:rPr lang="en-US" smtClean="0"/>
+              <a:rPr lang="en-US"/>
               <a:t>Third level</a:t>
             </a:r>
           </a:p>
           <a:p>
             <a:pPr lvl="3"/>
             <a:r>
-              <a:rPr lang="en-US" smtClean="0"/>
+              <a:rPr lang="en-US"/>
               <a:t>Fourth level</a:t>
             </a:r>
           </a:p>
           <a:p>
             <a:pPr lvl="4"/>
             <a:r>
-              <a:rPr lang="en-US" smtClean="0"/>
+              <a:rPr lang="en-US"/>
               <a:t>Fifth level</a:t>
             </a:r>
-            <a:endParaRPr lang="en-US"/>
           </a:p>
         </p:txBody>
       </p:sp>
@@ -1420,7 +1862,7 @@
           <a:p>
             <a:fld id="{5BCAD085-E8A6-8845-BD4E-CB4CCA059FC4}" type="datetimeFigureOut">
               <a:rPr lang="en-US" smtClean="0"/>
-              <a:t>1/27/13</a:t>
+              <a:t>8/2/26</a:t>
             </a:fld>
             <a:endParaRPr lang="en-US"/>
           </a:p>
@@ -1518,10 +1960,9 @@
           </a:lstStyle>
           <a:p>
             <a:r>
-              <a:rPr lang="en-US" smtClean="0"/>
+              <a:rPr lang="en-US"/>
               <a:t>Click to edit Master title style</a:t>
             </a:r>
-            <a:endParaRPr lang="en-US"/>
           </a:p>
         </p:txBody>
       </p:sp>
@@ -1584,7 +2025,7 @@
           <a:p>
             <a:pPr lvl="0"/>
             <a:r>
-              <a:rPr lang="en-US" smtClean="0"/>
+              <a:rPr lang="en-US"/>
               <a:t>Click to edit Master text styles</a:t>
             </a:r>
           </a:p>
@@ -1640,38 +2081,37 @@
           <a:p>
             <a:pPr lvl="0"/>
             <a:r>
-              <a:rPr lang="en-US" smtClean="0"/>
+              <a:rPr lang="en-US"/>
               <a:t>Click to edit Master text styles</a:t>
             </a:r>
           </a:p>
           <a:p>
             <a:pPr lvl="1"/>
             <a:r>
-              <a:rPr lang="en-US" smtClean="0"/>
+              <a:rPr lang="en-US"/>
               <a:t>Second level</a:t>
             </a:r>
           </a:p>
           <a:p>
             <a:pPr lvl="2"/>
             <a:r>
-              <a:rPr lang="en-US" smtClean="0"/>
+              <a:rPr lang="en-US"/>
               <a:t>Third level</a:t>
             </a:r>
           </a:p>
           <a:p>
             <a:pPr lvl="3"/>
             <a:r>
-              <a:rPr lang="en-US" smtClean="0"/>
+              <a:rPr lang="en-US"/>
               <a:t>Fourth level</a:t>
             </a:r>
           </a:p>
           <a:p>
             <a:pPr lvl="4"/>
             <a:r>
-              <a:rPr lang="en-US" smtClean="0"/>
+              <a:rPr lang="en-US"/>
               <a:t>Fifth level</a:t>
             </a:r>
-            <a:endParaRPr lang="en-US"/>
           </a:p>
         </p:txBody>
       </p:sp>
@@ -1734,7 +2174,7 @@
           <a:p>
             <a:pPr lvl="0"/>
             <a:r>
-              <a:rPr lang="en-US" smtClean="0"/>
+              <a:rPr lang="en-US"/>
               <a:t>Click to edit Master text styles</a:t>
             </a:r>
           </a:p>
@@ -1790,38 +2230,37 @@
           <a:p>
             <a:pPr lvl="0"/>
             <a:r>
-              <a:rPr lang="en-US" smtClean="0"/>
+              <a:rPr lang="en-US"/>
               <a:t>Click to edit Master text styles</a:t>
             </a:r>
           </a:p>
           <a:p>
             <a:pPr lvl="1"/>
             <a:r>
-              <a:rPr lang="en-US" smtClean="0"/>
+              <a:rPr lang="en-US"/>
               <a:t>Second level</a:t>
             </a:r>
           </a:p>
           <a:p>
             <a:pPr lvl="2"/>
             <a:r>
-              <a:rPr lang="en-US" smtClean="0"/>
+              <a:rPr lang="en-US"/>
               <a:t>Third level</a:t>
             </a:r>
           </a:p>
           <a:p>
             <a:pPr lvl="3"/>
             <a:r>
-              <a:rPr lang="en-US" smtClean="0"/>
+              <a:rPr lang="en-US"/>
               <a:t>Fourth level</a:t>
             </a:r>
           </a:p>
           <a:p>
             <a:pPr lvl="4"/>
             <a:r>
-              <a:rPr lang="en-US" smtClean="0"/>
+              <a:rPr lang="en-US"/>
               <a:t>Fifth level</a:t>
             </a:r>
-            <a:endParaRPr lang="en-US"/>
           </a:p>
         </p:txBody>
       </p:sp>
@@ -1842,7 +2281,7 @@
           <a:p>
             <a:fld id="{5BCAD085-E8A6-8845-BD4E-CB4CCA059FC4}" type="datetimeFigureOut">
               <a:rPr lang="en-US" smtClean="0"/>
-              <a:t>1/27/13</a:t>
+              <a:t>8/2/26</a:t>
             </a:fld>
             <a:endParaRPr lang="en-US"/>
           </a:p>
@@ -1936,10 +2375,9 @@
           <a:lstStyle/>
           <a:p>
             <a:r>
-              <a:rPr lang="en-US" smtClean="0"/>
+              <a:rPr lang="en-US"/>
               <a:t>Click to edit Master title style</a:t>
             </a:r>
-            <a:endParaRPr lang="en-US"/>
           </a:p>
         </p:txBody>
       </p:sp>
@@ -1960,7 +2398,7 @@
           <a:p>
             <a:fld id="{5BCAD085-E8A6-8845-BD4E-CB4CCA059FC4}" type="datetimeFigureOut">
               <a:rPr lang="en-US" smtClean="0"/>
-              <a:t>1/27/13</a:t>
+              <a:t>8/2/26</a:t>
             </a:fld>
             <a:endParaRPr lang="en-US"/>
           </a:p>
@@ -2055,7 +2493,7 @@
           <a:p>
             <a:fld id="{5BCAD085-E8A6-8845-BD4E-CB4CCA059FC4}" type="datetimeFigureOut">
               <a:rPr lang="en-US" smtClean="0"/>
-              <a:t>1/27/13</a:t>
+              <a:t>8/2/26</a:t>
             </a:fld>
             <a:endParaRPr lang="en-US"/>
           </a:p>
@@ -2158,10 +2596,9 @@
           </a:lstStyle>
           <a:p>
             <a:r>
-              <a:rPr lang="en-US" smtClean="0"/>
+              <a:rPr lang="en-US"/>
               <a:t>Click to edit Master title style</a:t>
             </a:r>
-            <a:endParaRPr lang="en-US"/>
           </a:p>
         </p:txBody>
       </p:sp>
@@ -2215,38 +2652,37 @@
           <a:p>
             <a:pPr lvl="0"/>
             <a:r>
-              <a:rPr lang="en-US" smtClean="0"/>
+              <a:rPr lang="en-US"/>
               <a:t>Click to edit Master text styles</a:t>
             </a:r>
           </a:p>
           <a:p>
             <a:pPr lvl="1"/>
             <a:r>
-              <a:rPr lang="en-US" smtClean="0"/>
+              <a:rPr lang="en-US"/>
               <a:t>Second level</a:t>
             </a:r>
           </a:p>
           <a:p>
             <a:pPr lvl="2"/>
             <a:r>
-              <a:rPr lang="en-US" smtClean="0"/>
+              <a:rPr lang="en-US"/>
               <a:t>Third level</a:t>
             </a:r>
           </a:p>
           <a:p>
             <a:pPr lvl="3"/>
             <a:r>
-              <a:rPr lang="en-US" smtClean="0"/>
+              <a:rPr lang="en-US"/>
               <a:t>Fourth level</a:t>
             </a:r>
           </a:p>
           <a:p>
             <a:pPr lvl="4"/>
             <a:r>
-              <a:rPr lang="en-US" smtClean="0"/>
+              <a:rPr lang="en-US"/>
               <a:t>Fifth level</a:t>
             </a:r>
-            <a:endParaRPr lang="en-US"/>
           </a:p>
         </p:txBody>
       </p:sp>
@@ -2309,7 +2745,7 @@
           <a:p>
             <a:pPr lvl="0"/>
             <a:r>
-              <a:rPr lang="en-US" smtClean="0"/>
+              <a:rPr lang="en-US"/>
               <a:t>Click to edit Master text styles</a:t>
             </a:r>
           </a:p>
@@ -2332,7 +2768,7 @@
           <a:p>
             <a:fld id="{5BCAD085-E8A6-8845-BD4E-CB4CCA059FC4}" type="datetimeFigureOut">
               <a:rPr lang="en-US" smtClean="0"/>
-              <a:t>1/27/13</a:t>
+              <a:t>8/2/26</a:t>
             </a:fld>
             <a:endParaRPr lang="en-US"/>
           </a:p>
@@ -2435,10 +2871,9 @@
           </a:lstStyle>
           <a:p>
             <a:r>
-              <a:rPr lang="en-US" smtClean="0"/>
+              <a:rPr lang="en-US"/>
               <a:t>Click to edit Master title style</a:t>
             </a:r>
-            <a:endParaRPr lang="en-US"/>
           </a:p>
         </p:txBody>
       </p:sp>
@@ -2562,7 +2997,7 @@
           <a:p>
             <a:pPr lvl="0"/>
             <a:r>
-              <a:rPr lang="en-US" smtClean="0"/>
+              <a:rPr lang="en-US"/>
               <a:t>Click to edit Master text styles</a:t>
             </a:r>
           </a:p>
@@ -2585,7 +3020,7 @@
           <a:p>
             <a:fld id="{5BCAD085-E8A6-8845-BD4E-CB4CCA059FC4}" type="datetimeFigureOut">
               <a:rPr lang="en-US" smtClean="0"/>
-              <a:t>1/27/13</a:t>
+              <a:t>8/2/26</a:t>
             </a:fld>
             <a:endParaRPr lang="en-US"/>
           </a:p>
@@ -2694,10 +3129,9 @@
           <a:lstStyle/>
           <a:p>
             <a:r>
-              <a:rPr lang="en-US" smtClean="0"/>
+              <a:rPr lang="en-US"/>
               <a:t>Click to edit Master title style</a:t>
             </a:r>
-            <a:endParaRPr lang="en-US"/>
           </a:p>
         </p:txBody>
       </p:sp>
@@ -2728,38 +3162,37 @@
           <a:p>
             <a:pPr lvl="0"/>
             <a:r>
-              <a:rPr lang="en-US" smtClean="0"/>
+              <a:rPr lang="en-US"/>
               <a:t>Click to edit Master text styles</a:t>
             </a:r>
           </a:p>
           <a:p>
             <a:pPr lvl="1"/>
             <a:r>
-              <a:rPr lang="en-US" smtClean="0"/>
+              <a:rPr lang="en-US"/>
               <a:t>Second level</a:t>
             </a:r>
           </a:p>
           <a:p>
             <a:pPr lvl="2"/>
             <a:r>
-              <a:rPr lang="en-US" smtClean="0"/>
+              <a:rPr lang="en-US"/>
               <a:t>Third level</a:t>
             </a:r>
           </a:p>
           <a:p>
             <a:pPr lvl="3"/>
             <a:r>
-              <a:rPr lang="en-US" smtClean="0"/>
+              <a:rPr lang="en-US"/>
               <a:t>Fourth level</a:t>
             </a:r>
           </a:p>
           <a:p>
             <a:pPr lvl="4"/>
             <a:r>
-              <a:rPr lang="en-US" smtClean="0"/>
+              <a:rPr lang="en-US"/>
               <a:t>Fifth level</a:t>
             </a:r>
-            <a:endParaRPr lang="en-US"/>
           </a:p>
         </p:txBody>
       </p:sp>
@@ -2798,7 +3231,7 @@
           <a:p>
             <a:fld id="{5BCAD085-E8A6-8845-BD4E-CB4CCA059FC4}" type="datetimeFigureOut">
               <a:rPr lang="en-US" smtClean="0"/>
-              <a:t>1/27/13</a:t>
+              <a:t>8/2/26</a:t>
             </a:fld>
             <a:endParaRPr lang="en-US"/>
           </a:p>
@@ -3157,7 +3590,7 @@
 </file>
 
 <file path=ppt/slides/slide1.xml><?xml version="1.0" encoding="utf-8"?>
-<p:sld xmlns:a="http://schemas.openxmlformats.org/drawingml/2006/main" xmlns:p="http://schemas.openxmlformats.org/presentationml/2006/main" xmlns:r="http://schemas.openxmlformats.org/officeDocument/2006/relationships">
+<p:sld xmlns:a="http://schemas.openxmlformats.org/drawingml/2006/main" xmlns:r="http://schemas.openxmlformats.org/officeDocument/2006/relationships" xmlns:p="http://schemas.openxmlformats.org/presentationml/2006/main">
   <p:cSld>
     <p:bg>
       <p:bgPr>
@@ -3173,7 +3606,14 @@
         <p:cNvGrpSpPr/>
         <p:nvPr/>
       </p:nvGrpSpPr>
-      <p:grpSpPr/>
+      <p:grpSpPr>
+        <a:xfrm>
+          <a:off x="0" y="0"/>
+          <a:ext cx="0" cy="0"/>
+          <a:chOff x="0" y="0"/>
+          <a:chExt cx="0" cy="0"/>
+        </a:xfrm>
+      </p:grpSpPr>
       <p:sp>
         <p:nvSpPr>
           <p:cNvPr id="2" name="Rectangle 1"/>
@@ -3215,6 +3655,7 @@
           <a:lstStyle/>
           <a:p>
             <a:pPr algn="ctr"/>
+            <a:endParaRPr/>
           </a:p>
         </p:txBody>
       </p:sp>
@@ -3339,7 +3780,7 @@
                 <a:srgbClr val="9E59CD"/>
               </a:gs>
             </a:gsLst>
-            <a:lin scaled="0" ang="0"/>
+            <a:lin ang="0" scaled="0"/>
           </a:gradFill>
           <a:ln>
             <a:noFill/>
@@ -3365,6 +3806,7 @@
           <a:lstStyle/>
           <a:p>
             <a:pPr algn="ctr"/>
+            <a:endParaRPr/>
           </a:p>
         </p:txBody>
       </p:sp>
@@ -3488,7 +3930,7 @@
 </file>
 
 <file path=ppt/slides/slide10.xml><?xml version="1.0" encoding="utf-8"?>
-<p:sld xmlns:a="http://schemas.openxmlformats.org/drawingml/2006/main" xmlns:p="http://schemas.openxmlformats.org/presentationml/2006/main" xmlns:r="http://schemas.openxmlformats.org/officeDocument/2006/relationships">
+<p:sld xmlns:a="http://schemas.openxmlformats.org/drawingml/2006/main" xmlns:r="http://schemas.openxmlformats.org/officeDocument/2006/relationships" xmlns:p="http://schemas.openxmlformats.org/presentationml/2006/main">
   <p:cSld>
     <p:bg>
       <p:bgPr>
@@ -3504,7 +3946,14 @@
         <p:cNvGrpSpPr/>
         <p:nvPr/>
       </p:nvGrpSpPr>
-      <p:grpSpPr/>
+      <p:grpSpPr>
+        <a:xfrm>
+          <a:off x="0" y="0"/>
+          <a:ext cx="0" cy="0"/>
+          <a:chOff x="0" y="0"/>
+          <a:chExt cx="0" cy="0"/>
+        </a:xfrm>
+      </p:grpSpPr>
       <p:sp>
         <p:nvSpPr>
           <p:cNvPr id="2" name="Rectangle 1"/>
@@ -3546,6 +3995,7 @@
           <a:lstStyle/>
           <a:p>
             <a:pPr algn="ctr"/>
+            <a:endParaRPr/>
           </a:p>
         </p:txBody>
       </p:sp>
@@ -3651,6 +4101,7 @@
           <a:lstStyle/>
           <a:p>
             <a:pPr algn="ctr"/>
+            <a:endParaRPr/>
           </a:p>
         </p:txBody>
       </p:sp>
@@ -3747,10 +4198,34 @@
                 <a:tableStyleId>{5C22544A-7EE6-4342-B048-85BDC9FD1C3A}</a:tableStyleId>
               </a:tblPr>
               <a:tblGrid>
-                <a:gridCol w="2743200"/>
-                <a:gridCol w="2743200"/>
-                <a:gridCol w="2743200"/>
-                <a:gridCol w="2743200"/>
+                <a:gridCol w="2743200">
+                  <a:extLst>
+                    <a:ext uri="{9D8B030D-6E8A-4147-A177-3AD203B41FA5}">
+                      <a16:colId xmlns:a16="http://schemas.microsoft.com/office/drawing/2014/main" val="20000"/>
+                    </a:ext>
+                  </a:extLst>
+                </a:gridCol>
+                <a:gridCol w="2743200">
+                  <a:extLst>
+                    <a:ext uri="{9D8B030D-6E8A-4147-A177-3AD203B41FA5}">
+                      <a16:colId xmlns:a16="http://schemas.microsoft.com/office/drawing/2014/main" val="20001"/>
+                    </a:ext>
+                  </a:extLst>
+                </a:gridCol>
+                <a:gridCol w="2743200">
+                  <a:extLst>
+                    <a:ext uri="{9D8B030D-6E8A-4147-A177-3AD203B41FA5}">
+                      <a16:colId xmlns:a16="http://schemas.microsoft.com/office/drawing/2014/main" val="20002"/>
+                    </a:ext>
+                  </a:extLst>
+                </a:gridCol>
+                <a:gridCol w="2743200">
+                  <a:extLst>
+                    <a:ext uri="{9D8B030D-6E8A-4147-A177-3AD203B41FA5}">
+                      <a16:colId xmlns:a16="http://schemas.microsoft.com/office/drawing/2014/main" val="20003"/>
+                    </a:ext>
+                  </a:extLst>
+                </a:gridCol>
               </a:tblGrid>
               <a:tr h="475488">
                 <a:tc>
@@ -3845,6 +4320,11 @@
                     </a:solidFill>
                   </a:tcPr>
                 </a:tc>
+                <a:extLst>
+                  <a:ext uri="{0D108BD9-81ED-4DB2-BD59-A6C34878D82A}">
+                    <a16:rowId xmlns:a16="http://schemas.microsoft.com/office/drawing/2014/main" val="10000"/>
+                  </a:ext>
+                </a:extLst>
               </a:tr>
               <a:tr h="475488">
                 <a:tc>
@@ -3939,6 +4419,11 @@
                     </a:solidFill>
                   </a:tcPr>
                 </a:tc>
+                <a:extLst>
+                  <a:ext uri="{0D108BD9-81ED-4DB2-BD59-A6C34878D82A}">
+                    <a16:rowId xmlns:a16="http://schemas.microsoft.com/office/drawing/2014/main" val="10001"/>
+                  </a:ext>
+                </a:extLst>
               </a:tr>
               <a:tr h="475488">
                 <a:tc>
@@ -4033,6 +4518,11 @@
                     </a:solidFill>
                   </a:tcPr>
                 </a:tc>
+                <a:extLst>
+                  <a:ext uri="{0D108BD9-81ED-4DB2-BD59-A6C34878D82A}">
+                    <a16:rowId xmlns:a16="http://schemas.microsoft.com/office/drawing/2014/main" val="10002"/>
+                  </a:ext>
+                </a:extLst>
               </a:tr>
               <a:tr h="475488">
                 <a:tc>
@@ -4127,6 +4617,11 @@
                     </a:solidFill>
                   </a:tcPr>
                 </a:tc>
+                <a:extLst>
+                  <a:ext uri="{0D108BD9-81ED-4DB2-BD59-A6C34878D82A}">
+                    <a16:rowId xmlns:a16="http://schemas.microsoft.com/office/drawing/2014/main" val="10003"/>
+                  </a:ext>
+                </a:extLst>
               </a:tr>
             </a:tbl>
           </a:graphicData>
@@ -4175,6 +4670,7 @@
           <a:lstStyle/>
           <a:p>
             <a:pPr algn="ctr"/>
+            <a:endParaRPr/>
           </a:p>
         </p:txBody>
       </p:sp>
@@ -4256,6 +4752,7 @@
           <a:lstStyle/>
           <a:p>
             <a:pPr algn="ctr"/>
+            <a:endParaRPr/>
           </a:p>
         </p:txBody>
       </p:sp>
@@ -4342,7 +4839,7 @@
 </file>
 
 <file path=ppt/slides/slide11.xml><?xml version="1.0" encoding="utf-8"?>
-<p:sld xmlns:a="http://schemas.openxmlformats.org/drawingml/2006/main" xmlns:p="http://schemas.openxmlformats.org/presentationml/2006/main" xmlns:r="http://schemas.openxmlformats.org/officeDocument/2006/relationships">
+<p:sld xmlns:a="http://schemas.openxmlformats.org/drawingml/2006/main" xmlns:r="http://schemas.openxmlformats.org/officeDocument/2006/relationships" xmlns:p="http://schemas.openxmlformats.org/presentationml/2006/main">
   <p:cSld>
     <p:bg>
       <p:bgPr>
@@ -4358,7 +4855,14 @@
         <p:cNvGrpSpPr/>
         <p:nvPr/>
       </p:nvGrpSpPr>
-      <p:grpSpPr/>
+      <p:grpSpPr>
+        <a:xfrm>
+          <a:off x="0" y="0"/>
+          <a:ext cx="0" cy="0"/>
+          <a:chOff x="0" y="0"/>
+          <a:chExt cx="0" cy="0"/>
+        </a:xfrm>
+      </p:grpSpPr>
       <p:sp>
         <p:nvSpPr>
           <p:cNvPr id="2" name="Rectangle 1"/>
@@ -4400,6 +4904,7 @@
           <a:lstStyle/>
           <a:p>
             <a:pPr algn="ctr"/>
+            <a:endParaRPr/>
           </a:p>
         </p:txBody>
       </p:sp>
@@ -4505,6 +5010,7 @@
           <a:lstStyle/>
           <a:p>
             <a:pPr algn="ctr"/>
+            <a:endParaRPr/>
           </a:p>
         </p:txBody>
       </p:sp>
@@ -4625,6 +5131,7 @@
           <a:lstStyle/>
           <a:p>
             <a:pPr algn="ctr"/>
+            <a:endParaRPr/>
           </a:p>
         </p:txBody>
       </p:sp>
@@ -4965,6 +5472,7 @@
           <a:lstStyle/>
           <a:p>
             <a:pPr algn="ctr"/>
+            <a:endParaRPr/>
           </a:p>
         </p:txBody>
       </p:sp>
@@ -5051,7 +5559,7 @@
 </file>
 
 <file path=ppt/slides/slide12.xml><?xml version="1.0" encoding="utf-8"?>
-<p:sld xmlns:a="http://schemas.openxmlformats.org/drawingml/2006/main" xmlns:p="http://schemas.openxmlformats.org/presentationml/2006/main" xmlns:r="http://schemas.openxmlformats.org/officeDocument/2006/relationships">
+<p:sld xmlns:a="http://schemas.openxmlformats.org/drawingml/2006/main" xmlns:r="http://schemas.openxmlformats.org/officeDocument/2006/relationships" xmlns:p="http://schemas.openxmlformats.org/presentationml/2006/main">
   <p:cSld>
     <p:bg>
       <p:bgPr>
@@ -5067,7 +5575,14 @@
         <p:cNvGrpSpPr/>
         <p:nvPr/>
       </p:nvGrpSpPr>
-      <p:grpSpPr/>
+      <p:grpSpPr>
+        <a:xfrm>
+          <a:off x="0" y="0"/>
+          <a:ext cx="0" cy="0"/>
+          <a:chOff x="0" y="0"/>
+          <a:chExt cx="0" cy="0"/>
+        </a:xfrm>
+      </p:grpSpPr>
       <p:sp>
         <p:nvSpPr>
           <p:cNvPr id="2" name="Rectangle 1"/>
@@ -5109,6 +5624,7 @@
           <a:lstStyle/>
           <a:p>
             <a:pPr algn="ctr"/>
+            <a:endParaRPr/>
           </a:p>
         </p:txBody>
       </p:sp>
@@ -5214,6 +5730,7 @@
           <a:lstStyle/>
           <a:p>
             <a:pPr algn="ctr"/>
+            <a:endParaRPr/>
           </a:p>
         </p:txBody>
       </p:sp>
@@ -5334,6 +5851,7 @@
           <a:lstStyle/>
           <a:p>
             <a:pPr algn="ctr"/>
+            <a:endParaRPr/>
           </a:p>
         </p:txBody>
       </p:sp>
@@ -5417,6 +5935,7 @@
           <a:lstStyle/>
           <a:p>
             <a:pPr algn="ctr"/>
+            <a:endParaRPr/>
           </a:p>
         </p:txBody>
       </p:sp>
@@ -5781,6 +6300,7 @@
           <a:lstStyle/>
           <a:p>
             <a:pPr algn="ctr"/>
+            <a:endParaRPr/>
           </a:p>
         </p:txBody>
       </p:sp>
@@ -5867,7 +6387,7 @@
 </file>
 
 <file path=ppt/slides/slide13.xml><?xml version="1.0" encoding="utf-8"?>
-<p:sld xmlns:a="http://schemas.openxmlformats.org/drawingml/2006/main" xmlns:p="http://schemas.openxmlformats.org/presentationml/2006/main" xmlns:r="http://schemas.openxmlformats.org/officeDocument/2006/relationships">
+<p:sld xmlns:a="http://schemas.openxmlformats.org/drawingml/2006/main" xmlns:r="http://schemas.openxmlformats.org/officeDocument/2006/relationships" xmlns:p="http://schemas.openxmlformats.org/presentationml/2006/main">
   <p:cSld>
     <p:bg>
       <p:bgPr>
@@ -5883,7 +6403,14 @@
         <p:cNvGrpSpPr/>
         <p:nvPr/>
       </p:nvGrpSpPr>
-      <p:grpSpPr/>
+      <p:grpSpPr>
+        <a:xfrm>
+          <a:off x="0" y="0"/>
+          <a:ext cx="0" cy="0"/>
+          <a:chOff x="0" y="0"/>
+          <a:chExt cx="0" cy="0"/>
+        </a:xfrm>
+      </p:grpSpPr>
       <p:sp>
         <p:nvSpPr>
           <p:cNvPr id="2" name="Rectangle 1"/>
@@ -5925,6 +6452,7 @@
           <a:lstStyle/>
           <a:p>
             <a:pPr algn="ctr"/>
+            <a:endParaRPr/>
           </a:p>
         </p:txBody>
       </p:sp>
@@ -6030,6 +6558,7 @@
           <a:lstStyle/>
           <a:p>
             <a:pPr algn="ctr"/>
+            <a:endParaRPr/>
           </a:p>
         </p:txBody>
       </p:sp>
@@ -6150,6 +6679,7 @@
           <a:lstStyle/>
           <a:p>
             <a:pPr algn="ctr"/>
+            <a:endParaRPr/>
           </a:p>
         </p:txBody>
       </p:sp>
@@ -6233,6 +6763,7 @@
           <a:lstStyle/>
           <a:p>
             <a:pPr algn="ctr"/>
+            <a:endParaRPr/>
           </a:p>
         </p:txBody>
       </p:sp>
@@ -6525,6 +7056,7 @@
           <a:lstStyle/>
           <a:p>
             <a:pPr algn="ctr"/>
+            <a:endParaRPr/>
           </a:p>
         </p:txBody>
       </p:sp>
@@ -6630,6 +7162,7 @@
           <a:lstStyle/>
           <a:p>
             <a:pPr algn="ctr"/>
+            <a:endParaRPr/>
           </a:p>
         </p:txBody>
       </p:sp>
@@ -6716,7 +7249,7 @@
 </file>
 
 <file path=ppt/slides/slide14.xml><?xml version="1.0" encoding="utf-8"?>
-<p:sld xmlns:a="http://schemas.openxmlformats.org/drawingml/2006/main" xmlns:p="http://schemas.openxmlformats.org/presentationml/2006/main" xmlns:r="http://schemas.openxmlformats.org/officeDocument/2006/relationships">
+<p:sld xmlns:a="http://schemas.openxmlformats.org/drawingml/2006/main" xmlns:r="http://schemas.openxmlformats.org/officeDocument/2006/relationships" xmlns:p="http://schemas.openxmlformats.org/presentationml/2006/main">
   <p:cSld>
     <p:bg>
       <p:bgPr>
@@ -6732,7 +7265,14 @@
         <p:cNvGrpSpPr/>
         <p:nvPr/>
       </p:nvGrpSpPr>
-      <p:grpSpPr/>
+      <p:grpSpPr>
+        <a:xfrm>
+          <a:off x="0" y="0"/>
+          <a:ext cx="0" cy="0"/>
+          <a:chOff x="0" y="0"/>
+          <a:chExt cx="0" cy="0"/>
+        </a:xfrm>
+      </p:grpSpPr>
       <p:sp>
         <p:nvSpPr>
           <p:cNvPr id="2" name="Rectangle 1"/>
@@ -6774,6 +7314,7 @@
           <a:lstStyle/>
           <a:p>
             <a:pPr algn="ctr"/>
+            <a:endParaRPr/>
           </a:p>
         </p:txBody>
       </p:sp>
@@ -6879,6 +7420,7 @@
           <a:lstStyle/>
           <a:p>
             <a:pPr algn="ctr"/>
+            <a:endParaRPr/>
           </a:p>
         </p:txBody>
       </p:sp>
@@ -6999,6 +7541,7 @@
           <a:lstStyle/>
           <a:p>
             <a:pPr algn="ctr"/>
+            <a:endParaRPr/>
           </a:p>
         </p:txBody>
       </p:sp>
@@ -7082,6 +7625,7 @@
           <a:lstStyle/>
           <a:p>
             <a:pPr algn="ctr"/>
+            <a:endParaRPr/>
           </a:p>
         </p:txBody>
       </p:sp>
@@ -7374,6 +7918,7 @@
           <a:lstStyle/>
           <a:p>
             <a:pPr algn="ctr"/>
+            <a:endParaRPr/>
           </a:p>
         </p:txBody>
       </p:sp>
@@ -7479,6 +8024,7 @@
           <a:lstStyle/>
           <a:p>
             <a:pPr algn="ctr"/>
+            <a:endParaRPr/>
           </a:p>
         </p:txBody>
       </p:sp>
@@ -7565,7 +8111,7 @@
 </file>
 
 <file path=ppt/slides/slide15.xml><?xml version="1.0" encoding="utf-8"?>
-<p:sld xmlns:a="http://schemas.openxmlformats.org/drawingml/2006/main" xmlns:p="http://schemas.openxmlformats.org/presentationml/2006/main" xmlns:r="http://schemas.openxmlformats.org/officeDocument/2006/relationships">
+<p:sld xmlns:a="http://schemas.openxmlformats.org/drawingml/2006/main" xmlns:r="http://schemas.openxmlformats.org/officeDocument/2006/relationships" xmlns:p="http://schemas.openxmlformats.org/presentationml/2006/main">
   <p:cSld>
     <p:bg>
       <p:bgPr>
@@ -7581,7 +8127,14 @@
         <p:cNvGrpSpPr/>
         <p:nvPr/>
       </p:nvGrpSpPr>
-      <p:grpSpPr/>
+      <p:grpSpPr>
+        <a:xfrm>
+          <a:off x="0" y="0"/>
+          <a:ext cx="0" cy="0"/>
+          <a:chOff x="0" y="0"/>
+          <a:chExt cx="0" cy="0"/>
+        </a:xfrm>
+      </p:grpSpPr>
       <p:sp>
         <p:nvSpPr>
           <p:cNvPr id="2" name="Rectangle 1"/>
@@ -7623,6 +8176,7 @@
           <a:lstStyle/>
           <a:p>
             <a:pPr algn="ctr"/>
+            <a:endParaRPr/>
           </a:p>
         </p:txBody>
       </p:sp>
@@ -7728,6 +8282,7 @@
           <a:lstStyle/>
           <a:p>
             <a:pPr algn="ctr"/>
+            <a:endParaRPr/>
           </a:p>
         </p:txBody>
       </p:sp>
@@ -7848,6 +8403,7 @@
           <a:lstStyle/>
           <a:p>
             <a:pPr algn="ctr"/>
+            <a:endParaRPr/>
           </a:p>
         </p:txBody>
       </p:sp>
@@ -8079,6 +8635,7 @@
           <a:lstStyle/>
           <a:p>
             <a:pPr algn="ctr"/>
+            <a:endParaRPr/>
           </a:p>
         </p:txBody>
       </p:sp>
@@ -8184,6 +8741,7 @@
           <a:lstStyle/>
           <a:p>
             <a:pPr algn="ctr"/>
+            <a:endParaRPr/>
           </a:p>
         </p:txBody>
       </p:sp>
@@ -8270,7 +8828,7 @@
 </file>
 
 <file path=ppt/slides/slide16.xml><?xml version="1.0" encoding="utf-8"?>
-<p:sld xmlns:a="http://schemas.openxmlformats.org/drawingml/2006/main" xmlns:p="http://schemas.openxmlformats.org/presentationml/2006/main" xmlns:r="http://schemas.openxmlformats.org/officeDocument/2006/relationships">
+<p:sld xmlns:a="http://schemas.openxmlformats.org/drawingml/2006/main" xmlns:r="http://schemas.openxmlformats.org/officeDocument/2006/relationships" xmlns:p="http://schemas.openxmlformats.org/presentationml/2006/main">
   <p:cSld>
     <p:bg>
       <p:bgPr>
@@ -8286,7 +8844,14 @@
         <p:cNvGrpSpPr/>
         <p:nvPr/>
       </p:nvGrpSpPr>
-      <p:grpSpPr/>
+      <p:grpSpPr>
+        <a:xfrm>
+          <a:off x="0" y="0"/>
+          <a:ext cx="0" cy="0"/>
+          <a:chOff x="0" y="0"/>
+          <a:chExt cx="0" cy="0"/>
+        </a:xfrm>
+      </p:grpSpPr>
       <p:sp>
         <p:nvSpPr>
           <p:cNvPr id="2" name="Rectangle 1"/>
@@ -8328,6 +8893,7 @@
           <a:lstStyle/>
           <a:p>
             <a:pPr algn="ctr"/>
+            <a:endParaRPr/>
           </a:p>
         </p:txBody>
       </p:sp>
@@ -8433,6 +8999,7 @@
           <a:lstStyle/>
           <a:p>
             <a:pPr algn="ctr"/>
+            <a:endParaRPr/>
           </a:p>
         </p:txBody>
       </p:sp>
@@ -8553,6 +9120,7 @@
           <a:lstStyle/>
           <a:p>
             <a:pPr algn="ctr"/>
+            <a:endParaRPr/>
           </a:p>
         </p:txBody>
       </p:sp>
@@ -8636,6 +9204,7 @@
           <a:lstStyle/>
           <a:p>
             <a:pPr algn="ctr"/>
+            <a:endParaRPr/>
           </a:p>
         </p:txBody>
       </p:sp>
@@ -8889,6 +9458,7 @@
           <a:lstStyle/>
           <a:p>
             <a:pPr algn="ctr"/>
+            <a:endParaRPr/>
           </a:p>
         </p:txBody>
       </p:sp>
@@ -8975,7 +9545,7 @@
 </file>
 
 <file path=ppt/slides/slide17.xml><?xml version="1.0" encoding="utf-8"?>
-<p:sld xmlns:a="http://schemas.openxmlformats.org/drawingml/2006/main" xmlns:p="http://schemas.openxmlformats.org/presentationml/2006/main" xmlns:r="http://schemas.openxmlformats.org/officeDocument/2006/relationships">
+<p:sld xmlns:a="http://schemas.openxmlformats.org/drawingml/2006/main" xmlns:r="http://schemas.openxmlformats.org/officeDocument/2006/relationships" xmlns:p="http://schemas.openxmlformats.org/presentationml/2006/main">
   <p:cSld>
     <p:bg>
       <p:bgPr>
@@ -8991,7 +9561,14 @@
         <p:cNvGrpSpPr/>
         <p:nvPr/>
       </p:nvGrpSpPr>
-      <p:grpSpPr/>
+      <p:grpSpPr>
+        <a:xfrm>
+          <a:off x="0" y="0"/>
+          <a:ext cx="0" cy="0"/>
+          <a:chOff x="0" y="0"/>
+          <a:chExt cx="0" cy="0"/>
+        </a:xfrm>
+      </p:grpSpPr>
       <p:sp>
         <p:nvSpPr>
           <p:cNvPr id="2" name="Rectangle 1"/>
@@ -9033,6 +9610,7 @@
           <a:lstStyle/>
           <a:p>
             <a:pPr algn="ctr"/>
+            <a:endParaRPr/>
           </a:p>
         </p:txBody>
       </p:sp>
@@ -9138,6 +9716,7 @@
           <a:lstStyle/>
           <a:p>
             <a:pPr algn="ctr"/>
+            <a:endParaRPr/>
           </a:p>
         </p:txBody>
       </p:sp>
@@ -9258,6 +9837,7 @@
           <a:lstStyle/>
           <a:p>
             <a:pPr algn="ctr"/>
+            <a:endParaRPr/>
           </a:p>
         </p:txBody>
       </p:sp>
@@ -9341,6 +9921,7 @@
           <a:lstStyle/>
           <a:p>
             <a:pPr algn="ctr"/>
+            <a:endParaRPr/>
           </a:p>
         </p:txBody>
       </p:sp>
@@ -9631,6 +10212,7 @@
           <a:lstStyle/>
           <a:p>
             <a:pPr algn="ctr"/>
+            <a:endParaRPr/>
           </a:p>
         </p:txBody>
       </p:sp>
@@ -9717,7 +10299,7 @@
 </file>
 
 <file path=ppt/slides/slide18.xml><?xml version="1.0" encoding="utf-8"?>
-<p:sld xmlns:a="http://schemas.openxmlformats.org/drawingml/2006/main" xmlns:p="http://schemas.openxmlformats.org/presentationml/2006/main" xmlns:r="http://schemas.openxmlformats.org/officeDocument/2006/relationships">
+<p:sld xmlns:a="http://schemas.openxmlformats.org/drawingml/2006/main" xmlns:r="http://schemas.openxmlformats.org/officeDocument/2006/relationships" xmlns:p="http://schemas.openxmlformats.org/presentationml/2006/main">
   <p:cSld>
     <p:bg>
       <p:bgPr>
@@ -9733,7 +10315,14 @@
         <p:cNvGrpSpPr/>
         <p:nvPr/>
       </p:nvGrpSpPr>
-      <p:grpSpPr/>
+      <p:grpSpPr>
+        <a:xfrm>
+          <a:off x="0" y="0"/>
+          <a:ext cx="0" cy="0"/>
+          <a:chOff x="0" y="0"/>
+          <a:chExt cx="0" cy="0"/>
+        </a:xfrm>
+      </p:grpSpPr>
       <p:sp>
         <p:nvSpPr>
           <p:cNvPr id="2" name="Rectangle 1"/>
@@ -9775,6 +10364,7 @@
           <a:lstStyle/>
           <a:p>
             <a:pPr algn="ctr"/>
+            <a:endParaRPr/>
           </a:p>
         </p:txBody>
       </p:sp>
@@ -9880,6 +10470,7 @@
           <a:lstStyle/>
           <a:p>
             <a:pPr algn="ctr"/>
+            <a:endParaRPr/>
           </a:p>
         </p:txBody>
       </p:sp>
@@ -9967,7 +10558,7 @@
         </p:nvGraphicFramePr>
         <p:xfrm>
           <a:off x="548640" y="2057400"/>
-          <a:ext cx="10972800" cy="1426464"/>
+          <a:ext cx="10972800" cy="1450848"/>
         </p:xfrm>
         <a:graphic>
           <a:graphicData uri="http://schemas.openxmlformats.org/drawingml/2006/table">
@@ -9976,8 +10567,20 @@
                 <a:tableStyleId>{5C22544A-7EE6-4342-B048-85BDC9FD1C3A}</a:tableStyleId>
               </a:tblPr>
               <a:tblGrid>
-                <a:gridCol w="5486400"/>
-                <a:gridCol w="5486400"/>
+                <a:gridCol w="5486400">
+                  <a:extLst>
+                    <a:ext uri="{9D8B030D-6E8A-4147-A177-3AD203B41FA5}">
+                      <a16:colId xmlns:a16="http://schemas.microsoft.com/office/drawing/2014/main" val="20000"/>
+                    </a:ext>
+                  </a:extLst>
+                </a:gridCol>
+                <a:gridCol w="5486400">
+                  <a:extLst>
+                    <a:ext uri="{9D8B030D-6E8A-4147-A177-3AD203B41FA5}">
+                      <a16:colId xmlns:a16="http://schemas.microsoft.com/office/drawing/2014/main" val="20001"/>
+                    </a:ext>
+                  </a:extLst>
+                </a:gridCol>
               </a:tblGrid>
               <a:tr h="475488">
                 <a:tc>
@@ -10026,6 +10629,11 @@
                     </a:solidFill>
                   </a:tcPr>
                 </a:tc>
+                <a:extLst>
+                  <a:ext uri="{0D108BD9-81ED-4DB2-BD59-A6C34878D82A}">
+                    <a16:rowId xmlns:a16="http://schemas.microsoft.com/office/drawing/2014/main" val="10000"/>
+                  </a:ext>
+                </a:extLst>
               </a:tr>
               <a:tr h="475488">
                 <a:tc>
@@ -10074,6 +10682,11 @@
                     </a:solidFill>
                   </a:tcPr>
                 </a:tc>
+                <a:extLst>
+                  <a:ext uri="{0D108BD9-81ED-4DB2-BD59-A6C34878D82A}">
+                    <a16:rowId xmlns:a16="http://schemas.microsoft.com/office/drawing/2014/main" val="10001"/>
+                  </a:ext>
+                </a:extLst>
               </a:tr>
               <a:tr h="475488">
                 <a:tc>
@@ -10122,6 +10735,11 @@
                     </a:solidFill>
                   </a:tcPr>
                 </a:tc>
+                <a:extLst>
+                  <a:ext uri="{0D108BD9-81ED-4DB2-BD59-A6C34878D82A}">
+                    <a16:rowId xmlns:a16="http://schemas.microsoft.com/office/drawing/2014/main" val="10002"/>
+                  </a:ext>
+                </a:extLst>
               </a:tr>
             </a:tbl>
           </a:graphicData>
@@ -10170,6 +10788,7 @@
           <a:lstStyle/>
           <a:p>
             <a:pPr algn="ctr"/>
+            <a:endParaRPr/>
           </a:p>
         </p:txBody>
       </p:sp>
@@ -10251,6 +10870,7 @@
           <a:lstStyle/>
           <a:p>
             <a:pPr algn="ctr"/>
+            <a:endParaRPr/>
           </a:p>
         </p:txBody>
       </p:sp>
@@ -10337,7 +10957,7 @@
 </file>
 
 <file path=ppt/slides/slide19.xml><?xml version="1.0" encoding="utf-8"?>
-<p:sld xmlns:a="http://schemas.openxmlformats.org/drawingml/2006/main" xmlns:p="http://schemas.openxmlformats.org/presentationml/2006/main" xmlns:r="http://schemas.openxmlformats.org/officeDocument/2006/relationships">
+<p:sld xmlns:a="http://schemas.openxmlformats.org/drawingml/2006/main" xmlns:r="http://schemas.openxmlformats.org/officeDocument/2006/relationships" xmlns:p="http://schemas.openxmlformats.org/presentationml/2006/main">
   <p:cSld>
     <p:bg>
       <p:bgPr>
@@ -10353,7 +10973,14 @@
         <p:cNvGrpSpPr/>
         <p:nvPr/>
       </p:nvGrpSpPr>
-      <p:grpSpPr/>
+      <p:grpSpPr>
+        <a:xfrm>
+          <a:off x="0" y="0"/>
+          <a:ext cx="0" cy="0"/>
+          <a:chOff x="0" y="0"/>
+          <a:chExt cx="0" cy="0"/>
+        </a:xfrm>
+      </p:grpSpPr>
       <p:sp>
         <p:nvSpPr>
           <p:cNvPr id="2" name="Rectangle 1"/>
@@ -10395,6 +11022,7 @@
           <a:lstStyle/>
           <a:p>
             <a:pPr algn="ctr"/>
+            <a:endParaRPr/>
           </a:p>
         </p:txBody>
       </p:sp>
@@ -10500,6 +11128,7 @@
           <a:lstStyle/>
           <a:p>
             <a:pPr algn="ctr"/>
+            <a:endParaRPr/>
           </a:p>
         </p:txBody>
       </p:sp>
@@ -10620,6 +11249,7 @@
           <a:lstStyle/>
           <a:p>
             <a:pPr algn="ctr"/>
+            <a:endParaRPr/>
           </a:p>
         </p:txBody>
       </p:sp>
@@ -10960,6 +11590,7 @@
           <a:lstStyle/>
           <a:p>
             <a:pPr algn="ctr"/>
+            <a:endParaRPr/>
           </a:p>
         </p:txBody>
       </p:sp>
@@ -11046,7 +11677,7 @@
 </file>
 
 <file path=ppt/slides/slide2.xml><?xml version="1.0" encoding="utf-8"?>
-<p:sld xmlns:a="http://schemas.openxmlformats.org/drawingml/2006/main" xmlns:p="http://schemas.openxmlformats.org/presentationml/2006/main" xmlns:r="http://schemas.openxmlformats.org/officeDocument/2006/relationships">
+<p:sld xmlns:a="http://schemas.openxmlformats.org/drawingml/2006/main" xmlns:r="http://schemas.openxmlformats.org/officeDocument/2006/relationships" xmlns:p="http://schemas.openxmlformats.org/presentationml/2006/main">
   <p:cSld>
     <p:bg>
       <p:bgPr>
@@ -11062,7 +11693,14 @@
         <p:cNvGrpSpPr/>
         <p:nvPr/>
       </p:nvGrpSpPr>
-      <p:grpSpPr/>
+      <p:grpSpPr>
+        <a:xfrm>
+          <a:off x="0" y="0"/>
+          <a:ext cx="0" cy="0"/>
+          <a:chOff x="0" y="0"/>
+          <a:chExt cx="0" cy="0"/>
+        </a:xfrm>
+      </p:grpSpPr>
       <p:sp>
         <p:nvSpPr>
           <p:cNvPr id="2" name="Rectangle 1"/>
@@ -11104,6 +11742,7 @@
           <a:lstStyle/>
           <a:p>
             <a:pPr algn="ctr"/>
+            <a:endParaRPr/>
           </a:p>
         </p:txBody>
       </p:sp>
@@ -11209,6 +11848,7 @@
           <a:lstStyle/>
           <a:p>
             <a:pPr algn="ctr"/>
+            <a:endParaRPr/>
           </a:p>
         </p:txBody>
       </p:sp>
@@ -11364,6 +12004,7 @@
           <a:lstStyle/>
           <a:p>
             <a:pPr algn="ctr"/>
+            <a:endParaRPr/>
           </a:p>
         </p:txBody>
       </p:sp>
@@ -11482,6 +12123,7 @@
           <a:lstStyle/>
           <a:p>
             <a:pPr algn="ctr"/>
+            <a:endParaRPr/>
           </a:p>
         </p:txBody>
       </p:sp>
@@ -11933,6 +12575,7 @@
           <a:lstStyle/>
           <a:p>
             <a:pPr algn="ctr"/>
+            <a:endParaRPr/>
           </a:p>
         </p:txBody>
       </p:sp>
@@ -12088,6 +12731,7 @@
           <a:lstStyle/>
           <a:p>
             <a:pPr algn="ctr"/>
+            <a:endParaRPr/>
           </a:p>
         </p:txBody>
       </p:sp>
@@ -12613,6 +13257,7 @@
           <a:lstStyle/>
           <a:p>
             <a:pPr algn="ctr"/>
+            <a:endParaRPr/>
           </a:p>
         </p:txBody>
       </p:sp>
@@ -12879,6 +13524,7 @@
           <a:lstStyle/>
           <a:p>
             <a:pPr algn="ctr"/>
+            <a:endParaRPr/>
           </a:p>
         </p:txBody>
       </p:sp>
@@ -12965,7 +13611,7 @@
 </file>
 
 <file path=ppt/slides/slide20.xml><?xml version="1.0" encoding="utf-8"?>
-<p:sld xmlns:a="http://schemas.openxmlformats.org/drawingml/2006/main" xmlns:p="http://schemas.openxmlformats.org/presentationml/2006/main" xmlns:r="http://schemas.openxmlformats.org/officeDocument/2006/relationships">
+<p:sld xmlns:a="http://schemas.openxmlformats.org/drawingml/2006/main" xmlns:r="http://schemas.openxmlformats.org/officeDocument/2006/relationships" xmlns:p="http://schemas.openxmlformats.org/presentationml/2006/main">
   <p:cSld>
     <p:bg>
       <p:bgPr>
@@ -12981,7 +13627,14 @@
         <p:cNvGrpSpPr/>
         <p:nvPr/>
       </p:nvGrpSpPr>
-      <p:grpSpPr/>
+      <p:grpSpPr>
+        <a:xfrm>
+          <a:off x="0" y="0"/>
+          <a:ext cx="0" cy="0"/>
+          <a:chOff x="0" y="0"/>
+          <a:chExt cx="0" cy="0"/>
+        </a:xfrm>
+      </p:grpSpPr>
       <p:sp>
         <p:nvSpPr>
           <p:cNvPr id="2" name="Rectangle 1"/>
@@ -13023,6 +13676,7 @@
           <a:lstStyle/>
           <a:p>
             <a:pPr algn="ctr"/>
+            <a:endParaRPr/>
           </a:p>
         </p:txBody>
       </p:sp>
@@ -13128,6 +13782,7 @@
           <a:lstStyle/>
           <a:p>
             <a:pPr algn="ctr"/>
+            <a:endParaRPr/>
           </a:p>
         </p:txBody>
       </p:sp>
@@ -13248,6 +13903,7 @@
           <a:lstStyle/>
           <a:p>
             <a:pPr algn="ctr"/>
+            <a:endParaRPr/>
           </a:p>
         </p:txBody>
       </p:sp>
@@ -13331,6 +13987,7 @@
           <a:lstStyle/>
           <a:p>
             <a:pPr algn="ctr"/>
+            <a:endParaRPr/>
           </a:p>
         </p:txBody>
       </p:sp>
@@ -13584,6 +14241,7 @@
           <a:lstStyle/>
           <a:p>
             <a:pPr algn="ctr"/>
+            <a:endParaRPr/>
           </a:p>
         </p:txBody>
       </p:sp>
@@ -13670,7 +14328,7 @@
 </file>
 
 <file path=ppt/slides/slide21.xml><?xml version="1.0" encoding="utf-8"?>
-<p:sld xmlns:a="http://schemas.openxmlformats.org/drawingml/2006/main" xmlns:p="http://schemas.openxmlformats.org/presentationml/2006/main" xmlns:r="http://schemas.openxmlformats.org/officeDocument/2006/relationships">
+<p:sld xmlns:a="http://schemas.openxmlformats.org/drawingml/2006/main" xmlns:r="http://schemas.openxmlformats.org/officeDocument/2006/relationships" xmlns:p="http://schemas.openxmlformats.org/presentationml/2006/main">
   <p:cSld>
     <p:bg>
       <p:bgPr>
@@ -13686,7 +14344,14 @@
         <p:cNvGrpSpPr/>
         <p:nvPr/>
       </p:nvGrpSpPr>
-      <p:grpSpPr/>
+      <p:grpSpPr>
+        <a:xfrm>
+          <a:off x="0" y="0"/>
+          <a:ext cx="0" cy="0"/>
+          <a:chOff x="0" y="0"/>
+          <a:chExt cx="0" cy="0"/>
+        </a:xfrm>
+      </p:grpSpPr>
       <p:sp>
         <p:nvSpPr>
           <p:cNvPr id="2" name="Rectangle 1"/>
@@ -13728,6 +14393,7 @@
           <a:lstStyle/>
           <a:p>
             <a:pPr algn="ctr"/>
+            <a:endParaRPr/>
           </a:p>
         </p:txBody>
       </p:sp>
@@ -13833,6 +14499,7 @@
           <a:lstStyle/>
           <a:p>
             <a:pPr algn="ctr"/>
+            <a:endParaRPr/>
           </a:p>
         </p:txBody>
       </p:sp>
@@ -13920,7 +14587,7 @@
         </p:nvGraphicFramePr>
         <p:xfrm>
           <a:off x="548640" y="2057400"/>
-          <a:ext cx="10972800" cy="1426464"/>
+          <a:ext cx="10972800" cy="1438656"/>
         </p:xfrm>
         <a:graphic>
           <a:graphicData uri="http://schemas.openxmlformats.org/drawingml/2006/table">
@@ -13929,11 +14596,41 @@
                 <a:tableStyleId>{5C22544A-7EE6-4342-B048-85BDC9FD1C3A}</a:tableStyleId>
               </a:tblPr>
               <a:tblGrid>
-                <a:gridCol w="2194560"/>
-                <a:gridCol w="2194560"/>
-                <a:gridCol w="2194560"/>
-                <a:gridCol w="2194560"/>
-                <a:gridCol w="2194560"/>
+                <a:gridCol w="2194560">
+                  <a:extLst>
+                    <a:ext uri="{9D8B030D-6E8A-4147-A177-3AD203B41FA5}">
+                      <a16:colId xmlns:a16="http://schemas.microsoft.com/office/drawing/2014/main" val="20000"/>
+                    </a:ext>
+                  </a:extLst>
+                </a:gridCol>
+                <a:gridCol w="2194560">
+                  <a:extLst>
+                    <a:ext uri="{9D8B030D-6E8A-4147-A177-3AD203B41FA5}">
+                      <a16:colId xmlns:a16="http://schemas.microsoft.com/office/drawing/2014/main" val="20001"/>
+                    </a:ext>
+                  </a:extLst>
+                </a:gridCol>
+                <a:gridCol w="2194560">
+                  <a:extLst>
+                    <a:ext uri="{9D8B030D-6E8A-4147-A177-3AD203B41FA5}">
+                      <a16:colId xmlns:a16="http://schemas.microsoft.com/office/drawing/2014/main" val="20002"/>
+                    </a:ext>
+                  </a:extLst>
+                </a:gridCol>
+                <a:gridCol w="2194560">
+                  <a:extLst>
+                    <a:ext uri="{9D8B030D-6E8A-4147-A177-3AD203B41FA5}">
+                      <a16:colId xmlns:a16="http://schemas.microsoft.com/office/drawing/2014/main" val="20003"/>
+                    </a:ext>
+                  </a:extLst>
+                </a:gridCol>
+                <a:gridCol w="2194560">
+                  <a:extLst>
+                    <a:ext uri="{9D8B030D-6E8A-4147-A177-3AD203B41FA5}">
+                      <a16:colId xmlns:a16="http://schemas.microsoft.com/office/drawing/2014/main" val="20004"/>
+                    </a:ext>
+                  </a:extLst>
+                </a:gridCol>
               </a:tblGrid>
               <a:tr h="475488">
                 <a:tc>
@@ -14051,6 +14748,11 @@
                     </a:solidFill>
                   </a:tcPr>
                 </a:tc>
+                <a:extLst>
+                  <a:ext uri="{0D108BD9-81ED-4DB2-BD59-A6C34878D82A}">
+                    <a16:rowId xmlns:a16="http://schemas.microsoft.com/office/drawing/2014/main" val="10000"/>
+                  </a:ext>
+                </a:extLst>
               </a:tr>
               <a:tr h="475488">
                 <a:tc>
@@ -14168,6 +14870,11 @@
                     </a:solidFill>
                   </a:tcPr>
                 </a:tc>
+                <a:extLst>
+                  <a:ext uri="{0D108BD9-81ED-4DB2-BD59-A6C34878D82A}">
+                    <a16:rowId xmlns:a16="http://schemas.microsoft.com/office/drawing/2014/main" val="10001"/>
+                  </a:ext>
+                </a:extLst>
               </a:tr>
               <a:tr h="475488">
                 <a:tc>
@@ -14285,6 +14992,11 @@
                     </a:solidFill>
                   </a:tcPr>
                 </a:tc>
+                <a:extLst>
+                  <a:ext uri="{0D108BD9-81ED-4DB2-BD59-A6C34878D82A}">
+                    <a16:rowId xmlns:a16="http://schemas.microsoft.com/office/drawing/2014/main" val="10002"/>
+                  </a:ext>
+                </a:extLst>
               </a:tr>
             </a:tbl>
           </a:graphicData>
@@ -14333,6 +15045,7 @@
           <a:lstStyle/>
           <a:p>
             <a:pPr algn="ctr"/>
+            <a:endParaRPr/>
           </a:p>
         </p:txBody>
       </p:sp>
@@ -14414,6 +15127,7 @@
           <a:lstStyle/>
           <a:p>
             <a:pPr algn="ctr"/>
+            <a:endParaRPr/>
           </a:p>
         </p:txBody>
       </p:sp>
@@ -14500,7 +15214,7 @@
 </file>
 
 <file path=ppt/slides/slide22.xml><?xml version="1.0" encoding="utf-8"?>
-<p:sld xmlns:a="http://schemas.openxmlformats.org/drawingml/2006/main" xmlns:p="http://schemas.openxmlformats.org/presentationml/2006/main" xmlns:r="http://schemas.openxmlformats.org/officeDocument/2006/relationships">
+<p:sld xmlns:a="http://schemas.openxmlformats.org/drawingml/2006/main" xmlns:r="http://schemas.openxmlformats.org/officeDocument/2006/relationships" xmlns:p="http://schemas.openxmlformats.org/presentationml/2006/main">
   <p:cSld>
     <p:bg>
       <p:bgPr>
@@ -14516,7 +15230,14 @@
         <p:cNvGrpSpPr/>
         <p:nvPr/>
       </p:nvGrpSpPr>
-      <p:grpSpPr/>
+      <p:grpSpPr>
+        <a:xfrm>
+          <a:off x="0" y="0"/>
+          <a:ext cx="0" cy="0"/>
+          <a:chOff x="0" y="0"/>
+          <a:chExt cx="0" cy="0"/>
+        </a:xfrm>
+      </p:grpSpPr>
       <p:sp>
         <p:nvSpPr>
           <p:cNvPr id="2" name="Rectangle 1"/>
@@ -14558,6 +15279,7 @@
           <a:lstStyle/>
           <a:p>
             <a:pPr algn="ctr"/>
+            <a:endParaRPr/>
           </a:p>
         </p:txBody>
       </p:sp>
@@ -14663,6 +15385,7 @@
           <a:lstStyle/>
           <a:p>
             <a:pPr algn="ctr"/>
+            <a:endParaRPr/>
           </a:p>
         </p:txBody>
       </p:sp>
@@ -14759,9 +15482,27 @@
                 <a:tableStyleId>{5C22544A-7EE6-4342-B048-85BDC9FD1C3A}</a:tableStyleId>
               </a:tblPr>
               <a:tblGrid>
-                <a:gridCol w="3657600"/>
-                <a:gridCol w="3657600"/>
-                <a:gridCol w="3657600"/>
+                <a:gridCol w="3657600">
+                  <a:extLst>
+                    <a:ext uri="{9D8B030D-6E8A-4147-A177-3AD203B41FA5}">
+                      <a16:colId xmlns:a16="http://schemas.microsoft.com/office/drawing/2014/main" val="20000"/>
+                    </a:ext>
+                  </a:extLst>
+                </a:gridCol>
+                <a:gridCol w="3657600">
+                  <a:extLst>
+                    <a:ext uri="{9D8B030D-6E8A-4147-A177-3AD203B41FA5}">
+                      <a16:colId xmlns:a16="http://schemas.microsoft.com/office/drawing/2014/main" val="20001"/>
+                    </a:ext>
+                  </a:extLst>
+                </a:gridCol>
+                <a:gridCol w="3657600">
+                  <a:extLst>
+                    <a:ext uri="{9D8B030D-6E8A-4147-A177-3AD203B41FA5}">
+                      <a16:colId xmlns:a16="http://schemas.microsoft.com/office/drawing/2014/main" val="20002"/>
+                    </a:ext>
+                  </a:extLst>
+                </a:gridCol>
               </a:tblGrid>
               <a:tr h="365760">
                 <a:tc>
@@ -14833,6 +15574,11 @@
                     </a:solidFill>
                   </a:tcPr>
                 </a:tc>
+                <a:extLst>
+                  <a:ext uri="{0D108BD9-81ED-4DB2-BD59-A6C34878D82A}">
+                    <a16:rowId xmlns:a16="http://schemas.microsoft.com/office/drawing/2014/main" val="10000"/>
+                  </a:ext>
+                </a:extLst>
               </a:tr>
               <a:tr h="365760">
                 <a:tc>
@@ -14904,6 +15650,11 @@
                     </a:solidFill>
                   </a:tcPr>
                 </a:tc>
+                <a:extLst>
+                  <a:ext uri="{0D108BD9-81ED-4DB2-BD59-A6C34878D82A}">
+                    <a16:rowId xmlns:a16="http://schemas.microsoft.com/office/drawing/2014/main" val="10001"/>
+                  </a:ext>
+                </a:extLst>
               </a:tr>
               <a:tr h="365760">
                 <a:tc>
@@ -14975,6 +15726,11 @@
                     </a:solidFill>
                   </a:tcPr>
                 </a:tc>
+                <a:extLst>
+                  <a:ext uri="{0D108BD9-81ED-4DB2-BD59-A6C34878D82A}">
+                    <a16:rowId xmlns:a16="http://schemas.microsoft.com/office/drawing/2014/main" val="10002"/>
+                  </a:ext>
+                </a:extLst>
               </a:tr>
               <a:tr h="365760">
                 <a:tc>
@@ -15046,6 +15802,11 @@
                     </a:solidFill>
                   </a:tcPr>
                 </a:tc>
+                <a:extLst>
+                  <a:ext uri="{0D108BD9-81ED-4DB2-BD59-A6C34878D82A}">
+                    <a16:rowId xmlns:a16="http://schemas.microsoft.com/office/drawing/2014/main" val="10003"/>
+                  </a:ext>
+                </a:extLst>
               </a:tr>
               <a:tr h="365760">
                 <a:tc>
@@ -15117,6 +15878,11 @@
                     </a:solidFill>
                   </a:tcPr>
                 </a:tc>
+                <a:extLst>
+                  <a:ext uri="{0D108BD9-81ED-4DB2-BD59-A6C34878D82A}">
+                    <a16:rowId xmlns:a16="http://schemas.microsoft.com/office/drawing/2014/main" val="10004"/>
+                  </a:ext>
+                </a:extLst>
               </a:tr>
               <a:tr h="365760">
                 <a:tc>
@@ -15188,6 +15954,11 @@
                     </a:solidFill>
                   </a:tcPr>
                 </a:tc>
+                <a:extLst>
+                  <a:ext uri="{0D108BD9-81ED-4DB2-BD59-A6C34878D82A}">
+                    <a16:rowId xmlns:a16="http://schemas.microsoft.com/office/drawing/2014/main" val="10005"/>
+                  </a:ext>
+                </a:extLst>
               </a:tr>
               <a:tr h="365760">
                 <a:tc>
@@ -15259,6 +16030,11 @@
                     </a:solidFill>
                   </a:tcPr>
                 </a:tc>
+                <a:extLst>
+                  <a:ext uri="{0D108BD9-81ED-4DB2-BD59-A6C34878D82A}">
+                    <a16:rowId xmlns:a16="http://schemas.microsoft.com/office/drawing/2014/main" val="10006"/>
+                  </a:ext>
+                </a:extLst>
               </a:tr>
             </a:tbl>
           </a:graphicData>
@@ -15307,6 +16083,7 @@
           <a:lstStyle/>
           <a:p>
             <a:pPr algn="ctr"/>
+            <a:endParaRPr/>
           </a:p>
         </p:txBody>
       </p:sp>
@@ -15388,6 +16165,7 @@
           <a:lstStyle/>
           <a:p>
             <a:pPr algn="ctr"/>
+            <a:endParaRPr/>
           </a:p>
         </p:txBody>
       </p:sp>
@@ -15474,7 +16252,7 @@
 </file>
 
 <file path=ppt/slides/slide23.xml><?xml version="1.0" encoding="utf-8"?>
-<p:sld xmlns:a="http://schemas.openxmlformats.org/drawingml/2006/main" xmlns:p="http://schemas.openxmlformats.org/presentationml/2006/main" xmlns:r="http://schemas.openxmlformats.org/officeDocument/2006/relationships">
+<p:sld xmlns:a="http://schemas.openxmlformats.org/drawingml/2006/main" xmlns:r="http://schemas.openxmlformats.org/officeDocument/2006/relationships" xmlns:p="http://schemas.openxmlformats.org/presentationml/2006/main">
   <p:cSld>
     <p:bg>
       <p:bgPr>
@@ -15490,7 +16268,14 @@
         <p:cNvGrpSpPr/>
         <p:nvPr/>
       </p:nvGrpSpPr>
-      <p:grpSpPr/>
+      <p:grpSpPr>
+        <a:xfrm>
+          <a:off x="0" y="0"/>
+          <a:ext cx="0" cy="0"/>
+          <a:chOff x="0" y="0"/>
+          <a:chExt cx="0" cy="0"/>
+        </a:xfrm>
+      </p:grpSpPr>
       <p:sp>
         <p:nvSpPr>
           <p:cNvPr id="2" name="Rectangle 1"/>
@@ -15532,6 +16317,7 @@
           <a:lstStyle/>
           <a:p>
             <a:pPr algn="ctr"/>
+            <a:endParaRPr/>
           </a:p>
         </p:txBody>
       </p:sp>
@@ -15637,6 +16423,7 @@
           <a:lstStyle/>
           <a:p>
             <a:pPr algn="ctr"/>
+            <a:endParaRPr/>
           </a:p>
         </p:txBody>
       </p:sp>
@@ -15794,6 +16581,7 @@
           <a:lstStyle/>
           <a:p>
             <a:pPr algn="ctr"/>
+            <a:endParaRPr/>
           </a:p>
         </p:txBody>
       </p:sp>
@@ -15899,6 +16687,7 @@
           <a:lstStyle/>
           <a:p>
             <a:pPr algn="ctr"/>
+            <a:endParaRPr/>
           </a:p>
         </p:txBody>
       </p:sp>
@@ -15985,7 +16774,7 @@
 </file>
 
 <file path=ppt/slides/slide24.xml><?xml version="1.0" encoding="utf-8"?>
-<p:sld xmlns:a="http://schemas.openxmlformats.org/drawingml/2006/main" xmlns:p="http://schemas.openxmlformats.org/presentationml/2006/main" xmlns:r="http://schemas.openxmlformats.org/officeDocument/2006/relationships">
+<p:sld xmlns:a="http://schemas.openxmlformats.org/drawingml/2006/main" xmlns:r="http://schemas.openxmlformats.org/officeDocument/2006/relationships" xmlns:p="http://schemas.openxmlformats.org/presentationml/2006/main">
   <p:cSld>
     <p:bg>
       <p:bgPr>
@@ -16001,7 +16790,14 @@
         <p:cNvGrpSpPr/>
         <p:nvPr/>
       </p:nvGrpSpPr>
-      <p:grpSpPr/>
+      <p:grpSpPr>
+        <a:xfrm>
+          <a:off x="0" y="0"/>
+          <a:ext cx="0" cy="0"/>
+          <a:chOff x="0" y="0"/>
+          <a:chExt cx="0" cy="0"/>
+        </a:xfrm>
+      </p:grpSpPr>
       <p:sp>
         <p:nvSpPr>
           <p:cNvPr id="2" name="Rectangle 1"/>
@@ -16043,6 +16839,7 @@
           <a:lstStyle/>
           <a:p>
             <a:pPr algn="ctr"/>
+            <a:endParaRPr/>
           </a:p>
         </p:txBody>
       </p:sp>
@@ -16148,6 +16945,7 @@
           <a:lstStyle/>
           <a:p>
             <a:pPr algn="ctr"/>
+            <a:endParaRPr/>
           </a:p>
         </p:txBody>
       </p:sp>
@@ -16244,9 +17042,27 @@
                 <a:tableStyleId>{5C22544A-7EE6-4342-B048-85BDC9FD1C3A}</a:tableStyleId>
               </a:tblPr>
               <a:tblGrid>
-                <a:gridCol w="3657600"/>
-                <a:gridCol w="3657600"/>
-                <a:gridCol w="3657600"/>
+                <a:gridCol w="3657600">
+                  <a:extLst>
+                    <a:ext uri="{9D8B030D-6E8A-4147-A177-3AD203B41FA5}">
+                      <a16:colId xmlns:a16="http://schemas.microsoft.com/office/drawing/2014/main" val="20000"/>
+                    </a:ext>
+                  </a:extLst>
+                </a:gridCol>
+                <a:gridCol w="3657600">
+                  <a:extLst>
+                    <a:ext uri="{9D8B030D-6E8A-4147-A177-3AD203B41FA5}">
+                      <a16:colId xmlns:a16="http://schemas.microsoft.com/office/drawing/2014/main" val="20001"/>
+                    </a:ext>
+                  </a:extLst>
+                </a:gridCol>
+                <a:gridCol w="3657600">
+                  <a:extLst>
+                    <a:ext uri="{9D8B030D-6E8A-4147-A177-3AD203B41FA5}">
+                      <a16:colId xmlns:a16="http://schemas.microsoft.com/office/drawing/2014/main" val="20002"/>
+                    </a:ext>
+                  </a:extLst>
+                </a:gridCol>
               </a:tblGrid>
               <a:tr h="365760">
                 <a:tc>
@@ -16318,6 +17134,11 @@
                     </a:solidFill>
                   </a:tcPr>
                 </a:tc>
+                <a:extLst>
+                  <a:ext uri="{0D108BD9-81ED-4DB2-BD59-A6C34878D82A}">
+                    <a16:rowId xmlns:a16="http://schemas.microsoft.com/office/drawing/2014/main" val="10000"/>
+                  </a:ext>
+                </a:extLst>
               </a:tr>
               <a:tr h="365760">
                 <a:tc>
@@ -16389,6 +17210,11 @@
                     </a:solidFill>
                   </a:tcPr>
                 </a:tc>
+                <a:extLst>
+                  <a:ext uri="{0D108BD9-81ED-4DB2-BD59-A6C34878D82A}">
+                    <a16:rowId xmlns:a16="http://schemas.microsoft.com/office/drawing/2014/main" val="10001"/>
+                  </a:ext>
+                </a:extLst>
               </a:tr>
               <a:tr h="365760">
                 <a:tc>
@@ -16460,6 +17286,11 @@
                     </a:solidFill>
                   </a:tcPr>
                 </a:tc>
+                <a:extLst>
+                  <a:ext uri="{0D108BD9-81ED-4DB2-BD59-A6C34878D82A}">
+                    <a16:rowId xmlns:a16="http://schemas.microsoft.com/office/drawing/2014/main" val="10002"/>
+                  </a:ext>
+                </a:extLst>
               </a:tr>
               <a:tr h="365760">
                 <a:tc>
@@ -16531,6 +17362,11 @@
                     </a:solidFill>
                   </a:tcPr>
                 </a:tc>
+                <a:extLst>
+                  <a:ext uri="{0D108BD9-81ED-4DB2-BD59-A6C34878D82A}">
+                    <a16:rowId xmlns:a16="http://schemas.microsoft.com/office/drawing/2014/main" val="10003"/>
+                  </a:ext>
+                </a:extLst>
               </a:tr>
               <a:tr h="365760">
                 <a:tc>
@@ -16602,6 +17438,11 @@
                     </a:solidFill>
                   </a:tcPr>
                 </a:tc>
+                <a:extLst>
+                  <a:ext uri="{0D108BD9-81ED-4DB2-BD59-A6C34878D82A}">
+                    <a16:rowId xmlns:a16="http://schemas.microsoft.com/office/drawing/2014/main" val="10004"/>
+                  </a:ext>
+                </a:extLst>
               </a:tr>
               <a:tr h="365760">
                 <a:tc>
@@ -16673,6 +17514,11 @@
                     </a:solidFill>
                   </a:tcPr>
                 </a:tc>
+                <a:extLst>
+                  <a:ext uri="{0D108BD9-81ED-4DB2-BD59-A6C34878D82A}">
+                    <a16:rowId xmlns:a16="http://schemas.microsoft.com/office/drawing/2014/main" val="10005"/>
+                  </a:ext>
+                </a:extLst>
               </a:tr>
               <a:tr h="365760">
                 <a:tc>
@@ -16744,6 +17590,11 @@
                     </a:solidFill>
                   </a:tcPr>
                 </a:tc>
+                <a:extLst>
+                  <a:ext uri="{0D108BD9-81ED-4DB2-BD59-A6C34878D82A}">
+                    <a16:rowId xmlns:a16="http://schemas.microsoft.com/office/drawing/2014/main" val="10006"/>
+                  </a:ext>
+                </a:extLst>
               </a:tr>
             </a:tbl>
           </a:graphicData>
@@ -16792,6 +17643,7 @@
           <a:lstStyle/>
           <a:p>
             <a:pPr algn="ctr"/>
+            <a:endParaRPr/>
           </a:p>
         </p:txBody>
       </p:sp>
@@ -16873,6 +17725,7 @@
           <a:lstStyle/>
           <a:p>
             <a:pPr algn="ctr"/>
+            <a:endParaRPr/>
           </a:p>
         </p:txBody>
       </p:sp>
@@ -16959,7 +17812,7 @@
 </file>
 
 <file path=ppt/slides/slide25.xml><?xml version="1.0" encoding="utf-8"?>
-<p:sld xmlns:a="http://schemas.openxmlformats.org/drawingml/2006/main" xmlns:p="http://schemas.openxmlformats.org/presentationml/2006/main" xmlns:r="http://schemas.openxmlformats.org/officeDocument/2006/relationships">
+<p:sld xmlns:a="http://schemas.openxmlformats.org/drawingml/2006/main" xmlns:r="http://schemas.openxmlformats.org/officeDocument/2006/relationships" xmlns:p="http://schemas.openxmlformats.org/presentationml/2006/main">
   <p:cSld>
     <p:bg>
       <p:bgPr>
@@ -16975,7 +17828,14 @@
         <p:cNvGrpSpPr/>
         <p:nvPr/>
       </p:nvGrpSpPr>
-      <p:grpSpPr/>
+      <p:grpSpPr>
+        <a:xfrm>
+          <a:off x="0" y="0"/>
+          <a:ext cx="0" cy="0"/>
+          <a:chOff x="0" y="0"/>
+          <a:chExt cx="0" cy="0"/>
+        </a:xfrm>
+      </p:grpSpPr>
       <p:sp>
         <p:nvSpPr>
           <p:cNvPr id="2" name="Rectangle 1"/>
@@ -17017,6 +17877,7 @@
           <a:lstStyle/>
           <a:p>
             <a:pPr algn="ctr"/>
+            <a:endParaRPr/>
           </a:p>
         </p:txBody>
       </p:sp>
@@ -17122,6 +17983,7 @@
           <a:lstStyle/>
           <a:p>
             <a:pPr algn="ctr"/>
+            <a:endParaRPr/>
           </a:p>
         </p:txBody>
       </p:sp>
@@ -17242,6 +18104,7 @@
           <a:lstStyle/>
           <a:p>
             <a:pPr algn="ctr"/>
+            <a:endParaRPr/>
           </a:p>
         </p:txBody>
       </p:sp>
@@ -17473,6 +18336,7 @@
           <a:lstStyle/>
           <a:p>
             <a:pPr algn="ctr"/>
+            <a:endParaRPr/>
           </a:p>
         </p:txBody>
       </p:sp>
@@ -17541,6 +18405,7 @@
           <a:lstStyle/>
           <a:p>
             <a:pPr algn="ctr"/>
+            <a:endParaRPr/>
           </a:p>
         </p:txBody>
       </p:sp>
@@ -17627,7 +18492,7 @@
 </file>
 
 <file path=ppt/slides/slide26.xml><?xml version="1.0" encoding="utf-8"?>
-<p:sld xmlns:a="http://schemas.openxmlformats.org/drawingml/2006/main" xmlns:p="http://schemas.openxmlformats.org/presentationml/2006/main" xmlns:r="http://schemas.openxmlformats.org/officeDocument/2006/relationships">
+<p:sld xmlns:a="http://schemas.openxmlformats.org/drawingml/2006/main" xmlns:r="http://schemas.openxmlformats.org/officeDocument/2006/relationships" xmlns:p="http://schemas.openxmlformats.org/presentationml/2006/main">
   <p:cSld>
     <p:bg>
       <p:bgPr>
@@ -17643,7 +18508,14 @@
         <p:cNvGrpSpPr/>
         <p:nvPr/>
       </p:nvGrpSpPr>
-      <p:grpSpPr/>
+      <p:grpSpPr>
+        <a:xfrm>
+          <a:off x="0" y="0"/>
+          <a:ext cx="0" cy="0"/>
+          <a:chOff x="0" y="0"/>
+          <a:chExt cx="0" cy="0"/>
+        </a:xfrm>
+      </p:grpSpPr>
       <p:sp>
         <p:nvSpPr>
           <p:cNvPr id="2" name="Rectangle 1"/>
@@ -17685,6 +18557,7 @@
           <a:lstStyle/>
           <a:p>
             <a:pPr algn="ctr"/>
+            <a:endParaRPr/>
           </a:p>
         </p:txBody>
       </p:sp>
@@ -17790,6 +18663,7 @@
           <a:lstStyle/>
           <a:p>
             <a:pPr algn="ctr"/>
+            <a:endParaRPr/>
           </a:p>
         </p:txBody>
       </p:sp>
@@ -17910,6 +18784,7 @@
           <a:lstStyle/>
           <a:p>
             <a:pPr algn="ctr"/>
+            <a:endParaRPr/>
           </a:p>
         </p:txBody>
       </p:sp>
@@ -18141,6 +19016,7 @@
           <a:lstStyle/>
           <a:p>
             <a:pPr algn="ctr"/>
+            <a:endParaRPr/>
           </a:p>
         </p:txBody>
       </p:sp>
@@ -18209,6 +19085,7 @@
           <a:lstStyle/>
           <a:p>
             <a:pPr algn="ctr"/>
+            <a:endParaRPr/>
           </a:p>
         </p:txBody>
       </p:sp>
@@ -18295,7 +19172,7 @@
 </file>
 
 <file path=ppt/slides/slide27.xml><?xml version="1.0" encoding="utf-8"?>
-<p:sld xmlns:a="http://schemas.openxmlformats.org/drawingml/2006/main" xmlns:p="http://schemas.openxmlformats.org/presentationml/2006/main" xmlns:r="http://schemas.openxmlformats.org/officeDocument/2006/relationships">
+<p:sld xmlns:a="http://schemas.openxmlformats.org/drawingml/2006/main" xmlns:r="http://schemas.openxmlformats.org/officeDocument/2006/relationships" xmlns:p="http://schemas.openxmlformats.org/presentationml/2006/main">
   <p:cSld>
     <p:bg>
       <p:bgPr>
@@ -18311,7 +19188,14 @@
         <p:cNvGrpSpPr/>
         <p:nvPr/>
       </p:nvGrpSpPr>
-      <p:grpSpPr/>
+      <p:grpSpPr>
+        <a:xfrm>
+          <a:off x="0" y="0"/>
+          <a:ext cx="0" cy="0"/>
+          <a:chOff x="0" y="0"/>
+          <a:chExt cx="0" cy="0"/>
+        </a:xfrm>
+      </p:grpSpPr>
       <p:sp>
         <p:nvSpPr>
           <p:cNvPr id="2" name="Rectangle 1"/>
@@ -18353,6 +19237,7 @@
           <a:lstStyle/>
           <a:p>
             <a:pPr algn="ctr"/>
+            <a:endParaRPr/>
           </a:p>
         </p:txBody>
       </p:sp>
@@ -18458,6 +19343,7 @@
           <a:lstStyle/>
           <a:p>
             <a:pPr algn="ctr"/>
+            <a:endParaRPr/>
           </a:p>
         </p:txBody>
       </p:sp>
@@ -18554,9 +19440,27 @@
                 <a:tableStyleId>{5C22544A-7EE6-4342-B048-85BDC9FD1C3A}</a:tableStyleId>
               </a:tblPr>
               <a:tblGrid>
-                <a:gridCol w="3657600"/>
-                <a:gridCol w="3657600"/>
-                <a:gridCol w="3657600"/>
+                <a:gridCol w="3657600">
+                  <a:extLst>
+                    <a:ext uri="{9D8B030D-6E8A-4147-A177-3AD203B41FA5}">
+                      <a16:colId xmlns:a16="http://schemas.microsoft.com/office/drawing/2014/main" val="20000"/>
+                    </a:ext>
+                  </a:extLst>
+                </a:gridCol>
+                <a:gridCol w="3657600">
+                  <a:extLst>
+                    <a:ext uri="{9D8B030D-6E8A-4147-A177-3AD203B41FA5}">
+                      <a16:colId xmlns:a16="http://schemas.microsoft.com/office/drawing/2014/main" val="20001"/>
+                    </a:ext>
+                  </a:extLst>
+                </a:gridCol>
+                <a:gridCol w="3657600">
+                  <a:extLst>
+                    <a:ext uri="{9D8B030D-6E8A-4147-A177-3AD203B41FA5}">
+                      <a16:colId xmlns:a16="http://schemas.microsoft.com/office/drawing/2014/main" val="20002"/>
+                    </a:ext>
+                  </a:extLst>
+                </a:gridCol>
               </a:tblGrid>
               <a:tr h="475488">
                 <a:tc>
@@ -18628,6 +19532,11 @@
                     </a:solidFill>
                   </a:tcPr>
                 </a:tc>
+                <a:extLst>
+                  <a:ext uri="{0D108BD9-81ED-4DB2-BD59-A6C34878D82A}">
+                    <a16:rowId xmlns:a16="http://schemas.microsoft.com/office/drawing/2014/main" val="10000"/>
+                  </a:ext>
+                </a:extLst>
               </a:tr>
               <a:tr h="475488">
                 <a:tc>
@@ -18699,6 +19608,11 @@
                     </a:solidFill>
                   </a:tcPr>
                 </a:tc>
+                <a:extLst>
+                  <a:ext uri="{0D108BD9-81ED-4DB2-BD59-A6C34878D82A}">
+                    <a16:rowId xmlns:a16="http://schemas.microsoft.com/office/drawing/2014/main" val="10001"/>
+                  </a:ext>
+                </a:extLst>
               </a:tr>
               <a:tr h="475488">
                 <a:tc>
@@ -18770,6 +19684,11 @@
                     </a:solidFill>
                   </a:tcPr>
                 </a:tc>
+                <a:extLst>
+                  <a:ext uri="{0D108BD9-81ED-4DB2-BD59-A6C34878D82A}">
+                    <a16:rowId xmlns:a16="http://schemas.microsoft.com/office/drawing/2014/main" val="10002"/>
+                  </a:ext>
+                </a:extLst>
               </a:tr>
               <a:tr h="475488">
                 <a:tc>
@@ -18841,6 +19760,11 @@
                     </a:solidFill>
                   </a:tcPr>
                 </a:tc>
+                <a:extLst>
+                  <a:ext uri="{0D108BD9-81ED-4DB2-BD59-A6C34878D82A}">
+                    <a16:rowId xmlns:a16="http://schemas.microsoft.com/office/drawing/2014/main" val="10003"/>
+                  </a:ext>
+                </a:extLst>
               </a:tr>
               <a:tr h="475488">
                 <a:tc>
@@ -18912,6 +19836,11 @@
                     </a:solidFill>
                   </a:tcPr>
                 </a:tc>
+                <a:extLst>
+                  <a:ext uri="{0D108BD9-81ED-4DB2-BD59-A6C34878D82A}">
+                    <a16:rowId xmlns:a16="http://schemas.microsoft.com/office/drawing/2014/main" val="10004"/>
+                  </a:ext>
+                </a:extLst>
               </a:tr>
             </a:tbl>
           </a:graphicData>
@@ -18960,6 +19889,7 @@
           <a:lstStyle/>
           <a:p>
             <a:pPr algn="ctr"/>
+            <a:endParaRPr/>
           </a:p>
         </p:txBody>
       </p:sp>
@@ -19041,6 +19971,7 @@
           <a:lstStyle/>
           <a:p>
             <a:pPr algn="ctr"/>
+            <a:endParaRPr/>
           </a:p>
         </p:txBody>
       </p:sp>
@@ -19127,7 +20058,7 @@
 </file>
 
 <file path=ppt/slides/slide28.xml><?xml version="1.0" encoding="utf-8"?>
-<p:sld xmlns:a="http://schemas.openxmlformats.org/drawingml/2006/main" xmlns:p="http://schemas.openxmlformats.org/presentationml/2006/main" xmlns:r="http://schemas.openxmlformats.org/officeDocument/2006/relationships">
+<p:sld xmlns:a="http://schemas.openxmlformats.org/drawingml/2006/main" xmlns:r="http://schemas.openxmlformats.org/officeDocument/2006/relationships" xmlns:p="http://schemas.openxmlformats.org/presentationml/2006/main">
   <p:cSld>
     <p:bg>
       <p:bgPr>
@@ -19143,7 +20074,14 @@
         <p:cNvGrpSpPr/>
         <p:nvPr/>
       </p:nvGrpSpPr>
-      <p:grpSpPr/>
+      <p:grpSpPr>
+        <a:xfrm>
+          <a:off x="0" y="0"/>
+          <a:ext cx="0" cy="0"/>
+          <a:chOff x="0" y="0"/>
+          <a:chExt cx="0" cy="0"/>
+        </a:xfrm>
+      </p:grpSpPr>
       <p:sp>
         <p:nvSpPr>
           <p:cNvPr id="2" name="Rectangle 1"/>
@@ -19185,6 +20123,7 @@
           <a:lstStyle/>
           <a:p>
             <a:pPr algn="ctr"/>
+            <a:endParaRPr/>
           </a:p>
         </p:txBody>
       </p:sp>
@@ -19290,6 +20229,7 @@
           <a:lstStyle/>
           <a:p>
             <a:pPr algn="ctr"/>
+            <a:endParaRPr/>
           </a:p>
         </p:txBody>
       </p:sp>
@@ -19410,6 +20350,7 @@
           <a:lstStyle/>
           <a:p>
             <a:pPr algn="ctr"/>
+            <a:endParaRPr/>
           </a:p>
         </p:txBody>
       </p:sp>
@@ -19715,6 +20656,7 @@
           <a:lstStyle/>
           <a:p>
             <a:pPr algn="ctr"/>
+            <a:endParaRPr/>
           </a:p>
         </p:txBody>
       </p:sp>
@@ -19783,6 +20725,7 @@
           <a:lstStyle/>
           <a:p>
             <a:pPr algn="ctr"/>
+            <a:endParaRPr/>
           </a:p>
         </p:txBody>
       </p:sp>
@@ -19869,7 +20812,7 @@
 </file>
 
 <file path=ppt/slides/slide29.xml><?xml version="1.0" encoding="utf-8"?>
-<p:sld xmlns:a="http://schemas.openxmlformats.org/drawingml/2006/main" xmlns:p="http://schemas.openxmlformats.org/presentationml/2006/main" xmlns:r="http://schemas.openxmlformats.org/officeDocument/2006/relationships">
+<p:sld xmlns:a="http://schemas.openxmlformats.org/drawingml/2006/main" xmlns:r="http://schemas.openxmlformats.org/officeDocument/2006/relationships" xmlns:p="http://schemas.openxmlformats.org/presentationml/2006/main">
   <p:cSld>
     <p:bg>
       <p:bgPr>
@@ -19885,7 +20828,14 @@
         <p:cNvGrpSpPr/>
         <p:nvPr/>
       </p:nvGrpSpPr>
-      <p:grpSpPr/>
+      <p:grpSpPr>
+        <a:xfrm>
+          <a:off x="0" y="0"/>
+          <a:ext cx="0" cy="0"/>
+          <a:chOff x="0" y="0"/>
+          <a:chExt cx="0" cy="0"/>
+        </a:xfrm>
+      </p:grpSpPr>
       <p:sp>
         <p:nvSpPr>
           <p:cNvPr id="2" name="Rectangle 1"/>
@@ -19927,6 +20877,7 @@
           <a:lstStyle/>
           <a:p>
             <a:pPr algn="ctr"/>
+            <a:endParaRPr/>
           </a:p>
         </p:txBody>
       </p:sp>
@@ -20032,6 +20983,7 @@
           <a:lstStyle/>
           <a:p>
             <a:pPr algn="ctr"/>
+            <a:endParaRPr/>
           </a:p>
         </p:txBody>
       </p:sp>
@@ -20152,6 +21104,7 @@
           <a:lstStyle/>
           <a:p>
             <a:pPr algn="ctr"/>
+            <a:endParaRPr/>
           </a:p>
         </p:txBody>
       </p:sp>
@@ -20418,6 +21371,7 @@
           <a:lstStyle/>
           <a:p>
             <a:pPr algn="ctr"/>
+            <a:endParaRPr/>
           </a:p>
         </p:txBody>
       </p:sp>
@@ -20504,7 +21458,7 @@
 </file>
 
 <file path=ppt/slides/slide3.xml><?xml version="1.0" encoding="utf-8"?>
-<p:sld xmlns:a="http://schemas.openxmlformats.org/drawingml/2006/main" xmlns:p="http://schemas.openxmlformats.org/presentationml/2006/main" xmlns:r="http://schemas.openxmlformats.org/officeDocument/2006/relationships">
+<p:sld xmlns:a="http://schemas.openxmlformats.org/drawingml/2006/main" xmlns:r="http://schemas.openxmlformats.org/officeDocument/2006/relationships" xmlns:p="http://schemas.openxmlformats.org/presentationml/2006/main">
   <p:cSld>
     <p:bg>
       <p:bgPr>
@@ -20520,7 +21474,14 @@
         <p:cNvGrpSpPr/>
         <p:nvPr/>
       </p:nvGrpSpPr>
-      <p:grpSpPr/>
+      <p:grpSpPr>
+        <a:xfrm>
+          <a:off x="0" y="0"/>
+          <a:ext cx="0" cy="0"/>
+          <a:chOff x="0" y="0"/>
+          <a:chExt cx="0" cy="0"/>
+        </a:xfrm>
+      </p:grpSpPr>
       <p:sp>
         <p:nvSpPr>
           <p:cNvPr id="2" name="Rectangle 1"/>
@@ -20562,6 +21523,7 @@
           <a:lstStyle/>
           <a:p>
             <a:pPr algn="ctr"/>
+            <a:endParaRPr/>
           </a:p>
         </p:txBody>
       </p:sp>
@@ -20686,7 +21648,7 @@
                 <a:srgbClr val="9E59CD"/>
               </a:gs>
             </a:gsLst>
-            <a:lin scaled="0" ang="0"/>
+            <a:lin ang="0" scaled="0"/>
           </a:gradFill>
           <a:ln>
             <a:noFill/>
@@ -20712,6 +21674,7 @@
           <a:lstStyle/>
           <a:p>
             <a:pPr algn="ctr"/>
+            <a:endParaRPr/>
           </a:p>
         </p:txBody>
       </p:sp>
@@ -20795,6 +21758,7 @@
           <a:lstStyle/>
           <a:p>
             <a:pPr algn="ctr"/>
+            <a:endParaRPr/>
           </a:p>
         </p:txBody>
       </p:sp>
@@ -20878,6 +21842,7 @@
           <a:lstStyle/>
           <a:p>
             <a:pPr algn="ctr"/>
+            <a:endParaRPr/>
           </a:p>
         </p:txBody>
       </p:sp>
@@ -20961,6 +21926,7 @@
           <a:lstStyle/>
           <a:p>
             <a:pPr algn="ctr"/>
+            <a:endParaRPr/>
           </a:p>
         </p:txBody>
       </p:sp>
@@ -21044,6 +22010,7 @@
           <a:lstStyle/>
           <a:p>
             <a:pPr algn="ctr"/>
+            <a:endParaRPr/>
           </a:p>
         </p:txBody>
       </p:sp>
@@ -21125,6 +22092,7 @@
           <a:lstStyle/>
           <a:p>
             <a:pPr algn="ctr"/>
+            <a:endParaRPr/>
           </a:p>
         </p:txBody>
       </p:sp>
@@ -21211,7 +22179,7 @@
 </file>
 
 <file path=ppt/slides/slide30.xml><?xml version="1.0" encoding="utf-8"?>
-<p:sld xmlns:a="http://schemas.openxmlformats.org/drawingml/2006/main" xmlns:p="http://schemas.openxmlformats.org/presentationml/2006/main" xmlns:r="http://schemas.openxmlformats.org/officeDocument/2006/relationships">
+<p:sld xmlns:a="http://schemas.openxmlformats.org/drawingml/2006/main" xmlns:r="http://schemas.openxmlformats.org/officeDocument/2006/relationships" xmlns:p="http://schemas.openxmlformats.org/presentationml/2006/main">
   <p:cSld>
     <p:bg>
       <p:bgPr>
@@ -21227,7 +22195,14 @@
         <p:cNvGrpSpPr/>
         <p:nvPr/>
       </p:nvGrpSpPr>
-      <p:grpSpPr/>
+      <p:grpSpPr>
+        <a:xfrm>
+          <a:off x="0" y="0"/>
+          <a:ext cx="0" cy="0"/>
+          <a:chOff x="0" y="0"/>
+          <a:chExt cx="0" cy="0"/>
+        </a:xfrm>
+      </p:grpSpPr>
       <p:sp>
         <p:nvSpPr>
           <p:cNvPr id="2" name="Rectangle 1"/>
@@ -21269,6 +22244,7 @@
           <a:lstStyle/>
           <a:p>
             <a:pPr algn="ctr"/>
+            <a:endParaRPr/>
           </a:p>
         </p:txBody>
       </p:sp>
@@ -21374,6 +22350,7 @@
           <a:lstStyle/>
           <a:p>
             <a:pPr algn="ctr"/>
+            <a:endParaRPr/>
           </a:p>
         </p:txBody>
       </p:sp>
@@ -21494,6 +22471,7 @@
           <a:lstStyle/>
           <a:p>
             <a:pPr algn="ctr"/>
+            <a:endParaRPr/>
           </a:p>
         </p:txBody>
       </p:sp>
@@ -21760,6 +22738,7 @@
           <a:lstStyle/>
           <a:p>
             <a:pPr algn="ctr"/>
+            <a:endParaRPr/>
           </a:p>
         </p:txBody>
       </p:sp>
@@ -21846,7 +22825,7 @@
 </file>
 
 <file path=ppt/slides/slide31.xml><?xml version="1.0" encoding="utf-8"?>
-<p:sld xmlns:a="http://schemas.openxmlformats.org/drawingml/2006/main" xmlns:p="http://schemas.openxmlformats.org/presentationml/2006/main" xmlns:r="http://schemas.openxmlformats.org/officeDocument/2006/relationships">
+<p:sld xmlns:a="http://schemas.openxmlformats.org/drawingml/2006/main" xmlns:r="http://schemas.openxmlformats.org/officeDocument/2006/relationships" xmlns:p="http://schemas.openxmlformats.org/presentationml/2006/main">
   <p:cSld>
     <p:bg>
       <p:bgPr>
@@ -21862,7 +22841,14 @@
         <p:cNvGrpSpPr/>
         <p:nvPr/>
       </p:nvGrpSpPr>
-      <p:grpSpPr/>
+      <p:grpSpPr>
+        <a:xfrm>
+          <a:off x="0" y="0"/>
+          <a:ext cx="0" cy="0"/>
+          <a:chOff x="0" y="0"/>
+          <a:chExt cx="0" cy="0"/>
+        </a:xfrm>
+      </p:grpSpPr>
       <p:sp>
         <p:nvSpPr>
           <p:cNvPr id="2" name="Rectangle 1"/>
@@ -21904,6 +22890,7 @@
           <a:lstStyle/>
           <a:p>
             <a:pPr algn="ctr"/>
+            <a:endParaRPr/>
           </a:p>
         </p:txBody>
       </p:sp>
@@ -22009,6 +22996,7 @@
           <a:lstStyle/>
           <a:p>
             <a:pPr algn="ctr"/>
+            <a:endParaRPr/>
           </a:p>
         </p:txBody>
       </p:sp>
@@ -22129,6 +23117,7 @@
           <a:lstStyle/>
           <a:p>
             <a:pPr algn="ctr"/>
+            <a:endParaRPr/>
           </a:p>
         </p:txBody>
       </p:sp>
@@ -22395,6 +23384,7 @@
           <a:lstStyle/>
           <a:p>
             <a:pPr algn="ctr"/>
+            <a:endParaRPr/>
           </a:p>
         </p:txBody>
       </p:sp>
@@ -22481,7 +23471,7 @@
 </file>
 
 <file path=ppt/slides/slide32.xml><?xml version="1.0" encoding="utf-8"?>
-<p:sld xmlns:a="http://schemas.openxmlformats.org/drawingml/2006/main" xmlns:p="http://schemas.openxmlformats.org/presentationml/2006/main" xmlns:r="http://schemas.openxmlformats.org/officeDocument/2006/relationships">
+<p:sld xmlns:a="http://schemas.openxmlformats.org/drawingml/2006/main" xmlns:r="http://schemas.openxmlformats.org/officeDocument/2006/relationships" xmlns:p="http://schemas.openxmlformats.org/presentationml/2006/main">
   <p:cSld>
     <p:bg>
       <p:bgPr>
@@ -22497,7 +23487,14 @@
         <p:cNvGrpSpPr/>
         <p:nvPr/>
       </p:nvGrpSpPr>
-      <p:grpSpPr/>
+      <p:grpSpPr>
+        <a:xfrm>
+          <a:off x="0" y="0"/>
+          <a:ext cx="0" cy="0"/>
+          <a:chOff x="0" y="0"/>
+          <a:chExt cx="0" cy="0"/>
+        </a:xfrm>
+      </p:grpSpPr>
       <p:sp>
         <p:nvSpPr>
           <p:cNvPr id="2" name="Rectangle 1"/>
@@ -22539,6 +23536,7 @@
           <a:lstStyle/>
           <a:p>
             <a:pPr algn="ctr"/>
+            <a:endParaRPr/>
           </a:p>
         </p:txBody>
       </p:sp>
@@ -22644,6 +23642,7 @@
           <a:lstStyle/>
           <a:p>
             <a:pPr algn="ctr"/>
+            <a:endParaRPr/>
           </a:p>
         </p:txBody>
       </p:sp>
@@ -22740,9 +23739,27 @@
                 <a:tableStyleId>{5C22544A-7EE6-4342-B048-85BDC9FD1C3A}</a:tableStyleId>
               </a:tblPr>
               <a:tblGrid>
-                <a:gridCol w="3657600"/>
-                <a:gridCol w="3657600"/>
-                <a:gridCol w="3657600"/>
+                <a:gridCol w="3657600">
+                  <a:extLst>
+                    <a:ext uri="{9D8B030D-6E8A-4147-A177-3AD203B41FA5}">
+                      <a16:colId xmlns:a16="http://schemas.microsoft.com/office/drawing/2014/main" val="20000"/>
+                    </a:ext>
+                  </a:extLst>
+                </a:gridCol>
+                <a:gridCol w="3657600">
+                  <a:extLst>
+                    <a:ext uri="{9D8B030D-6E8A-4147-A177-3AD203B41FA5}">
+                      <a16:colId xmlns:a16="http://schemas.microsoft.com/office/drawing/2014/main" val="20001"/>
+                    </a:ext>
+                  </a:extLst>
+                </a:gridCol>
+                <a:gridCol w="3657600">
+                  <a:extLst>
+                    <a:ext uri="{9D8B030D-6E8A-4147-A177-3AD203B41FA5}">
+                      <a16:colId xmlns:a16="http://schemas.microsoft.com/office/drawing/2014/main" val="20002"/>
+                    </a:ext>
+                  </a:extLst>
+                </a:gridCol>
               </a:tblGrid>
               <a:tr h="475488">
                 <a:tc>
@@ -22814,6 +23831,11 @@
                     </a:solidFill>
                   </a:tcPr>
                 </a:tc>
+                <a:extLst>
+                  <a:ext uri="{0D108BD9-81ED-4DB2-BD59-A6C34878D82A}">
+                    <a16:rowId xmlns:a16="http://schemas.microsoft.com/office/drawing/2014/main" val="10000"/>
+                  </a:ext>
+                </a:extLst>
               </a:tr>
               <a:tr h="475488">
                 <a:tc>
@@ -22885,6 +23907,11 @@
                     </a:solidFill>
                   </a:tcPr>
                 </a:tc>
+                <a:extLst>
+                  <a:ext uri="{0D108BD9-81ED-4DB2-BD59-A6C34878D82A}">
+                    <a16:rowId xmlns:a16="http://schemas.microsoft.com/office/drawing/2014/main" val="10001"/>
+                  </a:ext>
+                </a:extLst>
               </a:tr>
               <a:tr h="475488">
                 <a:tc>
@@ -22956,6 +23983,11 @@
                     </a:solidFill>
                   </a:tcPr>
                 </a:tc>
+                <a:extLst>
+                  <a:ext uri="{0D108BD9-81ED-4DB2-BD59-A6C34878D82A}">
+                    <a16:rowId xmlns:a16="http://schemas.microsoft.com/office/drawing/2014/main" val="10002"/>
+                  </a:ext>
+                </a:extLst>
               </a:tr>
               <a:tr h="475488">
                 <a:tc>
@@ -23027,6 +24059,11 @@
                     </a:solidFill>
                   </a:tcPr>
                 </a:tc>
+                <a:extLst>
+                  <a:ext uri="{0D108BD9-81ED-4DB2-BD59-A6C34878D82A}">
+                    <a16:rowId xmlns:a16="http://schemas.microsoft.com/office/drawing/2014/main" val="10003"/>
+                  </a:ext>
+                </a:extLst>
               </a:tr>
               <a:tr h="475488">
                 <a:tc>
@@ -23098,6 +24135,11 @@
                     </a:solidFill>
                   </a:tcPr>
                 </a:tc>
+                <a:extLst>
+                  <a:ext uri="{0D108BD9-81ED-4DB2-BD59-A6C34878D82A}">
+                    <a16:rowId xmlns:a16="http://schemas.microsoft.com/office/drawing/2014/main" val="10004"/>
+                  </a:ext>
+                </a:extLst>
               </a:tr>
             </a:tbl>
           </a:graphicData>
@@ -23146,6 +24188,7 @@
           <a:lstStyle/>
           <a:p>
             <a:pPr algn="ctr"/>
+            <a:endParaRPr/>
           </a:p>
         </p:txBody>
       </p:sp>
@@ -23227,6 +24270,7 @@
           <a:lstStyle/>
           <a:p>
             <a:pPr algn="ctr"/>
+            <a:endParaRPr/>
           </a:p>
         </p:txBody>
       </p:sp>
@@ -23313,7 +24357,7 @@
 </file>
 
 <file path=ppt/slides/slide33.xml><?xml version="1.0" encoding="utf-8"?>
-<p:sld xmlns:a="http://schemas.openxmlformats.org/drawingml/2006/main" xmlns:p="http://schemas.openxmlformats.org/presentationml/2006/main" xmlns:r="http://schemas.openxmlformats.org/officeDocument/2006/relationships">
+<p:sld xmlns:a="http://schemas.openxmlformats.org/drawingml/2006/main" xmlns:r="http://schemas.openxmlformats.org/officeDocument/2006/relationships" xmlns:p="http://schemas.openxmlformats.org/presentationml/2006/main">
   <p:cSld>
     <p:bg>
       <p:bgPr>
@@ -23329,7 +24373,14 @@
         <p:cNvGrpSpPr/>
         <p:nvPr/>
       </p:nvGrpSpPr>
-      <p:grpSpPr/>
+      <p:grpSpPr>
+        <a:xfrm>
+          <a:off x="0" y="0"/>
+          <a:ext cx="0" cy="0"/>
+          <a:chOff x="0" y="0"/>
+          <a:chExt cx="0" cy="0"/>
+        </a:xfrm>
+      </p:grpSpPr>
       <p:sp>
         <p:nvSpPr>
           <p:cNvPr id="2" name="Rectangle 1"/>
@@ -23371,6 +24422,7 @@
           <a:lstStyle/>
           <a:p>
             <a:pPr algn="ctr"/>
+            <a:endParaRPr/>
           </a:p>
         </p:txBody>
       </p:sp>
@@ -23476,6 +24528,7 @@
           <a:lstStyle/>
           <a:p>
             <a:pPr algn="ctr"/>
+            <a:endParaRPr/>
           </a:p>
         </p:txBody>
       </p:sp>
@@ -23596,6 +24649,7 @@
           <a:lstStyle/>
           <a:p>
             <a:pPr algn="ctr"/>
+            <a:endParaRPr/>
           </a:p>
         </p:txBody>
       </p:sp>
@@ -23679,6 +24733,7 @@
           <a:lstStyle/>
           <a:p>
             <a:pPr algn="ctr"/>
+            <a:endParaRPr/>
           </a:p>
         </p:txBody>
       </p:sp>
@@ -23971,6 +25026,7 @@
           <a:lstStyle/>
           <a:p>
             <a:pPr algn="ctr"/>
+            <a:endParaRPr/>
           </a:p>
         </p:txBody>
       </p:sp>
@@ -24076,6 +25132,7 @@
           <a:lstStyle/>
           <a:p>
             <a:pPr algn="ctr"/>
+            <a:endParaRPr/>
           </a:p>
         </p:txBody>
       </p:sp>
@@ -24162,7 +25219,7 @@
 </file>
 
 <file path=ppt/slides/slide34.xml><?xml version="1.0" encoding="utf-8"?>
-<p:sld xmlns:a="http://schemas.openxmlformats.org/drawingml/2006/main" xmlns:p="http://schemas.openxmlformats.org/presentationml/2006/main" xmlns:r="http://schemas.openxmlformats.org/officeDocument/2006/relationships">
+<p:sld xmlns:a="http://schemas.openxmlformats.org/drawingml/2006/main" xmlns:r="http://schemas.openxmlformats.org/officeDocument/2006/relationships" xmlns:p="http://schemas.openxmlformats.org/presentationml/2006/main">
   <p:cSld>
     <p:bg>
       <p:bgPr>
@@ -24178,7 +25235,14 @@
         <p:cNvGrpSpPr/>
         <p:nvPr/>
       </p:nvGrpSpPr>
-      <p:grpSpPr/>
+      <p:grpSpPr>
+        <a:xfrm>
+          <a:off x="0" y="0"/>
+          <a:ext cx="0" cy="0"/>
+          <a:chOff x="0" y="0"/>
+          <a:chExt cx="0" cy="0"/>
+        </a:xfrm>
+      </p:grpSpPr>
       <p:sp>
         <p:nvSpPr>
           <p:cNvPr id="2" name="Rectangle 1"/>
@@ -24220,6 +25284,7 @@
           <a:lstStyle/>
           <a:p>
             <a:pPr algn="ctr"/>
+            <a:endParaRPr/>
           </a:p>
         </p:txBody>
       </p:sp>
@@ -24325,6 +25390,7 @@
           <a:lstStyle/>
           <a:p>
             <a:pPr algn="ctr"/>
+            <a:endParaRPr/>
           </a:p>
         </p:txBody>
       </p:sp>
@@ -24421,8 +25487,20 @@
                 <a:tableStyleId>{5C22544A-7EE6-4342-B048-85BDC9FD1C3A}</a:tableStyleId>
               </a:tblPr>
               <a:tblGrid>
-                <a:gridCol w="5486400"/>
-                <a:gridCol w="5486400"/>
+                <a:gridCol w="5486400">
+                  <a:extLst>
+                    <a:ext uri="{9D8B030D-6E8A-4147-A177-3AD203B41FA5}">
+                      <a16:colId xmlns:a16="http://schemas.microsoft.com/office/drawing/2014/main" val="20000"/>
+                    </a:ext>
+                  </a:extLst>
+                </a:gridCol>
+                <a:gridCol w="5486400">
+                  <a:extLst>
+                    <a:ext uri="{9D8B030D-6E8A-4147-A177-3AD203B41FA5}">
+                      <a16:colId xmlns:a16="http://schemas.microsoft.com/office/drawing/2014/main" val="20001"/>
+                    </a:ext>
+                  </a:extLst>
+                </a:gridCol>
               </a:tblGrid>
               <a:tr h="475488">
                 <a:tc>
@@ -24471,6 +25549,11 @@
                     </a:solidFill>
                   </a:tcPr>
                 </a:tc>
+                <a:extLst>
+                  <a:ext uri="{0D108BD9-81ED-4DB2-BD59-A6C34878D82A}">
+                    <a16:rowId xmlns:a16="http://schemas.microsoft.com/office/drawing/2014/main" val="10000"/>
+                  </a:ext>
+                </a:extLst>
               </a:tr>
               <a:tr h="475488">
                 <a:tc>
@@ -24519,6 +25602,11 @@
                     </a:solidFill>
                   </a:tcPr>
                 </a:tc>
+                <a:extLst>
+                  <a:ext uri="{0D108BD9-81ED-4DB2-BD59-A6C34878D82A}">
+                    <a16:rowId xmlns:a16="http://schemas.microsoft.com/office/drawing/2014/main" val="10001"/>
+                  </a:ext>
+                </a:extLst>
               </a:tr>
               <a:tr h="475488">
                 <a:tc>
@@ -24567,6 +25655,11 @@
                     </a:solidFill>
                   </a:tcPr>
                 </a:tc>
+                <a:extLst>
+                  <a:ext uri="{0D108BD9-81ED-4DB2-BD59-A6C34878D82A}">
+                    <a16:rowId xmlns:a16="http://schemas.microsoft.com/office/drawing/2014/main" val="10002"/>
+                  </a:ext>
+                </a:extLst>
               </a:tr>
               <a:tr h="475488">
                 <a:tc>
@@ -24615,6 +25708,11 @@
                     </a:solidFill>
                   </a:tcPr>
                 </a:tc>
+                <a:extLst>
+                  <a:ext uri="{0D108BD9-81ED-4DB2-BD59-A6C34878D82A}">
+                    <a16:rowId xmlns:a16="http://schemas.microsoft.com/office/drawing/2014/main" val="10003"/>
+                  </a:ext>
+                </a:extLst>
               </a:tr>
             </a:tbl>
           </a:graphicData>
@@ -24663,6 +25761,7 @@
           <a:lstStyle/>
           <a:p>
             <a:pPr algn="ctr"/>
+            <a:endParaRPr/>
           </a:p>
         </p:txBody>
       </p:sp>
@@ -24744,6 +25843,7 @@
           <a:lstStyle/>
           <a:p>
             <a:pPr algn="ctr"/>
+            <a:endParaRPr/>
           </a:p>
         </p:txBody>
       </p:sp>
@@ -24830,7 +25930,7 @@
 </file>
 
 <file path=ppt/slides/slide35.xml><?xml version="1.0" encoding="utf-8"?>
-<p:sld xmlns:a="http://schemas.openxmlformats.org/drawingml/2006/main" xmlns:p="http://schemas.openxmlformats.org/presentationml/2006/main" xmlns:r="http://schemas.openxmlformats.org/officeDocument/2006/relationships">
+<p:sld xmlns:a="http://schemas.openxmlformats.org/drawingml/2006/main" xmlns:r="http://schemas.openxmlformats.org/officeDocument/2006/relationships" xmlns:p="http://schemas.openxmlformats.org/presentationml/2006/main">
   <p:cSld>
     <p:bg>
       <p:bgPr>
@@ -24846,7 +25946,14 @@
         <p:cNvGrpSpPr/>
         <p:nvPr/>
       </p:nvGrpSpPr>
-      <p:grpSpPr/>
+      <p:grpSpPr>
+        <a:xfrm>
+          <a:off x="0" y="0"/>
+          <a:ext cx="0" cy="0"/>
+          <a:chOff x="0" y="0"/>
+          <a:chExt cx="0" cy="0"/>
+        </a:xfrm>
+      </p:grpSpPr>
       <p:sp>
         <p:nvSpPr>
           <p:cNvPr id="2" name="Rectangle 1"/>
@@ -24888,6 +25995,7 @@
           <a:lstStyle/>
           <a:p>
             <a:pPr algn="ctr"/>
+            <a:endParaRPr/>
           </a:p>
         </p:txBody>
       </p:sp>
@@ -24993,6 +26101,7 @@
           <a:lstStyle/>
           <a:p>
             <a:pPr algn="ctr"/>
+            <a:endParaRPr/>
           </a:p>
         </p:txBody>
       </p:sp>
@@ -25113,6 +26222,7 @@
           <a:lstStyle/>
           <a:p>
             <a:pPr algn="ctr"/>
+            <a:endParaRPr/>
           </a:p>
         </p:txBody>
       </p:sp>
@@ -25196,6 +26306,7 @@
           <a:lstStyle/>
           <a:p>
             <a:pPr algn="ctr"/>
+            <a:endParaRPr/>
           </a:p>
         </p:txBody>
       </p:sp>
@@ -25449,6 +26560,7 @@
           <a:lstStyle/>
           <a:p>
             <a:pPr algn="ctr"/>
+            <a:endParaRPr/>
           </a:p>
         </p:txBody>
       </p:sp>
@@ -25535,7 +26647,7 @@
 </file>
 
 <file path=ppt/slides/slide36.xml><?xml version="1.0" encoding="utf-8"?>
-<p:sld xmlns:a="http://schemas.openxmlformats.org/drawingml/2006/main" xmlns:p="http://schemas.openxmlformats.org/presentationml/2006/main" xmlns:r="http://schemas.openxmlformats.org/officeDocument/2006/relationships">
+<p:sld xmlns:a="http://schemas.openxmlformats.org/drawingml/2006/main" xmlns:r="http://schemas.openxmlformats.org/officeDocument/2006/relationships" xmlns:p="http://schemas.openxmlformats.org/presentationml/2006/main">
   <p:cSld>
     <p:bg>
       <p:bgPr>
@@ -25551,7 +26663,14 @@
         <p:cNvGrpSpPr/>
         <p:nvPr/>
       </p:nvGrpSpPr>
-      <p:grpSpPr/>
+      <p:grpSpPr>
+        <a:xfrm>
+          <a:off x="0" y="0"/>
+          <a:ext cx="0" cy="0"/>
+          <a:chOff x="0" y="0"/>
+          <a:chExt cx="0" cy="0"/>
+        </a:xfrm>
+      </p:grpSpPr>
       <p:sp>
         <p:nvSpPr>
           <p:cNvPr id="2" name="Rectangle 1"/>
@@ -25593,6 +26712,7 @@
           <a:lstStyle/>
           <a:p>
             <a:pPr algn="ctr"/>
+            <a:endParaRPr/>
           </a:p>
         </p:txBody>
       </p:sp>
@@ -25698,6 +26818,7 @@
           <a:lstStyle/>
           <a:p>
             <a:pPr algn="ctr"/>
+            <a:endParaRPr/>
           </a:p>
         </p:txBody>
       </p:sp>
@@ -25794,9 +26915,27 @@
                 <a:tableStyleId>{5C22544A-7EE6-4342-B048-85BDC9FD1C3A}</a:tableStyleId>
               </a:tblPr>
               <a:tblGrid>
-                <a:gridCol w="3657600"/>
-                <a:gridCol w="3657600"/>
-                <a:gridCol w="3657600"/>
+                <a:gridCol w="3657600">
+                  <a:extLst>
+                    <a:ext uri="{9D8B030D-6E8A-4147-A177-3AD203B41FA5}">
+                      <a16:colId xmlns:a16="http://schemas.microsoft.com/office/drawing/2014/main" val="20000"/>
+                    </a:ext>
+                  </a:extLst>
+                </a:gridCol>
+                <a:gridCol w="3657600">
+                  <a:extLst>
+                    <a:ext uri="{9D8B030D-6E8A-4147-A177-3AD203B41FA5}">
+                      <a16:colId xmlns:a16="http://schemas.microsoft.com/office/drawing/2014/main" val="20001"/>
+                    </a:ext>
+                  </a:extLst>
+                </a:gridCol>
+                <a:gridCol w="3657600">
+                  <a:extLst>
+                    <a:ext uri="{9D8B030D-6E8A-4147-A177-3AD203B41FA5}">
+                      <a16:colId xmlns:a16="http://schemas.microsoft.com/office/drawing/2014/main" val="20002"/>
+                    </a:ext>
+                  </a:extLst>
+                </a:gridCol>
               </a:tblGrid>
               <a:tr h="475488">
                 <a:tc>
@@ -25868,6 +27007,11 @@
                     </a:solidFill>
                   </a:tcPr>
                 </a:tc>
+                <a:extLst>
+                  <a:ext uri="{0D108BD9-81ED-4DB2-BD59-A6C34878D82A}">
+                    <a16:rowId xmlns:a16="http://schemas.microsoft.com/office/drawing/2014/main" val="10000"/>
+                  </a:ext>
+                </a:extLst>
               </a:tr>
               <a:tr h="475488">
                 <a:tc>
@@ -25939,6 +27083,11 @@
                     </a:solidFill>
                   </a:tcPr>
                 </a:tc>
+                <a:extLst>
+                  <a:ext uri="{0D108BD9-81ED-4DB2-BD59-A6C34878D82A}">
+                    <a16:rowId xmlns:a16="http://schemas.microsoft.com/office/drawing/2014/main" val="10001"/>
+                  </a:ext>
+                </a:extLst>
               </a:tr>
               <a:tr h="475488">
                 <a:tc>
@@ -26010,6 +27159,11 @@
                     </a:solidFill>
                   </a:tcPr>
                 </a:tc>
+                <a:extLst>
+                  <a:ext uri="{0D108BD9-81ED-4DB2-BD59-A6C34878D82A}">
+                    <a16:rowId xmlns:a16="http://schemas.microsoft.com/office/drawing/2014/main" val="10002"/>
+                  </a:ext>
+                </a:extLst>
               </a:tr>
               <a:tr h="475488">
                 <a:tc>
@@ -26081,6 +27235,11 @@
                     </a:solidFill>
                   </a:tcPr>
                 </a:tc>
+                <a:extLst>
+                  <a:ext uri="{0D108BD9-81ED-4DB2-BD59-A6C34878D82A}">
+                    <a16:rowId xmlns:a16="http://schemas.microsoft.com/office/drawing/2014/main" val="10003"/>
+                  </a:ext>
+                </a:extLst>
               </a:tr>
             </a:tbl>
           </a:graphicData>
@@ -26129,6 +27288,7 @@
           <a:lstStyle/>
           <a:p>
             <a:pPr algn="ctr"/>
+            <a:endParaRPr/>
           </a:p>
         </p:txBody>
       </p:sp>
@@ -26210,6 +27370,7 @@
           <a:lstStyle/>
           <a:p>
             <a:pPr algn="ctr"/>
+            <a:endParaRPr/>
           </a:p>
         </p:txBody>
       </p:sp>
@@ -26296,7 +27457,7 @@
 </file>
 
 <file path=ppt/slides/slide37.xml><?xml version="1.0" encoding="utf-8"?>
-<p:sld xmlns:a="http://schemas.openxmlformats.org/drawingml/2006/main" xmlns:p="http://schemas.openxmlformats.org/presentationml/2006/main" xmlns:r="http://schemas.openxmlformats.org/officeDocument/2006/relationships">
+<p:sld xmlns:a="http://schemas.openxmlformats.org/drawingml/2006/main" xmlns:r="http://schemas.openxmlformats.org/officeDocument/2006/relationships" xmlns:p="http://schemas.openxmlformats.org/presentationml/2006/main">
   <p:cSld>
     <p:bg>
       <p:bgPr>
@@ -26312,7 +27473,14 @@
         <p:cNvGrpSpPr/>
         <p:nvPr/>
       </p:nvGrpSpPr>
-      <p:grpSpPr/>
+      <p:grpSpPr>
+        <a:xfrm>
+          <a:off x="0" y="0"/>
+          <a:ext cx="0" cy="0"/>
+          <a:chOff x="0" y="0"/>
+          <a:chExt cx="0" cy="0"/>
+        </a:xfrm>
+      </p:grpSpPr>
       <p:sp>
         <p:nvSpPr>
           <p:cNvPr id="2" name="Rectangle 1"/>
@@ -26354,6 +27522,7 @@
           <a:lstStyle/>
           <a:p>
             <a:pPr algn="ctr"/>
+            <a:endParaRPr/>
           </a:p>
         </p:txBody>
       </p:sp>
@@ -26459,6 +27628,7 @@
           <a:lstStyle/>
           <a:p>
             <a:pPr algn="ctr"/>
+            <a:endParaRPr/>
           </a:p>
         </p:txBody>
       </p:sp>
@@ -26555,8 +27725,20 @@
                 <a:tableStyleId>{5C22544A-7EE6-4342-B048-85BDC9FD1C3A}</a:tableStyleId>
               </a:tblPr>
               <a:tblGrid>
-                <a:gridCol w="5486400"/>
-                <a:gridCol w="5486400"/>
+                <a:gridCol w="5486400">
+                  <a:extLst>
+                    <a:ext uri="{9D8B030D-6E8A-4147-A177-3AD203B41FA5}">
+                      <a16:colId xmlns:a16="http://schemas.microsoft.com/office/drawing/2014/main" val="20000"/>
+                    </a:ext>
+                  </a:extLst>
+                </a:gridCol>
+                <a:gridCol w="5486400">
+                  <a:extLst>
+                    <a:ext uri="{9D8B030D-6E8A-4147-A177-3AD203B41FA5}">
+                      <a16:colId xmlns:a16="http://schemas.microsoft.com/office/drawing/2014/main" val="20001"/>
+                    </a:ext>
+                  </a:extLst>
+                </a:gridCol>
               </a:tblGrid>
               <a:tr h="475488">
                 <a:tc>
@@ -26605,6 +27787,11 @@
                     </a:solidFill>
                   </a:tcPr>
                 </a:tc>
+                <a:extLst>
+                  <a:ext uri="{0D108BD9-81ED-4DB2-BD59-A6C34878D82A}">
+                    <a16:rowId xmlns:a16="http://schemas.microsoft.com/office/drawing/2014/main" val="10000"/>
+                  </a:ext>
+                </a:extLst>
               </a:tr>
               <a:tr h="475488">
                 <a:tc>
@@ -26653,6 +27840,11 @@
                     </a:solidFill>
                   </a:tcPr>
                 </a:tc>
+                <a:extLst>
+                  <a:ext uri="{0D108BD9-81ED-4DB2-BD59-A6C34878D82A}">
+                    <a16:rowId xmlns:a16="http://schemas.microsoft.com/office/drawing/2014/main" val="10001"/>
+                  </a:ext>
+                </a:extLst>
               </a:tr>
               <a:tr h="475488">
                 <a:tc>
@@ -26701,6 +27893,11 @@
                     </a:solidFill>
                   </a:tcPr>
                 </a:tc>
+                <a:extLst>
+                  <a:ext uri="{0D108BD9-81ED-4DB2-BD59-A6C34878D82A}">
+                    <a16:rowId xmlns:a16="http://schemas.microsoft.com/office/drawing/2014/main" val="10002"/>
+                  </a:ext>
+                </a:extLst>
               </a:tr>
               <a:tr h="475488">
                 <a:tc>
@@ -26749,6 +27946,11 @@
                     </a:solidFill>
                   </a:tcPr>
                 </a:tc>
+                <a:extLst>
+                  <a:ext uri="{0D108BD9-81ED-4DB2-BD59-A6C34878D82A}">
+                    <a16:rowId xmlns:a16="http://schemas.microsoft.com/office/drawing/2014/main" val="10003"/>
+                  </a:ext>
+                </a:extLst>
               </a:tr>
             </a:tbl>
           </a:graphicData>
@@ -26797,6 +27999,7 @@
           <a:lstStyle/>
           <a:p>
             <a:pPr algn="ctr"/>
+            <a:endParaRPr/>
           </a:p>
         </p:txBody>
       </p:sp>
@@ -26878,6 +28081,7 @@
           <a:lstStyle/>
           <a:p>
             <a:pPr algn="ctr"/>
+            <a:endParaRPr/>
           </a:p>
         </p:txBody>
       </p:sp>
@@ -26964,7 +28168,7 @@
 </file>
 
 <file path=ppt/slides/slide38.xml><?xml version="1.0" encoding="utf-8"?>
-<p:sld xmlns:a="http://schemas.openxmlformats.org/drawingml/2006/main" xmlns:p="http://schemas.openxmlformats.org/presentationml/2006/main" xmlns:r="http://schemas.openxmlformats.org/officeDocument/2006/relationships">
+<p:sld xmlns:a="http://schemas.openxmlformats.org/drawingml/2006/main" xmlns:r="http://schemas.openxmlformats.org/officeDocument/2006/relationships" xmlns:p="http://schemas.openxmlformats.org/presentationml/2006/main">
   <p:cSld>
     <p:bg>
       <p:bgPr>
@@ -26980,7 +28184,14 @@
         <p:cNvGrpSpPr/>
         <p:nvPr/>
       </p:nvGrpSpPr>
-      <p:grpSpPr/>
+      <p:grpSpPr>
+        <a:xfrm>
+          <a:off x="0" y="0"/>
+          <a:ext cx="0" cy="0"/>
+          <a:chOff x="0" y="0"/>
+          <a:chExt cx="0" cy="0"/>
+        </a:xfrm>
+      </p:grpSpPr>
       <p:sp>
         <p:nvSpPr>
           <p:cNvPr id="2" name="Rectangle 1"/>
@@ -27022,6 +28233,7 @@
           <a:lstStyle/>
           <a:p>
             <a:pPr algn="ctr"/>
+            <a:endParaRPr/>
           </a:p>
         </p:txBody>
       </p:sp>
@@ -27127,6 +28339,7 @@
           <a:lstStyle/>
           <a:p>
             <a:pPr algn="ctr"/>
+            <a:endParaRPr/>
           </a:p>
         </p:txBody>
       </p:sp>
@@ -27247,6 +28460,7 @@
           <a:lstStyle/>
           <a:p>
             <a:pPr algn="ctr"/>
+            <a:endParaRPr/>
           </a:p>
         </p:txBody>
       </p:sp>
@@ -27330,6 +28544,7 @@
           <a:lstStyle/>
           <a:p>
             <a:pPr algn="ctr"/>
+            <a:endParaRPr/>
           </a:p>
         </p:txBody>
       </p:sp>
@@ -27620,6 +28835,7 @@
           <a:lstStyle/>
           <a:p>
             <a:pPr algn="ctr"/>
+            <a:endParaRPr/>
           </a:p>
         </p:txBody>
       </p:sp>
@@ -27706,7 +28922,7 @@
 </file>
 
 <file path=ppt/slides/slide39.xml><?xml version="1.0" encoding="utf-8"?>
-<p:sld xmlns:a="http://schemas.openxmlformats.org/drawingml/2006/main" xmlns:p="http://schemas.openxmlformats.org/presentationml/2006/main" xmlns:r="http://schemas.openxmlformats.org/officeDocument/2006/relationships">
+<p:sld xmlns:a="http://schemas.openxmlformats.org/drawingml/2006/main" xmlns:r="http://schemas.openxmlformats.org/officeDocument/2006/relationships" xmlns:p="http://schemas.openxmlformats.org/presentationml/2006/main">
   <p:cSld>
     <p:bg>
       <p:bgPr>
@@ -27722,7 +28938,14 @@
         <p:cNvGrpSpPr/>
         <p:nvPr/>
       </p:nvGrpSpPr>
-      <p:grpSpPr/>
+      <p:grpSpPr>
+        <a:xfrm>
+          <a:off x="0" y="0"/>
+          <a:ext cx="0" cy="0"/>
+          <a:chOff x="0" y="0"/>
+          <a:chExt cx="0" cy="0"/>
+        </a:xfrm>
+      </p:grpSpPr>
       <p:sp>
         <p:nvSpPr>
           <p:cNvPr id="2" name="Rectangle 1"/>
@@ -27764,6 +28987,7 @@
           <a:lstStyle/>
           <a:p>
             <a:pPr algn="ctr"/>
+            <a:endParaRPr/>
           </a:p>
         </p:txBody>
       </p:sp>
@@ -27869,6 +29093,7 @@
           <a:lstStyle/>
           <a:p>
             <a:pPr algn="ctr"/>
+            <a:endParaRPr/>
           </a:p>
         </p:txBody>
       </p:sp>
@@ -27989,6 +29214,7 @@
           <a:lstStyle/>
           <a:p>
             <a:pPr algn="ctr"/>
+            <a:endParaRPr/>
           </a:p>
         </p:txBody>
       </p:sp>
@@ -28218,6 +29444,7 @@
           <a:lstStyle/>
           <a:p>
             <a:pPr algn="ctr"/>
+            <a:endParaRPr/>
           </a:p>
         </p:txBody>
       </p:sp>
@@ -28304,7 +29531,7 @@
 </file>
 
 <file path=ppt/slides/slide4.xml><?xml version="1.0" encoding="utf-8"?>
-<p:sld xmlns:a="http://schemas.openxmlformats.org/drawingml/2006/main" xmlns:p="http://schemas.openxmlformats.org/presentationml/2006/main" xmlns:r="http://schemas.openxmlformats.org/officeDocument/2006/relationships">
+<p:sld xmlns:a="http://schemas.openxmlformats.org/drawingml/2006/main" xmlns:r="http://schemas.openxmlformats.org/officeDocument/2006/relationships" xmlns:p="http://schemas.openxmlformats.org/presentationml/2006/main">
   <p:cSld>
     <p:bg>
       <p:bgPr>
@@ -28320,7 +29547,14 @@
         <p:cNvGrpSpPr/>
         <p:nvPr/>
       </p:nvGrpSpPr>
-      <p:grpSpPr/>
+      <p:grpSpPr>
+        <a:xfrm>
+          <a:off x="0" y="0"/>
+          <a:ext cx="0" cy="0"/>
+          <a:chOff x="0" y="0"/>
+          <a:chExt cx="0" cy="0"/>
+        </a:xfrm>
+      </p:grpSpPr>
       <p:sp>
         <p:nvSpPr>
           <p:cNvPr id="2" name="Rectangle 1"/>
@@ -28362,6 +29596,7 @@
           <a:lstStyle/>
           <a:p>
             <a:pPr algn="ctr"/>
+            <a:endParaRPr/>
           </a:p>
         </p:txBody>
       </p:sp>
@@ -28374,7 +29609,7 @@
           <p:nvPr/>
         </p:nvPicPr>
         <p:blipFill>
-          <a:blip r:embed="rId2"/>
+          <a:blip r:embed="rId3"/>
           <a:stretch>
             <a:fillRect/>
           </a:stretch>
@@ -28467,6 +29702,7 @@
           <a:lstStyle/>
           <a:p>
             <a:pPr algn="ctr"/>
+            <a:endParaRPr/>
           </a:p>
         </p:txBody>
       </p:sp>
@@ -29058,80 +30294,6 @@
                 <a:cs typeface="DIN Next LT W23"/>
               </a:rPr>
               <a:t>Random Forest</a:t>
-            </a:r>
-          </a:p>
-        </p:txBody>
-      </p:sp>
-      <p:sp>
-        <p:nvSpPr>
-          <p:cNvPr id="22" name="TextBox 21"/>
-          <p:cNvSpPr txBox="1"/>
-          <p:nvPr/>
-        </p:nvSpPr>
-        <p:spPr>
-          <a:xfrm>
-            <a:off x="548640" y="6501384"/>
-            <a:ext cx="320040" cy="411480"/>
-          </a:xfrm>
-          <a:prstGeom prst="rect">
-            <a:avLst/>
-          </a:prstGeom>
-          <a:noFill/>
-        </p:spPr>
-        <p:txBody>
-          <a:bodyPr wrap="square" anchor="t">
-            <a:spAutoFit/>
-          </a:bodyPr>
-          <a:lstStyle/>
-          <a:p>
-            <a:pPr algn="l"/>
-            <a:r>
-              <a:rPr sz="2000" b="0">
-                <a:solidFill>
-                  <a:srgbClr val="9E59CD"/>
-                </a:solidFill>
-                <a:latin typeface="DIN Next LT W23"/>
-                <a:ea typeface="DIN Next LT W23"/>
-                <a:cs typeface="DIN Next LT W23"/>
-              </a:rPr>
-              <a:t>–</a:t>
-            </a:r>
-          </a:p>
-        </p:txBody>
-      </p:sp>
-      <p:sp>
-        <p:nvSpPr>
-          <p:cNvPr id="23" name="TextBox 22"/>
-          <p:cNvSpPr txBox="1"/>
-          <p:nvPr/>
-        </p:nvSpPr>
-        <p:spPr>
-          <a:xfrm>
-            <a:off x="914400" y="6501384"/>
-            <a:ext cx="9875519" cy="411480"/>
-          </a:xfrm>
-          <a:prstGeom prst="rect">
-            <a:avLst/>
-          </a:prstGeom>
-          <a:noFill/>
-        </p:spPr>
-        <p:txBody>
-          <a:bodyPr wrap="square" anchor="t">
-            <a:spAutoFit/>
-          </a:bodyPr>
-          <a:lstStyle/>
-          <a:p>
-            <a:pPr algn="l"/>
-            <a:r>
-              <a:rPr sz="2000" b="0">
-                <a:solidFill>
-                  <a:srgbClr val="121018"/>
-                </a:solidFill>
-                <a:latin typeface="DIN Next LT W23"/>
-                <a:ea typeface="DIN Next LT W23"/>
-                <a:cs typeface="DIN Next LT W23"/>
-              </a:rPr>
-              <a:t>Ridge / Lasso</a:t>
             </a:r>
           </a:p>
         </p:txBody>
@@ -29177,43 +30339,7 @@
           <a:lstStyle/>
           <a:p>
             <a:pPr algn="ctr"/>
-          </a:p>
-        </p:txBody>
-      </p:sp>
-      <p:sp>
-        <p:nvSpPr>
-          <p:cNvPr id="25" name="TextBox 24"/>
-          <p:cNvSpPr txBox="1"/>
-          <p:nvPr/>
-        </p:nvSpPr>
-        <p:spPr>
-          <a:xfrm>
-            <a:off x="548640" y="6510528"/>
-            <a:ext cx="2743200" cy="256032"/>
-          </a:xfrm>
-          <a:prstGeom prst="rect">
-            <a:avLst/>
-          </a:prstGeom>
-          <a:noFill/>
-        </p:spPr>
-        <p:txBody>
-          <a:bodyPr wrap="square" anchor="t">
-            <a:spAutoFit/>
-          </a:bodyPr>
-          <a:lstStyle/>
-          <a:p>
-            <a:pPr algn="l"/>
-            <a:r>
-              <a:rPr sz="1100" b="1">
-                <a:solidFill>
-                  <a:srgbClr val="5234B7"/>
-                </a:solidFill>
-                <a:latin typeface="DIN Next LT W23"/>
-                <a:ea typeface="DIN Next LT W23"/>
-                <a:cs typeface="DIN Next LT W23"/>
-              </a:rPr>
-              <a:t>ETRA</a:t>
-            </a:r>
+            <a:endParaRPr/>
           </a:p>
         </p:txBody>
       </p:sp>
@@ -29263,7 +30389,7 @@
 </file>
 
 <file path=ppt/slides/slide40.xml><?xml version="1.0" encoding="utf-8"?>
-<p:sld xmlns:a="http://schemas.openxmlformats.org/drawingml/2006/main" xmlns:p="http://schemas.openxmlformats.org/presentationml/2006/main" xmlns:r="http://schemas.openxmlformats.org/officeDocument/2006/relationships">
+<p:sld xmlns:a="http://schemas.openxmlformats.org/drawingml/2006/main" xmlns:r="http://schemas.openxmlformats.org/officeDocument/2006/relationships" xmlns:p="http://schemas.openxmlformats.org/presentationml/2006/main">
   <p:cSld>
     <p:bg>
       <p:bgPr>
@@ -29279,7 +30405,14 @@
         <p:cNvGrpSpPr/>
         <p:nvPr/>
       </p:nvGrpSpPr>
-      <p:grpSpPr/>
+      <p:grpSpPr>
+        <a:xfrm>
+          <a:off x="0" y="0"/>
+          <a:ext cx="0" cy="0"/>
+          <a:chOff x="0" y="0"/>
+          <a:chExt cx="0" cy="0"/>
+        </a:xfrm>
+      </p:grpSpPr>
       <p:sp>
         <p:nvSpPr>
           <p:cNvPr id="2" name="Rectangle 1"/>
@@ -29321,6 +30454,7 @@
           <a:lstStyle/>
           <a:p>
             <a:pPr algn="ctr"/>
+            <a:endParaRPr/>
           </a:p>
         </p:txBody>
       </p:sp>
@@ -29426,6 +30560,7 @@
           <a:lstStyle/>
           <a:p>
             <a:pPr algn="ctr"/>
+            <a:endParaRPr/>
           </a:p>
         </p:txBody>
       </p:sp>
@@ -29522,8 +30657,20 @@
                 <a:tableStyleId>{5C22544A-7EE6-4342-B048-85BDC9FD1C3A}</a:tableStyleId>
               </a:tblPr>
               <a:tblGrid>
-                <a:gridCol w="5486400"/>
-                <a:gridCol w="5486400"/>
+                <a:gridCol w="5486400">
+                  <a:extLst>
+                    <a:ext uri="{9D8B030D-6E8A-4147-A177-3AD203B41FA5}">
+                      <a16:colId xmlns:a16="http://schemas.microsoft.com/office/drawing/2014/main" val="20000"/>
+                    </a:ext>
+                  </a:extLst>
+                </a:gridCol>
+                <a:gridCol w="5486400">
+                  <a:extLst>
+                    <a:ext uri="{9D8B030D-6E8A-4147-A177-3AD203B41FA5}">
+                      <a16:colId xmlns:a16="http://schemas.microsoft.com/office/drawing/2014/main" val="20001"/>
+                    </a:ext>
+                  </a:extLst>
+                </a:gridCol>
               </a:tblGrid>
               <a:tr h="365760">
                 <a:tc>
@@ -29572,6 +30719,11 @@
                     </a:solidFill>
                   </a:tcPr>
                 </a:tc>
+                <a:extLst>
+                  <a:ext uri="{0D108BD9-81ED-4DB2-BD59-A6C34878D82A}">
+                    <a16:rowId xmlns:a16="http://schemas.microsoft.com/office/drawing/2014/main" val="10000"/>
+                  </a:ext>
+                </a:extLst>
               </a:tr>
               <a:tr h="365760">
                 <a:tc>
@@ -29620,6 +30772,11 @@
                     </a:solidFill>
                   </a:tcPr>
                 </a:tc>
+                <a:extLst>
+                  <a:ext uri="{0D108BD9-81ED-4DB2-BD59-A6C34878D82A}">
+                    <a16:rowId xmlns:a16="http://schemas.microsoft.com/office/drawing/2014/main" val="10001"/>
+                  </a:ext>
+                </a:extLst>
               </a:tr>
               <a:tr h="365760">
                 <a:tc>
@@ -29668,6 +30825,11 @@
                     </a:solidFill>
                   </a:tcPr>
                 </a:tc>
+                <a:extLst>
+                  <a:ext uri="{0D108BD9-81ED-4DB2-BD59-A6C34878D82A}">
+                    <a16:rowId xmlns:a16="http://schemas.microsoft.com/office/drawing/2014/main" val="10002"/>
+                  </a:ext>
+                </a:extLst>
               </a:tr>
               <a:tr h="365760">
                 <a:tc>
@@ -29716,6 +30878,11 @@
                     </a:solidFill>
                   </a:tcPr>
                 </a:tc>
+                <a:extLst>
+                  <a:ext uri="{0D108BD9-81ED-4DB2-BD59-A6C34878D82A}">
+                    <a16:rowId xmlns:a16="http://schemas.microsoft.com/office/drawing/2014/main" val="10003"/>
+                  </a:ext>
+                </a:extLst>
               </a:tr>
               <a:tr h="365760">
                 <a:tc>
@@ -29764,6 +30931,11 @@
                     </a:solidFill>
                   </a:tcPr>
                 </a:tc>
+                <a:extLst>
+                  <a:ext uri="{0D108BD9-81ED-4DB2-BD59-A6C34878D82A}">
+                    <a16:rowId xmlns:a16="http://schemas.microsoft.com/office/drawing/2014/main" val="10004"/>
+                  </a:ext>
+                </a:extLst>
               </a:tr>
               <a:tr h="365760">
                 <a:tc>
@@ -29812,6 +30984,11 @@
                     </a:solidFill>
                   </a:tcPr>
                 </a:tc>
+                <a:extLst>
+                  <a:ext uri="{0D108BD9-81ED-4DB2-BD59-A6C34878D82A}">
+                    <a16:rowId xmlns:a16="http://schemas.microsoft.com/office/drawing/2014/main" val="10005"/>
+                  </a:ext>
+                </a:extLst>
               </a:tr>
             </a:tbl>
           </a:graphicData>
@@ -29860,6 +31037,7 @@
           <a:lstStyle/>
           <a:p>
             <a:pPr algn="ctr"/>
+            <a:endParaRPr/>
           </a:p>
         </p:txBody>
       </p:sp>
@@ -29941,6 +31119,7 @@
           <a:lstStyle/>
           <a:p>
             <a:pPr algn="ctr"/>
+            <a:endParaRPr/>
           </a:p>
         </p:txBody>
       </p:sp>
@@ -30027,7 +31206,7 @@
 </file>
 
 <file path=ppt/slides/slide41.xml><?xml version="1.0" encoding="utf-8"?>
-<p:sld xmlns:a="http://schemas.openxmlformats.org/drawingml/2006/main" xmlns:p="http://schemas.openxmlformats.org/presentationml/2006/main" xmlns:r="http://schemas.openxmlformats.org/officeDocument/2006/relationships">
+<p:sld xmlns:a="http://schemas.openxmlformats.org/drawingml/2006/main" xmlns:r="http://schemas.openxmlformats.org/officeDocument/2006/relationships" xmlns:p="http://schemas.openxmlformats.org/presentationml/2006/main">
   <p:cSld>
     <p:bg>
       <p:bgPr>
@@ -30043,7 +31222,14 @@
         <p:cNvGrpSpPr/>
         <p:nvPr/>
       </p:nvGrpSpPr>
-      <p:grpSpPr/>
+      <p:grpSpPr>
+        <a:xfrm>
+          <a:off x="0" y="0"/>
+          <a:ext cx="0" cy="0"/>
+          <a:chOff x="0" y="0"/>
+          <a:chExt cx="0" cy="0"/>
+        </a:xfrm>
+      </p:grpSpPr>
       <p:sp>
         <p:nvSpPr>
           <p:cNvPr id="2" name="Rectangle 1"/>
@@ -30085,6 +31271,7 @@
           <a:lstStyle/>
           <a:p>
             <a:pPr algn="ctr"/>
+            <a:endParaRPr/>
           </a:p>
         </p:txBody>
       </p:sp>
@@ -30190,6 +31377,7 @@
           <a:lstStyle/>
           <a:p>
             <a:pPr algn="ctr"/>
+            <a:endParaRPr/>
           </a:p>
         </p:txBody>
       </p:sp>
@@ -30310,6 +31498,7 @@
           <a:lstStyle/>
           <a:p>
             <a:pPr algn="ctr"/>
+            <a:endParaRPr/>
           </a:p>
         </p:txBody>
       </p:sp>
@@ -30541,6 +31730,7 @@
           <a:lstStyle/>
           <a:p>
             <a:pPr algn="ctr"/>
+            <a:endParaRPr/>
           </a:p>
         </p:txBody>
       </p:sp>
@@ -30646,6 +31836,7 @@
           <a:lstStyle/>
           <a:p>
             <a:pPr algn="ctr"/>
+            <a:endParaRPr/>
           </a:p>
         </p:txBody>
       </p:sp>
@@ -30732,7 +31923,7 @@
 </file>
 
 <file path=ppt/slides/slide42.xml><?xml version="1.0" encoding="utf-8"?>
-<p:sld xmlns:a="http://schemas.openxmlformats.org/drawingml/2006/main" xmlns:p="http://schemas.openxmlformats.org/presentationml/2006/main" xmlns:r="http://schemas.openxmlformats.org/officeDocument/2006/relationships">
+<p:sld xmlns:a="http://schemas.openxmlformats.org/drawingml/2006/main" xmlns:r="http://schemas.openxmlformats.org/officeDocument/2006/relationships" xmlns:p="http://schemas.openxmlformats.org/presentationml/2006/main">
   <p:cSld>
     <p:bg>
       <p:bgPr>
@@ -30748,7 +31939,14 @@
         <p:cNvGrpSpPr/>
         <p:nvPr/>
       </p:nvGrpSpPr>
-      <p:grpSpPr/>
+      <p:grpSpPr>
+        <a:xfrm>
+          <a:off x="0" y="0"/>
+          <a:ext cx="0" cy="0"/>
+          <a:chOff x="0" y="0"/>
+          <a:chExt cx="0" cy="0"/>
+        </a:xfrm>
+      </p:grpSpPr>
       <p:sp>
         <p:nvSpPr>
           <p:cNvPr id="2" name="Rectangle 1"/>
@@ -30790,6 +31988,7 @@
           <a:lstStyle/>
           <a:p>
             <a:pPr algn="ctr"/>
+            <a:endParaRPr/>
           </a:p>
         </p:txBody>
       </p:sp>
@@ -30895,6 +32094,7 @@
           <a:lstStyle/>
           <a:p>
             <a:pPr algn="ctr"/>
+            <a:endParaRPr/>
           </a:p>
         </p:txBody>
       </p:sp>
@@ -31015,6 +32215,7 @@
           <a:lstStyle/>
           <a:p>
             <a:pPr algn="ctr"/>
+            <a:endParaRPr/>
           </a:p>
         </p:txBody>
       </p:sp>
@@ -31074,8 +32275,20 @@
                 <a:tableStyleId>{5C22544A-7EE6-4342-B048-85BDC9FD1C3A}</a:tableStyleId>
               </a:tblPr>
               <a:tblGrid>
-                <a:gridCol w="5486400"/>
-                <a:gridCol w="5486400"/>
+                <a:gridCol w="5486400">
+                  <a:extLst>
+                    <a:ext uri="{9D8B030D-6E8A-4147-A177-3AD203B41FA5}">
+                      <a16:colId xmlns:a16="http://schemas.microsoft.com/office/drawing/2014/main" val="20000"/>
+                    </a:ext>
+                  </a:extLst>
+                </a:gridCol>
+                <a:gridCol w="5486400">
+                  <a:extLst>
+                    <a:ext uri="{9D8B030D-6E8A-4147-A177-3AD203B41FA5}">
+                      <a16:colId xmlns:a16="http://schemas.microsoft.com/office/drawing/2014/main" val="20001"/>
+                    </a:ext>
+                  </a:extLst>
+                </a:gridCol>
               </a:tblGrid>
               <a:tr h="365760">
                 <a:tc>
@@ -31124,6 +32337,11 @@
                     </a:solidFill>
                   </a:tcPr>
                 </a:tc>
+                <a:extLst>
+                  <a:ext uri="{0D108BD9-81ED-4DB2-BD59-A6C34878D82A}">
+                    <a16:rowId xmlns:a16="http://schemas.microsoft.com/office/drawing/2014/main" val="10000"/>
+                  </a:ext>
+                </a:extLst>
               </a:tr>
               <a:tr h="365760">
                 <a:tc>
@@ -31172,6 +32390,11 @@
                     </a:solidFill>
                   </a:tcPr>
                 </a:tc>
+                <a:extLst>
+                  <a:ext uri="{0D108BD9-81ED-4DB2-BD59-A6C34878D82A}">
+                    <a16:rowId xmlns:a16="http://schemas.microsoft.com/office/drawing/2014/main" val="10001"/>
+                  </a:ext>
+                </a:extLst>
               </a:tr>
               <a:tr h="365760">
                 <a:tc>
@@ -31220,6 +32443,11 @@
                     </a:solidFill>
                   </a:tcPr>
                 </a:tc>
+                <a:extLst>
+                  <a:ext uri="{0D108BD9-81ED-4DB2-BD59-A6C34878D82A}">
+                    <a16:rowId xmlns:a16="http://schemas.microsoft.com/office/drawing/2014/main" val="10002"/>
+                  </a:ext>
+                </a:extLst>
               </a:tr>
               <a:tr h="365760">
                 <a:tc>
@@ -31268,6 +32496,11 @@
                     </a:solidFill>
                   </a:tcPr>
                 </a:tc>
+                <a:extLst>
+                  <a:ext uri="{0D108BD9-81ED-4DB2-BD59-A6C34878D82A}">
+                    <a16:rowId xmlns:a16="http://schemas.microsoft.com/office/drawing/2014/main" val="10003"/>
+                  </a:ext>
+                </a:extLst>
               </a:tr>
               <a:tr h="365760">
                 <a:tc>
@@ -31316,6 +32549,11 @@
                     </a:solidFill>
                   </a:tcPr>
                 </a:tc>
+                <a:extLst>
+                  <a:ext uri="{0D108BD9-81ED-4DB2-BD59-A6C34878D82A}">
+                    <a16:rowId xmlns:a16="http://schemas.microsoft.com/office/drawing/2014/main" val="10004"/>
+                  </a:ext>
+                </a:extLst>
               </a:tr>
             </a:tbl>
           </a:graphicData>
@@ -31364,6 +32602,7 @@
           <a:lstStyle/>
           <a:p>
             <a:pPr algn="ctr"/>
+            <a:endParaRPr/>
           </a:p>
         </p:txBody>
       </p:sp>
@@ -31445,6 +32684,7 @@
           <a:lstStyle/>
           <a:p>
             <a:pPr algn="ctr"/>
+            <a:endParaRPr/>
           </a:p>
         </p:txBody>
       </p:sp>
@@ -31531,7 +32771,7 @@
 </file>
 
 <file path=ppt/slides/slide43.xml><?xml version="1.0" encoding="utf-8"?>
-<p:sld xmlns:a="http://schemas.openxmlformats.org/drawingml/2006/main" xmlns:p="http://schemas.openxmlformats.org/presentationml/2006/main" xmlns:r="http://schemas.openxmlformats.org/officeDocument/2006/relationships">
+<p:sld xmlns:a="http://schemas.openxmlformats.org/drawingml/2006/main" xmlns:r="http://schemas.openxmlformats.org/officeDocument/2006/relationships" xmlns:p="http://schemas.openxmlformats.org/presentationml/2006/main">
   <p:cSld>
     <p:bg>
       <p:bgPr>
@@ -31547,7 +32787,14 @@
         <p:cNvGrpSpPr/>
         <p:nvPr/>
       </p:nvGrpSpPr>
-      <p:grpSpPr/>
+      <p:grpSpPr>
+        <a:xfrm>
+          <a:off x="0" y="0"/>
+          <a:ext cx="0" cy="0"/>
+          <a:chOff x="0" y="0"/>
+          <a:chExt cx="0" cy="0"/>
+        </a:xfrm>
+      </p:grpSpPr>
       <p:sp>
         <p:nvSpPr>
           <p:cNvPr id="2" name="Rectangle 1"/>
@@ -31589,6 +32836,7 @@
           <a:lstStyle/>
           <a:p>
             <a:pPr algn="ctr"/>
+            <a:endParaRPr/>
           </a:p>
         </p:txBody>
       </p:sp>
@@ -31694,6 +32942,7 @@
           <a:lstStyle/>
           <a:p>
             <a:pPr algn="ctr"/>
+            <a:endParaRPr/>
           </a:p>
         </p:txBody>
       </p:sp>
@@ -31790,8 +33039,20 @@
                 <a:tableStyleId>{5C22544A-7EE6-4342-B048-85BDC9FD1C3A}</a:tableStyleId>
               </a:tblPr>
               <a:tblGrid>
-                <a:gridCol w="5486400"/>
-                <a:gridCol w="5486400"/>
+                <a:gridCol w="5486400">
+                  <a:extLst>
+                    <a:ext uri="{9D8B030D-6E8A-4147-A177-3AD203B41FA5}">
+                      <a16:colId xmlns:a16="http://schemas.microsoft.com/office/drawing/2014/main" val="20000"/>
+                    </a:ext>
+                  </a:extLst>
+                </a:gridCol>
+                <a:gridCol w="5486400">
+                  <a:extLst>
+                    <a:ext uri="{9D8B030D-6E8A-4147-A177-3AD203B41FA5}">
+                      <a16:colId xmlns:a16="http://schemas.microsoft.com/office/drawing/2014/main" val="20001"/>
+                    </a:ext>
+                  </a:extLst>
+                </a:gridCol>
               </a:tblGrid>
               <a:tr h="475488">
                 <a:tc>
@@ -31840,6 +33101,11 @@
                     </a:solidFill>
                   </a:tcPr>
                 </a:tc>
+                <a:extLst>
+                  <a:ext uri="{0D108BD9-81ED-4DB2-BD59-A6C34878D82A}">
+                    <a16:rowId xmlns:a16="http://schemas.microsoft.com/office/drawing/2014/main" val="10000"/>
+                  </a:ext>
+                </a:extLst>
               </a:tr>
               <a:tr h="475488">
                 <a:tc>
@@ -31888,6 +33154,11 @@
                     </a:solidFill>
                   </a:tcPr>
                 </a:tc>
+                <a:extLst>
+                  <a:ext uri="{0D108BD9-81ED-4DB2-BD59-A6C34878D82A}">
+                    <a16:rowId xmlns:a16="http://schemas.microsoft.com/office/drawing/2014/main" val="10001"/>
+                  </a:ext>
+                </a:extLst>
               </a:tr>
               <a:tr h="475488">
                 <a:tc>
@@ -31936,6 +33207,11 @@
                     </a:solidFill>
                   </a:tcPr>
                 </a:tc>
+                <a:extLst>
+                  <a:ext uri="{0D108BD9-81ED-4DB2-BD59-A6C34878D82A}">
+                    <a16:rowId xmlns:a16="http://schemas.microsoft.com/office/drawing/2014/main" val="10002"/>
+                  </a:ext>
+                </a:extLst>
               </a:tr>
               <a:tr h="475488">
                 <a:tc>
@@ -31984,6 +33260,11 @@
                     </a:solidFill>
                   </a:tcPr>
                 </a:tc>
+                <a:extLst>
+                  <a:ext uri="{0D108BD9-81ED-4DB2-BD59-A6C34878D82A}">
+                    <a16:rowId xmlns:a16="http://schemas.microsoft.com/office/drawing/2014/main" val="10003"/>
+                  </a:ext>
+                </a:extLst>
               </a:tr>
               <a:tr h="475488">
                 <a:tc>
@@ -32032,6 +33313,11 @@
                     </a:solidFill>
                   </a:tcPr>
                 </a:tc>
+                <a:extLst>
+                  <a:ext uri="{0D108BD9-81ED-4DB2-BD59-A6C34878D82A}">
+                    <a16:rowId xmlns:a16="http://schemas.microsoft.com/office/drawing/2014/main" val="10004"/>
+                  </a:ext>
+                </a:extLst>
               </a:tr>
             </a:tbl>
           </a:graphicData>
@@ -32080,6 +33366,7 @@
           <a:lstStyle/>
           <a:p>
             <a:pPr algn="ctr"/>
+            <a:endParaRPr/>
           </a:p>
         </p:txBody>
       </p:sp>
@@ -32161,6 +33448,7 @@
           <a:lstStyle/>
           <a:p>
             <a:pPr algn="ctr"/>
+            <a:endParaRPr/>
           </a:p>
         </p:txBody>
       </p:sp>
@@ -32247,7 +33535,7 @@
 </file>
 
 <file path=ppt/slides/slide44.xml><?xml version="1.0" encoding="utf-8"?>
-<p:sld xmlns:a="http://schemas.openxmlformats.org/drawingml/2006/main" xmlns:p="http://schemas.openxmlformats.org/presentationml/2006/main" xmlns:r="http://schemas.openxmlformats.org/officeDocument/2006/relationships">
+<p:sld xmlns:a="http://schemas.openxmlformats.org/drawingml/2006/main" xmlns:r="http://schemas.openxmlformats.org/officeDocument/2006/relationships" xmlns:p="http://schemas.openxmlformats.org/presentationml/2006/main">
   <p:cSld>
     <p:bg>
       <p:bgPr>
@@ -32263,7 +33551,14 @@
         <p:cNvGrpSpPr/>
         <p:nvPr/>
       </p:nvGrpSpPr>
-      <p:grpSpPr/>
+      <p:grpSpPr>
+        <a:xfrm>
+          <a:off x="0" y="0"/>
+          <a:ext cx="0" cy="0"/>
+          <a:chOff x="0" y="0"/>
+          <a:chExt cx="0" cy="0"/>
+        </a:xfrm>
+      </p:grpSpPr>
       <p:sp>
         <p:nvSpPr>
           <p:cNvPr id="2" name="Rectangle 1"/>
@@ -32305,6 +33600,7 @@
           <a:lstStyle/>
           <a:p>
             <a:pPr algn="ctr"/>
+            <a:endParaRPr/>
           </a:p>
         </p:txBody>
       </p:sp>
@@ -32410,6 +33706,7 @@
           <a:lstStyle/>
           <a:p>
             <a:pPr algn="ctr"/>
+            <a:endParaRPr/>
           </a:p>
         </p:txBody>
       </p:sp>
@@ -32530,6 +33827,7 @@
           <a:lstStyle/>
           <a:p>
             <a:pPr algn="ctr"/>
+            <a:endParaRPr/>
           </a:p>
         </p:txBody>
       </p:sp>
@@ -32761,6 +34059,7 @@
           <a:lstStyle/>
           <a:p>
             <a:pPr algn="ctr"/>
+            <a:endParaRPr/>
           </a:p>
         </p:txBody>
       </p:sp>
@@ -32829,6 +34128,7 @@
           <a:lstStyle/>
           <a:p>
             <a:pPr algn="ctr"/>
+            <a:endParaRPr/>
           </a:p>
         </p:txBody>
       </p:sp>
@@ -32915,7 +34215,7 @@
 </file>
 
 <file path=ppt/slides/slide45.xml><?xml version="1.0" encoding="utf-8"?>
-<p:sld xmlns:a="http://schemas.openxmlformats.org/drawingml/2006/main" xmlns:p="http://schemas.openxmlformats.org/presentationml/2006/main" xmlns:r="http://schemas.openxmlformats.org/officeDocument/2006/relationships">
+<p:sld xmlns:a="http://schemas.openxmlformats.org/drawingml/2006/main" xmlns:r="http://schemas.openxmlformats.org/officeDocument/2006/relationships" xmlns:p="http://schemas.openxmlformats.org/presentationml/2006/main">
   <p:cSld>
     <p:bg>
       <p:bgPr>
@@ -32931,7 +34231,14 @@
         <p:cNvGrpSpPr/>
         <p:nvPr/>
       </p:nvGrpSpPr>
-      <p:grpSpPr/>
+      <p:grpSpPr>
+        <a:xfrm>
+          <a:off x="0" y="0"/>
+          <a:ext cx="0" cy="0"/>
+          <a:chOff x="0" y="0"/>
+          <a:chExt cx="0" cy="0"/>
+        </a:xfrm>
+      </p:grpSpPr>
       <p:sp>
         <p:nvSpPr>
           <p:cNvPr id="2" name="Rectangle 1"/>
@@ -32973,6 +34280,7 @@
           <a:lstStyle/>
           <a:p>
             <a:pPr algn="ctr"/>
+            <a:endParaRPr/>
           </a:p>
         </p:txBody>
       </p:sp>
@@ -33078,6 +34386,7 @@
           <a:lstStyle/>
           <a:p>
             <a:pPr algn="ctr"/>
+            <a:endParaRPr/>
           </a:p>
         </p:txBody>
       </p:sp>
@@ -33198,6 +34507,7 @@
           <a:lstStyle/>
           <a:p>
             <a:pPr algn="ctr"/>
+            <a:endParaRPr/>
           </a:p>
         </p:txBody>
       </p:sp>
@@ -33429,6 +34739,7 @@
           <a:lstStyle/>
           <a:p>
             <a:pPr algn="ctr"/>
+            <a:endParaRPr/>
           </a:p>
         </p:txBody>
       </p:sp>
@@ -33497,6 +34808,7 @@
           <a:lstStyle/>
           <a:p>
             <a:pPr algn="ctr"/>
+            <a:endParaRPr/>
           </a:p>
         </p:txBody>
       </p:sp>
@@ -33583,7 +34895,7 @@
 </file>
 
 <file path=ppt/slides/slide46.xml><?xml version="1.0" encoding="utf-8"?>
-<p:sld xmlns:a="http://schemas.openxmlformats.org/drawingml/2006/main" xmlns:p="http://schemas.openxmlformats.org/presentationml/2006/main" xmlns:r="http://schemas.openxmlformats.org/officeDocument/2006/relationships">
+<p:sld xmlns:a="http://schemas.openxmlformats.org/drawingml/2006/main" xmlns:r="http://schemas.openxmlformats.org/officeDocument/2006/relationships" xmlns:p="http://schemas.openxmlformats.org/presentationml/2006/main">
   <p:cSld>
     <p:bg>
       <p:bgPr>
@@ -33599,7 +34911,14 @@
         <p:cNvGrpSpPr/>
         <p:nvPr/>
       </p:nvGrpSpPr>
-      <p:grpSpPr/>
+      <p:grpSpPr>
+        <a:xfrm>
+          <a:off x="0" y="0"/>
+          <a:ext cx="0" cy="0"/>
+          <a:chOff x="0" y="0"/>
+          <a:chExt cx="0" cy="0"/>
+        </a:xfrm>
+      </p:grpSpPr>
       <p:sp>
         <p:nvSpPr>
           <p:cNvPr id="2" name="Rectangle 1"/>
@@ -33641,6 +34960,7 @@
           <a:lstStyle/>
           <a:p>
             <a:pPr algn="ctr"/>
+            <a:endParaRPr/>
           </a:p>
         </p:txBody>
       </p:sp>
@@ -33746,6 +35066,7 @@
           <a:lstStyle/>
           <a:p>
             <a:pPr algn="ctr"/>
+            <a:endParaRPr/>
           </a:p>
         </p:txBody>
       </p:sp>
@@ -33866,6 +35187,7 @@
           <a:lstStyle/>
           <a:p>
             <a:pPr algn="ctr"/>
+            <a:endParaRPr/>
           </a:p>
         </p:txBody>
       </p:sp>
@@ -34171,6 +35493,7 @@
           <a:lstStyle/>
           <a:p>
             <a:pPr algn="ctr"/>
+            <a:endParaRPr/>
           </a:p>
         </p:txBody>
       </p:sp>
@@ -34276,6 +35599,7 @@
           <a:lstStyle/>
           <a:p>
             <a:pPr algn="ctr"/>
+            <a:endParaRPr/>
           </a:p>
         </p:txBody>
       </p:sp>
@@ -34362,7 +35686,7 @@
 </file>
 
 <file path=ppt/slides/slide47.xml><?xml version="1.0" encoding="utf-8"?>
-<p:sld xmlns:a="http://schemas.openxmlformats.org/drawingml/2006/main" xmlns:p="http://schemas.openxmlformats.org/presentationml/2006/main" xmlns:r="http://schemas.openxmlformats.org/officeDocument/2006/relationships">
+<p:sld xmlns:a="http://schemas.openxmlformats.org/drawingml/2006/main" xmlns:r="http://schemas.openxmlformats.org/officeDocument/2006/relationships" xmlns:p="http://schemas.openxmlformats.org/presentationml/2006/main">
   <p:cSld>
     <p:bg>
       <p:bgPr>
@@ -34378,7 +35702,14 @@
         <p:cNvGrpSpPr/>
         <p:nvPr/>
       </p:nvGrpSpPr>
-      <p:grpSpPr/>
+      <p:grpSpPr>
+        <a:xfrm>
+          <a:off x="0" y="0"/>
+          <a:ext cx="0" cy="0"/>
+          <a:chOff x="0" y="0"/>
+          <a:chExt cx="0" cy="0"/>
+        </a:xfrm>
+      </p:grpSpPr>
       <p:sp>
         <p:nvSpPr>
           <p:cNvPr id="2" name="Rectangle 1"/>
@@ -34420,6 +35751,7 @@
           <a:lstStyle/>
           <a:p>
             <a:pPr algn="ctr"/>
+            <a:endParaRPr/>
           </a:p>
         </p:txBody>
       </p:sp>
@@ -34525,6 +35857,7 @@
           <a:lstStyle/>
           <a:p>
             <a:pPr algn="ctr"/>
+            <a:endParaRPr/>
           </a:p>
         </p:txBody>
       </p:sp>
@@ -34645,6 +35978,7 @@
           <a:lstStyle/>
           <a:p>
             <a:pPr algn="ctr"/>
+            <a:endParaRPr/>
           </a:p>
         </p:txBody>
       </p:sp>
@@ -34728,6 +36062,7 @@
           <a:lstStyle/>
           <a:p>
             <a:pPr algn="ctr"/>
+            <a:endParaRPr/>
           </a:p>
         </p:txBody>
       </p:sp>
@@ -34981,6 +36316,7 @@
           <a:lstStyle/>
           <a:p>
             <a:pPr algn="ctr"/>
+            <a:endParaRPr/>
           </a:p>
         </p:txBody>
       </p:sp>
@@ -35067,7 +36403,7 @@
 </file>
 
 <file path=ppt/slides/slide48.xml><?xml version="1.0" encoding="utf-8"?>
-<p:sld xmlns:a="http://schemas.openxmlformats.org/drawingml/2006/main" xmlns:p="http://schemas.openxmlformats.org/presentationml/2006/main" xmlns:r="http://schemas.openxmlformats.org/officeDocument/2006/relationships">
+<p:sld xmlns:a="http://schemas.openxmlformats.org/drawingml/2006/main" xmlns:r="http://schemas.openxmlformats.org/officeDocument/2006/relationships" xmlns:p="http://schemas.openxmlformats.org/presentationml/2006/main">
   <p:cSld>
     <p:bg>
       <p:bgPr>
@@ -35083,7 +36419,14 @@
         <p:cNvGrpSpPr/>
         <p:nvPr/>
       </p:nvGrpSpPr>
-      <p:grpSpPr/>
+      <p:grpSpPr>
+        <a:xfrm>
+          <a:off x="0" y="0"/>
+          <a:ext cx="0" cy="0"/>
+          <a:chOff x="0" y="0"/>
+          <a:chExt cx="0" cy="0"/>
+        </a:xfrm>
+      </p:grpSpPr>
       <p:sp>
         <p:nvSpPr>
           <p:cNvPr id="2" name="Rectangle 1"/>
@@ -35125,6 +36468,7 @@
           <a:lstStyle/>
           <a:p>
             <a:pPr algn="ctr"/>
+            <a:endParaRPr/>
           </a:p>
         </p:txBody>
       </p:sp>
@@ -35230,6 +36574,7 @@
           <a:lstStyle/>
           <a:p>
             <a:pPr algn="ctr"/>
+            <a:endParaRPr/>
           </a:p>
         </p:txBody>
       </p:sp>
@@ -35350,6 +36695,7 @@
           <a:lstStyle/>
           <a:p>
             <a:pPr algn="ctr"/>
+            <a:endParaRPr/>
           </a:p>
         </p:txBody>
       </p:sp>
@@ -35433,6 +36779,7 @@
           <a:lstStyle/>
           <a:p>
             <a:pPr algn="ctr"/>
+            <a:endParaRPr/>
           </a:p>
         </p:txBody>
       </p:sp>
@@ -35699,6 +37046,7 @@
           <a:lstStyle/>
           <a:p>
             <a:pPr algn="ctr"/>
+            <a:endParaRPr/>
           </a:p>
         </p:txBody>
       </p:sp>
@@ -35785,7 +37133,7 @@
 </file>
 
 <file path=ppt/slides/slide49.xml><?xml version="1.0" encoding="utf-8"?>
-<p:sld xmlns:a="http://schemas.openxmlformats.org/drawingml/2006/main" xmlns:p="http://schemas.openxmlformats.org/presentationml/2006/main" xmlns:r="http://schemas.openxmlformats.org/officeDocument/2006/relationships">
+<p:sld xmlns:a="http://schemas.openxmlformats.org/drawingml/2006/main" xmlns:r="http://schemas.openxmlformats.org/officeDocument/2006/relationships" xmlns:p="http://schemas.openxmlformats.org/presentationml/2006/main">
   <p:cSld>
     <p:bg>
       <p:bgPr>
@@ -35801,7 +37149,14 @@
         <p:cNvGrpSpPr/>
         <p:nvPr/>
       </p:nvGrpSpPr>
-      <p:grpSpPr/>
+      <p:grpSpPr>
+        <a:xfrm>
+          <a:off x="0" y="0"/>
+          <a:ext cx="0" cy="0"/>
+          <a:chOff x="0" y="0"/>
+          <a:chExt cx="0" cy="0"/>
+        </a:xfrm>
+      </p:grpSpPr>
       <p:sp>
         <p:nvSpPr>
           <p:cNvPr id="2" name="Rectangle 1"/>
@@ -35843,6 +37198,7 @@
           <a:lstStyle/>
           <a:p>
             <a:pPr algn="ctr"/>
+            <a:endParaRPr/>
           </a:p>
         </p:txBody>
       </p:sp>
@@ -35948,6 +37304,7 @@
           <a:lstStyle/>
           <a:p>
             <a:pPr algn="ctr"/>
+            <a:endParaRPr/>
           </a:p>
         </p:txBody>
       </p:sp>
@@ -36068,6 +37425,7 @@
           <a:lstStyle/>
           <a:p>
             <a:pPr algn="ctr"/>
+            <a:endParaRPr/>
           </a:p>
         </p:txBody>
       </p:sp>
@@ -36151,6 +37509,7 @@
           <a:lstStyle/>
           <a:p>
             <a:pPr algn="ctr"/>
+            <a:endParaRPr/>
           </a:p>
         </p:txBody>
       </p:sp>
@@ -36443,6 +37802,7 @@
           <a:lstStyle/>
           <a:p>
             <a:pPr algn="ctr"/>
+            <a:endParaRPr/>
           </a:p>
         </p:txBody>
       </p:sp>
@@ -36511,6 +37871,7 @@
           <a:lstStyle/>
           <a:p>
             <a:pPr algn="ctr"/>
+            <a:endParaRPr/>
           </a:p>
         </p:txBody>
       </p:sp>
@@ -36597,7 +37958,7 @@
 </file>
 
 <file path=ppt/slides/slide5.xml><?xml version="1.0" encoding="utf-8"?>
-<p:sld xmlns:a="http://schemas.openxmlformats.org/drawingml/2006/main" xmlns:p="http://schemas.openxmlformats.org/presentationml/2006/main" xmlns:r="http://schemas.openxmlformats.org/officeDocument/2006/relationships">
+<p:sld xmlns:a="http://schemas.openxmlformats.org/drawingml/2006/main" xmlns:r="http://schemas.openxmlformats.org/officeDocument/2006/relationships" xmlns:p="http://schemas.openxmlformats.org/presentationml/2006/main">
   <p:cSld>
     <p:bg>
       <p:bgPr>
@@ -36613,7 +37974,14 @@
         <p:cNvGrpSpPr/>
         <p:nvPr/>
       </p:nvGrpSpPr>
-      <p:grpSpPr/>
+      <p:grpSpPr>
+        <a:xfrm>
+          <a:off x="0" y="0"/>
+          <a:ext cx="0" cy="0"/>
+          <a:chOff x="0" y="0"/>
+          <a:chExt cx="0" cy="0"/>
+        </a:xfrm>
+      </p:grpSpPr>
       <p:sp>
         <p:nvSpPr>
           <p:cNvPr id="2" name="Rectangle 1"/>
@@ -36655,6 +38023,7 @@
           <a:lstStyle/>
           <a:p>
             <a:pPr algn="ctr"/>
+            <a:endParaRPr/>
           </a:p>
         </p:txBody>
       </p:sp>
@@ -36760,6 +38129,7 @@
           <a:lstStyle/>
           <a:p>
             <a:pPr algn="ctr"/>
+            <a:endParaRPr/>
           </a:p>
         </p:txBody>
       </p:sp>
@@ -36880,6 +38250,7 @@
           <a:lstStyle/>
           <a:p>
             <a:pPr algn="ctr"/>
+            <a:endParaRPr/>
           </a:p>
         </p:txBody>
       </p:sp>
@@ -36963,6 +38334,7 @@
           <a:lstStyle/>
           <a:p>
             <a:pPr algn="ctr"/>
+            <a:endParaRPr/>
           </a:p>
         </p:txBody>
       </p:sp>
@@ -37255,6 +38627,7 @@
           <a:lstStyle/>
           <a:p>
             <a:pPr algn="ctr"/>
+            <a:endParaRPr/>
           </a:p>
         </p:txBody>
       </p:sp>
@@ -37360,6 +38733,7 @@
           <a:lstStyle/>
           <a:p>
             <a:pPr algn="ctr"/>
+            <a:endParaRPr/>
           </a:p>
         </p:txBody>
       </p:sp>
@@ -37446,7 +38820,7 @@
 </file>
 
 <file path=ppt/slides/slide50.xml><?xml version="1.0" encoding="utf-8"?>
-<p:sld xmlns:a="http://schemas.openxmlformats.org/drawingml/2006/main" xmlns:p="http://schemas.openxmlformats.org/presentationml/2006/main" xmlns:r="http://schemas.openxmlformats.org/officeDocument/2006/relationships">
+<p:sld xmlns:a="http://schemas.openxmlformats.org/drawingml/2006/main" xmlns:r="http://schemas.openxmlformats.org/officeDocument/2006/relationships" xmlns:p="http://schemas.openxmlformats.org/presentationml/2006/main">
   <p:cSld>
     <p:bg>
       <p:bgPr>
@@ -37462,7 +38836,14 @@
         <p:cNvGrpSpPr/>
         <p:nvPr/>
       </p:nvGrpSpPr>
-      <p:grpSpPr/>
+      <p:grpSpPr>
+        <a:xfrm>
+          <a:off x="0" y="0"/>
+          <a:ext cx="0" cy="0"/>
+          <a:chOff x="0" y="0"/>
+          <a:chExt cx="0" cy="0"/>
+        </a:xfrm>
+      </p:grpSpPr>
       <p:sp>
         <p:nvSpPr>
           <p:cNvPr id="2" name="Rectangle 1"/>
@@ -37504,6 +38885,7 @@
           <a:lstStyle/>
           <a:p>
             <a:pPr algn="ctr"/>
+            <a:endParaRPr/>
           </a:p>
         </p:txBody>
       </p:sp>
@@ -37609,6 +38991,7 @@
           <a:lstStyle/>
           <a:p>
             <a:pPr algn="ctr"/>
+            <a:endParaRPr/>
           </a:p>
         </p:txBody>
       </p:sp>
@@ -37705,8 +39088,20 @@
                 <a:tableStyleId>{5C22544A-7EE6-4342-B048-85BDC9FD1C3A}</a:tableStyleId>
               </a:tblPr>
               <a:tblGrid>
-                <a:gridCol w="5486400"/>
-                <a:gridCol w="5486400"/>
+                <a:gridCol w="5486400">
+                  <a:extLst>
+                    <a:ext uri="{9D8B030D-6E8A-4147-A177-3AD203B41FA5}">
+                      <a16:colId xmlns:a16="http://schemas.microsoft.com/office/drawing/2014/main" val="20000"/>
+                    </a:ext>
+                  </a:extLst>
+                </a:gridCol>
+                <a:gridCol w="5486400">
+                  <a:extLst>
+                    <a:ext uri="{9D8B030D-6E8A-4147-A177-3AD203B41FA5}">
+                      <a16:colId xmlns:a16="http://schemas.microsoft.com/office/drawing/2014/main" val="20001"/>
+                    </a:ext>
+                  </a:extLst>
+                </a:gridCol>
               </a:tblGrid>
               <a:tr h="475488">
                 <a:tc>
@@ -37755,6 +39150,11 @@
                     </a:solidFill>
                   </a:tcPr>
                 </a:tc>
+                <a:extLst>
+                  <a:ext uri="{0D108BD9-81ED-4DB2-BD59-A6C34878D82A}">
+                    <a16:rowId xmlns:a16="http://schemas.microsoft.com/office/drawing/2014/main" val="10000"/>
+                  </a:ext>
+                </a:extLst>
               </a:tr>
               <a:tr h="475488">
                 <a:tc>
@@ -37803,6 +39203,11 @@
                     </a:solidFill>
                   </a:tcPr>
                 </a:tc>
+                <a:extLst>
+                  <a:ext uri="{0D108BD9-81ED-4DB2-BD59-A6C34878D82A}">
+                    <a16:rowId xmlns:a16="http://schemas.microsoft.com/office/drawing/2014/main" val="10001"/>
+                  </a:ext>
+                </a:extLst>
               </a:tr>
               <a:tr h="475488">
                 <a:tc>
@@ -37851,6 +39256,11 @@
                     </a:solidFill>
                   </a:tcPr>
                 </a:tc>
+                <a:extLst>
+                  <a:ext uri="{0D108BD9-81ED-4DB2-BD59-A6C34878D82A}">
+                    <a16:rowId xmlns:a16="http://schemas.microsoft.com/office/drawing/2014/main" val="10002"/>
+                  </a:ext>
+                </a:extLst>
               </a:tr>
               <a:tr h="475488">
                 <a:tc>
@@ -37899,6 +39309,11 @@
                     </a:solidFill>
                   </a:tcPr>
                 </a:tc>
+                <a:extLst>
+                  <a:ext uri="{0D108BD9-81ED-4DB2-BD59-A6C34878D82A}">
+                    <a16:rowId xmlns:a16="http://schemas.microsoft.com/office/drawing/2014/main" val="10003"/>
+                  </a:ext>
+                </a:extLst>
               </a:tr>
             </a:tbl>
           </a:graphicData>
@@ -37947,6 +39362,7 @@
           <a:lstStyle/>
           <a:p>
             <a:pPr algn="ctr"/>
+            <a:endParaRPr/>
           </a:p>
         </p:txBody>
       </p:sp>
@@ -38028,6 +39444,7 @@
           <a:lstStyle/>
           <a:p>
             <a:pPr algn="ctr"/>
+            <a:endParaRPr/>
           </a:p>
         </p:txBody>
       </p:sp>
@@ -38114,7 +39531,7 @@
 </file>
 
 <file path=ppt/slides/slide51.xml><?xml version="1.0" encoding="utf-8"?>
-<p:sld xmlns:a="http://schemas.openxmlformats.org/drawingml/2006/main" xmlns:p="http://schemas.openxmlformats.org/presentationml/2006/main" xmlns:r="http://schemas.openxmlformats.org/officeDocument/2006/relationships">
+<p:sld xmlns:a="http://schemas.openxmlformats.org/drawingml/2006/main" xmlns:r="http://schemas.openxmlformats.org/officeDocument/2006/relationships" xmlns:p="http://schemas.openxmlformats.org/presentationml/2006/main">
   <p:cSld>
     <p:bg>
       <p:bgPr>
@@ -38130,7 +39547,14 @@
         <p:cNvGrpSpPr/>
         <p:nvPr/>
       </p:nvGrpSpPr>
-      <p:grpSpPr/>
+      <p:grpSpPr>
+        <a:xfrm>
+          <a:off x="0" y="0"/>
+          <a:ext cx="0" cy="0"/>
+          <a:chOff x="0" y="0"/>
+          <a:chExt cx="0" cy="0"/>
+        </a:xfrm>
+      </p:grpSpPr>
       <p:sp>
         <p:nvSpPr>
           <p:cNvPr id="2" name="Rectangle 1"/>
@@ -38172,6 +39596,7 @@
           <a:lstStyle/>
           <a:p>
             <a:pPr algn="ctr"/>
+            <a:endParaRPr/>
           </a:p>
         </p:txBody>
       </p:sp>
@@ -38277,6 +39702,7 @@
           <a:lstStyle/>
           <a:p>
             <a:pPr algn="ctr"/>
+            <a:endParaRPr/>
           </a:p>
         </p:txBody>
       </p:sp>
@@ -38373,9 +39799,27 @@
                 <a:tableStyleId>{5C22544A-7EE6-4342-B048-85BDC9FD1C3A}</a:tableStyleId>
               </a:tblPr>
               <a:tblGrid>
-                <a:gridCol w="3657600"/>
-                <a:gridCol w="3657600"/>
-                <a:gridCol w="3657600"/>
+                <a:gridCol w="3657600">
+                  <a:extLst>
+                    <a:ext uri="{9D8B030D-6E8A-4147-A177-3AD203B41FA5}">
+                      <a16:colId xmlns:a16="http://schemas.microsoft.com/office/drawing/2014/main" val="20000"/>
+                    </a:ext>
+                  </a:extLst>
+                </a:gridCol>
+                <a:gridCol w="3657600">
+                  <a:extLst>
+                    <a:ext uri="{9D8B030D-6E8A-4147-A177-3AD203B41FA5}">
+                      <a16:colId xmlns:a16="http://schemas.microsoft.com/office/drawing/2014/main" val="20001"/>
+                    </a:ext>
+                  </a:extLst>
+                </a:gridCol>
+                <a:gridCol w="3657600">
+                  <a:extLst>
+                    <a:ext uri="{9D8B030D-6E8A-4147-A177-3AD203B41FA5}">
+                      <a16:colId xmlns:a16="http://schemas.microsoft.com/office/drawing/2014/main" val="20002"/>
+                    </a:ext>
+                  </a:extLst>
+                </a:gridCol>
               </a:tblGrid>
               <a:tr h="475488">
                 <a:tc>
@@ -38447,6 +39891,11 @@
                     </a:solidFill>
                   </a:tcPr>
                 </a:tc>
+                <a:extLst>
+                  <a:ext uri="{0D108BD9-81ED-4DB2-BD59-A6C34878D82A}">
+                    <a16:rowId xmlns:a16="http://schemas.microsoft.com/office/drawing/2014/main" val="10000"/>
+                  </a:ext>
+                </a:extLst>
               </a:tr>
               <a:tr h="475488">
                 <a:tc>
@@ -38518,6 +39967,11 @@
                     </a:solidFill>
                   </a:tcPr>
                 </a:tc>
+                <a:extLst>
+                  <a:ext uri="{0D108BD9-81ED-4DB2-BD59-A6C34878D82A}">
+                    <a16:rowId xmlns:a16="http://schemas.microsoft.com/office/drawing/2014/main" val="10001"/>
+                  </a:ext>
+                </a:extLst>
               </a:tr>
               <a:tr h="475488">
                 <a:tc>
@@ -38589,6 +40043,11 @@
                     </a:solidFill>
                   </a:tcPr>
                 </a:tc>
+                <a:extLst>
+                  <a:ext uri="{0D108BD9-81ED-4DB2-BD59-A6C34878D82A}">
+                    <a16:rowId xmlns:a16="http://schemas.microsoft.com/office/drawing/2014/main" val="10002"/>
+                  </a:ext>
+                </a:extLst>
               </a:tr>
               <a:tr h="475488">
                 <a:tc>
@@ -38660,6 +40119,11 @@
                     </a:solidFill>
                   </a:tcPr>
                 </a:tc>
+                <a:extLst>
+                  <a:ext uri="{0D108BD9-81ED-4DB2-BD59-A6C34878D82A}">
+                    <a16:rowId xmlns:a16="http://schemas.microsoft.com/office/drawing/2014/main" val="10003"/>
+                  </a:ext>
+                </a:extLst>
               </a:tr>
               <a:tr h="475488">
                 <a:tc>
@@ -38731,6 +40195,11 @@
                     </a:solidFill>
                   </a:tcPr>
                 </a:tc>
+                <a:extLst>
+                  <a:ext uri="{0D108BD9-81ED-4DB2-BD59-A6C34878D82A}">
+                    <a16:rowId xmlns:a16="http://schemas.microsoft.com/office/drawing/2014/main" val="10004"/>
+                  </a:ext>
+                </a:extLst>
               </a:tr>
             </a:tbl>
           </a:graphicData>
@@ -38779,6 +40248,7 @@
           <a:lstStyle/>
           <a:p>
             <a:pPr algn="ctr"/>
+            <a:endParaRPr/>
           </a:p>
         </p:txBody>
       </p:sp>
@@ -38860,6 +40330,7 @@
           <a:lstStyle/>
           <a:p>
             <a:pPr algn="ctr"/>
+            <a:endParaRPr/>
           </a:p>
         </p:txBody>
       </p:sp>
@@ -38946,7 +40417,7 @@
 </file>
 
 <file path=ppt/slides/slide52.xml><?xml version="1.0" encoding="utf-8"?>
-<p:sld xmlns:a="http://schemas.openxmlformats.org/drawingml/2006/main" xmlns:p="http://schemas.openxmlformats.org/presentationml/2006/main" xmlns:r="http://schemas.openxmlformats.org/officeDocument/2006/relationships">
+<p:sld xmlns:a="http://schemas.openxmlformats.org/drawingml/2006/main" xmlns:r="http://schemas.openxmlformats.org/officeDocument/2006/relationships" xmlns:p="http://schemas.openxmlformats.org/presentationml/2006/main">
   <p:cSld>
     <p:bg>
       <p:bgPr>
@@ -38962,7 +40433,14 @@
         <p:cNvGrpSpPr/>
         <p:nvPr/>
       </p:nvGrpSpPr>
-      <p:grpSpPr/>
+      <p:grpSpPr>
+        <a:xfrm>
+          <a:off x="0" y="0"/>
+          <a:ext cx="0" cy="0"/>
+          <a:chOff x="0" y="0"/>
+          <a:chExt cx="0" cy="0"/>
+        </a:xfrm>
+      </p:grpSpPr>
       <p:sp>
         <p:nvSpPr>
           <p:cNvPr id="2" name="Rectangle 1"/>
@@ -39004,6 +40482,7 @@
           <a:lstStyle/>
           <a:p>
             <a:pPr algn="ctr"/>
+            <a:endParaRPr/>
           </a:p>
         </p:txBody>
       </p:sp>
@@ -39109,6 +40588,7 @@
           <a:lstStyle/>
           <a:p>
             <a:pPr algn="ctr"/>
+            <a:endParaRPr/>
           </a:p>
         </p:txBody>
       </p:sp>
@@ -39229,6 +40709,7 @@
           <a:lstStyle/>
           <a:p>
             <a:pPr algn="ctr"/>
+            <a:endParaRPr/>
           </a:p>
         </p:txBody>
       </p:sp>
@@ -39460,6 +40941,7 @@
           <a:lstStyle/>
           <a:p>
             <a:pPr algn="ctr"/>
+            <a:endParaRPr/>
           </a:p>
         </p:txBody>
       </p:sp>
@@ -39528,6 +41010,7 @@
           <a:lstStyle/>
           <a:p>
             <a:pPr algn="ctr"/>
+            <a:endParaRPr/>
           </a:p>
         </p:txBody>
       </p:sp>
@@ -39614,7 +41097,7 @@
 </file>
 
 <file path=ppt/slides/slide53.xml><?xml version="1.0" encoding="utf-8"?>
-<p:sld xmlns:a="http://schemas.openxmlformats.org/drawingml/2006/main" xmlns:p="http://schemas.openxmlformats.org/presentationml/2006/main" xmlns:r="http://schemas.openxmlformats.org/officeDocument/2006/relationships">
+<p:sld xmlns:a="http://schemas.openxmlformats.org/drawingml/2006/main" xmlns:r="http://schemas.openxmlformats.org/officeDocument/2006/relationships" xmlns:p="http://schemas.openxmlformats.org/presentationml/2006/main">
   <p:cSld>
     <p:bg>
       <p:bgPr>
@@ -39630,7 +41113,14 @@
         <p:cNvGrpSpPr/>
         <p:nvPr/>
       </p:nvGrpSpPr>
-      <p:grpSpPr/>
+      <p:grpSpPr>
+        <a:xfrm>
+          <a:off x="0" y="0"/>
+          <a:ext cx="0" cy="0"/>
+          <a:chOff x="0" y="0"/>
+          <a:chExt cx="0" cy="0"/>
+        </a:xfrm>
+      </p:grpSpPr>
       <p:sp>
         <p:nvSpPr>
           <p:cNvPr id="2" name="Rectangle 1"/>
@@ -39672,6 +41162,7 @@
           <a:lstStyle/>
           <a:p>
             <a:pPr algn="ctr"/>
+            <a:endParaRPr/>
           </a:p>
         </p:txBody>
       </p:sp>
@@ -39777,6 +41268,7 @@
           <a:lstStyle/>
           <a:p>
             <a:pPr algn="ctr"/>
+            <a:endParaRPr/>
           </a:p>
         </p:txBody>
       </p:sp>
@@ -39897,6 +41389,7 @@
           <a:lstStyle/>
           <a:p>
             <a:pPr algn="ctr"/>
+            <a:endParaRPr/>
           </a:p>
         </p:txBody>
       </p:sp>
@@ -40128,6 +41621,7 @@
           <a:lstStyle/>
           <a:p>
             <a:pPr algn="ctr"/>
+            <a:endParaRPr/>
           </a:p>
         </p:txBody>
       </p:sp>
@@ -40196,6 +41690,7 @@
           <a:lstStyle/>
           <a:p>
             <a:pPr algn="ctr"/>
+            <a:endParaRPr/>
           </a:p>
         </p:txBody>
       </p:sp>
@@ -40282,7 +41777,7 @@
 </file>
 
 <file path=ppt/slides/slide54.xml><?xml version="1.0" encoding="utf-8"?>
-<p:sld xmlns:a="http://schemas.openxmlformats.org/drawingml/2006/main" xmlns:p="http://schemas.openxmlformats.org/presentationml/2006/main" xmlns:r="http://schemas.openxmlformats.org/officeDocument/2006/relationships">
+<p:sld xmlns:a="http://schemas.openxmlformats.org/drawingml/2006/main" xmlns:r="http://schemas.openxmlformats.org/officeDocument/2006/relationships" xmlns:p="http://schemas.openxmlformats.org/presentationml/2006/main">
   <p:cSld>
     <p:bg>
       <p:bgPr>
@@ -40298,7 +41793,14 @@
         <p:cNvGrpSpPr/>
         <p:nvPr/>
       </p:nvGrpSpPr>
-      <p:grpSpPr/>
+      <p:grpSpPr>
+        <a:xfrm>
+          <a:off x="0" y="0"/>
+          <a:ext cx="0" cy="0"/>
+          <a:chOff x="0" y="0"/>
+          <a:chExt cx="0" cy="0"/>
+        </a:xfrm>
+      </p:grpSpPr>
       <p:sp>
         <p:nvSpPr>
           <p:cNvPr id="2" name="Rectangle 1"/>
@@ -40340,6 +41842,7 @@
           <a:lstStyle/>
           <a:p>
             <a:pPr algn="ctr"/>
+            <a:endParaRPr/>
           </a:p>
         </p:txBody>
       </p:sp>
@@ -40445,6 +41948,7 @@
           <a:lstStyle/>
           <a:p>
             <a:pPr algn="ctr"/>
+            <a:endParaRPr/>
           </a:p>
         </p:txBody>
       </p:sp>
@@ -40565,6 +42069,7 @@
           <a:lstStyle/>
           <a:p>
             <a:pPr algn="ctr"/>
+            <a:endParaRPr/>
           </a:p>
         </p:txBody>
       </p:sp>
@@ -40870,6 +42375,7 @@
           <a:lstStyle/>
           <a:p>
             <a:pPr algn="ctr"/>
+            <a:endParaRPr/>
           </a:p>
         </p:txBody>
       </p:sp>
@@ -40975,6 +42481,7 @@
           <a:lstStyle/>
           <a:p>
             <a:pPr algn="ctr"/>
+            <a:endParaRPr/>
           </a:p>
         </p:txBody>
       </p:sp>
@@ -41061,7 +42568,7 @@
 </file>
 
 <file path=ppt/slides/slide55.xml><?xml version="1.0" encoding="utf-8"?>
-<p:sld xmlns:a="http://schemas.openxmlformats.org/drawingml/2006/main" xmlns:p="http://schemas.openxmlformats.org/presentationml/2006/main" xmlns:r="http://schemas.openxmlformats.org/officeDocument/2006/relationships">
+<p:sld xmlns:a="http://schemas.openxmlformats.org/drawingml/2006/main" xmlns:r="http://schemas.openxmlformats.org/officeDocument/2006/relationships" xmlns:p="http://schemas.openxmlformats.org/presentationml/2006/main">
   <p:cSld>
     <p:bg>
       <p:bgPr>
@@ -41077,7 +42584,14 @@
         <p:cNvGrpSpPr/>
         <p:nvPr/>
       </p:nvGrpSpPr>
-      <p:grpSpPr/>
+      <p:grpSpPr>
+        <a:xfrm>
+          <a:off x="0" y="0"/>
+          <a:ext cx="0" cy="0"/>
+          <a:chOff x="0" y="0"/>
+          <a:chExt cx="0" cy="0"/>
+        </a:xfrm>
+      </p:grpSpPr>
       <p:sp>
         <p:nvSpPr>
           <p:cNvPr id="2" name="Rectangle 1"/>
@@ -41119,6 +42633,7 @@
           <a:lstStyle/>
           <a:p>
             <a:pPr algn="ctr"/>
+            <a:endParaRPr/>
           </a:p>
         </p:txBody>
       </p:sp>
@@ -41224,6 +42739,7 @@
           <a:lstStyle/>
           <a:p>
             <a:pPr algn="ctr"/>
+            <a:endParaRPr/>
           </a:p>
         </p:txBody>
       </p:sp>
@@ -41344,6 +42860,7 @@
           <a:lstStyle/>
           <a:p>
             <a:pPr algn="ctr"/>
+            <a:endParaRPr/>
           </a:p>
         </p:txBody>
       </p:sp>
@@ -41647,6 +43164,7 @@
           <a:lstStyle/>
           <a:p>
             <a:pPr algn="ctr"/>
+            <a:endParaRPr/>
           </a:p>
         </p:txBody>
       </p:sp>
@@ -41733,7 +43251,7 @@
 </file>
 
 <file path=ppt/slides/slide56.xml><?xml version="1.0" encoding="utf-8"?>
-<p:sld xmlns:a="http://schemas.openxmlformats.org/drawingml/2006/main" xmlns:p="http://schemas.openxmlformats.org/presentationml/2006/main" xmlns:r="http://schemas.openxmlformats.org/officeDocument/2006/relationships">
+<p:sld xmlns:a="http://schemas.openxmlformats.org/drawingml/2006/main" xmlns:r="http://schemas.openxmlformats.org/officeDocument/2006/relationships" xmlns:p="http://schemas.openxmlformats.org/presentationml/2006/main">
   <p:cSld>
     <p:bg>
       <p:bgPr>
@@ -41749,7 +43267,14 @@
         <p:cNvGrpSpPr/>
         <p:nvPr/>
       </p:nvGrpSpPr>
-      <p:grpSpPr/>
+      <p:grpSpPr>
+        <a:xfrm>
+          <a:off x="0" y="0"/>
+          <a:ext cx="0" cy="0"/>
+          <a:chOff x="0" y="0"/>
+          <a:chExt cx="0" cy="0"/>
+        </a:xfrm>
+      </p:grpSpPr>
       <p:sp>
         <p:nvSpPr>
           <p:cNvPr id="2" name="Rectangle 1"/>
@@ -41791,6 +43316,7 @@
           <a:lstStyle/>
           <a:p>
             <a:pPr algn="ctr"/>
+            <a:endParaRPr/>
           </a:p>
         </p:txBody>
       </p:sp>
@@ -41896,6 +43422,7 @@
           <a:lstStyle/>
           <a:p>
             <a:pPr algn="ctr"/>
+            <a:endParaRPr/>
           </a:p>
         </p:txBody>
       </p:sp>
@@ -41992,9 +43519,27 @@
                 <a:tableStyleId>{5C22544A-7EE6-4342-B048-85BDC9FD1C3A}</a:tableStyleId>
               </a:tblPr>
               <a:tblGrid>
-                <a:gridCol w="3657600"/>
-                <a:gridCol w="3657600"/>
-                <a:gridCol w="3657600"/>
+                <a:gridCol w="3657600">
+                  <a:extLst>
+                    <a:ext uri="{9D8B030D-6E8A-4147-A177-3AD203B41FA5}">
+                      <a16:colId xmlns:a16="http://schemas.microsoft.com/office/drawing/2014/main" val="20000"/>
+                    </a:ext>
+                  </a:extLst>
+                </a:gridCol>
+                <a:gridCol w="3657600">
+                  <a:extLst>
+                    <a:ext uri="{9D8B030D-6E8A-4147-A177-3AD203B41FA5}">
+                      <a16:colId xmlns:a16="http://schemas.microsoft.com/office/drawing/2014/main" val="20001"/>
+                    </a:ext>
+                  </a:extLst>
+                </a:gridCol>
+                <a:gridCol w="3657600">
+                  <a:extLst>
+                    <a:ext uri="{9D8B030D-6E8A-4147-A177-3AD203B41FA5}">
+                      <a16:colId xmlns:a16="http://schemas.microsoft.com/office/drawing/2014/main" val="20002"/>
+                    </a:ext>
+                  </a:extLst>
+                </a:gridCol>
               </a:tblGrid>
               <a:tr h="475488">
                 <a:tc>
@@ -42066,6 +43611,11 @@
                     </a:solidFill>
                   </a:tcPr>
                 </a:tc>
+                <a:extLst>
+                  <a:ext uri="{0D108BD9-81ED-4DB2-BD59-A6C34878D82A}">
+                    <a16:rowId xmlns:a16="http://schemas.microsoft.com/office/drawing/2014/main" val="10000"/>
+                  </a:ext>
+                </a:extLst>
               </a:tr>
               <a:tr h="475488">
                 <a:tc>
@@ -42137,6 +43687,11 @@
                     </a:solidFill>
                   </a:tcPr>
                 </a:tc>
+                <a:extLst>
+                  <a:ext uri="{0D108BD9-81ED-4DB2-BD59-A6C34878D82A}">
+                    <a16:rowId xmlns:a16="http://schemas.microsoft.com/office/drawing/2014/main" val="10001"/>
+                  </a:ext>
+                </a:extLst>
               </a:tr>
               <a:tr h="475488">
                 <a:tc>
@@ -42208,6 +43763,11 @@
                     </a:solidFill>
                   </a:tcPr>
                 </a:tc>
+                <a:extLst>
+                  <a:ext uri="{0D108BD9-81ED-4DB2-BD59-A6C34878D82A}">
+                    <a16:rowId xmlns:a16="http://schemas.microsoft.com/office/drawing/2014/main" val="10002"/>
+                  </a:ext>
+                </a:extLst>
               </a:tr>
             </a:tbl>
           </a:graphicData>
@@ -42256,6 +43816,7 @@
           <a:lstStyle/>
           <a:p>
             <a:pPr algn="ctr"/>
+            <a:endParaRPr/>
           </a:p>
         </p:txBody>
       </p:sp>
@@ -42337,6 +43898,7 @@
           <a:lstStyle/>
           <a:p>
             <a:pPr algn="ctr"/>
+            <a:endParaRPr/>
           </a:p>
         </p:txBody>
       </p:sp>
@@ -42423,7 +43985,7 @@
 </file>
 
 <file path=ppt/slides/slide57.xml><?xml version="1.0" encoding="utf-8"?>
-<p:sld xmlns:a="http://schemas.openxmlformats.org/drawingml/2006/main" xmlns:p="http://schemas.openxmlformats.org/presentationml/2006/main" xmlns:r="http://schemas.openxmlformats.org/officeDocument/2006/relationships">
+<p:sld xmlns:a="http://schemas.openxmlformats.org/drawingml/2006/main" xmlns:r="http://schemas.openxmlformats.org/officeDocument/2006/relationships" xmlns:p="http://schemas.openxmlformats.org/presentationml/2006/main">
   <p:cSld>
     <p:bg>
       <p:bgPr>
@@ -42439,7 +44001,14 @@
         <p:cNvGrpSpPr/>
         <p:nvPr/>
       </p:nvGrpSpPr>
-      <p:grpSpPr/>
+      <p:grpSpPr>
+        <a:xfrm>
+          <a:off x="0" y="0"/>
+          <a:ext cx="0" cy="0"/>
+          <a:chOff x="0" y="0"/>
+          <a:chExt cx="0" cy="0"/>
+        </a:xfrm>
+      </p:grpSpPr>
       <p:sp>
         <p:nvSpPr>
           <p:cNvPr id="2" name="Rectangle 1"/>
@@ -42481,6 +44050,7 @@
           <a:lstStyle/>
           <a:p>
             <a:pPr algn="ctr"/>
+            <a:endParaRPr/>
           </a:p>
         </p:txBody>
       </p:sp>
@@ -42586,6 +44156,7 @@
           <a:lstStyle/>
           <a:p>
             <a:pPr algn="ctr"/>
+            <a:endParaRPr/>
           </a:p>
         </p:txBody>
       </p:sp>
@@ -42706,6 +44277,7 @@
           <a:lstStyle/>
           <a:p>
             <a:pPr algn="ctr"/>
+            <a:endParaRPr/>
           </a:p>
         </p:txBody>
       </p:sp>
@@ -42789,6 +44361,7 @@
           <a:lstStyle/>
           <a:p>
             <a:pPr algn="ctr"/>
+            <a:endParaRPr/>
           </a:p>
         </p:txBody>
       </p:sp>
@@ -43042,6 +44615,7 @@
           <a:lstStyle/>
           <a:p>
             <a:pPr algn="ctr"/>
+            <a:endParaRPr/>
           </a:p>
         </p:txBody>
       </p:sp>
@@ -43128,7 +44702,7 @@
 </file>
 
 <file path=ppt/slides/slide58.xml><?xml version="1.0" encoding="utf-8"?>
-<p:sld xmlns:a="http://schemas.openxmlformats.org/drawingml/2006/main" xmlns:p="http://schemas.openxmlformats.org/presentationml/2006/main" xmlns:r="http://schemas.openxmlformats.org/officeDocument/2006/relationships">
+<p:sld xmlns:a="http://schemas.openxmlformats.org/drawingml/2006/main" xmlns:r="http://schemas.openxmlformats.org/officeDocument/2006/relationships" xmlns:p="http://schemas.openxmlformats.org/presentationml/2006/main">
   <p:cSld>
     <p:bg>
       <p:bgPr>
@@ -43144,7 +44718,14 @@
         <p:cNvGrpSpPr/>
         <p:nvPr/>
       </p:nvGrpSpPr>
-      <p:grpSpPr/>
+      <p:grpSpPr>
+        <a:xfrm>
+          <a:off x="0" y="0"/>
+          <a:ext cx="0" cy="0"/>
+          <a:chOff x="0" y="0"/>
+          <a:chExt cx="0" cy="0"/>
+        </a:xfrm>
+      </p:grpSpPr>
       <p:sp>
         <p:nvSpPr>
           <p:cNvPr id="2" name="Rectangle 1"/>
@@ -43186,6 +44767,7 @@
           <a:lstStyle/>
           <a:p>
             <a:pPr algn="ctr"/>
+            <a:endParaRPr/>
           </a:p>
         </p:txBody>
       </p:sp>
@@ -43291,6 +44873,7 @@
           <a:lstStyle/>
           <a:p>
             <a:pPr algn="ctr"/>
+            <a:endParaRPr/>
           </a:p>
         </p:txBody>
       </p:sp>
@@ -43411,6 +44994,7 @@
           <a:lstStyle/>
           <a:p>
             <a:pPr algn="ctr"/>
+            <a:endParaRPr/>
           </a:p>
         </p:txBody>
       </p:sp>
@@ -43494,6 +45078,7 @@
           <a:lstStyle/>
           <a:p>
             <a:pPr algn="ctr"/>
+            <a:endParaRPr/>
           </a:p>
         </p:txBody>
       </p:sp>
@@ -43747,6 +45332,7 @@
           <a:lstStyle/>
           <a:p>
             <a:pPr algn="ctr"/>
+            <a:endParaRPr/>
           </a:p>
         </p:txBody>
       </p:sp>
@@ -43833,7 +45419,7 @@
 </file>
 
 <file path=ppt/slides/slide59.xml><?xml version="1.0" encoding="utf-8"?>
-<p:sld xmlns:a="http://schemas.openxmlformats.org/drawingml/2006/main" xmlns:p="http://schemas.openxmlformats.org/presentationml/2006/main" xmlns:r="http://schemas.openxmlformats.org/officeDocument/2006/relationships">
+<p:sld xmlns:a="http://schemas.openxmlformats.org/drawingml/2006/main" xmlns:r="http://schemas.openxmlformats.org/officeDocument/2006/relationships" xmlns:p="http://schemas.openxmlformats.org/presentationml/2006/main">
   <p:cSld>
     <p:bg>
       <p:bgPr>
@@ -43849,7 +45435,14 @@
         <p:cNvGrpSpPr/>
         <p:nvPr/>
       </p:nvGrpSpPr>
-      <p:grpSpPr/>
+      <p:grpSpPr>
+        <a:xfrm>
+          <a:off x="0" y="0"/>
+          <a:ext cx="0" cy="0"/>
+          <a:chOff x="0" y="0"/>
+          <a:chExt cx="0" cy="0"/>
+        </a:xfrm>
+      </p:grpSpPr>
       <p:sp>
         <p:nvSpPr>
           <p:cNvPr id="2" name="Rectangle 1"/>
@@ -43891,6 +45484,7 @@
           <a:lstStyle/>
           <a:p>
             <a:pPr algn="ctr"/>
+            <a:endParaRPr/>
           </a:p>
         </p:txBody>
       </p:sp>
@@ -43996,6 +45590,7 @@
           <a:lstStyle/>
           <a:p>
             <a:pPr algn="ctr"/>
+            <a:endParaRPr/>
           </a:p>
         </p:txBody>
       </p:sp>
@@ -44116,6 +45711,7 @@
           <a:lstStyle/>
           <a:p>
             <a:pPr algn="ctr"/>
+            <a:endParaRPr/>
           </a:p>
         </p:txBody>
       </p:sp>
@@ -44199,6 +45795,7 @@
           <a:lstStyle/>
           <a:p>
             <a:pPr algn="ctr"/>
+            <a:endParaRPr/>
           </a:p>
         </p:txBody>
       </p:sp>
@@ -44452,6 +46049,7 @@
           <a:lstStyle/>
           <a:p>
             <a:pPr algn="ctr"/>
+            <a:endParaRPr/>
           </a:p>
         </p:txBody>
       </p:sp>
@@ -44538,7 +46136,7 @@
 </file>
 
 <file path=ppt/slides/slide6.xml><?xml version="1.0" encoding="utf-8"?>
-<p:sld xmlns:a="http://schemas.openxmlformats.org/drawingml/2006/main" xmlns:p="http://schemas.openxmlformats.org/presentationml/2006/main" xmlns:r="http://schemas.openxmlformats.org/officeDocument/2006/relationships">
+<p:sld xmlns:a="http://schemas.openxmlformats.org/drawingml/2006/main" xmlns:r="http://schemas.openxmlformats.org/officeDocument/2006/relationships" xmlns:p="http://schemas.openxmlformats.org/presentationml/2006/main">
   <p:cSld>
     <p:bg>
       <p:bgPr>
@@ -44554,7 +46152,14 @@
         <p:cNvGrpSpPr/>
         <p:nvPr/>
       </p:nvGrpSpPr>
-      <p:grpSpPr/>
+      <p:grpSpPr>
+        <a:xfrm>
+          <a:off x="0" y="0"/>
+          <a:ext cx="0" cy="0"/>
+          <a:chOff x="0" y="0"/>
+          <a:chExt cx="0" cy="0"/>
+        </a:xfrm>
+      </p:grpSpPr>
       <p:sp>
         <p:nvSpPr>
           <p:cNvPr id="2" name="Rectangle 1"/>
@@ -44596,6 +46201,7 @@
           <a:lstStyle/>
           <a:p>
             <a:pPr algn="ctr"/>
+            <a:endParaRPr/>
           </a:p>
         </p:txBody>
       </p:sp>
@@ -44701,6 +46307,7 @@
           <a:lstStyle/>
           <a:p>
             <a:pPr algn="ctr"/>
+            <a:endParaRPr/>
           </a:p>
         </p:txBody>
       </p:sp>
@@ -44821,6 +46428,7 @@
           <a:lstStyle/>
           <a:p>
             <a:pPr algn="ctr"/>
+            <a:endParaRPr/>
           </a:p>
         </p:txBody>
       </p:sp>
@@ -44904,6 +46512,7 @@
           <a:lstStyle/>
           <a:p>
             <a:pPr algn="ctr"/>
+            <a:endParaRPr/>
           </a:p>
         </p:txBody>
       </p:sp>
@@ -45194,6 +46803,7 @@
           <a:lstStyle/>
           <a:p>
             <a:pPr algn="ctr"/>
+            <a:endParaRPr/>
           </a:p>
         </p:txBody>
       </p:sp>
@@ -45280,7 +46890,7 @@
 </file>
 
 <file path=ppt/slides/slide60.xml><?xml version="1.0" encoding="utf-8"?>
-<p:sld xmlns:a="http://schemas.openxmlformats.org/drawingml/2006/main" xmlns:p="http://schemas.openxmlformats.org/presentationml/2006/main" xmlns:r="http://schemas.openxmlformats.org/officeDocument/2006/relationships">
+<p:sld xmlns:a="http://schemas.openxmlformats.org/drawingml/2006/main" xmlns:r="http://schemas.openxmlformats.org/officeDocument/2006/relationships" xmlns:p="http://schemas.openxmlformats.org/presentationml/2006/main">
   <p:cSld>
     <p:bg>
       <p:bgPr>
@@ -45296,7 +46906,14 @@
         <p:cNvGrpSpPr/>
         <p:nvPr/>
       </p:nvGrpSpPr>
-      <p:grpSpPr/>
+      <p:grpSpPr>
+        <a:xfrm>
+          <a:off x="0" y="0"/>
+          <a:ext cx="0" cy="0"/>
+          <a:chOff x="0" y="0"/>
+          <a:chExt cx="0" cy="0"/>
+        </a:xfrm>
+      </p:grpSpPr>
       <p:sp>
         <p:nvSpPr>
           <p:cNvPr id="2" name="Rectangle 1"/>
@@ -45338,6 +46955,7 @@
           <a:lstStyle/>
           <a:p>
             <a:pPr algn="ctr"/>
+            <a:endParaRPr/>
           </a:p>
         </p:txBody>
       </p:sp>
@@ -45443,6 +47061,7 @@
           <a:lstStyle/>
           <a:p>
             <a:pPr algn="ctr"/>
+            <a:endParaRPr/>
           </a:p>
         </p:txBody>
       </p:sp>
@@ -45539,8 +47158,20 @@
                 <a:tableStyleId>{5C22544A-7EE6-4342-B048-85BDC9FD1C3A}</a:tableStyleId>
               </a:tblPr>
               <a:tblGrid>
-                <a:gridCol w="5486400"/>
-                <a:gridCol w="5486400"/>
+                <a:gridCol w="5486400">
+                  <a:extLst>
+                    <a:ext uri="{9D8B030D-6E8A-4147-A177-3AD203B41FA5}">
+                      <a16:colId xmlns:a16="http://schemas.microsoft.com/office/drawing/2014/main" val="20000"/>
+                    </a:ext>
+                  </a:extLst>
+                </a:gridCol>
+                <a:gridCol w="5486400">
+                  <a:extLst>
+                    <a:ext uri="{9D8B030D-6E8A-4147-A177-3AD203B41FA5}">
+                      <a16:colId xmlns:a16="http://schemas.microsoft.com/office/drawing/2014/main" val="20001"/>
+                    </a:ext>
+                  </a:extLst>
+                </a:gridCol>
               </a:tblGrid>
               <a:tr h="365760">
                 <a:tc>
@@ -45589,6 +47220,11 @@
                     </a:solidFill>
                   </a:tcPr>
                 </a:tc>
+                <a:extLst>
+                  <a:ext uri="{0D108BD9-81ED-4DB2-BD59-A6C34878D82A}">
+                    <a16:rowId xmlns:a16="http://schemas.microsoft.com/office/drawing/2014/main" val="10000"/>
+                  </a:ext>
+                </a:extLst>
               </a:tr>
               <a:tr h="365760">
                 <a:tc>
@@ -45637,6 +47273,11 @@
                     </a:solidFill>
                   </a:tcPr>
                 </a:tc>
+                <a:extLst>
+                  <a:ext uri="{0D108BD9-81ED-4DB2-BD59-A6C34878D82A}">
+                    <a16:rowId xmlns:a16="http://schemas.microsoft.com/office/drawing/2014/main" val="10001"/>
+                  </a:ext>
+                </a:extLst>
               </a:tr>
               <a:tr h="365760">
                 <a:tc>
@@ -45685,6 +47326,11 @@
                     </a:solidFill>
                   </a:tcPr>
                 </a:tc>
+                <a:extLst>
+                  <a:ext uri="{0D108BD9-81ED-4DB2-BD59-A6C34878D82A}">
+                    <a16:rowId xmlns:a16="http://schemas.microsoft.com/office/drawing/2014/main" val="10002"/>
+                  </a:ext>
+                </a:extLst>
               </a:tr>
               <a:tr h="365760">
                 <a:tc>
@@ -45733,6 +47379,11 @@
                     </a:solidFill>
                   </a:tcPr>
                 </a:tc>
+                <a:extLst>
+                  <a:ext uri="{0D108BD9-81ED-4DB2-BD59-A6C34878D82A}">
+                    <a16:rowId xmlns:a16="http://schemas.microsoft.com/office/drawing/2014/main" val="10003"/>
+                  </a:ext>
+                </a:extLst>
               </a:tr>
               <a:tr h="365760">
                 <a:tc>
@@ -45781,6 +47432,11 @@
                     </a:solidFill>
                   </a:tcPr>
                 </a:tc>
+                <a:extLst>
+                  <a:ext uri="{0D108BD9-81ED-4DB2-BD59-A6C34878D82A}">
+                    <a16:rowId xmlns:a16="http://schemas.microsoft.com/office/drawing/2014/main" val="10004"/>
+                  </a:ext>
+                </a:extLst>
               </a:tr>
               <a:tr h="365760">
                 <a:tc>
@@ -45829,6 +47485,11 @@
                     </a:solidFill>
                   </a:tcPr>
                 </a:tc>
+                <a:extLst>
+                  <a:ext uri="{0D108BD9-81ED-4DB2-BD59-A6C34878D82A}">
+                    <a16:rowId xmlns:a16="http://schemas.microsoft.com/office/drawing/2014/main" val="10005"/>
+                  </a:ext>
+                </a:extLst>
               </a:tr>
               <a:tr h="365760">
                 <a:tc>
@@ -45877,6 +47538,11 @@
                     </a:solidFill>
                   </a:tcPr>
                 </a:tc>
+                <a:extLst>
+                  <a:ext uri="{0D108BD9-81ED-4DB2-BD59-A6C34878D82A}">
+                    <a16:rowId xmlns:a16="http://schemas.microsoft.com/office/drawing/2014/main" val="10006"/>
+                  </a:ext>
+                </a:extLst>
               </a:tr>
               <a:tr h="365760">
                 <a:tc>
@@ -45925,6 +47591,11 @@
                     </a:solidFill>
                   </a:tcPr>
                 </a:tc>
+                <a:extLst>
+                  <a:ext uri="{0D108BD9-81ED-4DB2-BD59-A6C34878D82A}">
+                    <a16:rowId xmlns:a16="http://schemas.microsoft.com/office/drawing/2014/main" val="10007"/>
+                  </a:ext>
+                </a:extLst>
               </a:tr>
             </a:tbl>
           </a:graphicData>
@@ -45973,6 +47644,7 @@
           <a:lstStyle/>
           <a:p>
             <a:pPr algn="ctr"/>
+            <a:endParaRPr/>
           </a:p>
         </p:txBody>
       </p:sp>
@@ -46054,6 +47726,7 @@
           <a:lstStyle/>
           <a:p>
             <a:pPr algn="ctr"/>
+            <a:endParaRPr/>
           </a:p>
         </p:txBody>
       </p:sp>
@@ -46140,7 +47813,7 @@
 </file>
 
 <file path=ppt/slides/slide61.xml><?xml version="1.0" encoding="utf-8"?>
-<p:sld xmlns:a="http://schemas.openxmlformats.org/drawingml/2006/main" xmlns:p="http://schemas.openxmlformats.org/presentationml/2006/main" xmlns:r="http://schemas.openxmlformats.org/officeDocument/2006/relationships">
+<p:sld xmlns:a="http://schemas.openxmlformats.org/drawingml/2006/main" xmlns:r="http://schemas.openxmlformats.org/officeDocument/2006/relationships" xmlns:p="http://schemas.openxmlformats.org/presentationml/2006/main">
   <p:cSld>
     <p:bg>
       <p:bgPr>
@@ -46156,7 +47829,14 @@
         <p:cNvGrpSpPr/>
         <p:nvPr/>
       </p:nvGrpSpPr>
-      <p:grpSpPr/>
+      <p:grpSpPr>
+        <a:xfrm>
+          <a:off x="0" y="0"/>
+          <a:ext cx="0" cy="0"/>
+          <a:chOff x="0" y="0"/>
+          <a:chExt cx="0" cy="0"/>
+        </a:xfrm>
+      </p:grpSpPr>
       <p:sp>
         <p:nvSpPr>
           <p:cNvPr id="2" name="Rectangle 1"/>
@@ -46198,6 +47878,7 @@
           <a:lstStyle/>
           <a:p>
             <a:pPr algn="ctr"/>
+            <a:endParaRPr/>
           </a:p>
         </p:txBody>
       </p:sp>
@@ -46303,6 +47984,7 @@
           <a:lstStyle/>
           <a:p>
             <a:pPr algn="ctr"/>
+            <a:endParaRPr/>
           </a:p>
         </p:txBody>
       </p:sp>
@@ -46423,6 +48105,7 @@
           <a:lstStyle/>
           <a:p>
             <a:pPr algn="ctr"/>
+            <a:endParaRPr/>
           </a:p>
         </p:txBody>
       </p:sp>
@@ -46654,6 +48337,7 @@
           <a:lstStyle/>
           <a:p>
             <a:pPr algn="ctr"/>
+            <a:endParaRPr/>
           </a:p>
         </p:txBody>
       </p:sp>
@@ -46722,6 +48406,7 @@
           <a:lstStyle/>
           <a:p>
             <a:pPr algn="ctr"/>
+            <a:endParaRPr/>
           </a:p>
         </p:txBody>
       </p:sp>
@@ -46808,7 +48493,7 @@
 </file>
 
 <file path=ppt/slides/slide62.xml><?xml version="1.0" encoding="utf-8"?>
-<p:sld xmlns:a="http://schemas.openxmlformats.org/drawingml/2006/main" xmlns:p="http://schemas.openxmlformats.org/presentationml/2006/main" xmlns:r="http://schemas.openxmlformats.org/officeDocument/2006/relationships">
+<p:sld xmlns:a="http://schemas.openxmlformats.org/drawingml/2006/main" xmlns:r="http://schemas.openxmlformats.org/officeDocument/2006/relationships" xmlns:p="http://schemas.openxmlformats.org/presentationml/2006/main">
   <p:cSld>
     <p:bg>
       <p:bgPr>
@@ -46824,7 +48509,14 @@
         <p:cNvGrpSpPr/>
         <p:nvPr/>
       </p:nvGrpSpPr>
-      <p:grpSpPr/>
+      <p:grpSpPr>
+        <a:xfrm>
+          <a:off x="0" y="0"/>
+          <a:ext cx="0" cy="0"/>
+          <a:chOff x="0" y="0"/>
+          <a:chExt cx="0" cy="0"/>
+        </a:xfrm>
+      </p:grpSpPr>
       <p:sp>
         <p:nvSpPr>
           <p:cNvPr id="2" name="Rectangle 1"/>
@@ -46866,6 +48558,7 @@
           <a:lstStyle/>
           <a:p>
             <a:pPr algn="ctr"/>
+            <a:endParaRPr/>
           </a:p>
         </p:txBody>
       </p:sp>
@@ -46971,6 +48664,7 @@
           <a:lstStyle/>
           <a:p>
             <a:pPr algn="ctr"/>
+            <a:endParaRPr/>
           </a:p>
         </p:txBody>
       </p:sp>
@@ -47067,8 +48761,20 @@
                 <a:tableStyleId>{5C22544A-7EE6-4342-B048-85BDC9FD1C3A}</a:tableStyleId>
               </a:tblPr>
               <a:tblGrid>
-                <a:gridCol w="5486400"/>
-                <a:gridCol w="5486400"/>
+                <a:gridCol w="5486400">
+                  <a:extLst>
+                    <a:ext uri="{9D8B030D-6E8A-4147-A177-3AD203B41FA5}">
+                      <a16:colId xmlns:a16="http://schemas.microsoft.com/office/drawing/2014/main" val="20000"/>
+                    </a:ext>
+                  </a:extLst>
+                </a:gridCol>
+                <a:gridCol w="5486400">
+                  <a:extLst>
+                    <a:ext uri="{9D8B030D-6E8A-4147-A177-3AD203B41FA5}">
+                      <a16:colId xmlns:a16="http://schemas.microsoft.com/office/drawing/2014/main" val="20001"/>
+                    </a:ext>
+                  </a:extLst>
+                </a:gridCol>
               </a:tblGrid>
               <a:tr h="475488">
                 <a:tc>
@@ -47117,6 +48823,11 @@
                     </a:solidFill>
                   </a:tcPr>
                 </a:tc>
+                <a:extLst>
+                  <a:ext uri="{0D108BD9-81ED-4DB2-BD59-A6C34878D82A}">
+                    <a16:rowId xmlns:a16="http://schemas.microsoft.com/office/drawing/2014/main" val="10000"/>
+                  </a:ext>
+                </a:extLst>
               </a:tr>
               <a:tr h="475488">
                 <a:tc>
@@ -47165,6 +48876,11 @@
                     </a:solidFill>
                   </a:tcPr>
                 </a:tc>
+                <a:extLst>
+                  <a:ext uri="{0D108BD9-81ED-4DB2-BD59-A6C34878D82A}">
+                    <a16:rowId xmlns:a16="http://schemas.microsoft.com/office/drawing/2014/main" val="10001"/>
+                  </a:ext>
+                </a:extLst>
               </a:tr>
               <a:tr h="475488">
                 <a:tc>
@@ -47213,6 +48929,11 @@
                     </a:solidFill>
                   </a:tcPr>
                 </a:tc>
+                <a:extLst>
+                  <a:ext uri="{0D108BD9-81ED-4DB2-BD59-A6C34878D82A}">
+                    <a16:rowId xmlns:a16="http://schemas.microsoft.com/office/drawing/2014/main" val="10002"/>
+                  </a:ext>
+                </a:extLst>
               </a:tr>
               <a:tr h="475488">
                 <a:tc>
@@ -47261,6 +48982,11 @@
                     </a:solidFill>
                   </a:tcPr>
                 </a:tc>
+                <a:extLst>
+                  <a:ext uri="{0D108BD9-81ED-4DB2-BD59-A6C34878D82A}">
+                    <a16:rowId xmlns:a16="http://schemas.microsoft.com/office/drawing/2014/main" val="10003"/>
+                  </a:ext>
+                </a:extLst>
               </a:tr>
               <a:tr h="475488">
                 <a:tc>
@@ -47309,6 +49035,11 @@
                     </a:solidFill>
                   </a:tcPr>
                 </a:tc>
+                <a:extLst>
+                  <a:ext uri="{0D108BD9-81ED-4DB2-BD59-A6C34878D82A}">
+                    <a16:rowId xmlns:a16="http://schemas.microsoft.com/office/drawing/2014/main" val="10004"/>
+                  </a:ext>
+                </a:extLst>
               </a:tr>
             </a:tbl>
           </a:graphicData>
@@ -47357,6 +49088,7 @@
           <a:lstStyle/>
           <a:p>
             <a:pPr algn="ctr"/>
+            <a:endParaRPr/>
           </a:p>
         </p:txBody>
       </p:sp>
@@ -47438,6 +49170,7 @@
           <a:lstStyle/>
           <a:p>
             <a:pPr algn="ctr"/>
+            <a:endParaRPr/>
           </a:p>
         </p:txBody>
       </p:sp>
@@ -47524,7 +49257,7 @@
 </file>
 
 <file path=ppt/slides/slide63.xml><?xml version="1.0" encoding="utf-8"?>
-<p:sld xmlns:a="http://schemas.openxmlformats.org/drawingml/2006/main" xmlns:p="http://schemas.openxmlformats.org/presentationml/2006/main" xmlns:r="http://schemas.openxmlformats.org/officeDocument/2006/relationships">
+<p:sld xmlns:a="http://schemas.openxmlformats.org/drawingml/2006/main" xmlns:r="http://schemas.openxmlformats.org/officeDocument/2006/relationships" xmlns:p="http://schemas.openxmlformats.org/presentationml/2006/main">
   <p:cSld>
     <p:bg>
       <p:bgPr>
@@ -47540,7 +49273,14 @@
         <p:cNvGrpSpPr/>
         <p:nvPr/>
       </p:nvGrpSpPr>
-      <p:grpSpPr/>
+      <p:grpSpPr>
+        <a:xfrm>
+          <a:off x="0" y="0"/>
+          <a:ext cx="0" cy="0"/>
+          <a:chOff x="0" y="0"/>
+          <a:chExt cx="0" cy="0"/>
+        </a:xfrm>
+      </p:grpSpPr>
       <p:sp>
         <p:nvSpPr>
           <p:cNvPr id="2" name="Rectangle 1"/>
@@ -47582,6 +49322,7 @@
           <a:lstStyle/>
           <a:p>
             <a:pPr algn="ctr"/>
+            <a:endParaRPr/>
           </a:p>
         </p:txBody>
       </p:sp>
@@ -47687,6 +49428,7 @@
           <a:lstStyle/>
           <a:p>
             <a:pPr algn="ctr"/>
+            <a:endParaRPr/>
           </a:p>
         </p:txBody>
       </p:sp>
@@ -47807,6 +49549,7 @@
           <a:lstStyle/>
           <a:p>
             <a:pPr algn="ctr"/>
+            <a:endParaRPr/>
           </a:p>
         </p:txBody>
       </p:sp>
@@ -47890,6 +49633,7 @@
           <a:lstStyle/>
           <a:p>
             <a:pPr algn="ctr"/>
+            <a:endParaRPr/>
           </a:p>
         </p:txBody>
       </p:sp>
@@ -48182,6 +49926,7 @@
           <a:lstStyle/>
           <a:p>
             <a:pPr algn="ctr"/>
+            <a:endParaRPr/>
           </a:p>
         </p:txBody>
       </p:sp>
@@ -48287,6 +50032,7 @@
           <a:lstStyle/>
           <a:p>
             <a:pPr algn="ctr"/>
+            <a:endParaRPr/>
           </a:p>
         </p:txBody>
       </p:sp>
@@ -48373,7 +50119,7 @@
 </file>
 
 <file path=ppt/slides/slide64.xml><?xml version="1.0" encoding="utf-8"?>
-<p:sld xmlns:a="http://schemas.openxmlformats.org/drawingml/2006/main" xmlns:p="http://schemas.openxmlformats.org/presentationml/2006/main" xmlns:r="http://schemas.openxmlformats.org/officeDocument/2006/relationships">
+<p:sld xmlns:a="http://schemas.openxmlformats.org/drawingml/2006/main" xmlns:r="http://schemas.openxmlformats.org/officeDocument/2006/relationships" xmlns:p="http://schemas.openxmlformats.org/presentationml/2006/main">
   <p:cSld>
     <p:bg>
       <p:bgPr>
@@ -48389,7 +50135,14 @@
         <p:cNvGrpSpPr/>
         <p:nvPr/>
       </p:nvGrpSpPr>
-      <p:grpSpPr/>
+      <p:grpSpPr>
+        <a:xfrm>
+          <a:off x="0" y="0"/>
+          <a:ext cx="0" cy="0"/>
+          <a:chOff x="0" y="0"/>
+          <a:chExt cx="0" cy="0"/>
+        </a:xfrm>
+      </p:grpSpPr>
       <p:sp>
         <p:nvSpPr>
           <p:cNvPr id="2" name="Rectangle 1"/>
@@ -48431,6 +50184,7 @@
           <a:lstStyle/>
           <a:p>
             <a:pPr algn="ctr"/>
+            <a:endParaRPr/>
           </a:p>
         </p:txBody>
       </p:sp>
@@ -48536,6 +50290,7 @@
           <a:lstStyle/>
           <a:p>
             <a:pPr algn="ctr"/>
+            <a:endParaRPr/>
           </a:p>
         </p:txBody>
       </p:sp>
@@ -48632,9 +50387,27 @@
                 <a:tableStyleId>{5C22544A-7EE6-4342-B048-85BDC9FD1C3A}</a:tableStyleId>
               </a:tblPr>
               <a:tblGrid>
-                <a:gridCol w="3657600"/>
-                <a:gridCol w="3657600"/>
-                <a:gridCol w="3657600"/>
+                <a:gridCol w="3657600">
+                  <a:extLst>
+                    <a:ext uri="{9D8B030D-6E8A-4147-A177-3AD203B41FA5}">
+                      <a16:colId xmlns:a16="http://schemas.microsoft.com/office/drawing/2014/main" val="20000"/>
+                    </a:ext>
+                  </a:extLst>
+                </a:gridCol>
+                <a:gridCol w="3657600">
+                  <a:extLst>
+                    <a:ext uri="{9D8B030D-6E8A-4147-A177-3AD203B41FA5}">
+                      <a16:colId xmlns:a16="http://schemas.microsoft.com/office/drawing/2014/main" val="20001"/>
+                    </a:ext>
+                  </a:extLst>
+                </a:gridCol>
+                <a:gridCol w="3657600">
+                  <a:extLst>
+                    <a:ext uri="{9D8B030D-6E8A-4147-A177-3AD203B41FA5}">
+                      <a16:colId xmlns:a16="http://schemas.microsoft.com/office/drawing/2014/main" val="20002"/>
+                    </a:ext>
+                  </a:extLst>
+                </a:gridCol>
               </a:tblGrid>
               <a:tr h="365760">
                 <a:tc>
@@ -48706,6 +50479,11 @@
                     </a:solidFill>
                   </a:tcPr>
                 </a:tc>
+                <a:extLst>
+                  <a:ext uri="{0D108BD9-81ED-4DB2-BD59-A6C34878D82A}">
+                    <a16:rowId xmlns:a16="http://schemas.microsoft.com/office/drawing/2014/main" val="10000"/>
+                  </a:ext>
+                </a:extLst>
               </a:tr>
               <a:tr h="365760">
                 <a:tc>
@@ -48777,6 +50555,11 @@
                     </a:solidFill>
                   </a:tcPr>
                 </a:tc>
+                <a:extLst>
+                  <a:ext uri="{0D108BD9-81ED-4DB2-BD59-A6C34878D82A}">
+                    <a16:rowId xmlns:a16="http://schemas.microsoft.com/office/drawing/2014/main" val="10001"/>
+                  </a:ext>
+                </a:extLst>
               </a:tr>
               <a:tr h="365760">
                 <a:tc>
@@ -48848,6 +50631,11 @@
                     </a:solidFill>
                   </a:tcPr>
                 </a:tc>
+                <a:extLst>
+                  <a:ext uri="{0D108BD9-81ED-4DB2-BD59-A6C34878D82A}">
+                    <a16:rowId xmlns:a16="http://schemas.microsoft.com/office/drawing/2014/main" val="10002"/>
+                  </a:ext>
+                </a:extLst>
               </a:tr>
               <a:tr h="365760">
                 <a:tc>
@@ -48919,6 +50707,11 @@
                     </a:solidFill>
                   </a:tcPr>
                 </a:tc>
+                <a:extLst>
+                  <a:ext uri="{0D108BD9-81ED-4DB2-BD59-A6C34878D82A}">
+                    <a16:rowId xmlns:a16="http://schemas.microsoft.com/office/drawing/2014/main" val="10003"/>
+                  </a:ext>
+                </a:extLst>
               </a:tr>
               <a:tr h="365760">
                 <a:tc>
@@ -48990,6 +50783,11 @@
                     </a:solidFill>
                   </a:tcPr>
                 </a:tc>
+                <a:extLst>
+                  <a:ext uri="{0D108BD9-81ED-4DB2-BD59-A6C34878D82A}">
+                    <a16:rowId xmlns:a16="http://schemas.microsoft.com/office/drawing/2014/main" val="10004"/>
+                  </a:ext>
+                </a:extLst>
               </a:tr>
               <a:tr h="365760">
                 <a:tc>
@@ -49061,6 +50859,11 @@
                     </a:solidFill>
                   </a:tcPr>
                 </a:tc>
+                <a:extLst>
+                  <a:ext uri="{0D108BD9-81ED-4DB2-BD59-A6C34878D82A}">
+                    <a16:rowId xmlns:a16="http://schemas.microsoft.com/office/drawing/2014/main" val="10005"/>
+                  </a:ext>
+                </a:extLst>
               </a:tr>
               <a:tr h="365760">
                 <a:tc>
@@ -49132,6 +50935,11 @@
                     </a:solidFill>
                   </a:tcPr>
                 </a:tc>
+                <a:extLst>
+                  <a:ext uri="{0D108BD9-81ED-4DB2-BD59-A6C34878D82A}">
+                    <a16:rowId xmlns:a16="http://schemas.microsoft.com/office/drawing/2014/main" val="10006"/>
+                  </a:ext>
+                </a:extLst>
               </a:tr>
             </a:tbl>
           </a:graphicData>
@@ -49180,6 +50988,7 @@
           <a:lstStyle/>
           <a:p>
             <a:pPr algn="ctr"/>
+            <a:endParaRPr/>
           </a:p>
         </p:txBody>
       </p:sp>
@@ -49261,6 +51070,7 @@
           <a:lstStyle/>
           <a:p>
             <a:pPr algn="ctr"/>
+            <a:endParaRPr/>
           </a:p>
         </p:txBody>
       </p:sp>
@@ -49347,7 +51157,7 @@
 </file>
 
 <file path=ppt/slides/slide65.xml><?xml version="1.0" encoding="utf-8"?>
-<p:sld xmlns:a="http://schemas.openxmlformats.org/drawingml/2006/main" xmlns:p="http://schemas.openxmlformats.org/presentationml/2006/main" xmlns:r="http://schemas.openxmlformats.org/officeDocument/2006/relationships">
+<p:sld xmlns:a="http://schemas.openxmlformats.org/drawingml/2006/main" xmlns:r="http://schemas.openxmlformats.org/officeDocument/2006/relationships" xmlns:p="http://schemas.openxmlformats.org/presentationml/2006/main">
   <p:cSld>
     <p:bg>
       <p:bgPr>
@@ -49363,7 +51173,14 @@
         <p:cNvGrpSpPr/>
         <p:nvPr/>
       </p:nvGrpSpPr>
-      <p:grpSpPr/>
+      <p:grpSpPr>
+        <a:xfrm>
+          <a:off x="0" y="0"/>
+          <a:ext cx="0" cy="0"/>
+          <a:chOff x="0" y="0"/>
+          <a:chExt cx="0" cy="0"/>
+        </a:xfrm>
+      </p:grpSpPr>
       <p:sp>
         <p:nvSpPr>
           <p:cNvPr id="2" name="Rectangle 1"/>
@@ -49405,6 +51222,7 @@
           <a:lstStyle/>
           <a:p>
             <a:pPr algn="ctr"/>
+            <a:endParaRPr/>
           </a:p>
         </p:txBody>
       </p:sp>
@@ -49510,6 +51328,7 @@
           <a:lstStyle/>
           <a:p>
             <a:pPr algn="ctr"/>
+            <a:endParaRPr/>
           </a:p>
         </p:txBody>
       </p:sp>
@@ -49630,6 +51449,7 @@
           <a:lstStyle/>
           <a:p>
             <a:pPr algn="ctr"/>
+            <a:endParaRPr/>
           </a:p>
         </p:txBody>
       </p:sp>
@@ -49861,6 +51681,7 @@
           <a:lstStyle/>
           <a:p>
             <a:pPr algn="ctr"/>
+            <a:endParaRPr/>
           </a:p>
         </p:txBody>
       </p:sp>
@@ -49929,6 +51750,7 @@
           <a:lstStyle/>
           <a:p>
             <a:pPr algn="ctr"/>
+            <a:endParaRPr/>
           </a:p>
         </p:txBody>
       </p:sp>
@@ -50015,7 +51837,7 @@
 </file>
 
 <file path=ppt/slides/slide66.xml><?xml version="1.0" encoding="utf-8"?>
-<p:sld xmlns:a="http://schemas.openxmlformats.org/drawingml/2006/main" xmlns:p="http://schemas.openxmlformats.org/presentationml/2006/main" xmlns:r="http://schemas.openxmlformats.org/officeDocument/2006/relationships">
+<p:sld xmlns:a="http://schemas.openxmlformats.org/drawingml/2006/main" xmlns:r="http://schemas.openxmlformats.org/officeDocument/2006/relationships" xmlns:p="http://schemas.openxmlformats.org/presentationml/2006/main">
   <p:cSld>
     <p:bg>
       <p:bgPr>
@@ -50031,7 +51853,14 @@
         <p:cNvGrpSpPr/>
         <p:nvPr/>
       </p:nvGrpSpPr>
-      <p:grpSpPr/>
+      <p:grpSpPr>
+        <a:xfrm>
+          <a:off x="0" y="0"/>
+          <a:ext cx="0" cy="0"/>
+          <a:chOff x="0" y="0"/>
+          <a:chExt cx="0" cy="0"/>
+        </a:xfrm>
+      </p:grpSpPr>
       <p:sp>
         <p:nvSpPr>
           <p:cNvPr id="2" name="Rectangle 1"/>
@@ -50073,6 +51902,7 @@
           <a:lstStyle/>
           <a:p>
             <a:pPr algn="ctr"/>
+            <a:endParaRPr/>
           </a:p>
         </p:txBody>
       </p:sp>
@@ -50178,6 +52008,7 @@
           <a:lstStyle/>
           <a:p>
             <a:pPr algn="ctr"/>
+            <a:endParaRPr/>
           </a:p>
         </p:txBody>
       </p:sp>
@@ -50274,9 +52105,27 @@
                 <a:tableStyleId>{5C22544A-7EE6-4342-B048-85BDC9FD1C3A}</a:tableStyleId>
               </a:tblPr>
               <a:tblGrid>
-                <a:gridCol w="3657600"/>
-                <a:gridCol w="3657600"/>
-                <a:gridCol w="3657600"/>
+                <a:gridCol w="3657600">
+                  <a:extLst>
+                    <a:ext uri="{9D8B030D-6E8A-4147-A177-3AD203B41FA5}">
+                      <a16:colId xmlns:a16="http://schemas.microsoft.com/office/drawing/2014/main" val="20000"/>
+                    </a:ext>
+                  </a:extLst>
+                </a:gridCol>
+                <a:gridCol w="3657600">
+                  <a:extLst>
+                    <a:ext uri="{9D8B030D-6E8A-4147-A177-3AD203B41FA5}">
+                      <a16:colId xmlns:a16="http://schemas.microsoft.com/office/drawing/2014/main" val="20001"/>
+                    </a:ext>
+                  </a:extLst>
+                </a:gridCol>
+                <a:gridCol w="3657600">
+                  <a:extLst>
+                    <a:ext uri="{9D8B030D-6E8A-4147-A177-3AD203B41FA5}">
+                      <a16:colId xmlns:a16="http://schemas.microsoft.com/office/drawing/2014/main" val="20002"/>
+                    </a:ext>
+                  </a:extLst>
+                </a:gridCol>
               </a:tblGrid>
               <a:tr h="475488">
                 <a:tc>
@@ -50348,6 +52197,11 @@
                     </a:solidFill>
                   </a:tcPr>
                 </a:tc>
+                <a:extLst>
+                  <a:ext uri="{0D108BD9-81ED-4DB2-BD59-A6C34878D82A}">
+                    <a16:rowId xmlns:a16="http://schemas.microsoft.com/office/drawing/2014/main" val="10000"/>
+                  </a:ext>
+                </a:extLst>
               </a:tr>
               <a:tr h="475488">
                 <a:tc>
@@ -50419,6 +52273,11 @@
                     </a:solidFill>
                   </a:tcPr>
                 </a:tc>
+                <a:extLst>
+                  <a:ext uri="{0D108BD9-81ED-4DB2-BD59-A6C34878D82A}">
+                    <a16:rowId xmlns:a16="http://schemas.microsoft.com/office/drawing/2014/main" val="10001"/>
+                  </a:ext>
+                </a:extLst>
               </a:tr>
               <a:tr h="475488">
                 <a:tc>
@@ -50490,6 +52349,11 @@
                     </a:solidFill>
                   </a:tcPr>
                 </a:tc>
+                <a:extLst>
+                  <a:ext uri="{0D108BD9-81ED-4DB2-BD59-A6C34878D82A}">
+                    <a16:rowId xmlns:a16="http://schemas.microsoft.com/office/drawing/2014/main" val="10002"/>
+                  </a:ext>
+                </a:extLst>
               </a:tr>
               <a:tr h="475488">
                 <a:tc>
@@ -50561,6 +52425,11 @@
                     </a:solidFill>
                   </a:tcPr>
                 </a:tc>
+                <a:extLst>
+                  <a:ext uri="{0D108BD9-81ED-4DB2-BD59-A6C34878D82A}">
+                    <a16:rowId xmlns:a16="http://schemas.microsoft.com/office/drawing/2014/main" val="10003"/>
+                  </a:ext>
+                </a:extLst>
               </a:tr>
               <a:tr h="475488">
                 <a:tc>
@@ -50632,6 +52501,11 @@
                     </a:solidFill>
                   </a:tcPr>
                 </a:tc>
+                <a:extLst>
+                  <a:ext uri="{0D108BD9-81ED-4DB2-BD59-A6C34878D82A}">
+                    <a16:rowId xmlns:a16="http://schemas.microsoft.com/office/drawing/2014/main" val="10004"/>
+                  </a:ext>
+                </a:extLst>
               </a:tr>
             </a:tbl>
           </a:graphicData>
@@ -50680,6 +52554,7 @@
           <a:lstStyle/>
           <a:p>
             <a:pPr algn="ctr"/>
+            <a:endParaRPr/>
           </a:p>
         </p:txBody>
       </p:sp>
@@ -50761,6 +52636,7 @@
           <a:lstStyle/>
           <a:p>
             <a:pPr algn="ctr"/>
+            <a:endParaRPr/>
           </a:p>
         </p:txBody>
       </p:sp>
@@ -50847,7 +52723,7 @@
 </file>
 
 <file path=ppt/slides/slide67.xml><?xml version="1.0" encoding="utf-8"?>
-<p:sld xmlns:a="http://schemas.openxmlformats.org/drawingml/2006/main" xmlns:p="http://schemas.openxmlformats.org/presentationml/2006/main" xmlns:r="http://schemas.openxmlformats.org/officeDocument/2006/relationships">
+<p:sld xmlns:a="http://schemas.openxmlformats.org/drawingml/2006/main" xmlns:r="http://schemas.openxmlformats.org/officeDocument/2006/relationships" xmlns:p="http://schemas.openxmlformats.org/presentationml/2006/main">
   <p:cSld>
     <p:bg>
       <p:bgPr>
@@ -50863,7 +52739,14 @@
         <p:cNvGrpSpPr/>
         <p:nvPr/>
       </p:nvGrpSpPr>
-      <p:grpSpPr/>
+      <p:grpSpPr>
+        <a:xfrm>
+          <a:off x="0" y="0"/>
+          <a:ext cx="0" cy="0"/>
+          <a:chOff x="0" y="0"/>
+          <a:chExt cx="0" cy="0"/>
+        </a:xfrm>
+      </p:grpSpPr>
       <p:sp>
         <p:nvSpPr>
           <p:cNvPr id="2" name="Rectangle 1"/>
@@ -50905,6 +52788,7 @@
           <a:lstStyle/>
           <a:p>
             <a:pPr algn="ctr"/>
+            <a:endParaRPr/>
           </a:p>
         </p:txBody>
       </p:sp>
@@ -51010,6 +52894,7 @@
           <a:lstStyle/>
           <a:p>
             <a:pPr algn="ctr"/>
+            <a:endParaRPr/>
           </a:p>
         </p:txBody>
       </p:sp>
@@ -51130,6 +53015,7 @@
           <a:lstStyle/>
           <a:p>
             <a:pPr algn="ctr"/>
+            <a:endParaRPr/>
           </a:p>
         </p:txBody>
       </p:sp>
@@ -51213,6 +53099,7 @@
           <a:lstStyle/>
           <a:p>
             <a:pPr algn="ctr"/>
+            <a:endParaRPr/>
           </a:p>
         </p:txBody>
       </p:sp>
@@ -51505,6 +53392,7 @@
           <a:lstStyle/>
           <a:p>
             <a:pPr algn="ctr"/>
+            <a:endParaRPr/>
           </a:p>
         </p:txBody>
       </p:sp>
@@ -51610,6 +53498,7 @@
           <a:lstStyle/>
           <a:p>
             <a:pPr algn="ctr"/>
+            <a:endParaRPr/>
           </a:p>
         </p:txBody>
       </p:sp>
@@ -51696,7 +53585,7 @@
 </file>
 
 <file path=ppt/slides/slide68.xml><?xml version="1.0" encoding="utf-8"?>
-<p:sld xmlns:a="http://schemas.openxmlformats.org/drawingml/2006/main" xmlns:p="http://schemas.openxmlformats.org/presentationml/2006/main" xmlns:r="http://schemas.openxmlformats.org/officeDocument/2006/relationships">
+<p:sld xmlns:a="http://schemas.openxmlformats.org/drawingml/2006/main" xmlns:r="http://schemas.openxmlformats.org/officeDocument/2006/relationships" xmlns:p="http://schemas.openxmlformats.org/presentationml/2006/main">
   <p:cSld>
     <p:bg>
       <p:bgPr>
@@ -51712,7 +53601,14 @@
         <p:cNvGrpSpPr/>
         <p:nvPr/>
       </p:nvGrpSpPr>
-      <p:grpSpPr/>
+      <p:grpSpPr>
+        <a:xfrm>
+          <a:off x="0" y="0"/>
+          <a:ext cx="0" cy="0"/>
+          <a:chOff x="0" y="0"/>
+          <a:chExt cx="0" cy="0"/>
+        </a:xfrm>
+      </p:grpSpPr>
       <p:sp>
         <p:nvSpPr>
           <p:cNvPr id="2" name="Rectangle 1"/>
@@ -51754,6 +53650,7 @@
           <a:lstStyle/>
           <a:p>
             <a:pPr algn="ctr"/>
+            <a:endParaRPr/>
           </a:p>
         </p:txBody>
       </p:sp>
@@ -51859,6 +53756,7 @@
           <a:lstStyle/>
           <a:p>
             <a:pPr algn="ctr"/>
+            <a:endParaRPr/>
           </a:p>
         </p:txBody>
       </p:sp>
@@ -51979,6 +53877,7 @@
           <a:lstStyle/>
           <a:p>
             <a:pPr algn="ctr"/>
+            <a:endParaRPr/>
           </a:p>
         </p:txBody>
       </p:sp>
@@ -52062,6 +53961,7 @@
           <a:lstStyle/>
           <a:p>
             <a:pPr algn="ctr"/>
+            <a:endParaRPr/>
           </a:p>
         </p:txBody>
       </p:sp>
@@ -52315,6 +54215,7 @@
           <a:lstStyle/>
           <a:p>
             <a:pPr algn="ctr"/>
+            <a:endParaRPr/>
           </a:p>
         </p:txBody>
       </p:sp>
@@ -52401,7 +54302,7 @@
 </file>
 
 <file path=ppt/slides/slide69.xml><?xml version="1.0" encoding="utf-8"?>
-<p:sld xmlns:a="http://schemas.openxmlformats.org/drawingml/2006/main" xmlns:p="http://schemas.openxmlformats.org/presentationml/2006/main" xmlns:r="http://schemas.openxmlformats.org/officeDocument/2006/relationships">
+<p:sld xmlns:a="http://schemas.openxmlformats.org/drawingml/2006/main" xmlns:r="http://schemas.openxmlformats.org/officeDocument/2006/relationships" xmlns:p="http://schemas.openxmlformats.org/presentationml/2006/main">
   <p:cSld>
     <p:bg>
       <p:bgPr>
@@ -52417,7 +54318,14 @@
         <p:cNvGrpSpPr/>
         <p:nvPr/>
       </p:nvGrpSpPr>
-      <p:grpSpPr/>
+      <p:grpSpPr>
+        <a:xfrm>
+          <a:off x="0" y="0"/>
+          <a:ext cx="0" cy="0"/>
+          <a:chOff x="0" y="0"/>
+          <a:chExt cx="0" cy="0"/>
+        </a:xfrm>
+      </p:grpSpPr>
       <p:sp>
         <p:nvSpPr>
           <p:cNvPr id="2" name="Rectangle 1"/>
@@ -52459,6 +54367,7 @@
           <a:lstStyle/>
           <a:p>
             <a:pPr algn="ctr"/>
+            <a:endParaRPr/>
           </a:p>
         </p:txBody>
       </p:sp>
@@ -52564,6 +54473,7 @@
           <a:lstStyle/>
           <a:p>
             <a:pPr algn="ctr"/>
+            <a:endParaRPr/>
           </a:p>
         </p:txBody>
       </p:sp>
@@ -52684,6 +54594,7 @@
           <a:lstStyle/>
           <a:p>
             <a:pPr algn="ctr"/>
+            <a:endParaRPr/>
           </a:p>
         </p:txBody>
       </p:sp>
@@ -52915,6 +54826,7 @@
           <a:lstStyle/>
           <a:p>
             <a:pPr algn="ctr"/>
+            <a:endParaRPr/>
           </a:p>
         </p:txBody>
       </p:sp>
@@ -53020,6 +54932,7 @@
           <a:lstStyle/>
           <a:p>
             <a:pPr algn="ctr"/>
+            <a:endParaRPr/>
           </a:p>
         </p:txBody>
       </p:sp>
@@ -53106,7 +55019,7 @@
 </file>
 
 <file path=ppt/slides/slide7.xml><?xml version="1.0" encoding="utf-8"?>
-<p:sld xmlns:a="http://schemas.openxmlformats.org/drawingml/2006/main" xmlns:p="http://schemas.openxmlformats.org/presentationml/2006/main" xmlns:r="http://schemas.openxmlformats.org/officeDocument/2006/relationships">
+<p:sld xmlns:a="http://schemas.openxmlformats.org/drawingml/2006/main" xmlns:r="http://schemas.openxmlformats.org/officeDocument/2006/relationships" xmlns:p="http://schemas.openxmlformats.org/presentationml/2006/main">
   <p:cSld>
     <p:bg>
       <p:bgPr>
@@ -53122,7 +55035,14 @@
         <p:cNvGrpSpPr/>
         <p:nvPr/>
       </p:nvGrpSpPr>
-      <p:grpSpPr/>
+      <p:grpSpPr>
+        <a:xfrm>
+          <a:off x="0" y="0"/>
+          <a:ext cx="0" cy="0"/>
+          <a:chOff x="0" y="0"/>
+          <a:chExt cx="0" cy="0"/>
+        </a:xfrm>
+      </p:grpSpPr>
       <p:sp>
         <p:nvSpPr>
           <p:cNvPr id="2" name="Rectangle 1"/>
@@ -53164,6 +55084,7 @@
           <a:lstStyle/>
           <a:p>
             <a:pPr algn="ctr"/>
+            <a:endParaRPr/>
           </a:p>
         </p:txBody>
       </p:sp>
@@ -53269,6 +55190,7 @@
           <a:lstStyle/>
           <a:p>
             <a:pPr algn="ctr"/>
+            <a:endParaRPr/>
           </a:p>
         </p:txBody>
       </p:sp>
@@ -53365,8 +55287,20 @@
                 <a:tableStyleId>{5C22544A-7EE6-4342-B048-85BDC9FD1C3A}</a:tableStyleId>
               </a:tblPr>
               <a:tblGrid>
-                <a:gridCol w="5486400"/>
-                <a:gridCol w="5486400"/>
+                <a:gridCol w="5486400">
+                  <a:extLst>
+                    <a:ext uri="{9D8B030D-6E8A-4147-A177-3AD203B41FA5}">
+                      <a16:colId xmlns:a16="http://schemas.microsoft.com/office/drawing/2014/main" val="20000"/>
+                    </a:ext>
+                  </a:extLst>
+                </a:gridCol>
+                <a:gridCol w="5486400">
+                  <a:extLst>
+                    <a:ext uri="{9D8B030D-6E8A-4147-A177-3AD203B41FA5}">
+                      <a16:colId xmlns:a16="http://schemas.microsoft.com/office/drawing/2014/main" val="20001"/>
+                    </a:ext>
+                  </a:extLst>
+                </a:gridCol>
               </a:tblGrid>
               <a:tr h="475488">
                 <a:tc>
@@ -53415,6 +55349,11 @@
                     </a:solidFill>
                   </a:tcPr>
                 </a:tc>
+                <a:extLst>
+                  <a:ext uri="{0D108BD9-81ED-4DB2-BD59-A6C34878D82A}">
+                    <a16:rowId xmlns:a16="http://schemas.microsoft.com/office/drawing/2014/main" val="10000"/>
+                  </a:ext>
+                </a:extLst>
               </a:tr>
               <a:tr h="475488">
                 <a:tc>
@@ -53463,6 +55402,11 @@
                     </a:solidFill>
                   </a:tcPr>
                 </a:tc>
+                <a:extLst>
+                  <a:ext uri="{0D108BD9-81ED-4DB2-BD59-A6C34878D82A}">
+                    <a16:rowId xmlns:a16="http://schemas.microsoft.com/office/drawing/2014/main" val="10001"/>
+                  </a:ext>
+                </a:extLst>
               </a:tr>
               <a:tr h="475488">
                 <a:tc>
@@ -53511,6 +55455,11 @@
                     </a:solidFill>
                   </a:tcPr>
                 </a:tc>
+                <a:extLst>
+                  <a:ext uri="{0D108BD9-81ED-4DB2-BD59-A6C34878D82A}">
+                    <a16:rowId xmlns:a16="http://schemas.microsoft.com/office/drawing/2014/main" val="10002"/>
+                  </a:ext>
+                </a:extLst>
               </a:tr>
               <a:tr h="475488">
                 <a:tc>
@@ -53559,6 +55508,11 @@
                     </a:solidFill>
                   </a:tcPr>
                 </a:tc>
+                <a:extLst>
+                  <a:ext uri="{0D108BD9-81ED-4DB2-BD59-A6C34878D82A}">
+                    <a16:rowId xmlns:a16="http://schemas.microsoft.com/office/drawing/2014/main" val="10003"/>
+                  </a:ext>
+                </a:extLst>
               </a:tr>
               <a:tr h="475488">
                 <a:tc>
@@ -53607,6 +55561,11 @@
                     </a:solidFill>
                   </a:tcPr>
                 </a:tc>
+                <a:extLst>
+                  <a:ext uri="{0D108BD9-81ED-4DB2-BD59-A6C34878D82A}">
+                    <a16:rowId xmlns:a16="http://schemas.microsoft.com/office/drawing/2014/main" val="10004"/>
+                  </a:ext>
+                </a:extLst>
               </a:tr>
             </a:tbl>
           </a:graphicData>
@@ -53655,6 +55614,7 @@
           <a:lstStyle/>
           <a:p>
             <a:pPr algn="ctr"/>
+            <a:endParaRPr/>
           </a:p>
         </p:txBody>
       </p:sp>
@@ -53736,6 +55696,7 @@
           <a:lstStyle/>
           <a:p>
             <a:pPr algn="ctr"/>
+            <a:endParaRPr/>
           </a:p>
         </p:txBody>
       </p:sp>
@@ -53822,7 +55783,7 @@
 </file>
 
 <file path=ppt/slides/slide70.xml><?xml version="1.0" encoding="utf-8"?>
-<p:sld xmlns:a="http://schemas.openxmlformats.org/drawingml/2006/main" xmlns:p="http://schemas.openxmlformats.org/presentationml/2006/main" xmlns:r="http://schemas.openxmlformats.org/officeDocument/2006/relationships">
+<p:sld xmlns:a="http://schemas.openxmlformats.org/drawingml/2006/main" xmlns:r="http://schemas.openxmlformats.org/officeDocument/2006/relationships" xmlns:p="http://schemas.openxmlformats.org/presentationml/2006/main">
   <p:cSld>
     <p:bg>
       <p:bgPr>
@@ -53838,7 +55799,14 @@
         <p:cNvGrpSpPr/>
         <p:nvPr/>
       </p:nvGrpSpPr>
-      <p:grpSpPr/>
+      <p:grpSpPr>
+        <a:xfrm>
+          <a:off x="0" y="0"/>
+          <a:ext cx="0" cy="0"/>
+          <a:chOff x="0" y="0"/>
+          <a:chExt cx="0" cy="0"/>
+        </a:xfrm>
+      </p:grpSpPr>
       <p:sp>
         <p:nvSpPr>
           <p:cNvPr id="2" name="Rectangle 1"/>
@@ -53880,6 +55848,7 @@
           <a:lstStyle/>
           <a:p>
             <a:pPr algn="ctr"/>
+            <a:endParaRPr/>
           </a:p>
         </p:txBody>
       </p:sp>
@@ -53985,6 +55954,7 @@
           <a:lstStyle/>
           <a:p>
             <a:pPr algn="ctr"/>
+            <a:endParaRPr/>
           </a:p>
         </p:txBody>
       </p:sp>
@@ -54105,6 +56075,7 @@
           <a:lstStyle/>
           <a:p>
             <a:pPr algn="ctr"/>
+            <a:endParaRPr/>
           </a:p>
         </p:txBody>
       </p:sp>
@@ -54188,6 +56159,7 @@
           <a:lstStyle/>
           <a:p>
             <a:pPr algn="ctr"/>
+            <a:endParaRPr/>
           </a:p>
         </p:txBody>
       </p:sp>
@@ -54441,6 +56413,7 @@
           <a:lstStyle/>
           <a:p>
             <a:pPr algn="ctr"/>
+            <a:endParaRPr/>
           </a:p>
         </p:txBody>
       </p:sp>
@@ -54527,7 +56500,7 @@
 </file>
 
 <file path=ppt/slides/slide71.xml><?xml version="1.0" encoding="utf-8"?>
-<p:sld xmlns:a="http://schemas.openxmlformats.org/drawingml/2006/main" xmlns:p="http://schemas.openxmlformats.org/presentationml/2006/main" xmlns:r="http://schemas.openxmlformats.org/officeDocument/2006/relationships">
+<p:sld xmlns:a="http://schemas.openxmlformats.org/drawingml/2006/main" xmlns:r="http://schemas.openxmlformats.org/officeDocument/2006/relationships" xmlns:p="http://schemas.openxmlformats.org/presentationml/2006/main">
   <p:cSld>
     <p:bg>
       <p:bgPr>
@@ -54543,7 +56516,14 @@
         <p:cNvGrpSpPr/>
         <p:nvPr/>
       </p:nvGrpSpPr>
-      <p:grpSpPr/>
+      <p:grpSpPr>
+        <a:xfrm>
+          <a:off x="0" y="0"/>
+          <a:ext cx="0" cy="0"/>
+          <a:chOff x="0" y="0"/>
+          <a:chExt cx="0" cy="0"/>
+        </a:xfrm>
+      </p:grpSpPr>
       <p:sp>
         <p:nvSpPr>
           <p:cNvPr id="2" name="Rectangle 1"/>
@@ -54585,6 +56565,7 @@
           <a:lstStyle/>
           <a:p>
             <a:pPr algn="ctr"/>
+            <a:endParaRPr/>
           </a:p>
         </p:txBody>
       </p:sp>
@@ -54690,6 +56671,7 @@
           <a:lstStyle/>
           <a:p>
             <a:pPr algn="ctr"/>
+            <a:endParaRPr/>
           </a:p>
         </p:txBody>
       </p:sp>
@@ -54810,6 +56792,7 @@
           <a:lstStyle/>
           <a:p>
             <a:pPr algn="ctr"/>
+            <a:endParaRPr/>
           </a:p>
         </p:txBody>
       </p:sp>
@@ -54893,6 +56876,7 @@
           <a:lstStyle/>
           <a:p>
             <a:pPr algn="ctr"/>
+            <a:endParaRPr/>
           </a:p>
         </p:txBody>
       </p:sp>
@@ -55146,6 +57130,7 @@
           <a:lstStyle/>
           <a:p>
             <a:pPr algn="ctr"/>
+            <a:endParaRPr/>
           </a:p>
         </p:txBody>
       </p:sp>
@@ -55232,7 +57217,7 @@
 </file>
 
 <file path=ppt/slides/slide72.xml><?xml version="1.0" encoding="utf-8"?>
-<p:sld xmlns:a="http://schemas.openxmlformats.org/drawingml/2006/main" xmlns:p="http://schemas.openxmlformats.org/presentationml/2006/main" xmlns:r="http://schemas.openxmlformats.org/officeDocument/2006/relationships">
+<p:sld xmlns:a="http://schemas.openxmlformats.org/drawingml/2006/main" xmlns:r="http://schemas.openxmlformats.org/officeDocument/2006/relationships" xmlns:p="http://schemas.openxmlformats.org/presentationml/2006/main">
   <p:cSld>
     <p:bg>
       <p:bgPr>
@@ -55248,7 +57233,14 @@
         <p:cNvGrpSpPr/>
         <p:nvPr/>
       </p:nvGrpSpPr>
-      <p:grpSpPr/>
+      <p:grpSpPr>
+        <a:xfrm>
+          <a:off x="0" y="0"/>
+          <a:ext cx="0" cy="0"/>
+          <a:chOff x="0" y="0"/>
+          <a:chExt cx="0" cy="0"/>
+        </a:xfrm>
+      </p:grpSpPr>
       <p:sp>
         <p:nvSpPr>
           <p:cNvPr id="2" name="Rectangle 1"/>
@@ -55290,6 +57282,7 @@
           <a:lstStyle/>
           <a:p>
             <a:pPr algn="ctr"/>
+            <a:endParaRPr/>
           </a:p>
         </p:txBody>
       </p:sp>
@@ -55395,6 +57388,7 @@
           <a:lstStyle/>
           <a:p>
             <a:pPr algn="ctr"/>
+            <a:endParaRPr/>
           </a:p>
         </p:txBody>
       </p:sp>
@@ -55515,6 +57509,7 @@
           <a:lstStyle/>
           <a:p>
             <a:pPr algn="ctr"/>
+            <a:endParaRPr/>
           </a:p>
         </p:txBody>
       </p:sp>
@@ -55598,6 +57593,7 @@
           <a:lstStyle/>
           <a:p>
             <a:pPr algn="ctr"/>
+            <a:endParaRPr/>
           </a:p>
         </p:txBody>
       </p:sp>
@@ -55851,6 +57847,7 @@
           <a:lstStyle/>
           <a:p>
             <a:pPr algn="ctr"/>
+            <a:endParaRPr/>
           </a:p>
         </p:txBody>
       </p:sp>
@@ -55937,7 +57934,7 @@
 </file>
 
 <file path=ppt/slides/slide73.xml><?xml version="1.0" encoding="utf-8"?>
-<p:sld xmlns:a="http://schemas.openxmlformats.org/drawingml/2006/main" xmlns:p="http://schemas.openxmlformats.org/presentationml/2006/main" xmlns:r="http://schemas.openxmlformats.org/officeDocument/2006/relationships">
+<p:sld xmlns:a="http://schemas.openxmlformats.org/drawingml/2006/main" xmlns:r="http://schemas.openxmlformats.org/officeDocument/2006/relationships" xmlns:p="http://schemas.openxmlformats.org/presentationml/2006/main">
   <p:cSld>
     <p:bg>
       <p:bgPr>
@@ -55953,7 +57950,14 @@
         <p:cNvGrpSpPr/>
         <p:nvPr/>
       </p:nvGrpSpPr>
-      <p:grpSpPr/>
+      <p:grpSpPr>
+        <a:xfrm>
+          <a:off x="0" y="0"/>
+          <a:ext cx="0" cy="0"/>
+          <a:chOff x="0" y="0"/>
+          <a:chExt cx="0" cy="0"/>
+        </a:xfrm>
+      </p:grpSpPr>
       <p:sp>
         <p:nvSpPr>
           <p:cNvPr id="2" name="Rectangle 1"/>
@@ -55995,6 +57999,7 @@
           <a:lstStyle/>
           <a:p>
             <a:pPr algn="ctr"/>
+            <a:endParaRPr/>
           </a:p>
         </p:txBody>
       </p:sp>
@@ -56100,6 +58105,7 @@
           <a:lstStyle/>
           <a:p>
             <a:pPr algn="ctr"/>
+            <a:endParaRPr/>
           </a:p>
         </p:txBody>
       </p:sp>
@@ -56220,6 +58226,7 @@
           <a:lstStyle/>
           <a:p>
             <a:pPr algn="ctr"/>
+            <a:endParaRPr/>
           </a:p>
         </p:txBody>
       </p:sp>
@@ -56303,6 +58310,7 @@
           <a:lstStyle/>
           <a:p>
             <a:pPr algn="ctr"/>
+            <a:endParaRPr/>
           </a:p>
         </p:txBody>
       </p:sp>
@@ -56556,6 +58564,7 @@
           <a:lstStyle/>
           <a:p>
             <a:pPr algn="ctr"/>
+            <a:endParaRPr/>
           </a:p>
         </p:txBody>
       </p:sp>
@@ -56642,7 +58651,7 @@
 </file>
 
 <file path=ppt/slides/slide74.xml><?xml version="1.0" encoding="utf-8"?>
-<p:sld xmlns:a="http://schemas.openxmlformats.org/drawingml/2006/main" xmlns:p="http://schemas.openxmlformats.org/presentationml/2006/main" xmlns:r="http://schemas.openxmlformats.org/officeDocument/2006/relationships">
+<p:sld xmlns:a="http://schemas.openxmlformats.org/drawingml/2006/main" xmlns:r="http://schemas.openxmlformats.org/officeDocument/2006/relationships" xmlns:p="http://schemas.openxmlformats.org/presentationml/2006/main">
   <p:cSld>
     <p:bg>
       <p:bgPr>
@@ -56658,7 +58667,14 @@
         <p:cNvGrpSpPr/>
         <p:nvPr/>
       </p:nvGrpSpPr>
-      <p:grpSpPr/>
+      <p:grpSpPr>
+        <a:xfrm>
+          <a:off x="0" y="0"/>
+          <a:ext cx="0" cy="0"/>
+          <a:chOff x="0" y="0"/>
+          <a:chExt cx="0" cy="0"/>
+        </a:xfrm>
+      </p:grpSpPr>
       <p:sp>
         <p:nvSpPr>
           <p:cNvPr id="2" name="Rectangle 1"/>
@@ -56700,6 +58716,7 @@
           <a:lstStyle/>
           <a:p>
             <a:pPr algn="ctr"/>
+            <a:endParaRPr/>
           </a:p>
         </p:txBody>
       </p:sp>
@@ -56805,6 +58822,7 @@
           <a:lstStyle/>
           <a:p>
             <a:pPr algn="ctr"/>
+            <a:endParaRPr/>
           </a:p>
         </p:txBody>
       </p:sp>
@@ -56925,6 +58943,7 @@
           <a:lstStyle/>
           <a:p>
             <a:pPr algn="ctr"/>
+            <a:endParaRPr/>
           </a:p>
         </p:txBody>
       </p:sp>
@@ -57228,6 +59247,7 @@
           <a:lstStyle/>
           <a:p>
             <a:pPr algn="ctr"/>
+            <a:endParaRPr/>
           </a:p>
         </p:txBody>
       </p:sp>
@@ -57314,7 +59334,7 @@
 </file>
 
 <file path=ppt/slides/slide75.xml><?xml version="1.0" encoding="utf-8"?>
-<p:sld xmlns:a="http://schemas.openxmlformats.org/drawingml/2006/main" xmlns:p="http://schemas.openxmlformats.org/presentationml/2006/main" xmlns:r="http://schemas.openxmlformats.org/officeDocument/2006/relationships">
+<p:sld xmlns:a="http://schemas.openxmlformats.org/drawingml/2006/main" xmlns:r="http://schemas.openxmlformats.org/officeDocument/2006/relationships" xmlns:p="http://schemas.openxmlformats.org/presentationml/2006/main">
   <p:cSld>
     <p:bg>
       <p:bgPr>
@@ -57330,7 +59350,14 @@
         <p:cNvGrpSpPr/>
         <p:nvPr/>
       </p:nvGrpSpPr>
-      <p:grpSpPr/>
+      <p:grpSpPr>
+        <a:xfrm>
+          <a:off x="0" y="0"/>
+          <a:ext cx="0" cy="0"/>
+          <a:chOff x="0" y="0"/>
+          <a:chExt cx="0" cy="0"/>
+        </a:xfrm>
+      </p:grpSpPr>
       <p:sp>
         <p:nvSpPr>
           <p:cNvPr id="2" name="Rectangle 1"/>
@@ -57372,6 +59399,7 @@
           <a:lstStyle/>
           <a:p>
             <a:pPr algn="ctr"/>
+            <a:endParaRPr/>
           </a:p>
         </p:txBody>
       </p:sp>
@@ -57477,6 +59505,7 @@
           <a:lstStyle/>
           <a:p>
             <a:pPr algn="ctr"/>
+            <a:endParaRPr/>
           </a:p>
         </p:txBody>
       </p:sp>
@@ -57564,7 +59593,7 @@
         </p:nvGraphicFramePr>
         <p:xfrm>
           <a:off x="548640" y="2057400"/>
-          <a:ext cx="10972800" cy="1901952"/>
+          <a:ext cx="10972800" cy="1914144"/>
         </p:xfrm>
         <a:graphic>
           <a:graphicData uri="http://schemas.openxmlformats.org/drawingml/2006/table">
@@ -57573,10 +59602,34 @@
                 <a:tableStyleId>{5C22544A-7EE6-4342-B048-85BDC9FD1C3A}</a:tableStyleId>
               </a:tblPr>
               <a:tblGrid>
-                <a:gridCol w="2743200"/>
-                <a:gridCol w="2743200"/>
-                <a:gridCol w="2743200"/>
-                <a:gridCol w="2743200"/>
+                <a:gridCol w="2743200">
+                  <a:extLst>
+                    <a:ext uri="{9D8B030D-6E8A-4147-A177-3AD203B41FA5}">
+                      <a16:colId xmlns:a16="http://schemas.microsoft.com/office/drawing/2014/main" val="20000"/>
+                    </a:ext>
+                  </a:extLst>
+                </a:gridCol>
+                <a:gridCol w="2743200">
+                  <a:extLst>
+                    <a:ext uri="{9D8B030D-6E8A-4147-A177-3AD203B41FA5}">
+                      <a16:colId xmlns:a16="http://schemas.microsoft.com/office/drawing/2014/main" val="20001"/>
+                    </a:ext>
+                  </a:extLst>
+                </a:gridCol>
+                <a:gridCol w="2743200">
+                  <a:extLst>
+                    <a:ext uri="{9D8B030D-6E8A-4147-A177-3AD203B41FA5}">
+                      <a16:colId xmlns:a16="http://schemas.microsoft.com/office/drawing/2014/main" val="20002"/>
+                    </a:ext>
+                  </a:extLst>
+                </a:gridCol>
+                <a:gridCol w="2743200">
+                  <a:extLst>
+                    <a:ext uri="{9D8B030D-6E8A-4147-A177-3AD203B41FA5}">
+                      <a16:colId xmlns:a16="http://schemas.microsoft.com/office/drawing/2014/main" val="20003"/>
+                    </a:ext>
+                  </a:extLst>
+                </a:gridCol>
               </a:tblGrid>
               <a:tr h="475488">
                 <a:tc>
@@ -57671,6 +59724,11 @@
                     </a:solidFill>
                   </a:tcPr>
                 </a:tc>
+                <a:extLst>
+                  <a:ext uri="{0D108BD9-81ED-4DB2-BD59-A6C34878D82A}">
+                    <a16:rowId xmlns:a16="http://schemas.microsoft.com/office/drawing/2014/main" val="10000"/>
+                  </a:ext>
+                </a:extLst>
               </a:tr>
               <a:tr h="475488">
                 <a:tc>
@@ -57765,6 +59823,11 @@
                     </a:solidFill>
                   </a:tcPr>
                 </a:tc>
+                <a:extLst>
+                  <a:ext uri="{0D108BD9-81ED-4DB2-BD59-A6C34878D82A}">
+                    <a16:rowId xmlns:a16="http://schemas.microsoft.com/office/drawing/2014/main" val="10001"/>
+                  </a:ext>
+                </a:extLst>
               </a:tr>
               <a:tr h="475488">
                 <a:tc>
@@ -57859,6 +59922,11 @@
                     </a:solidFill>
                   </a:tcPr>
                 </a:tc>
+                <a:extLst>
+                  <a:ext uri="{0D108BD9-81ED-4DB2-BD59-A6C34878D82A}">
+                    <a16:rowId xmlns:a16="http://schemas.microsoft.com/office/drawing/2014/main" val="10002"/>
+                  </a:ext>
+                </a:extLst>
               </a:tr>
               <a:tr h="475488">
                 <a:tc>
@@ -57953,6 +60021,11 @@
                     </a:solidFill>
                   </a:tcPr>
                 </a:tc>
+                <a:extLst>
+                  <a:ext uri="{0D108BD9-81ED-4DB2-BD59-A6C34878D82A}">
+                    <a16:rowId xmlns:a16="http://schemas.microsoft.com/office/drawing/2014/main" val="10003"/>
+                  </a:ext>
+                </a:extLst>
               </a:tr>
             </a:tbl>
           </a:graphicData>
@@ -58001,6 +60074,7 @@
           <a:lstStyle/>
           <a:p>
             <a:pPr algn="ctr"/>
+            <a:endParaRPr/>
           </a:p>
         </p:txBody>
       </p:sp>
@@ -58082,6 +60156,7 @@
           <a:lstStyle/>
           <a:p>
             <a:pPr algn="ctr"/>
+            <a:endParaRPr/>
           </a:p>
         </p:txBody>
       </p:sp>
@@ -58168,7 +60243,7 @@
 </file>
 
 <file path=ppt/slides/slide76.xml><?xml version="1.0" encoding="utf-8"?>
-<p:sld xmlns:a="http://schemas.openxmlformats.org/drawingml/2006/main" xmlns:p="http://schemas.openxmlformats.org/presentationml/2006/main" xmlns:r="http://schemas.openxmlformats.org/officeDocument/2006/relationships">
+<p:sld xmlns:a="http://schemas.openxmlformats.org/drawingml/2006/main" xmlns:r="http://schemas.openxmlformats.org/officeDocument/2006/relationships" xmlns:p="http://schemas.openxmlformats.org/presentationml/2006/main">
   <p:cSld>
     <p:bg>
       <p:bgPr>
@@ -58184,7 +60259,14 @@
         <p:cNvGrpSpPr/>
         <p:nvPr/>
       </p:nvGrpSpPr>
-      <p:grpSpPr/>
+      <p:grpSpPr>
+        <a:xfrm>
+          <a:off x="0" y="0"/>
+          <a:ext cx="0" cy="0"/>
+          <a:chOff x="0" y="0"/>
+          <a:chExt cx="0" cy="0"/>
+        </a:xfrm>
+      </p:grpSpPr>
       <p:sp>
         <p:nvSpPr>
           <p:cNvPr id="2" name="Rectangle 1"/>
@@ -58226,6 +60308,7 @@
           <a:lstStyle/>
           <a:p>
             <a:pPr algn="ctr"/>
+            <a:endParaRPr/>
           </a:p>
         </p:txBody>
       </p:sp>
@@ -58331,6 +60414,7 @@
           <a:lstStyle/>
           <a:p>
             <a:pPr algn="ctr"/>
+            <a:endParaRPr/>
           </a:p>
         </p:txBody>
       </p:sp>
@@ -58427,9 +60511,27 @@
                 <a:tableStyleId>{5C22544A-7EE6-4342-B048-85BDC9FD1C3A}</a:tableStyleId>
               </a:tblPr>
               <a:tblGrid>
-                <a:gridCol w="3657600"/>
-                <a:gridCol w="3657600"/>
-                <a:gridCol w="3657600"/>
+                <a:gridCol w="3657600">
+                  <a:extLst>
+                    <a:ext uri="{9D8B030D-6E8A-4147-A177-3AD203B41FA5}">
+                      <a16:colId xmlns:a16="http://schemas.microsoft.com/office/drawing/2014/main" val="20000"/>
+                    </a:ext>
+                  </a:extLst>
+                </a:gridCol>
+                <a:gridCol w="3657600">
+                  <a:extLst>
+                    <a:ext uri="{9D8B030D-6E8A-4147-A177-3AD203B41FA5}">
+                      <a16:colId xmlns:a16="http://schemas.microsoft.com/office/drawing/2014/main" val="20001"/>
+                    </a:ext>
+                  </a:extLst>
+                </a:gridCol>
+                <a:gridCol w="3657600">
+                  <a:extLst>
+                    <a:ext uri="{9D8B030D-6E8A-4147-A177-3AD203B41FA5}">
+                      <a16:colId xmlns:a16="http://schemas.microsoft.com/office/drawing/2014/main" val="20002"/>
+                    </a:ext>
+                  </a:extLst>
+                </a:gridCol>
               </a:tblGrid>
               <a:tr h="365760">
                 <a:tc>
@@ -58501,6 +60603,11 @@
                     </a:solidFill>
                   </a:tcPr>
                 </a:tc>
+                <a:extLst>
+                  <a:ext uri="{0D108BD9-81ED-4DB2-BD59-A6C34878D82A}">
+                    <a16:rowId xmlns:a16="http://schemas.microsoft.com/office/drawing/2014/main" val="10000"/>
+                  </a:ext>
+                </a:extLst>
               </a:tr>
               <a:tr h="365760">
                 <a:tc>
@@ -58572,6 +60679,11 @@
                     </a:solidFill>
                   </a:tcPr>
                 </a:tc>
+                <a:extLst>
+                  <a:ext uri="{0D108BD9-81ED-4DB2-BD59-A6C34878D82A}">
+                    <a16:rowId xmlns:a16="http://schemas.microsoft.com/office/drawing/2014/main" val="10001"/>
+                  </a:ext>
+                </a:extLst>
               </a:tr>
               <a:tr h="365760">
                 <a:tc>
@@ -58643,6 +60755,11 @@
                     </a:solidFill>
                   </a:tcPr>
                 </a:tc>
+                <a:extLst>
+                  <a:ext uri="{0D108BD9-81ED-4DB2-BD59-A6C34878D82A}">
+                    <a16:rowId xmlns:a16="http://schemas.microsoft.com/office/drawing/2014/main" val="10002"/>
+                  </a:ext>
+                </a:extLst>
               </a:tr>
               <a:tr h="365760">
                 <a:tc>
@@ -58714,6 +60831,11 @@
                     </a:solidFill>
                   </a:tcPr>
                 </a:tc>
+                <a:extLst>
+                  <a:ext uri="{0D108BD9-81ED-4DB2-BD59-A6C34878D82A}">
+                    <a16:rowId xmlns:a16="http://schemas.microsoft.com/office/drawing/2014/main" val="10003"/>
+                  </a:ext>
+                </a:extLst>
               </a:tr>
               <a:tr h="365760">
                 <a:tc>
@@ -58785,6 +60907,11 @@
                     </a:solidFill>
                   </a:tcPr>
                 </a:tc>
+                <a:extLst>
+                  <a:ext uri="{0D108BD9-81ED-4DB2-BD59-A6C34878D82A}">
+                    <a16:rowId xmlns:a16="http://schemas.microsoft.com/office/drawing/2014/main" val="10004"/>
+                  </a:ext>
+                </a:extLst>
               </a:tr>
               <a:tr h="365760">
                 <a:tc>
@@ -58856,6 +60983,11 @@
                     </a:solidFill>
                   </a:tcPr>
                 </a:tc>
+                <a:extLst>
+                  <a:ext uri="{0D108BD9-81ED-4DB2-BD59-A6C34878D82A}">
+                    <a16:rowId xmlns:a16="http://schemas.microsoft.com/office/drawing/2014/main" val="10005"/>
+                  </a:ext>
+                </a:extLst>
               </a:tr>
             </a:tbl>
           </a:graphicData>
@@ -58904,6 +61036,7 @@
           <a:lstStyle/>
           <a:p>
             <a:pPr algn="ctr"/>
+            <a:endParaRPr/>
           </a:p>
         </p:txBody>
       </p:sp>
@@ -58985,6 +61118,7 @@
           <a:lstStyle/>
           <a:p>
             <a:pPr algn="ctr"/>
+            <a:endParaRPr/>
           </a:p>
         </p:txBody>
       </p:sp>
@@ -59071,7 +61205,7 @@
 </file>
 
 <file path=ppt/slides/slide77.xml><?xml version="1.0" encoding="utf-8"?>
-<p:sld xmlns:a="http://schemas.openxmlformats.org/drawingml/2006/main" xmlns:p="http://schemas.openxmlformats.org/presentationml/2006/main" xmlns:r="http://schemas.openxmlformats.org/officeDocument/2006/relationships">
+<p:sld xmlns:a="http://schemas.openxmlformats.org/drawingml/2006/main" xmlns:r="http://schemas.openxmlformats.org/officeDocument/2006/relationships" xmlns:p="http://schemas.openxmlformats.org/presentationml/2006/main">
   <p:cSld>
     <p:bg>
       <p:bgPr>
@@ -59087,7 +61221,14 @@
         <p:cNvGrpSpPr/>
         <p:nvPr/>
       </p:nvGrpSpPr>
-      <p:grpSpPr/>
+      <p:grpSpPr>
+        <a:xfrm>
+          <a:off x="0" y="0"/>
+          <a:ext cx="0" cy="0"/>
+          <a:chOff x="0" y="0"/>
+          <a:chExt cx="0" cy="0"/>
+        </a:xfrm>
+      </p:grpSpPr>
       <p:sp>
         <p:nvSpPr>
           <p:cNvPr id="2" name="Rectangle 1"/>
@@ -59129,6 +61270,7 @@
           <a:lstStyle/>
           <a:p>
             <a:pPr algn="ctr"/>
+            <a:endParaRPr/>
           </a:p>
         </p:txBody>
       </p:sp>
@@ -59234,6 +61376,7 @@
           <a:lstStyle/>
           <a:p>
             <a:pPr algn="ctr"/>
+            <a:endParaRPr/>
           </a:p>
         </p:txBody>
       </p:sp>
@@ -59330,8 +61473,20 @@
                 <a:tableStyleId>{5C22544A-7EE6-4342-B048-85BDC9FD1C3A}</a:tableStyleId>
               </a:tblPr>
               <a:tblGrid>
-                <a:gridCol w="5486400"/>
-                <a:gridCol w="5486400"/>
+                <a:gridCol w="5486400">
+                  <a:extLst>
+                    <a:ext uri="{9D8B030D-6E8A-4147-A177-3AD203B41FA5}">
+                      <a16:colId xmlns:a16="http://schemas.microsoft.com/office/drawing/2014/main" val="20000"/>
+                    </a:ext>
+                  </a:extLst>
+                </a:gridCol>
+                <a:gridCol w="5486400">
+                  <a:extLst>
+                    <a:ext uri="{9D8B030D-6E8A-4147-A177-3AD203B41FA5}">
+                      <a16:colId xmlns:a16="http://schemas.microsoft.com/office/drawing/2014/main" val="20001"/>
+                    </a:ext>
+                  </a:extLst>
+                </a:gridCol>
               </a:tblGrid>
               <a:tr h="365760">
                 <a:tc>
@@ -59380,6 +61535,11 @@
                     </a:solidFill>
                   </a:tcPr>
                 </a:tc>
+                <a:extLst>
+                  <a:ext uri="{0D108BD9-81ED-4DB2-BD59-A6C34878D82A}">
+                    <a16:rowId xmlns:a16="http://schemas.microsoft.com/office/drawing/2014/main" val="10000"/>
+                  </a:ext>
+                </a:extLst>
               </a:tr>
               <a:tr h="365760">
                 <a:tc>
@@ -59428,6 +61588,11 @@
                     </a:solidFill>
                   </a:tcPr>
                 </a:tc>
+                <a:extLst>
+                  <a:ext uri="{0D108BD9-81ED-4DB2-BD59-A6C34878D82A}">
+                    <a16:rowId xmlns:a16="http://schemas.microsoft.com/office/drawing/2014/main" val="10001"/>
+                  </a:ext>
+                </a:extLst>
               </a:tr>
               <a:tr h="365760">
                 <a:tc>
@@ -59476,6 +61641,11 @@
                     </a:solidFill>
                   </a:tcPr>
                 </a:tc>
+                <a:extLst>
+                  <a:ext uri="{0D108BD9-81ED-4DB2-BD59-A6C34878D82A}">
+                    <a16:rowId xmlns:a16="http://schemas.microsoft.com/office/drawing/2014/main" val="10002"/>
+                  </a:ext>
+                </a:extLst>
               </a:tr>
               <a:tr h="365760">
                 <a:tc>
@@ -59524,6 +61694,11 @@
                     </a:solidFill>
                   </a:tcPr>
                 </a:tc>
+                <a:extLst>
+                  <a:ext uri="{0D108BD9-81ED-4DB2-BD59-A6C34878D82A}">
+                    <a16:rowId xmlns:a16="http://schemas.microsoft.com/office/drawing/2014/main" val="10003"/>
+                  </a:ext>
+                </a:extLst>
               </a:tr>
               <a:tr h="365760">
                 <a:tc>
@@ -59572,6 +61747,11 @@
                     </a:solidFill>
                   </a:tcPr>
                 </a:tc>
+                <a:extLst>
+                  <a:ext uri="{0D108BD9-81ED-4DB2-BD59-A6C34878D82A}">
+                    <a16:rowId xmlns:a16="http://schemas.microsoft.com/office/drawing/2014/main" val="10004"/>
+                  </a:ext>
+                </a:extLst>
               </a:tr>
               <a:tr h="365760">
                 <a:tc>
@@ -59620,6 +61800,11 @@
                     </a:solidFill>
                   </a:tcPr>
                 </a:tc>
+                <a:extLst>
+                  <a:ext uri="{0D108BD9-81ED-4DB2-BD59-A6C34878D82A}">
+                    <a16:rowId xmlns:a16="http://schemas.microsoft.com/office/drawing/2014/main" val="10005"/>
+                  </a:ext>
+                </a:extLst>
               </a:tr>
             </a:tbl>
           </a:graphicData>
@@ -59668,6 +61853,7 @@
           <a:lstStyle/>
           <a:p>
             <a:pPr algn="ctr"/>
+            <a:endParaRPr/>
           </a:p>
         </p:txBody>
       </p:sp>
@@ -59749,6 +61935,7 @@
           <a:lstStyle/>
           <a:p>
             <a:pPr algn="ctr"/>
+            <a:endParaRPr/>
           </a:p>
         </p:txBody>
       </p:sp>
@@ -59835,7 +62022,7 @@
 </file>
 
 <file path=ppt/slides/slide78.xml><?xml version="1.0" encoding="utf-8"?>
-<p:sld xmlns:a="http://schemas.openxmlformats.org/drawingml/2006/main" xmlns:p="http://schemas.openxmlformats.org/presentationml/2006/main" xmlns:r="http://schemas.openxmlformats.org/officeDocument/2006/relationships">
+<p:sld xmlns:a="http://schemas.openxmlformats.org/drawingml/2006/main" xmlns:r="http://schemas.openxmlformats.org/officeDocument/2006/relationships" xmlns:p="http://schemas.openxmlformats.org/presentationml/2006/main">
   <p:cSld>
     <p:bg>
       <p:bgPr>
@@ -59851,7 +62038,14 @@
         <p:cNvGrpSpPr/>
         <p:nvPr/>
       </p:nvGrpSpPr>
-      <p:grpSpPr/>
+      <p:grpSpPr>
+        <a:xfrm>
+          <a:off x="0" y="0"/>
+          <a:ext cx="0" cy="0"/>
+          <a:chOff x="0" y="0"/>
+          <a:chExt cx="0" cy="0"/>
+        </a:xfrm>
+      </p:grpSpPr>
       <p:sp>
         <p:nvSpPr>
           <p:cNvPr id="2" name="Rectangle 1"/>
@@ -59893,6 +62087,7 @@
           <a:lstStyle/>
           <a:p>
             <a:pPr algn="ctr"/>
+            <a:endParaRPr/>
           </a:p>
         </p:txBody>
       </p:sp>
@@ -59998,6 +62193,7 @@
           <a:lstStyle/>
           <a:p>
             <a:pPr algn="ctr"/>
+            <a:endParaRPr/>
           </a:p>
         </p:txBody>
       </p:sp>
@@ -60118,6 +62314,7 @@
           <a:lstStyle/>
           <a:p>
             <a:pPr algn="ctr"/>
+            <a:endParaRPr/>
           </a:p>
         </p:txBody>
       </p:sp>
@@ -60349,6 +62546,7 @@
           <a:lstStyle/>
           <a:p>
             <a:pPr algn="ctr"/>
+            <a:endParaRPr/>
           </a:p>
         </p:txBody>
       </p:sp>
@@ -60454,6 +62652,7 @@
           <a:lstStyle/>
           <a:p>
             <a:pPr algn="ctr"/>
+            <a:endParaRPr/>
           </a:p>
         </p:txBody>
       </p:sp>
@@ -60540,7 +62739,7 @@
 </file>
 
 <file path=ppt/slides/slide79.xml><?xml version="1.0" encoding="utf-8"?>
-<p:sld xmlns:a="http://schemas.openxmlformats.org/drawingml/2006/main" xmlns:p="http://schemas.openxmlformats.org/presentationml/2006/main" xmlns:r="http://schemas.openxmlformats.org/officeDocument/2006/relationships">
+<p:sld xmlns:a="http://schemas.openxmlformats.org/drawingml/2006/main" xmlns:r="http://schemas.openxmlformats.org/officeDocument/2006/relationships" xmlns:p="http://schemas.openxmlformats.org/presentationml/2006/main">
   <p:cSld>
     <p:bg>
       <p:bgPr>
@@ -60556,7 +62755,14 @@
         <p:cNvGrpSpPr/>
         <p:nvPr/>
       </p:nvGrpSpPr>
-      <p:grpSpPr/>
+      <p:grpSpPr>
+        <a:xfrm>
+          <a:off x="0" y="0"/>
+          <a:ext cx="0" cy="0"/>
+          <a:chOff x="0" y="0"/>
+          <a:chExt cx="0" cy="0"/>
+        </a:xfrm>
+      </p:grpSpPr>
       <p:sp>
         <p:nvSpPr>
           <p:cNvPr id="2" name="Rectangle 1"/>
@@ -60598,6 +62804,7 @@
           <a:lstStyle/>
           <a:p>
             <a:pPr algn="ctr"/>
+            <a:endParaRPr/>
           </a:p>
         </p:txBody>
       </p:sp>
@@ -60703,6 +62910,7 @@
           <a:lstStyle/>
           <a:p>
             <a:pPr algn="ctr"/>
+            <a:endParaRPr/>
           </a:p>
         </p:txBody>
       </p:sp>
@@ -60799,9 +63007,27 @@
                 <a:tableStyleId>{5C22544A-7EE6-4342-B048-85BDC9FD1C3A}</a:tableStyleId>
               </a:tblPr>
               <a:tblGrid>
-                <a:gridCol w="3657600"/>
-                <a:gridCol w="3657600"/>
-                <a:gridCol w="3657600"/>
+                <a:gridCol w="3657600">
+                  <a:extLst>
+                    <a:ext uri="{9D8B030D-6E8A-4147-A177-3AD203B41FA5}">
+                      <a16:colId xmlns:a16="http://schemas.microsoft.com/office/drawing/2014/main" val="20000"/>
+                    </a:ext>
+                  </a:extLst>
+                </a:gridCol>
+                <a:gridCol w="3657600">
+                  <a:extLst>
+                    <a:ext uri="{9D8B030D-6E8A-4147-A177-3AD203B41FA5}">
+                      <a16:colId xmlns:a16="http://schemas.microsoft.com/office/drawing/2014/main" val="20001"/>
+                    </a:ext>
+                  </a:extLst>
+                </a:gridCol>
+                <a:gridCol w="3657600">
+                  <a:extLst>
+                    <a:ext uri="{9D8B030D-6E8A-4147-A177-3AD203B41FA5}">
+                      <a16:colId xmlns:a16="http://schemas.microsoft.com/office/drawing/2014/main" val="20002"/>
+                    </a:ext>
+                  </a:extLst>
+                </a:gridCol>
               </a:tblGrid>
               <a:tr h="475488">
                 <a:tc>
@@ -60873,6 +63099,11 @@
                     </a:solidFill>
                   </a:tcPr>
                 </a:tc>
+                <a:extLst>
+                  <a:ext uri="{0D108BD9-81ED-4DB2-BD59-A6C34878D82A}">
+                    <a16:rowId xmlns:a16="http://schemas.microsoft.com/office/drawing/2014/main" val="10000"/>
+                  </a:ext>
+                </a:extLst>
               </a:tr>
               <a:tr h="475488">
                 <a:tc>
@@ -60944,6 +63175,11 @@
                     </a:solidFill>
                   </a:tcPr>
                 </a:tc>
+                <a:extLst>
+                  <a:ext uri="{0D108BD9-81ED-4DB2-BD59-A6C34878D82A}">
+                    <a16:rowId xmlns:a16="http://schemas.microsoft.com/office/drawing/2014/main" val="10001"/>
+                  </a:ext>
+                </a:extLst>
               </a:tr>
               <a:tr h="475488">
                 <a:tc>
@@ -61015,6 +63251,11 @@
                     </a:solidFill>
                   </a:tcPr>
                 </a:tc>
+                <a:extLst>
+                  <a:ext uri="{0D108BD9-81ED-4DB2-BD59-A6C34878D82A}">
+                    <a16:rowId xmlns:a16="http://schemas.microsoft.com/office/drawing/2014/main" val="10002"/>
+                  </a:ext>
+                </a:extLst>
               </a:tr>
               <a:tr h="475488">
                 <a:tc>
@@ -61086,6 +63327,11 @@
                     </a:solidFill>
                   </a:tcPr>
                 </a:tc>
+                <a:extLst>
+                  <a:ext uri="{0D108BD9-81ED-4DB2-BD59-A6C34878D82A}">
+                    <a16:rowId xmlns:a16="http://schemas.microsoft.com/office/drawing/2014/main" val="10003"/>
+                  </a:ext>
+                </a:extLst>
               </a:tr>
             </a:tbl>
           </a:graphicData>
@@ -61134,6 +63380,7 @@
           <a:lstStyle/>
           <a:p>
             <a:pPr algn="ctr"/>
+            <a:endParaRPr/>
           </a:p>
         </p:txBody>
       </p:sp>
@@ -61215,6 +63462,7 @@
           <a:lstStyle/>
           <a:p>
             <a:pPr algn="ctr"/>
+            <a:endParaRPr/>
           </a:p>
         </p:txBody>
       </p:sp>
@@ -61301,7 +63549,7 @@
 </file>
 
 <file path=ppt/slides/slide8.xml><?xml version="1.0" encoding="utf-8"?>
-<p:sld xmlns:a="http://schemas.openxmlformats.org/drawingml/2006/main" xmlns:p="http://schemas.openxmlformats.org/presentationml/2006/main" xmlns:r="http://schemas.openxmlformats.org/officeDocument/2006/relationships">
+<p:sld xmlns:a="http://schemas.openxmlformats.org/drawingml/2006/main" xmlns:r="http://schemas.openxmlformats.org/officeDocument/2006/relationships" xmlns:p="http://schemas.openxmlformats.org/presentationml/2006/main">
   <p:cSld>
     <p:bg>
       <p:bgPr>
@@ -61317,7 +63565,14 @@
         <p:cNvGrpSpPr/>
         <p:nvPr/>
       </p:nvGrpSpPr>
-      <p:grpSpPr/>
+      <p:grpSpPr>
+        <a:xfrm>
+          <a:off x="0" y="0"/>
+          <a:ext cx="0" cy="0"/>
+          <a:chOff x="0" y="0"/>
+          <a:chExt cx="0" cy="0"/>
+        </a:xfrm>
+      </p:grpSpPr>
       <p:sp>
         <p:nvSpPr>
           <p:cNvPr id="2" name="Rectangle 1"/>
@@ -61359,6 +63614,7 @@
           <a:lstStyle/>
           <a:p>
             <a:pPr algn="ctr"/>
+            <a:endParaRPr/>
           </a:p>
         </p:txBody>
       </p:sp>
@@ -61464,6 +63720,7 @@
           <a:lstStyle/>
           <a:p>
             <a:pPr algn="ctr"/>
+            <a:endParaRPr/>
           </a:p>
         </p:txBody>
       </p:sp>
@@ -61584,6 +63841,7 @@
           <a:lstStyle/>
           <a:p>
             <a:pPr algn="ctr"/>
+            <a:endParaRPr/>
           </a:p>
         </p:txBody>
       </p:sp>
@@ -61667,6 +63925,7 @@
           <a:lstStyle/>
           <a:p>
             <a:pPr algn="ctr"/>
+            <a:endParaRPr/>
           </a:p>
         </p:txBody>
       </p:sp>
@@ -61957,6 +64216,7 @@
           <a:lstStyle/>
           <a:p>
             <a:pPr algn="ctr"/>
+            <a:endParaRPr/>
           </a:p>
         </p:txBody>
       </p:sp>
@@ -62043,7 +64303,7 @@
 </file>
 
 <file path=ppt/slides/slide9.xml><?xml version="1.0" encoding="utf-8"?>
-<p:sld xmlns:a="http://schemas.openxmlformats.org/drawingml/2006/main" xmlns:p="http://schemas.openxmlformats.org/presentationml/2006/main" xmlns:r="http://schemas.openxmlformats.org/officeDocument/2006/relationships">
+<p:sld xmlns:a="http://schemas.openxmlformats.org/drawingml/2006/main" xmlns:r="http://schemas.openxmlformats.org/officeDocument/2006/relationships" xmlns:p="http://schemas.openxmlformats.org/presentationml/2006/main">
   <p:cSld>
     <p:bg>
       <p:bgPr>
@@ -62059,7 +64319,14 @@
         <p:cNvGrpSpPr/>
         <p:nvPr/>
       </p:nvGrpSpPr>
-      <p:grpSpPr/>
+      <p:grpSpPr>
+        <a:xfrm>
+          <a:off x="0" y="0"/>
+          <a:ext cx="0" cy="0"/>
+          <a:chOff x="0" y="0"/>
+          <a:chExt cx="0" cy="0"/>
+        </a:xfrm>
+      </p:grpSpPr>
       <p:sp>
         <p:nvSpPr>
           <p:cNvPr id="2" name="Rectangle 1"/>
@@ -62101,6 +64368,7 @@
           <a:lstStyle/>
           <a:p>
             <a:pPr algn="ctr"/>
+            <a:endParaRPr/>
           </a:p>
         </p:txBody>
       </p:sp>
@@ -62206,6 +64474,7 @@
           <a:lstStyle/>
           <a:p>
             <a:pPr algn="ctr"/>
+            <a:endParaRPr/>
           </a:p>
         </p:txBody>
       </p:sp>
@@ -62326,6 +64595,7 @@
           <a:lstStyle/>
           <a:p>
             <a:pPr algn="ctr"/>
+            <a:endParaRPr/>
           </a:p>
         </p:txBody>
       </p:sp>
@@ -62409,6 +64679,7 @@
           <a:lstStyle/>
           <a:p>
             <a:pPr algn="ctr"/>
+            <a:endParaRPr/>
           </a:p>
         </p:txBody>
       </p:sp>
@@ -62699,6 +64970,7 @@
           <a:lstStyle/>
           <a:p>
             <a:pPr algn="ctr"/>
+            <a:endParaRPr/>
           </a:p>
         </p:txBody>
       </p:sp>
@@ -63102,4 +65374,319 @@
   </a:objectDefaults>
   <a:extraClrSchemeLst/>
 </a:theme>
+</file>
+
+<file path=ppt/theme/theme2.xml><?xml version="1.0" encoding="utf-8"?>
+<a:theme xmlns:a="http://schemas.openxmlformats.org/drawingml/2006/main" name="Office Theme">
+  <a:themeElements>
+    <a:clrScheme name="Office">
+      <a:dk1>
+        <a:sysClr val="windowText" lastClr="000000"/>
+      </a:dk1>
+      <a:lt1>
+        <a:sysClr val="window" lastClr="FFFFFF"/>
+      </a:lt1>
+      <a:dk2>
+        <a:srgbClr val="0E2841"/>
+      </a:dk2>
+      <a:lt2>
+        <a:srgbClr val="E8E8E8"/>
+      </a:lt2>
+      <a:accent1>
+        <a:srgbClr val="156082"/>
+      </a:accent1>
+      <a:accent2>
+        <a:srgbClr val="E97132"/>
+      </a:accent2>
+      <a:accent3>
+        <a:srgbClr val="196B24"/>
+      </a:accent3>
+      <a:accent4>
+        <a:srgbClr val="0F9ED5"/>
+      </a:accent4>
+      <a:accent5>
+        <a:srgbClr val="A02B93"/>
+      </a:accent5>
+      <a:accent6>
+        <a:srgbClr val="4EA72E"/>
+      </a:accent6>
+      <a:hlink>
+        <a:srgbClr val="467886"/>
+      </a:hlink>
+      <a:folHlink>
+        <a:srgbClr val="96607D"/>
+      </a:folHlink>
+    </a:clrScheme>
+    <a:fontScheme name="Office">
+      <a:majorFont>
+        <a:latin typeface="Aptos Display" panose="02110004020202020204"/>
+        <a:ea typeface=""/>
+        <a:cs typeface=""/>
+        <a:font script="Jpan" typeface="游ゴシック Light"/>
+        <a:font script="Hang" typeface="맑은 고딕"/>
+        <a:font script="Hans" typeface="等线 Light"/>
+        <a:font script="Hant" typeface="新細明體"/>
+        <a:font script="Arab" typeface="Times New Roman"/>
+        <a:font script="Hebr" typeface="Times New Roman"/>
+        <a:font script="Thai" typeface="Angsana New"/>
+        <a:font script="Ethi" typeface="Nyala"/>
+        <a:font script="Beng" typeface="Vrinda"/>
+        <a:font script="Gujr" typeface="Shruti"/>
+        <a:font script="Khmr" typeface="MoolBoran"/>
+        <a:font script="Knda" typeface="Tunga"/>
+        <a:font script="Guru" typeface="Raavi"/>
+        <a:font script="Cans" typeface="Euphemia"/>
+        <a:font script="Cher" typeface="Plantagenet Cherokee"/>
+        <a:font script="Yiii" typeface="Microsoft Yi Baiti"/>
+        <a:font script="Tibt" typeface="Microsoft Himalaya"/>
+        <a:font script="Thaa" typeface="MV Boli"/>
+        <a:font script="Deva" typeface="Mangal"/>
+        <a:font script="Telu" typeface="Gautami"/>
+        <a:font script="Taml" typeface="Latha"/>
+        <a:font script="Syrc" typeface="Estrangelo Edessa"/>
+        <a:font script="Orya" typeface="Kalinga"/>
+        <a:font script="Mlym" typeface="Kartika"/>
+        <a:font script="Laoo" typeface="DokChampa"/>
+        <a:font script="Sinh" typeface="Iskoola Pota"/>
+        <a:font script="Mong" typeface="Mongolian Baiti"/>
+        <a:font script="Viet" typeface="Times New Roman"/>
+        <a:font script="Uigh" typeface="Microsoft Uighur"/>
+        <a:font script="Geor" typeface="Sylfaen"/>
+        <a:font script="Armn" typeface="Arial"/>
+        <a:font script="Bugi" typeface="Leelawadee UI"/>
+        <a:font script="Bopo" typeface="Microsoft JhengHei"/>
+        <a:font script="Java" typeface="Javanese Text"/>
+        <a:font script="Lisu" typeface="Segoe UI"/>
+        <a:font script="Mymr" typeface="Myanmar Text"/>
+        <a:font script="Nkoo" typeface="Ebrima"/>
+        <a:font script="Olck" typeface="Nirmala UI"/>
+        <a:font script="Osma" typeface="Ebrima"/>
+        <a:font script="Phag" typeface="Phagspa"/>
+        <a:font script="Syrn" typeface="Estrangelo Edessa"/>
+        <a:font script="Syrj" typeface="Estrangelo Edessa"/>
+        <a:font script="Syre" typeface="Estrangelo Edessa"/>
+        <a:font script="Sora" typeface="Nirmala UI"/>
+        <a:font script="Tale" typeface="Microsoft Tai Le"/>
+        <a:font script="Talu" typeface="Microsoft New Tai Lue"/>
+        <a:font script="Tfng" typeface="Ebrima"/>
+      </a:majorFont>
+      <a:minorFont>
+        <a:latin typeface="Aptos" panose="02110004020202020204"/>
+        <a:ea typeface=""/>
+        <a:cs typeface=""/>
+        <a:font script="Jpan" typeface="游ゴシック"/>
+        <a:font script="Hang" typeface="맑은 고딕"/>
+        <a:font script="Hans" typeface="等线"/>
+        <a:font script="Hant" typeface="新細明體"/>
+        <a:font script="Arab" typeface="Arial"/>
+        <a:font script="Hebr" typeface="Arial"/>
+        <a:font script="Thai" typeface="Cordia New"/>
+        <a:font script="Ethi" typeface="Nyala"/>
+        <a:font script="Beng" typeface="Vrinda"/>
+        <a:font script="Gujr" typeface="Shruti"/>
+        <a:font script="Khmr" typeface="DaunPenh"/>
+        <a:font script="Knda" typeface="Tunga"/>
+        <a:font script="Guru" typeface="Raavi"/>
+        <a:font script="Cans" typeface="Euphemia"/>
+        <a:font script="Cher" typeface="Plantagenet Cherokee"/>
+        <a:font script="Yiii" typeface="Microsoft Yi Baiti"/>
+        <a:font script="Tibt" typeface="Microsoft Himalaya"/>
+        <a:font script="Thaa" typeface="MV Boli"/>
+        <a:font script="Deva" typeface="Mangal"/>
+        <a:font script="Telu" typeface="Gautami"/>
+        <a:font script="Taml" typeface="Latha"/>
+        <a:font script="Syrc" typeface="Estrangelo Edessa"/>
+        <a:font script="Orya" typeface="Kalinga"/>
+        <a:font script="Mlym" typeface="Kartika"/>
+        <a:font script="Laoo" typeface="DokChampa"/>
+        <a:font script="Sinh" typeface="Iskoola Pota"/>
+        <a:font script="Mong" typeface="Mongolian Baiti"/>
+        <a:font script="Viet" typeface="Arial"/>
+        <a:font script="Uigh" typeface="Microsoft Uighur"/>
+        <a:font script="Geor" typeface="Sylfaen"/>
+        <a:font script="Armn" typeface="Arial"/>
+        <a:font script="Bugi" typeface="Leelawadee UI"/>
+        <a:font script="Bopo" typeface="Microsoft JhengHei"/>
+        <a:font script="Java" typeface="Javanese Text"/>
+        <a:font script="Lisu" typeface="Segoe UI"/>
+        <a:font script="Mymr" typeface="Myanmar Text"/>
+        <a:font script="Nkoo" typeface="Ebrima"/>
+        <a:font script="Olck" typeface="Nirmala UI"/>
+        <a:font script="Osma" typeface="Ebrima"/>
+        <a:font script="Phag" typeface="Phagspa"/>
+        <a:font script="Syrn" typeface="Estrangelo Edessa"/>
+        <a:font script="Syrj" typeface="Estrangelo Edessa"/>
+        <a:font script="Syre" typeface="Estrangelo Edessa"/>
+        <a:font script="Sora" typeface="Nirmala UI"/>
+        <a:font script="Tale" typeface="Microsoft Tai Le"/>
+        <a:font script="Talu" typeface="Microsoft New Tai Lue"/>
+        <a:font script="Tfng" typeface="Ebrima"/>
+      </a:minorFont>
+    </a:fontScheme>
+    <a:fmtScheme name="Office">
+      <a:fillStyleLst>
+        <a:solidFill>
+          <a:schemeClr val="phClr"/>
+        </a:solidFill>
+        <a:gradFill rotWithShape="1">
+          <a:gsLst>
+            <a:gs pos="0">
+              <a:schemeClr val="phClr">
+                <a:lumMod val="110000"/>
+                <a:satMod val="105000"/>
+                <a:tint val="67000"/>
+              </a:schemeClr>
+            </a:gs>
+            <a:gs pos="50000">
+              <a:schemeClr val="phClr">
+                <a:lumMod val="105000"/>
+                <a:satMod val="103000"/>
+                <a:tint val="73000"/>
+              </a:schemeClr>
+            </a:gs>
+            <a:gs pos="100000">
+              <a:schemeClr val="phClr">
+                <a:lumMod val="105000"/>
+                <a:satMod val="109000"/>
+                <a:tint val="81000"/>
+              </a:schemeClr>
+            </a:gs>
+          </a:gsLst>
+          <a:lin ang="5400000" scaled="0"/>
+        </a:gradFill>
+        <a:gradFill rotWithShape="1">
+          <a:gsLst>
+            <a:gs pos="0">
+              <a:schemeClr val="phClr">
+                <a:satMod val="103000"/>
+                <a:lumMod val="102000"/>
+                <a:tint val="94000"/>
+              </a:schemeClr>
+            </a:gs>
+            <a:gs pos="50000">
+              <a:schemeClr val="phClr">
+                <a:satMod val="110000"/>
+                <a:lumMod val="100000"/>
+                <a:shade val="100000"/>
+              </a:schemeClr>
+            </a:gs>
+            <a:gs pos="100000">
+              <a:schemeClr val="phClr">
+                <a:lumMod val="99000"/>
+                <a:satMod val="120000"/>
+                <a:shade val="78000"/>
+              </a:schemeClr>
+            </a:gs>
+          </a:gsLst>
+          <a:lin ang="5400000" scaled="0"/>
+        </a:gradFill>
+      </a:fillStyleLst>
+      <a:lnStyleLst>
+        <a:ln w="12700" cap="flat" cmpd="sng" algn="ctr">
+          <a:solidFill>
+            <a:schemeClr val="phClr"/>
+          </a:solidFill>
+          <a:prstDash val="solid"/>
+          <a:miter lim="800000"/>
+        </a:ln>
+        <a:ln w="19050" cap="flat" cmpd="sng" algn="ctr">
+          <a:solidFill>
+            <a:schemeClr val="phClr"/>
+          </a:solidFill>
+          <a:prstDash val="solid"/>
+          <a:miter lim="800000"/>
+        </a:ln>
+        <a:ln w="25400" cap="flat" cmpd="sng" algn="ctr">
+          <a:solidFill>
+            <a:schemeClr val="phClr"/>
+          </a:solidFill>
+          <a:prstDash val="solid"/>
+          <a:miter lim="800000"/>
+        </a:ln>
+      </a:lnStyleLst>
+      <a:effectStyleLst>
+        <a:effectStyle>
+          <a:effectLst/>
+        </a:effectStyle>
+        <a:effectStyle>
+          <a:effectLst/>
+        </a:effectStyle>
+        <a:effectStyle>
+          <a:effectLst>
+            <a:outerShdw blurRad="57150" dist="19050" dir="5400000" algn="ctr" rotWithShape="0">
+              <a:srgbClr val="000000">
+                <a:alpha val="63000"/>
+              </a:srgbClr>
+            </a:outerShdw>
+          </a:effectLst>
+        </a:effectStyle>
+      </a:effectStyleLst>
+      <a:bgFillStyleLst>
+        <a:solidFill>
+          <a:schemeClr val="phClr"/>
+        </a:solidFill>
+        <a:solidFill>
+          <a:schemeClr val="phClr">
+            <a:tint val="95000"/>
+            <a:satMod val="170000"/>
+          </a:schemeClr>
+        </a:solidFill>
+        <a:gradFill rotWithShape="1">
+          <a:gsLst>
+            <a:gs pos="0">
+              <a:schemeClr val="phClr">
+                <a:tint val="93000"/>
+                <a:satMod val="150000"/>
+                <a:shade val="98000"/>
+                <a:lumMod val="102000"/>
+              </a:schemeClr>
+            </a:gs>
+            <a:gs pos="50000">
+              <a:schemeClr val="phClr">
+                <a:tint val="98000"/>
+                <a:satMod val="130000"/>
+                <a:shade val="90000"/>
+                <a:lumMod val="103000"/>
+              </a:schemeClr>
+            </a:gs>
+            <a:gs pos="100000">
+              <a:schemeClr val="phClr">
+                <a:shade val="63000"/>
+                <a:satMod val="120000"/>
+              </a:schemeClr>
+            </a:gs>
+          </a:gsLst>
+          <a:lin ang="5400000" scaled="0"/>
+        </a:gradFill>
+      </a:bgFillStyleLst>
+    </a:fmtScheme>
+  </a:themeElements>
+  <a:objectDefaults>
+    <a:lnDef>
+      <a:spPr/>
+      <a:bodyPr/>
+      <a:lstStyle/>
+      <a:style>
+        <a:lnRef idx="2">
+          <a:schemeClr val="accent1"/>
+        </a:lnRef>
+        <a:fillRef idx="0">
+          <a:schemeClr val="accent1"/>
+        </a:fillRef>
+        <a:effectRef idx="1">
+          <a:schemeClr val="accent1"/>
+        </a:effectRef>
+        <a:fontRef idx="minor">
+          <a:schemeClr val="tx1"/>
+        </a:fontRef>
+      </a:style>
+    </a:lnDef>
+  </a:objectDefaults>
+  <a:extraClrSchemeLst/>
+  <a:extLst>
+    <a:ext uri="{05A4C25C-085E-4340-85A3-A5531E510DB2}">
+      <thm15:themeFamily xmlns:thm15="http://schemas.microsoft.com/office/thememl/2012/main" name="Office Theme" id="{2E142A2C-CD16-42D6-873A-C26D2A0506FA}" vid="{1BDDFF52-6CD6-40A5-AB3C-68EB2F1E4D0A}"/>
+    </a:ext>
+  </a:extLst>
+</a:theme>
 </file>